--- a/docs/任务一答辩.pptx
+++ b/docs/任务一答辩.pptx
@@ -2,20 +2,25 @@
 <file path=ppt/presentation.xml><?xml version="1.0" encoding="utf-8"?>
 <p:presentation xmlns:p="http://schemas.openxmlformats.org/presentationml/2006/main">
   <p:sldMasterIdLst>
-    <p:sldMasterId xmlns:r="http://schemas.openxmlformats.org/officeDocument/2006/relationships" id="2147483648" r:id="R7c0b480c7f644187"/>
+    <p:sldMasterId xmlns:r="http://schemas.openxmlformats.org/officeDocument/2006/relationships" id="2147483648" r:id="R369f22823d074af2"/>
   </p:sldMasterIdLst>
   <p:notesMasterIdLst>
-    <p:notesMasterId xmlns:r="http://schemas.openxmlformats.org/officeDocument/2006/relationships" r:id="R20acd8b2651f4a96"/>
+    <p:notesMasterId xmlns:r="http://schemas.openxmlformats.org/officeDocument/2006/relationships" r:id="Rcc7b3d884f074a27"/>
   </p:notesMasterIdLst>
   <p:sldIdLst>
-    <p:sldId xmlns:r="http://schemas.openxmlformats.org/officeDocument/2006/relationships" id="256" r:id="R64275b78c936476c"/>
-    <p:sldId xmlns:r="http://schemas.openxmlformats.org/officeDocument/2006/relationships" id="257" r:id="Rf87d8e4538604ff3"/>
-    <p:sldId xmlns:r="http://schemas.openxmlformats.org/officeDocument/2006/relationships" id="258" r:id="Rd2c1e75865eb4d20"/>
-    <p:sldId xmlns:r="http://schemas.openxmlformats.org/officeDocument/2006/relationships" id="259" r:id="Rb8d2d44ef8a64b35"/>
-    <p:sldId xmlns:r="http://schemas.openxmlformats.org/officeDocument/2006/relationships" id="260" r:id="R3dae6b6e562b46a1"/>
-    <p:sldId xmlns:r="http://schemas.openxmlformats.org/officeDocument/2006/relationships" id="261" r:id="R455d9942670449ff"/>
-    <p:sldId xmlns:r="http://schemas.openxmlformats.org/officeDocument/2006/relationships" id="262" r:id="R095b67539f834674"/>
-    <p:sldId xmlns:r="http://schemas.openxmlformats.org/officeDocument/2006/relationships" id="263" r:id="R4d4e62a3c1ce44c4"/>
+    <p:sldId xmlns:r="http://schemas.openxmlformats.org/officeDocument/2006/relationships" id="256" r:id="R7a690694b0f344c6"/>
+    <p:sldId xmlns:r="http://schemas.openxmlformats.org/officeDocument/2006/relationships" id="257" r:id="R65e591da1788489f"/>
+    <p:sldId xmlns:r="http://schemas.openxmlformats.org/officeDocument/2006/relationships" id="258" r:id="R3b4eb34eec9f4ddb"/>
+    <p:sldId xmlns:r="http://schemas.openxmlformats.org/officeDocument/2006/relationships" id="259" r:id="Rb02fc82d5f0c43c3"/>
+    <p:sldId xmlns:r="http://schemas.openxmlformats.org/officeDocument/2006/relationships" id="260" r:id="R8cc92b53611343c6"/>
+    <p:sldId xmlns:r="http://schemas.openxmlformats.org/officeDocument/2006/relationships" id="261" r:id="R09f8c3c1ffb949e2"/>
+    <p:sldId xmlns:r="http://schemas.openxmlformats.org/officeDocument/2006/relationships" id="262" r:id="Reed0ae525f2d4cc7"/>
+    <p:sldId xmlns:r="http://schemas.openxmlformats.org/officeDocument/2006/relationships" id="263" r:id="Rdd8f158c69a24578"/>
+    <p:sldId xmlns:r="http://schemas.openxmlformats.org/officeDocument/2006/relationships" id="264" r:id="R3f8f159109294da2"/>
+    <p:sldId xmlns:r="http://schemas.openxmlformats.org/officeDocument/2006/relationships" id="265" r:id="Rd2a1015d28dd4f63"/>
+    <p:sldId xmlns:r="http://schemas.openxmlformats.org/officeDocument/2006/relationships" id="266" r:id="R9e9f96b183074e01"/>
+    <p:sldId xmlns:r="http://schemas.openxmlformats.org/officeDocument/2006/relationships" id="267" r:id="R118f43f5addc4e7f"/>
+    <p:sldId xmlns:r="http://schemas.openxmlformats.org/officeDocument/2006/relationships" id="268" r:id="Re95d655610984ab9"/>
   </p:sldIdLst>
   <p:sldSz cx="12192000" cy="6858000"/>
   <p:notesSz cx="6858000" cy="9144000"/>
@@ -449,7 +454,312 @@
           <a:lstStyle xmlns:a="http://schemas.openxmlformats.org/drawingml/2006/main"/>
           <a:p xmlns:a="http://schemas.openxmlformats.org/drawingml/2006/main">
             <a:r>
-              <a:t>选题依据：仓库根目录任务书第二部分与通用交付要求。现阶段硬件测试尚未完成。</a:t>
+              <a:t>介绍变长生成与前缀重复保存造成的空间浪费。随后依次说明管理机制、实现和实验。</a:t>
+            </a:r>
+          </a:p>
+          <a:p xmlns:a="http://schemas.openxmlformats.org/drawingml/2006/main">
+            <a:r>
+              <a:t>来源：任务书第 2、6、8.1 节</a:t>
+            </a:r>
+          </a:p>
+        </p:txBody>
+      </p:sp>
+      <p:sp>
+        <p:nvSpPr>
+          <p:cNvPr id="4" name="Slide Number Placeholder 3"/>
+          <p:cNvSpPr>
+            <a:spLocks xmlns:a="http://schemas.openxmlformats.org/drawingml/2006/main" noGrp="1"/>
+          </p:cNvSpPr>
+          <p:nvPr>
+            <p:ph type="sldNum" idx="5"/>
+          </p:nvPr>
+        </p:nvSpPr>
+        <p:spPr/>
+        <p:txBody>
+          <a:bodyPr xmlns:a="http://schemas.openxmlformats.org/drawingml/2006/main"/>
+          <a:lstStyle xmlns:a="http://schemas.openxmlformats.org/drawingml/2006/main"/>
+          <a:p xmlns:a="http://schemas.openxmlformats.org/drawingml/2006/main"/>
+        </p:txBody>
+      </p:sp>
+    </p:spTree>
+  </p:cSld>
+  <p:clrMapOvr>
+    <a:masterClrMapping xmlns:a="http://schemas.openxmlformats.org/drawingml/2006/main"/>
+  </p:clrMapOvr>
+</p:notes>
+</file>
+
+<file path=ppt/notesSlides/notesSlide10.xml><?xml version="1.0" encoding="utf-8"?>
+<p:notes xmlns:p="http://schemas.openxmlformats.org/presentationml/2006/main">
+  <p:cSld>
+    <p:spTree>
+      <p:nvGrpSpPr>
+        <p:cNvPr id="1" name=""/>
+        <p:cNvGrpSpPr/>
+        <p:nvPr/>
+      </p:nvGrpSpPr>
+      <p:grpSpPr>
+        <a:xfrm xmlns:a="http://schemas.openxmlformats.org/drawingml/2006/main"/>
+      </p:grpSpPr>
+      <p:sp>
+        <p:nvSpPr>
+          <p:cNvPr id="2" name="Slide Image Placeholder 1"/>
+          <p:cNvSpPr>
+            <a:spLocks xmlns:a="http://schemas.openxmlformats.org/drawingml/2006/main" noGrp="1"/>
+          </p:cNvSpPr>
+          <p:nvPr>
+            <p:ph type="sldImg" idx="0"/>
+          </p:nvPr>
+        </p:nvSpPr>
+        <p:spPr/>
+      </p:sp>
+      <p:sp>
+        <p:nvSpPr>
+          <p:cNvPr id="3" name="Notes Placeholder 2"/>
+          <p:cNvSpPr>
+            <a:spLocks xmlns:a="http://schemas.openxmlformats.org/drawingml/2006/main" noGrp="1"/>
+          </p:cNvSpPr>
+          <p:nvPr>
+            <p:ph type="body" idx="1"/>
+          </p:nvPr>
+        </p:nvSpPr>
+        <p:spPr/>
+        <p:txBody>
+          <a:bodyPr xmlns:a="http://schemas.openxmlformats.org/drawingml/2006/main"/>
+          <a:lstStyle xmlns:a="http://schemas.openxmlformats.org/drawingml/2006/main"/>
+          <a:p xmlns:a="http://schemas.openxmlformats.org/drawingml/2006/main">
+            <a:r>
+              <a:t>父序列9token，8个分支，各追加1个不同token。独立保存用108槽位，COW用44，减少59.3%。8次复制只发生在共享未满尾页。</a:t>
+            </a:r>
+          </a:p>
+          <a:p xmlns:a="http://schemas.openxmlformats.org/drawingml/2006/main">
+            <a:r>
+              <a:t>来源：experiments/task1/raw.json，branches</a:t>
+            </a:r>
+          </a:p>
+        </p:txBody>
+      </p:sp>
+      <p:sp>
+        <p:nvSpPr>
+          <p:cNvPr id="4" name="Slide Number Placeholder 3"/>
+          <p:cNvSpPr>
+            <a:spLocks xmlns:a="http://schemas.openxmlformats.org/drawingml/2006/main" noGrp="1"/>
+          </p:cNvSpPr>
+          <p:nvPr>
+            <p:ph type="sldNum" idx="5"/>
+          </p:nvPr>
+        </p:nvSpPr>
+        <p:spPr/>
+        <p:txBody>
+          <a:bodyPr xmlns:a="http://schemas.openxmlformats.org/drawingml/2006/main"/>
+          <a:lstStyle xmlns:a="http://schemas.openxmlformats.org/drawingml/2006/main"/>
+          <a:p xmlns:a="http://schemas.openxmlformats.org/drawingml/2006/main"/>
+        </p:txBody>
+      </p:sp>
+    </p:spTree>
+  </p:cSld>
+  <p:clrMapOvr>
+    <a:masterClrMapping xmlns:a="http://schemas.openxmlformats.org/drawingml/2006/main"/>
+  </p:clrMapOvr>
+</p:notes>
+</file>
+
+<file path=ppt/notesSlides/notesSlide11.xml><?xml version="1.0" encoding="utf-8"?>
+<p:notes xmlns:p="http://schemas.openxmlformats.org/presentationml/2006/main">
+  <p:cSld>
+    <p:spTree>
+      <p:nvGrpSpPr>
+        <p:cNvPr id="1" name=""/>
+        <p:cNvGrpSpPr/>
+        <p:nvPr/>
+      </p:nvGrpSpPr>
+      <p:grpSpPr>
+        <a:xfrm xmlns:a="http://schemas.openxmlformats.org/drawingml/2006/main"/>
+      </p:grpSpPr>
+      <p:sp>
+        <p:nvSpPr>
+          <p:cNvPr id="2" name="Slide Image Placeholder 1"/>
+          <p:cNvSpPr>
+            <a:spLocks xmlns:a="http://schemas.openxmlformats.org/drawingml/2006/main" noGrp="1"/>
+          </p:cNvSpPr>
+          <p:nvPr>
+            <p:ph type="sldImg" idx="0"/>
+          </p:nvPr>
+        </p:nvSpPr>
+        <p:spPr/>
+      </p:sp>
+      <p:sp>
+        <p:nvSpPr>
+          <p:cNvPr id="3" name="Notes Placeholder 2"/>
+          <p:cNvSpPr>
+            <a:spLocks xmlns:a="http://schemas.openxmlformats.org/drawingml/2006/main" noGrp="1"/>
+          </p:cNvSpPr>
+          <p:nvPr>
+            <p:ph type="body" idx="1"/>
+          </p:nvPr>
+        </p:nvSpPr>
+        <p:spPr/>
+        <p:txBody>
+          <a:bodyPr xmlns:a="http://schemas.openxmlformats.org/drawingml/2006/main"/>
+          <a:lstStyle xmlns:a="http://schemas.openxmlformats.org/drawingml/2006/main"/>
+          <a:p xmlns:a="http://schemas.openxmlformats.org/drawingml/2006/main">
+            <a:r>
+              <a:t>物理32token、主机256token。连续预留64一条也放不下。分页同时接纳16条，增长时没有准入等待而直接失败，因此本组也为0。换页可以轮流驻留，但64token单请求超过物理容量仍失败。这不是硬件最大并发测量。</a:t>
+            </a:r>
+          </a:p>
+          <a:p xmlns:a="http://schemas.openxmlformats.org/drawingml/2006/main">
+            <a:r>
+              <a:t>来源：experiments/task1/summary.csv，capacity_sweep，concurrency=16</a:t>
+            </a:r>
+          </a:p>
+        </p:txBody>
+      </p:sp>
+      <p:sp>
+        <p:nvSpPr>
+          <p:cNvPr id="4" name="Slide Number Placeholder 3"/>
+          <p:cNvSpPr>
+            <a:spLocks xmlns:a="http://schemas.openxmlformats.org/drawingml/2006/main" noGrp="1"/>
+          </p:cNvSpPr>
+          <p:nvPr>
+            <p:ph type="sldNum" idx="5"/>
+          </p:nvPr>
+        </p:nvSpPr>
+        <p:spPr/>
+        <p:txBody>
+          <a:bodyPr xmlns:a="http://schemas.openxmlformats.org/drawingml/2006/main"/>
+          <a:lstStyle xmlns:a="http://schemas.openxmlformats.org/drawingml/2006/main"/>
+          <a:p xmlns:a="http://schemas.openxmlformats.org/drawingml/2006/main"/>
+        </p:txBody>
+      </p:sp>
+    </p:spTree>
+  </p:cSld>
+  <p:clrMapOvr>
+    <a:masterClrMapping xmlns:a="http://schemas.openxmlformats.org/drawingml/2006/main"/>
+  </p:clrMapOvr>
+</p:notes>
+</file>
+
+<file path=ppt/notesSlides/notesSlide12.xml><?xml version="1.0" encoding="utf-8"?>
+<p:notes xmlns:p="http://schemas.openxmlformats.org/presentationml/2006/main">
+  <p:cSld>
+    <p:spTree>
+      <p:nvGrpSpPr>
+        <p:cNvPr id="1" name=""/>
+        <p:cNvGrpSpPr/>
+        <p:nvPr/>
+      </p:nvGrpSpPr>
+      <p:grpSpPr>
+        <a:xfrm xmlns:a="http://schemas.openxmlformats.org/drawingml/2006/main"/>
+      </p:grpSpPr>
+      <p:sp>
+        <p:nvSpPr>
+          <p:cNvPr id="2" name="Slide Image Placeholder 1"/>
+          <p:cNvSpPr>
+            <a:spLocks xmlns:a="http://schemas.openxmlformats.org/drawingml/2006/main" noGrp="1"/>
+          </p:cNvSpPr>
+          <p:nvPr>
+            <p:ph type="sldImg" idx="0"/>
+          </p:nvPr>
+        </p:nvSpPr>
+        <p:spPr/>
+      </p:sp>
+      <p:sp>
+        <p:nvSpPr>
+          <p:cNvPr id="3" name="Notes Placeholder 2"/>
+          <p:cNvSpPr>
+            <a:spLocks xmlns:a="http://schemas.openxmlformats.org/drawingml/2006/main" noGrp="1"/>
+          </p:cNvSpPr>
+          <p:nvPr>
+            <p:ph type="body" idx="1"/>
+          </p:nvPr>
+        </p:nvSpPr>
+        <p:spPr/>
+        <p:txBody>
+          <a:bodyPr xmlns:a="http://schemas.openxmlformats.org/drawingml/2006/main"/>
+          <a:lstStyle xmlns:a="http://schemas.openxmlformats.org/drawingml/2006/main"/>
+          <a:p xmlns:a="http://schemas.openxmlformats.org/drawingml/2006/main">
+            <a:r>
+              <a:t>35项CPU张量环境全通过，总覆盖率93.64%。纯CPU32通过3跳过，覆盖率81.98%。真实CUDA页往返和Qwen3对照尚待4060Laptop执行。</a:t>
+            </a:r>
+          </a:p>
+          <a:p xmlns:a="http://schemas.openxmlformats.org/drawingml/2006/main">
+            <a:r>
+              <a:t>来源：experiments/task1/tests-*；test/validate_gpu.py</a:t>
+            </a:r>
+          </a:p>
+        </p:txBody>
+      </p:sp>
+      <p:sp>
+        <p:nvSpPr>
+          <p:cNvPr id="4" name="Slide Number Placeholder 3"/>
+          <p:cNvSpPr>
+            <a:spLocks xmlns:a="http://schemas.openxmlformats.org/drawingml/2006/main" noGrp="1"/>
+          </p:cNvSpPr>
+          <p:nvPr>
+            <p:ph type="sldNum" idx="5"/>
+          </p:nvPr>
+        </p:nvSpPr>
+        <p:spPr/>
+        <p:txBody>
+          <a:bodyPr xmlns:a="http://schemas.openxmlformats.org/drawingml/2006/main"/>
+          <a:lstStyle xmlns:a="http://schemas.openxmlformats.org/drawingml/2006/main"/>
+          <a:p xmlns:a="http://schemas.openxmlformats.org/drawingml/2006/main"/>
+        </p:txBody>
+      </p:sp>
+    </p:spTree>
+  </p:cSld>
+  <p:clrMapOvr>
+    <a:masterClrMapping xmlns:a="http://schemas.openxmlformats.org/drawingml/2006/main"/>
+  </p:clrMapOvr>
+</p:notes>
+</file>
+
+<file path=ppt/notesSlides/notesSlide13.xml><?xml version="1.0" encoding="utf-8"?>
+<p:notes xmlns:p="http://schemas.openxmlformats.org/presentationml/2006/main">
+  <p:cSld>
+    <p:spTree>
+      <p:nvGrpSpPr>
+        <p:cNvPr id="1" name=""/>
+        <p:cNvGrpSpPr/>
+        <p:nvPr/>
+      </p:nvGrpSpPr>
+      <p:grpSpPr>
+        <a:xfrm xmlns:a="http://schemas.openxmlformats.org/drawingml/2006/main"/>
+      </p:grpSpPr>
+      <p:sp>
+        <p:nvSpPr>
+          <p:cNvPr id="2" name="Slide Image Placeholder 1"/>
+          <p:cNvSpPr>
+            <a:spLocks xmlns:a="http://schemas.openxmlformats.org/drawingml/2006/main" noGrp="1"/>
+          </p:cNvSpPr>
+          <p:nvPr>
+            <p:ph type="sldImg" idx="0"/>
+          </p:nvPr>
+        </p:nvSpPr>
+        <p:spPr/>
+      </p:sp>
+      <p:sp>
+        <p:nvSpPr>
+          <p:cNvPr id="3" name="Notes Placeholder 2"/>
+          <p:cNvSpPr>
+            <a:spLocks xmlns:a="http://schemas.openxmlformats.org/drawingml/2006/main" noGrp="1"/>
+          </p:cNvSpPr>
+          <p:nvPr>
+            <p:ph type="body" idx="1"/>
+          </p:nvPr>
+        </p:nvSpPr>
+        <p:spPr/>
+        <p:txBody>
+          <a:bodyPr xmlns:a="http://schemas.openxmlformats.org/drawingml/2006/main"/>
+          <a:lstStyle xmlns:a="http://schemas.openxmlformats.org/drawingml/2006/main"/>
+          <a:p xmlns:a="http://schemas.openxmlformats.org/drawingml/2006/main">
+            <a:r>
+              <a:t>按需分页降低预留浪费，COW减少重复前缀保存，主机换页在容量与搬运成本之间取舍。现场演示demo_memory，再看CPU测试与报告；GPU结果待实测补充。</a:t>
+            </a:r>
+          </a:p>
+          <a:p xmlns:a="http://schemas.openxmlformats.org/drawingml/2006/main">
+            <a:r>
+              <a:t>来源：系统设计文档；量化评测报告；scripts/demo_memory.py</a:t>
             </a:r>
           </a:p>
         </p:txBody>
@@ -519,7 +829,12 @@
           <a:lstStyle xmlns:a="http://schemas.openxmlformats.org/drawingml/2006/main"/>
           <a:p xmlns:a="http://schemas.openxmlformats.org/drawingml/2006/main">
             <a:r>
-              <a:t>来源：Professional-Internship 仓库 docs/00-系统设计.md。本次报告仅包含已运行的 CPU 仿真与测试。RTX 4060 Laptop 的 CUDA/Qwen3 实测待执行。</a:t>
+              <a:t>重点讲地址空间、共享引用和页面置换。页表在用户态维护，分配器采用固定块空闲队列。</a:t>
+            </a:r>
+          </a:p>
+          <a:p xmlns:a="http://schemas.openxmlformats.org/drawingml/2006/main">
+            <a:r>
+              <a:t>来源：src/memory/paging.py；任务书 8.1</a:t>
             </a:r>
           </a:p>
         </p:txBody>
@@ -589,7 +904,12 @@
           <a:lstStyle xmlns:a="http://schemas.openxmlformats.org/drawingml/2006/main"/>
           <a:p xmlns:a="http://schemas.openxmlformats.org/drawingml/2006/main">
             <a:r>
-              <a:t>来源：Professional-Internship 仓库 docs/00-系统设计.md。本次报告仅包含已运行的 CPU 仿真与测试。RTX 4060 Laptop 的 CUDA/Qwen3 实测待执行。</a:t>
+              <a:t>管理逻辑共用，数据存储分为列表和张量两个后端。CourseEngine 将运行器接到 Qwen3 执行器，页面分配权只属于 PagedMemory。</a:t>
+            </a:r>
+          </a:p>
+          <a:p xmlns:a="http://schemas.openxmlformats.org/drawingml/2006/main">
+            <a:r>
+              <a:t>来源：src/memory/；src/control/engine.py</a:t>
             </a:r>
           </a:p>
         </p:txBody>
@@ -659,7 +979,12 @@
           <a:lstStyle xmlns:a="http://schemas.openxmlformats.org/drawingml/2006/main"/>
           <a:p xmlns:a="http://schemas.openxmlformats.org/drawingml/2006/main">
             <a:r>
-              <a:t>来源：Professional-Internship 仓库 docs/00-系统设计.md。本次报告仅包含已运行的 CPU 仿真与测试。RTX 4060 Laptop 的 CUDA/Qwen3 实测待执行。</a:t>
+              <a:t>以每页4个token为例，位置9对应第2页和页内偏移1。页ID保持稳定，换入换出只改变驻留位置。</a:t>
+            </a:r>
+          </a:p>
+          <a:p xmlns:a="http://schemas.openxmlformats.org/drawingml/2006/main">
+            <a:r>
+              <a:t>来源：src/memory/paging.py</a:t>
             </a:r>
           </a:p>
         </p:txBody>
@@ -729,7 +1054,12 @@
           <a:lstStyle xmlns:a="http://schemas.openxmlformats.org/drawingml/2006/main"/>
           <a:p xmlns:a="http://schemas.openxmlformats.org/drawingml/2006/main">
             <a:r>
-              <a:t>来源：Professional-Internship 仓库 experiments/task1/raw.json 与 summary.csv。本次报告仅包含已运行的 CPU 仿真与测试。RTX 4060 Laptop 的 CUDA/Qwen3 实测待执行。</a:t>
+              <a:t>fork只复制页ID列表。未满尾页被多个分支共享时，追加先复制该页。完整前缀继续共享。只有复制完成才替换映射。</a:t>
+            </a:r>
+          </a:p>
+          <a:p xmlns:a="http://schemas.openxmlformats.org/drawingml/2006/main">
+            <a:r>
+              <a:t>来源：src/memory/paging.py；test/cpu/test_cow.py</a:t>
             </a:r>
           </a:p>
         </p:txBody>
@@ -799,7 +1129,12 @@
           <a:lstStyle xmlns:a="http://schemas.openxmlformats.org/drawingml/2006/main"/>
           <a:p xmlns:a="http://schemas.openxmlformats.org/drawingml/2006/main">
             <a:r>
-              <a:t>来源：Professional-Internship 仓库 experiments/task1/raw.json 的 branches。本次报告仅包含已运行的 CPU 仿真与测试。RTX 4060 Laptop 的 CUDA/Qwen3 实测待执行。</a:t>
+              <a:t>LRU只考虑未固定页。主机满时交换槽位，临时多用一页主机缓冲。所有搬运同步完成，随后才执行前向。</a:t>
+            </a:r>
+          </a:p>
+          <a:p xmlns:a="http://schemas.openxmlformats.org/drawingml/2006/main">
+            <a:r>
+              <a:t>来源：src/memory/paging.py；runtime.py；torch_storage.py</a:t>
             </a:r>
           </a:p>
         </p:txBody>
@@ -869,7 +1204,12 @@
           <a:lstStyle xmlns:a="http://schemas.openxmlformats.org/drawingml/2006/main"/>
           <a:p xmlns:a="http://schemas.openxmlformats.org/drawingml/2006/main">
             <a:r>
-              <a:t>来源：Professional-Internship 仓库 test/README.md 与 experiments/task1/。本次报告仅包含已运行的 CPU 仿真与测试。RTX 4060 Laptop 的 CUDA/Qwen3 实测待执行。</a:t>
+              <a:t>81组混合负载加48组容量扫描，共129组。各策略用相同负载和顺序。连续基线预留最大长度，分页按实际长度增长。</a:t>
+            </a:r>
+          </a:p>
+          <a:p xmlns:a="http://schemas.openxmlformats.org/drawingml/2006/main">
+            <a:r>
+              <a:t>来源：bench/bench_memory.py；experiments/task1/raw.json</a:t>
             </a:r>
           </a:p>
         </p:txBody>
@@ -939,7 +1279,87 @@
           <a:lstStyle xmlns:a="http://schemas.openxmlformats.org/drawingml/2006/main"/>
           <a:p xmlns:a="http://schemas.openxmlformats.org/drawingml/2006/main">
             <a:r>
-              <a:t>来源：Professional-Internship 仓库 docs/04-复现与演示.md。本次报告仅包含已运行的 CPU 仿真与测试。RTX 4060 Laptop 的 CUDA/Qwen3 实测待执行。</a:t>
+              <a:t>图中为种子42、43、44的均值。32页时三种策略分别完成5.67、19.33和32条。报告给出样本标准差。换页还使用了额外主机容量。</a:t>
+            </a:r>
+          </a:p>
+          <a:p xmlns:a="http://schemas.openxmlformats.org/drawingml/2006/main">
+            <a:r>
+              <a:t>来源：experiments/task1/summary.csv，mixed，block_size=4</a:t>
+            </a:r>
+          </a:p>
+        </p:txBody>
+      </p:sp>
+      <p:sp>
+        <p:nvSpPr>
+          <p:cNvPr id="4" name="Slide Number Placeholder 3"/>
+          <p:cNvSpPr>
+            <a:spLocks xmlns:a="http://schemas.openxmlformats.org/drawingml/2006/main" noGrp="1"/>
+          </p:cNvSpPr>
+          <p:nvPr>
+            <p:ph type="sldNum" idx="5"/>
+          </p:nvPr>
+        </p:nvSpPr>
+        <p:spPr/>
+        <p:txBody>
+          <a:bodyPr xmlns:a="http://schemas.openxmlformats.org/drawingml/2006/main"/>
+          <a:lstStyle xmlns:a="http://schemas.openxmlformats.org/drawingml/2006/main"/>
+          <a:p xmlns:a="http://schemas.openxmlformats.org/drawingml/2006/main"/>
+        </p:txBody>
+      </p:sp>
+    </p:spTree>
+  </p:cSld>
+  <p:clrMapOvr>
+    <a:masterClrMapping xmlns:a="http://schemas.openxmlformats.org/drawingml/2006/main"/>
+  </p:clrMapOvr>
+</p:notes>
+</file>
+
+<file path=ppt/notesSlides/notesSlide9.xml><?xml version="1.0" encoding="utf-8"?>
+<p:notes xmlns:p="http://schemas.openxmlformats.org/presentationml/2006/main">
+  <p:cSld>
+    <p:spTree>
+      <p:nvGrpSpPr>
+        <p:cNvPr id="1" name=""/>
+        <p:cNvGrpSpPr/>
+        <p:nvPr/>
+      </p:nvGrpSpPr>
+      <p:grpSpPr>
+        <a:xfrm xmlns:a="http://schemas.openxmlformats.org/drawingml/2006/main"/>
+      </p:grpSpPr>
+      <p:sp>
+        <p:nvSpPr>
+          <p:cNvPr id="2" name="Slide Image Placeholder 1"/>
+          <p:cNvSpPr>
+            <a:spLocks xmlns:a="http://schemas.openxmlformats.org/drawingml/2006/main" noGrp="1"/>
+          </p:cNvSpPr>
+          <p:nvPr>
+            <p:ph type="sldImg" idx="0"/>
+          </p:nvPr>
+        </p:nvSpPr>
+        <p:spPr/>
+      </p:sp>
+      <p:sp>
+        <p:nvSpPr>
+          <p:cNvPr id="3" name="Notes Placeholder 2"/>
+          <p:cNvSpPr>
+            <a:spLocks xmlns:a="http://schemas.openxmlformats.org/drawingml/2006/main" noGrp="1"/>
+          </p:cNvSpPr>
+          <p:nvPr>
+            <p:ph type="body" idx="1"/>
+          </p:nvPr>
+        </p:nvSpPr>
+        <p:spPr/>
+        <p:txBody>
+          <a:bodyPr xmlns:a="http://schemas.openxmlformats.org/drawingml/2006/main"/>
+          <a:lstStyle xmlns:a="http://schemas.openxmlformats.org/drawingml/2006/main"/>
+          <a:p xmlns:a="http://schemas.openxmlformats.org/drawingml/2006/main">
+            <a:r>
+              <a:t>碎片率按各tick的分配槽位加权。32页时连续为79.8%，分页19.0%，换页18.3%。从连续到分页下降60.9个百分点。共享页只计一次，换页方案的分母包括主机页。</a:t>
+            </a:r>
+          </a:p>
+          <a:p xmlns:a="http://schemas.openxmlformats.org/drawingml/2006/main">
+            <a:r>
+              <a:t>来源：experiments/task1/summary.csv，mixed，block_size=4</a:t>
             </a:r>
           </a:p>
         </p:txBody>
@@ -1007,7 +1427,7 @@
   </p:cSld>
   <p:clrMap bg1="lt1" tx1="dk1" bg2="lt2" tx2="dk2" accent1="accent1" accent2="accent2" accent3="accent3" accent4="accent4" accent5="accent5" accent6="accent6" hlink="hlink" folHlink="folHlink"/>
   <p:sldLayoutIdLst>
-    <p:sldLayoutId xmlns:r="http://schemas.openxmlformats.org/officeDocument/2006/relationships" id="2147483649" r:id="R7eb3748f806c4be6"/>
+    <p:sldLayoutId xmlns:r="http://schemas.openxmlformats.org/officeDocument/2006/relationships" id="2147483649" r:id="R3defa51ba8e8474b"/>
   </p:sldLayoutIdLst>
   <p:txStyles>
     <p:titleStyle>
@@ -1551,7 +1971,7 @@
           </c:tx>
           <c:spPr>
             <a:solidFill xmlns:a="http://schemas.openxmlformats.org/drawingml/2006/main">
-              <a:srgbClr val="8A96A8"/>
+              <a:srgbClr val="8290A0"/>
             </a:solidFill>
           </c:spPr>
           <c:cat>
@@ -1575,16 +1995,16 @@
             <c:numRef>
               <c:f>'Chart Data'!$B$2:$B$4</c:f>
               <c:numCache>
-                <c:formatCode>General</c:formatCode>
+                <c:formatCode>0.00</c:formatCode>
                 <c:ptCount val="3"/>
                 <c:pt idx="0">
-                  <c:v>1.6667</c:v>
+                  <c:v>1.67</c:v>
                 </c:pt>
                 <c:pt idx="1">
                   <c:v>3</c:v>
                 </c:pt>
                 <c:pt idx="2">
-                  <c:v>5.6667</c:v>
+                  <c:v>5.67</c:v>
                 </c:pt>
               </c:numCache>
             </c:numRef>
@@ -1598,7 +2018,7 @@
           </c:tx>
           <c:spPr>
             <a:solidFill xmlns:a="http://schemas.openxmlformats.org/drawingml/2006/main">
-              <a:srgbClr val="2771B6"/>
+              <a:srgbClr val="286CA8"/>
             </a:solidFill>
           </c:spPr>
           <c:cat>
@@ -1622,16 +2042,16 @@
             <c:numRef>
               <c:f>'Chart Data'!$D$2:$D$4</c:f>
               <c:numCache>
-                <c:formatCode>General</c:formatCode>
+                <c:formatCode>0.00</c:formatCode>
                 <c:ptCount val="3"/>
                 <c:pt idx="0">
-                  <c:v>4.6667</c:v>
+                  <c:v>4.67</c:v>
                 </c:pt>
                 <c:pt idx="1">
                   <c:v>11</c:v>
                 </c:pt>
                 <c:pt idx="2">
-                  <c:v>19.3333</c:v>
+                  <c:v>19.33</c:v>
                 </c:pt>
               </c:numCache>
             </c:numRef>
@@ -1645,7 +2065,7 @@
           </c:tx>
           <c:spPr>
             <a:solidFill xmlns:a="http://schemas.openxmlformats.org/drawingml/2006/main">
-              <a:srgbClr val="159B86"/>
+              <a:srgbClr val="168578"/>
             </a:solidFill>
           </c:spPr>
           <c:cat>
@@ -1669,13 +2089,13 @@
             <c:numRef>
               <c:f>'Chart Data'!$F$2:$F$4</c:f>
               <c:numCache>
-                <c:formatCode>General</c:formatCode>
+                <c:formatCode>0.00</c:formatCode>
                 <c:ptCount val="3"/>
                 <c:pt idx="0">
-                  <c:v>25.3333</c:v>
+                  <c:v>25.33</c:v>
                 </c:pt>
                 <c:pt idx="1">
-                  <c:v>28.3333</c:v>
+                  <c:v>28.33</c:v>
                 </c:pt>
                 <c:pt idx="2">
                   <c:v>32</c:v>
@@ -1690,7 +2110,7 @@
             <a:lstStyle xmlns:a="http://schemas.openxmlformats.org/drawingml/2006/main"/>
             <a:p xmlns:a="http://schemas.openxmlformats.org/drawingml/2006/main">
               <a:pPr>
-                <a:defRPr sz="1650">
+                <a:defRPr sz="1575">
                   <a:latin typeface="PingFang SC"/>
                   <a:ea typeface="PingFang SC"/>
                   <a:cs typeface="PingFang SC"/>
@@ -1733,7 +2153,7 @@
           <a:lstStyle xmlns:a="http://schemas.openxmlformats.org/drawingml/2006/main"/>
           <a:p xmlns:a="http://schemas.openxmlformats.org/drawingml/2006/main">
             <a:pPr>
-              <a:defRPr sz="1650">
+              <a:defRPr sz="1575">
                 <a:solidFill>
                   <a:srgbClr val="666666"/>
                 </a:solidFill>
@@ -1751,9 +2171,9 @@
         <c:scaling>
           <c:orientation val="minMax"/>
         </c:scaling>
-        <c:delete val="1"/>
+        <c:delete val="0"/>
         <c:axPos val="l"/>
-        <c:numFmt formatCode="General"/>
+        <c:numFmt formatCode="0.00"/>
         <c:majorTickMark val="none"/>
         <c:minorTickMark val="none"/>
         <c:spPr>
@@ -1769,7 +2189,7 @@
           <a:lstStyle xmlns:a="http://schemas.openxmlformats.org/drawingml/2006/main"/>
           <a:p xmlns:a="http://schemas.openxmlformats.org/drawingml/2006/main">
             <a:pPr>
-              <a:defRPr sz="1650">
+              <a:defRPr sz="1575">
                 <a:solidFill>
                   <a:srgbClr val="666666"/>
                 </a:solidFill>
@@ -1783,6 +2203,9 @@
         <c:crossAx val="48650112"/>
         <c:crossBetween val="between"/>
       </c:valAx>
+      <c:spPr>
+        <a:noFill xmlns:a="http://schemas.openxmlformats.org/drawingml/2006/main"/>
+      </c:spPr>
     </c:plotArea>
     <c:legend>
       <c:legendPos val="b"/>
@@ -1792,7 +2215,7 @@
         <a:lstStyle xmlns:a="http://schemas.openxmlformats.org/drawingml/2006/main"/>
         <a:p xmlns:a="http://schemas.openxmlformats.org/drawingml/2006/main">
           <a:pPr>
-            <a:defRPr sz="1650">
+            <a:defRPr sz="1575">
               <a:latin typeface="PingFang SC"/>
               <a:ea typeface="PingFang SC"/>
               <a:cs typeface="PingFang SC"/>
@@ -1803,6 +2226,9 @@
     </c:legend>
     <c:plotVisOnly val="1"/>
   </c:chart>
+  <c:spPr>
+    <a:noFill xmlns:a="http://schemas.openxmlformats.org/drawingml/2006/main"/>
+  </c:spPr>
   <c:externalData r:id="rIdChartSnapshot1">
     <c:autoUpdate val="0"/>
   </c:externalData>
@@ -1822,38 +2248,44 @@
           <c:idx val="0"/>
           <c:order val="0"/>
           <c:tx>
-            <c:v>分支写入前</c:v>
+            <c:v>连续预分配</c:v>
           </c:tx>
           <c:spPr>
             <a:solidFill xmlns:a="http://schemas.openxmlformats.org/drawingml/2006/main">
-              <a:srgbClr val="8A96A8"/>
+              <a:srgbClr val="8290A0"/>
             </a:solidFill>
           </c:spPr>
           <c:cat>
             <c:strRef>
-              <c:f>'Chart Data'!$A$2:$A$3</c:f>
+              <c:f>'Chart Data'!$A$2:$A$4</c:f>
               <c:strCache>
-                <c:ptCount val="2"/>
+                <c:ptCount val="3"/>
                 <c:pt idx="0">
-                  <c:v>独立复制</c:v>
+                  <c:v>8 页</c:v>
                 </c:pt>
                 <c:pt idx="1">
-                  <c:v>共享与 COW</c:v>
+                  <c:v>16 页</c:v>
+                </c:pt>
+                <c:pt idx="2">
+                  <c:v>32 页</c:v>
                 </c:pt>
               </c:strCache>
             </c:strRef>
           </c:cat>
           <c:val>
             <c:numRef>
-              <c:f>'Chart Data'!$B$2:$B$3</c:f>
+              <c:f>'Chart Data'!$B$2:$B$4</c:f>
               <c:numCache>
-                <c:formatCode>General</c:formatCode>
-                <c:ptCount val="2"/>
+                <c:formatCode>0.0"%"</c:formatCode>
+                <c:ptCount val="3"/>
                 <c:pt idx="0">
-                  <c:v>108</c:v>
+                  <c:v>85.4</c:v>
                 </c:pt>
                 <c:pt idx="1">
-                  <c:v>12</c:v>
+                  <c:v>82.3</c:v>
+                </c:pt>
+                <c:pt idx="2">
+                  <c:v>79.8</c:v>
                 </c:pt>
               </c:numCache>
             </c:numRef>
@@ -1863,38 +2295,91 @@
           <c:idx val="1"/>
           <c:order val="1"/>
           <c:tx>
-            <c:v>分支写入后</c:v>
+            <c:v>按需分页</c:v>
           </c:tx>
           <c:spPr>
             <a:solidFill xmlns:a="http://schemas.openxmlformats.org/drawingml/2006/main">
-              <a:srgbClr val="2771B6"/>
+              <a:srgbClr val="286CA8"/>
             </a:solidFill>
           </c:spPr>
           <c:cat>
             <c:strRef>
-              <c:f>'Chart Data'!$C$2:$C$3</c:f>
+              <c:f>'Chart Data'!$C$2:$C$4</c:f>
               <c:strCache>
-                <c:ptCount val="2"/>
+                <c:ptCount val="3"/>
                 <c:pt idx="0">
-                  <c:v>独立复制</c:v>
+                  <c:v>8 页</c:v>
                 </c:pt>
                 <c:pt idx="1">
-                  <c:v>共享与 COW</c:v>
+                  <c:v>16 页</c:v>
+                </c:pt>
+                <c:pt idx="2">
+                  <c:v>32 页</c:v>
                 </c:pt>
               </c:strCache>
             </c:strRef>
           </c:cat>
           <c:val>
             <c:numRef>
-              <c:f>'Chart Data'!$D$2:$D$3</c:f>
+              <c:f>'Chart Data'!$D$2:$D$4</c:f>
               <c:numCache>
-                <c:formatCode>General</c:formatCode>
-                <c:ptCount val="2"/>
+                <c:formatCode>0.0"%"</c:formatCode>
+                <c:ptCount val="3"/>
                 <c:pt idx="0">
-                  <c:v>108</c:v>
+                  <c:v>25.1</c:v>
                 </c:pt>
                 <c:pt idx="1">
-                  <c:v>44</c:v>
+                  <c:v>22.1</c:v>
+                </c:pt>
+                <c:pt idx="2">
+                  <c:v>19</c:v>
+                </c:pt>
+              </c:numCache>
+            </c:numRef>
+          </c:val>
+        </c:ser>
+        <c:ser>
+          <c:idx val="2"/>
+          <c:order val="2"/>
+          <c:tx>
+            <c:v>分页与主机换页</c:v>
+          </c:tx>
+          <c:spPr>
+            <a:solidFill xmlns:a="http://schemas.openxmlformats.org/drawingml/2006/main">
+              <a:srgbClr val="168578"/>
+            </a:solidFill>
+          </c:spPr>
+          <c:cat>
+            <c:strRef>
+              <c:f>'Chart Data'!$E$2:$E$4</c:f>
+              <c:strCache>
+                <c:ptCount val="3"/>
+                <c:pt idx="0">
+                  <c:v>8 页</c:v>
+                </c:pt>
+                <c:pt idx="1">
+                  <c:v>16 页</c:v>
+                </c:pt>
+                <c:pt idx="2">
+                  <c:v>32 页</c:v>
+                </c:pt>
+              </c:strCache>
+            </c:strRef>
+          </c:cat>
+          <c:val>
+            <c:numRef>
+              <c:f>'Chart Data'!$F$2:$F$4</c:f>
+              <c:numCache>
+                <c:formatCode>0.0"%"</c:formatCode>
+                <c:ptCount val="3"/>
+                <c:pt idx="0">
+                  <c:v>19.3</c:v>
+                </c:pt>
+                <c:pt idx="1">
+                  <c:v>18.4</c:v>
+                </c:pt>
+                <c:pt idx="2">
+                  <c:v>18.3</c:v>
                 </c:pt>
               </c:numCache>
             </c:numRef>
@@ -1906,7 +2391,7 @@
             <a:lstStyle xmlns:a="http://schemas.openxmlformats.org/drawingml/2006/main"/>
             <a:p xmlns:a="http://schemas.openxmlformats.org/drawingml/2006/main">
               <a:pPr>
-                <a:defRPr sz="1650">
+                <a:defRPr sz="1575">
                   <a:latin typeface="PingFang SC"/>
                   <a:ea typeface="PingFang SC"/>
                   <a:cs typeface="PingFang SC"/>
@@ -1949,7 +2434,7 @@
           <a:lstStyle xmlns:a="http://schemas.openxmlformats.org/drawingml/2006/main"/>
           <a:p xmlns:a="http://schemas.openxmlformats.org/drawingml/2006/main">
             <a:pPr>
-              <a:defRPr sz="1650">
+              <a:defRPr sz="1575">
                 <a:solidFill>
                   <a:srgbClr val="666666"/>
                 </a:solidFill>
@@ -1967,9 +2452,9 @@
         <c:scaling>
           <c:orientation val="minMax"/>
         </c:scaling>
-        <c:delete val="1"/>
+        <c:delete val="0"/>
         <c:axPos val="l"/>
-        <c:numFmt formatCode="General"/>
+        <c:numFmt formatCode="0.0&quot;%&quot;"/>
         <c:majorTickMark val="none"/>
         <c:minorTickMark val="none"/>
         <c:spPr>
@@ -1985,7 +2470,7 @@
           <a:lstStyle xmlns:a="http://schemas.openxmlformats.org/drawingml/2006/main"/>
           <a:p xmlns:a="http://schemas.openxmlformats.org/drawingml/2006/main">
             <a:pPr>
-              <a:defRPr sz="1650">
+              <a:defRPr sz="1575">
                 <a:solidFill>
                   <a:srgbClr val="666666"/>
                 </a:solidFill>
@@ -1999,6 +2484,9 @@
         <c:crossAx val="48650112"/>
         <c:crossBetween val="between"/>
       </c:valAx>
+      <c:spPr>
+        <a:noFill xmlns:a="http://schemas.openxmlformats.org/drawingml/2006/main"/>
+      </c:spPr>
     </c:plotArea>
     <c:legend>
       <c:legendPos val="b"/>
@@ -2008,7 +2496,7 @@
         <a:lstStyle xmlns:a="http://schemas.openxmlformats.org/drawingml/2006/main"/>
         <a:p xmlns:a="http://schemas.openxmlformats.org/drawingml/2006/main">
           <a:pPr>
-            <a:defRPr sz="1650">
+            <a:defRPr sz="1575">
               <a:latin typeface="PingFang SC"/>
               <a:ea typeface="PingFang SC"/>
               <a:cs typeface="PingFang SC"/>
@@ -2019,6 +2507,231 @@
     </c:legend>
     <c:plotVisOnly val="1"/>
   </c:chart>
+  <c:spPr>
+    <a:noFill xmlns:a="http://schemas.openxmlformats.org/drawingml/2006/main"/>
+  </c:spPr>
+  <c:externalData r:id="rIdChartSnapshot1">
+    <c:autoUpdate val="0"/>
+  </c:externalData>
+</c:chartSpace>
+</file>
+
+<file path=ppt/slides/charts/chart3.xml><?xml version="1.0" encoding="utf-8"?>
+<c:chartSpace xmlns:c="http://schemas.openxmlformats.org/drawingml/2006/chart" xmlns:r="http://schemas.openxmlformats.org/officeDocument/2006/relationships">
+  <c:lang val="en-US"/>
+  <c:chart>
+    <c:plotArea>
+      <c:barChart>
+        <c:barDir val="col"/>
+        <c:grouping val="clustered"/>
+        <c:varyColors val="0"/>
+        <c:ser>
+          <c:idx val="0"/>
+          <c:order val="0"/>
+          <c:tx>
+            <c:v>分支写入前</c:v>
+          </c:tx>
+          <c:spPr>
+            <a:solidFill xmlns:a="http://schemas.openxmlformats.org/drawingml/2006/main">
+              <a:srgbClr val="8290A0"/>
+            </a:solidFill>
+          </c:spPr>
+          <c:cat>
+            <c:strRef>
+              <c:f>'Chart Data'!$A$2:$A$3</c:f>
+              <c:strCache>
+                <c:ptCount val="2"/>
+                <c:pt idx="0">
+                  <c:v>独立复制</c:v>
+                </c:pt>
+                <c:pt idx="1">
+                  <c:v>共享与 COW</c:v>
+                </c:pt>
+              </c:strCache>
+            </c:strRef>
+          </c:cat>
+          <c:val>
+            <c:numRef>
+              <c:f>'Chart Data'!$B$2:$B$3</c:f>
+              <c:numCache>
+                <c:formatCode>0</c:formatCode>
+                <c:ptCount val="2"/>
+                <c:pt idx="0">
+                  <c:v>108</c:v>
+                </c:pt>
+                <c:pt idx="1">
+                  <c:v>12</c:v>
+                </c:pt>
+              </c:numCache>
+            </c:numRef>
+          </c:val>
+        </c:ser>
+        <c:ser>
+          <c:idx val="1"/>
+          <c:order val="1"/>
+          <c:tx>
+            <c:v>分支写入后</c:v>
+          </c:tx>
+          <c:spPr>
+            <a:solidFill xmlns:a="http://schemas.openxmlformats.org/drawingml/2006/main">
+              <a:srgbClr val="286CA8"/>
+            </a:solidFill>
+          </c:spPr>
+          <c:cat>
+            <c:strRef>
+              <c:f>'Chart Data'!$C$2:$C$3</c:f>
+              <c:strCache>
+                <c:ptCount val="2"/>
+                <c:pt idx="0">
+                  <c:v>独立复制</c:v>
+                </c:pt>
+                <c:pt idx="1">
+                  <c:v>共享与 COW</c:v>
+                </c:pt>
+              </c:strCache>
+            </c:strRef>
+          </c:cat>
+          <c:val>
+            <c:numRef>
+              <c:f>'Chart Data'!$D$2:$D$3</c:f>
+              <c:numCache>
+                <c:formatCode>0</c:formatCode>
+                <c:ptCount val="2"/>
+                <c:pt idx="0">
+                  <c:v>108</c:v>
+                </c:pt>
+                <c:pt idx="1">
+                  <c:v>44</c:v>
+                </c:pt>
+              </c:numCache>
+            </c:numRef>
+          </c:val>
+        </c:ser>
+        <c:dLbls>
+          <c:txPr>
+            <a:bodyPr xmlns:a="http://schemas.openxmlformats.org/drawingml/2006/main" anchorCtr="1"/>
+            <a:lstStyle xmlns:a="http://schemas.openxmlformats.org/drawingml/2006/main"/>
+            <a:p xmlns:a="http://schemas.openxmlformats.org/drawingml/2006/main">
+              <a:pPr>
+                <a:defRPr sz="1575">
+                  <a:latin typeface="PingFang SC"/>
+                  <a:ea typeface="PingFang SC"/>
+                  <a:cs typeface="PingFang SC"/>
+                </a:defRPr>
+              </a:pPr>
+            </a:p>
+          </c:txPr>
+          <c:dLblPos val="outEnd"/>
+          <c:showLegendKey val="0"/>
+          <c:showVal val="1"/>
+          <c:showCatName val="0"/>
+          <c:showSerName val="0"/>
+          <c:showPercent val="0"/>
+          <c:showBubbleSize val="0"/>
+          <c:showLeaderLines val="0"/>
+        </c:dLbls>
+        <c:axId val="48650112"/>
+        <c:axId val="48672768"/>
+      </c:barChart>
+      <c:catAx>
+        <c:axId val="48650112"/>
+        <c:scaling>
+          <c:orientation val="minMax"/>
+        </c:scaling>
+        <c:delete val="0"/>
+        <c:axPos val="b"/>
+        <c:numFmt formatCode="General"/>
+        <c:majorTickMark val="none"/>
+        <c:minorTickMark val="none"/>
+        <c:spPr>
+          <a:ln xmlns:a="http://schemas.openxmlformats.org/drawingml/2006/main" w="9525">
+            <a:solidFill>
+              <a:srgbClr val="D4D4D4"/>
+            </a:solidFill>
+            <a:prstDash val="solid"/>
+          </a:ln>
+        </c:spPr>
+        <c:txPr>
+          <a:bodyPr xmlns:a="http://schemas.openxmlformats.org/drawingml/2006/main" anchorCtr="1"/>
+          <a:lstStyle xmlns:a="http://schemas.openxmlformats.org/drawingml/2006/main"/>
+          <a:p xmlns:a="http://schemas.openxmlformats.org/drawingml/2006/main">
+            <a:pPr>
+              <a:defRPr sz="1575">
+                <a:solidFill>
+                  <a:srgbClr val="666666"/>
+                </a:solidFill>
+                <a:latin typeface="PingFang SC"/>
+                <a:ea typeface="PingFang SC"/>
+                <a:cs typeface="PingFang SC"/>
+              </a:defRPr>
+            </a:pPr>
+          </a:p>
+        </c:txPr>
+        <c:crossAx val="48672768"/>
+      </c:catAx>
+      <c:valAx>
+        <c:axId val="48672768"/>
+        <c:scaling>
+          <c:orientation val="minMax"/>
+        </c:scaling>
+        <c:delete val="0"/>
+        <c:axPos val="l"/>
+        <c:numFmt formatCode="0"/>
+        <c:majorTickMark val="none"/>
+        <c:minorTickMark val="none"/>
+        <c:spPr>
+          <a:ln xmlns:a="http://schemas.openxmlformats.org/drawingml/2006/main" w="9525">
+            <a:solidFill>
+              <a:srgbClr val="D4D4D4"/>
+            </a:solidFill>
+            <a:prstDash val="solid"/>
+          </a:ln>
+        </c:spPr>
+        <c:txPr>
+          <a:bodyPr xmlns:a="http://schemas.openxmlformats.org/drawingml/2006/main" anchorCtr="1"/>
+          <a:lstStyle xmlns:a="http://schemas.openxmlformats.org/drawingml/2006/main"/>
+          <a:p xmlns:a="http://schemas.openxmlformats.org/drawingml/2006/main">
+            <a:pPr>
+              <a:defRPr sz="1575">
+                <a:solidFill>
+                  <a:srgbClr val="666666"/>
+                </a:solidFill>
+                <a:latin typeface="PingFang SC"/>
+                <a:ea typeface="PingFang SC"/>
+                <a:cs typeface="PingFang SC"/>
+              </a:defRPr>
+            </a:pPr>
+          </a:p>
+        </c:txPr>
+        <c:crossAx val="48650112"/>
+        <c:crossBetween val="between"/>
+      </c:valAx>
+      <c:spPr>
+        <a:noFill xmlns:a="http://schemas.openxmlformats.org/drawingml/2006/main"/>
+      </c:spPr>
+    </c:plotArea>
+    <c:legend>
+      <c:legendPos val="b"/>
+      <c:overlay val="0"/>
+      <c:txPr>
+        <a:bodyPr xmlns:a="http://schemas.openxmlformats.org/drawingml/2006/main" anchorCtr="1"/>
+        <a:lstStyle xmlns:a="http://schemas.openxmlformats.org/drawingml/2006/main"/>
+        <a:p xmlns:a="http://schemas.openxmlformats.org/drawingml/2006/main">
+          <a:pPr>
+            <a:defRPr sz="1575">
+              <a:latin typeface="PingFang SC"/>
+              <a:ea typeface="PingFang SC"/>
+              <a:cs typeface="PingFang SC"/>
+            </a:defRPr>
+          </a:pPr>
+        </a:p>
+      </c:txPr>
+    </c:legend>
+    <c:plotVisOnly val="1"/>
+  </c:chart>
+  <c:spPr>
+    <a:noFill xmlns:a="http://schemas.openxmlformats.org/drawingml/2006/main"/>
+  </c:spPr>
   <c:externalData r:id="rIdChartSnapshot1">
     <c:autoUpdate val="0"/>
   </c:externalData>
@@ -2046,10 +2759,10 @@
       </p:grpSpPr>
       <p:sp>
         <p:nvSpPr>
-          <p:cNvPr id="4" name="">
+          <p:cNvPr id="6" name="">
             <a:extLst xmlns:a="http://schemas.openxmlformats.org/drawingml/2006/main">
               <a:ext uri="{FF2B5EF4-FFF2-40B4-BE49-F238E27FC236}">
-                <a16:creationId xmlns:a16="http://schemas.microsoft.com/office/drawing/2014/main" id="{77D3DC0C-822F-4C09-ABEE-1A1CA7731EC2}"/>
+                <a16:creationId xmlns:a16="http://schemas.microsoft.com/office/drawing/2014/main" id="{781B9989-A738-47A1-B02F-85C2B6DCEF33}"/>
               </a:ext>
             </a:extLst>
           </p:cNvPr>
@@ -2060,8 +2773,8 @@
         </p:nvSpPr>
         <p:spPr>
           <a:xfrm xmlns:a="http://schemas.openxmlformats.org/drawingml/2006/main">
-            <a:off x="762000" y="1714500"/>
-            <a:ext cx="10668000" cy="2000250"/>
+            <a:off x="619125" y="409575"/>
+            <a:ext cx="10953750" cy="809625"/>
           </a:xfrm>
           <a:prstGeom xmlns:a="http://schemas.openxmlformats.org/drawingml/2006/main" prst="rect">
             <a:avLst/>
@@ -2078,9 +2791,9 @@
           <a:lstStyle xmlns:a="http://schemas.openxmlformats.org/drawingml/2006/main"/>
           <a:p xmlns:a="http://schemas.openxmlformats.org/drawingml/2006/main">
             <a:pPr>
-              <a:defRPr sz="5700" b="1">
-                <a:solidFill>
-                  <a:srgbClr val="12283A"/>
+              <a:defRPr sz="3300" b="1">
+                <a:solidFill>
+                  <a:srgbClr val="172C3D"/>
                 </a:solidFill>
                 <a:latin typeface="PingFang SC"/>
                 <a:ea typeface="PingFang SC"/>
@@ -2088,38 +2801,15 @@
               </a:defRPr>
             </a:pPr>
             <a:r>
-              <a:rPr sz="5700" b="1">
-                <a:solidFill>
-                  <a:srgbClr val="12283A"/>
+              <a:rPr sz="3300" b="1">
+                <a:solidFill>
+                  <a:srgbClr val="172C3D"/>
                 </a:solidFill>
                 <a:latin typeface="PingFang SC"/>
                 <a:ea typeface="PingFang SC"/>
                 <a:cs typeface="PingFang SC"/>
               </a:rPr>
-              <a:t>KV Cache</a:t>
-            </a:r>
-          </a:p>
-          <a:p xmlns:a="http://schemas.openxmlformats.org/drawingml/2006/main">
-            <a:pPr>
-              <a:defRPr sz="5700" b="1">
-                <a:solidFill>
-                  <a:srgbClr val="12283A"/>
-                </a:solidFill>
-                <a:latin typeface="PingFang SC"/>
-                <a:ea typeface="PingFang SC"/>
-                <a:cs typeface="PingFang SC"/>
-              </a:defRPr>
-            </a:pPr>
-            <a:r>
-              <a:rPr sz="5700" b="1">
-                <a:solidFill>
-                  <a:srgbClr val="12283A"/>
-                </a:solidFill>
-                <a:latin typeface="PingFang SC"/>
-                <a:ea typeface="PingFang SC"/>
-                <a:cs typeface="PingFang SC"/>
-              </a:rPr>
-              <a:t>分页内存管理</a:t>
+              <a:t>KV Cache 分页内存管理</a:t>
             </a:r>
           </a:p>
         </p:txBody>
@@ -2129,7 +2819,7 @@
           <p:cNvPr id="2" name="">
             <a:extLst xmlns:a="http://schemas.openxmlformats.org/drawingml/2006/main">
               <a:ext uri="{FF2B5EF4-FFF2-40B4-BE49-F238E27FC236}">
-                <a16:creationId xmlns:a16="http://schemas.microsoft.com/office/drawing/2014/main" id="{71DAB5DC-DC8B-4066-B3BF-399A0DDE02F5}"/>
+                <a16:creationId xmlns:a16="http://schemas.microsoft.com/office/drawing/2014/main" id="{D15EBE8B-4701-45AF-AE38-55DA3782CD2C}"/>
               </a:ext>
             </a:extLst>
           </p:cNvPr>
@@ -2140,8 +2830,8 @@
         </p:nvSpPr>
         <p:spPr>
           <a:xfrm xmlns:a="http://schemas.openxmlformats.org/drawingml/2006/main">
-            <a:off x="800100" y="4048125"/>
-            <a:ext cx="10477500" cy="619125"/>
+            <a:off x="11239500" y="6400800"/>
+            <a:ext cx="476250" cy="266700"/>
           </a:xfrm>
           <a:prstGeom xmlns:a="http://schemas.openxmlformats.org/drawingml/2006/main" prst="rect">
             <a:avLst/>
@@ -2158,9 +2848,9 @@
           <a:lstStyle xmlns:a="http://schemas.openxmlformats.org/drawingml/2006/main"/>
           <a:p xmlns:a="http://schemas.openxmlformats.org/drawingml/2006/main">
             <a:pPr>
-              <a:defRPr sz="2550" b="0">
-                <a:solidFill>
-                  <a:srgbClr val="263748"/>
+              <a:defRPr sz="1350" b="0">
+                <a:solidFill>
+                  <a:srgbClr val="8290A0"/>
                 </a:solidFill>
                 <a:latin typeface="PingFang SC"/>
                 <a:ea typeface="PingFang SC"/>
@@ -2168,15 +2858,15 @@
               </a:defRPr>
             </a:pPr>
             <a:r>
-              <a:rPr sz="2550" b="0">
-                <a:solidFill>
-                  <a:srgbClr val="263748"/>
+              <a:rPr sz="1350" b="0">
+                <a:solidFill>
+                  <a:srgbClr val="8290A0"/>
                 </a:solidFill>
                 <a:latin typeface="PingFang SC"/>
                 <a:ea typeface="PingFang SC"/>
                 <a:cs typeface="PingFang SC"/>
               </a:rPr>
-              <a:t>专业实习课程任务一</a:t>
+              <a:t>01</a:t>
             </a:r>
           </a:p>
         </p:txBody>
@@ -2186,7 +2876,7 @@
           <p:cNvPr id="3" name="">
             <a:extLst xmlns:a="http://schemas.openxmlformats.org/drawingml/2006/main">
               <a:ext uri="{FF2B5EF4-FFF2-40B4-BE49-F238E27FC236}">
-                <a16:creationId xmlns:a16="http://schemas.microsoft.com/office/drawing/2014/main" id="{6DB9ACE9-1F7C-4711-8AC5-39402A7F1752}"/>
+                <a16:creationId xmlns:a16="http://schemas.microsoft.com/office/drawing/2014/main" id="{006E4943-601B-4842-9C4B-FB74137E1F6D}"/>
               </a:ext>
             </a:extLst>
           </p:cNvPr>
@@ -2197,8 +2887,8 @@
         </p:nvSpPr>
         <p:spPr>
           <a:xfrm xmlns:a="http://schemas.openxmlformats.org/drawingml/2006/main">
-            <a:off x="800100" y="4857750"/>
-            <a:ext cx="10477500" cy="762000"/>
+            <a:off x="723900" y="2190750"/>
+            <a:ext cx="10572750" cy="857250"/>
           </a:xfrm>
           <a:prstGeom xmlns:a="http://schemas.openxmlformats.org/drawingml/2006/main" prst="rect">
             <a:avLst/>
@@ -2215,9 +2905,9 @@
           <a:lstStyle xmlns:a="http://schemas.openxmlformats.org/drawingml/2006/main"/>
           <a:p xmlns:a="http://schemas.openxmlformats.org/drawingml/2006/main">
             <a:pPr>
-              <a:defRPr sz="2175" b="0">
-                <a:solidFill>
-                  <a:srgbClr val="263748"/>
+              <a:defRPr sz="4050" b="1">
+                <a:solidFill>
+                  <a:srgbClr val="172C3D"/>
                 </a:solidFill>
                 <a:latin typeface="PingFang SC"/>
                 <a:ea typeface="PingFang SC"/>
@@ -2225,15 +2915,129 @@
               </a:defRPr>
             </a:pPr>
             <a:r>
-              <a:rPr sz="2175" b="0">
-                <a:solidFill>
-                  <a:srgbClr val="263748"/>
+              <a:rPr sz="4050" b="1">
+                <a:solidFill>
+                  <a:srgbClr val="172C3D"/>
                 </a:solidFill>
                 <a:latin typeface="PingFang SC"/>
                 <a:ea typeface="PingFang SC"/>
                 <a:cs typeface="PingFang SC"/>
               </a:rPr>
-              <a:t>分页、共享与 COW、LRU 换页的设计和验证</a:t>
+              <a:t>系统设计与量化评测</a:t>
+            </a:r>
+          </a:p>
+        </p:txBody>
+      </p:sp>
+      <p:sp>
+        <p:nvSpPr>
+          <p:cNvPr id="4" name="">
+            <a:extLst xmlns:a="http://schemas.openxmlformats.org/drawingml/2006/main">
+              <a:ext uri="{FF2B5EF4-FFF2-40B4-BE49-F238E27FC236}">
+                <a16:creationId xmlns:a16="http://schemas.microsoft.com/office/drawing/2014/main" id="{C240D0A4-03B9-4296-90C5-7A3CA53ABB00}"/>
+              </a:ext>
+            </a:extLst>
+          </p:cNvPr>
+          <p:cNvSpPr>
+            <a:spLocks xmlns:a="http://schemas.openxmlformats.org/drawingml/2006/main" noGrp="1"/>
+          </p:cNvSpPr>
+          <p:nvPr/>
+        </p:nvSpPr>
+        <p:spPr>
+          <a:xfrm xmlns:a="http://schemas.openxmlformats.org/drawingml/2006/main">
+            <a:off x="762000" y="3476625"/>
+            <a:ext cx="10477500" cy="619125"/>
+          </a:xfrm>
+          <a:prstGeom xmlns:a="http://schemas.openxmlformats.org/drawingml/2006/main" prst="rect">
+            <a:avLst/>
+          </a:prstGeom>
+          <a:noFill xmlns:a="http://schemas.openxmlformats.org/drawingml/2006/main"/>
+          <a:ln xmlns:a="http://schemas.openxmlformats.org/drawingml/2006/main" w="0">
+            <a:noFill/>
+          </a:ln>
+        </p:spPr>
+        <p:txBody>
+          <a:bodyPr xmlns:a="http://schemas.openxmlformats.org/drawingml/2006/main">
+            <a:noAutofit/>
+          </a:bodyPr>
+          <a:lstStyle xmlns:a="http://schemas.openxmlformats.org/drawingml/2006/main"/>
+          <a:p xmlns:a="http://schemas.openxmlformats.org/drawingml/2006/main">
+            <a:pPr>
+              <a:defRPr sz="2400" b="0">
+                <a:solidFill>
+                  <a:srgbClr val="172C3D"/>
+                </a:solidFill>
+                <a:latin typeface="PingFang SC"/>
+                <a:ea typeface="PingFang SC"/>
+                <a:cs typeface="PingFang SC"/>
+              </a:defRPr>
+            </a:pPr>
+            <a:r>
+              <a:rPr sz="2400" b="0">
+                <a:solidFill>
+                  <a:srgbClr val="172C3D"/>
+                </a:solidFill>
+                <a:latin typeface="PingFang SC"/>
+                <a:ea typeface="PingFang SC"/>
+                <a:cs typeface="PingFang SC"/>
+              </a:rPr>
+              <a:t>按需分配、写时复制与 LRU 换页</a:t>
+            </a:r>
+          </a:p>
+        </p:txBody>
+      </p:sp>
+      <p:sp>
+        <p:nvSpPr>
+          <p:cNvPr id="5" name="">
+            <a:extLst xmlns:a="http://schemas.openxmlformats.org/drawingml/2006/main">
+              <a:ext uri="{FF2B5EF4-FFF2-40B4-BE49-F238E27FC236}">
+                <a16:creationId xmlns:a16="http://schemas.microsoft.com/office/drawing/2014/main" id="{8AA749A0-3056-4812-9AE3-4F8636012E3D}"/>
+              </a:ext>
+            </a:extLst>
+          </p:cNvPr>
+          <p:cNvSpPr>
+            <a:spLocks xmlns:a="http://schemas.openxmlformats.org/drawingml/2006/main" noGrp="1"/>
+          </p:cNvSpPr>
+          <p:nvPr/>
+        </p:nvSpPr>
+        <p:spPr>
+          <a:xfrm xmlns:a="http://schemas.openxmlformats.org/drawingml/2006/main">
+            <a:off x="762000" y="4905375"/>
+            <a:ext cx="10477500" cy="523875"/>
+          </a:xfrm>
+          <a:prstGeom xmlns:a="http://schemas.openxmlformats.org/drawingml/2006/main" prst="rect">
+            <a:avLst/>
+          </a:prstGeom>
+          <a:noFill xmlns:a="http://schemas.openxmlformats.org/drawingml/2006/main"/>
+          <a:ln xmlns:a="http://schemas.openxmlformats.org/drawingml/2006/main" w="0">
+            <a:noFill/>
+          </a:ln>
+        </p:spPr>
+        <p:txBody>
+          <a:bodyPr xmlns:a="http://schemas.openxmlformats.org/drawingml/2006/main">
+            <a:noAutofit/>
+          </a:bodyPr>
+          <a:lstStyle xmlns:a="http://schemas.openxmlformats.org/drawingml/2006/main"/>
+          <a:p xmlns:a="http://schemas.openxmlformats.org/drawingml/2006/main">
+            <a:pPr>
+              <a:defRPr sz="1950" b="0">
+                <a:solidFill>
+                  <a:srgbClr val="8290A0"/>
+                </a:solidFill>
+                <a:latin typeface="PingFang SC"/>
+                <a:ea typeface="PingFang SC"/>
+                <a:cs typeface="PingFang SC"/>
+              </a:defRPr>
+            </a:pPr>
+            <a:r>
+              <a:rPr sz="1950" b="0">
+                <a:solidFill>
+                  <a:srgbClr val="8290A0"/>
+                </a:solidFill>
+                <a:latin typeface="PingFang SC"/>
+                <a:ea typeface="PingFang SC"/>
+                <a:cs typeface="PingFang SC"/>
+              </a:rPr>
+              <a:t>CPU 实验已完成，CUDA / Qwen3 实测待补充</a:t>
             </a:r>
           </a:p>
         </p:txBody>
@@ -2241,7 +3045,2055 @@
     </p:spTree>
     <p:extLst>
       <p:ext uri="{BB962C8B-B14F-4D97-AF65-F5344CB8AC3E}">
-        <p14:creationId xmlns:p14="http://schemas.microsoft.com/office/powerpoint/2010/main" val="21411099"/>
+        <p14:creationId xmlns:p14="http://schemas.microsoft.com/office/powerpoint/2010/main" val="888548538"/>
+      </p:ext>
+    </p:extLst>
+  </p:cSld>
+</p:sld>
+</file>
+
+<file path=ppt/slides/slide10.xml><?xml version="1.0" encoding="utf-8"?>
+<p:sld xmlns:p="http://schemas.openxmlformats.org/presentationml/2006/main">
+  <p:cSld>
+    <p:bg>
+      <p:bgPr>
+        <a:solidFill xmlns:a="http://schemas.openxmlformats.org/drawingml/2006/main">
+          <a:srgbClr val="FFFFFF"/>
+        </a:solidFill>
+      </p:bgPr>
+    </p:bg>
+    <p:spTree>
+      <p:nvGrpSpPr>
+        <p:cNvPr id="1" name=""/>
+        <p:cNvGrpSpPr/>
+        <p:nvPr/>
+      </p:nvGrpSpPr>
+      <p:grpSpPr>
+        <a:xfrm xmlns:a="http://schemas.openxmlformats.org/drawingml/2006/main"/>
+      </p:grpSpPr>
+      <p:sp>
+        <p:nvSpPr>
+          <p:cNvPr id="6" name="">
+            <a:extLst xmlns:a="http://schemas.openxmlformats.org/drawingml/2006/main">
+              <a:ext uri="{FF2B5EF4-FFF2-40B4-BE49-F238E27FC236}">
+                <a16:creationId xmlns:a16="http://schemas.microsoft.com/office/drawing/2014/main" id="{65B90B8B-9920-4C09-8A24-E3E28DC23762}"/>
+              </a:ext>
+            </a:extLst>
+          </p:cNvPr>
+          <p:cNvSpPr>
+            <a:spLocks xmlns:a="http://schemas.openxmlformats.org/drawingml/2006/main" noGrp="1"/>
+          </p:cNvSpPr>
+          <p:nvPr/>
+        </p:nvSpPr>
+        <p:spPr>
+          <a:xfrm xmlns:a="http://schemas.openxmlformats.org/drawingml/2006/main">
+            <a:off x="619125" y="409575"/>
+            <a:ext cx="10953750" cy="809625"/>
+          </a:xfrm>
+          <a:prstGeom xmlns:a="http://schemas.openxmlformats.org/drawingml/2006/main" prst="rect">
+            <a:avLst/>
+          </a:prstGeom>
+          <a:noFill xmlns:a="http://schemas.openxmlformats.org/drawingml/2006/main"/>
+          <a:ln xmlns:a="http://schemas.openxmlformats.org/drawingml/2006/main" w="0">
+            <a:noFill/>
+          </a:ln>
+        </p:spPr>
+        <p:txBody>
+          <a:bodyPr xmlns:a="http://schemas.openxmlformats.org/drawingml/2006/main">
+            <a:noAutofit/>
+          </a:bodyPr>
+          <a:lstStyle xmlns:a="http://schemas.openxmlformats.org/drawingml/2006/main"/>
+          <a:p xmlns:a="http://schemas.openxmlformats.org/drawingml/2006/main">
+            <a:pPr>
+              <a:defRPr sz="3300" b="1">
+                <a:solidFill>
+                  <a:srgbClr val="172C3D"/>
+                </a:solidFill>
+                <a:latin typeface="PingFang SC"/>
+                <a:ea typeface="PingFang SC"/>
+                <a:cs typeface="PingFang SC"/>
+              </a:defRPr>
+            </a:pPr>
+            <a:r>
+              <a:rPr sz="3300" b="1">
+                <a:solidFill>
+                  <a:srgbClr val="172C3D"/>
+                </a:solidFill>
+                <a:latin typeface="PingFang SC"/>
+                <a:ea typeface="PingFang SC"/>
+                <a:cs typeface="PingFang SC"/>
+              </a:rPr>
+              <a:t>共享分支的空间占用</a:t>
+            </a:r>
+          </a:p>
+        </p:txBody>
+      </p:sp>
+      <p:sp>
+        <p:nvSpPr>
+          <p:cNvPr id="2" name="">
+            <a:extLst xmlns:a="http://schemas.openxmlformats.org/drawingml/2006/main">
+              <a:ext uri="{FF2B5EF4-FFF2-40B4-BE49-F238E27FC236}">
+                <a16:creationId xmlns:a16="http://schemas.microsoft.com/office/drawing/2014/main" id="{91B289D4-DEB2-4C46-A903-4A584BB68C2E}"/>
+              </a:ext>
+            </a:extLst>
+          </p:cNvPr>
+          <p:cNvSpPr>
+            <a:spLocks xmlns:a="http://schemas.openxmlformats.org/drawingml/2006/main" noGrp="1"/>
+          </p:cNvSpPr>
+          <p:nvPr/>
+        </p:nvSpPr>
+        <p:spPr>
+          <a:xfrm xmlns:a="http://schemas.openxmlformats.org/drawingml/2006/main">
+            <a:off x="11239500" y="6400800"/>
+            <a:ext cx="476250" cy="266700"/>
+          </a:xfrm>
+          <a:prstGeom xmlns:a="http://schemas.openxmlformats.org/drawingml/2006/main" prst="rect">
+            <a:avLst/>
+          </a:prstGeom>
+          <a:noFill xmlns:a="http://schemas.openxmlformats.org/drawingml/2006/main"/>
+          <a:ln xmlns:a="http://schemas.openxmlformats.org/drawingml/2006/main" w="0">
+            <a:noFill/>
+          </a:ln>
+        </p:spPr>
+        <p:txBody>
+          <a:bodyPr xmlns:a="http://schemas.openxmlformats.org/drawingml/2006/main">
+            <a:noAutofit/>
+          </a:bodyPr>
+          <a:lstStyle xmlns:a="http://schemas.openxmlformats.org/drawingml/2006/main"/>
+          <a:p xmlns:a="http://schemas.openxmlformats.org/drawingml/2006/main">
+            <a:pPr>
+              <a:defRPr sz="1350" b="0">
+                <a:solidFill>
+                  <a:srgbClr val="8290A0"/>
+                </a:solidFill>
+                <a:latin typeface="PingFang SC"/>
+                <a:ea typeface="PingFang SC"/>
+                <a:cs typeface="PingFang SC"/>
+              </a:defRPr>
+            </a:pPr>
+            <a:r>
+              <a:rPr sz="1350" b="0">
+                <a:solidFill>
+                  <a:srgbClr val="8290A0"/>
+                </a:solidFill>
+                <a:latin typeface="PingFang SC"/>
+                <a:ea typeface="PingFang SC"/>
+                <a:cs typeface="PingFang SC"/>
+              </a:rPr>
+              <a:t>10</a:t>
+            </a:r>
+          </a:p>
+        </p:txBody>
+      </p:sp>
+      <p:graphicFrame>
+        <p:nvGraphicFramePr>
+          <p:cNvPr id="8" name="Chart"/>
+          <p:cNvGraphicFramePr/>
+          <p:nvPr/>
+        </p:nvGraphicFramePr>
+        <p:xfrm>
+          <a:off xmlns:a="http://schemas.openxmlformats.org/drawingml/2006/main" x="714375" y="1666875"/>
+          <a:ext xmlns:a="http://schemas.openxmlformats.org/drawingml/2006/main" cx="10763250" cy="3714750"/>
+        </p:xfrm>
+        <a:graphic xmlns:a="http://schemas.openxmlformats.org/drawingml/2006/main">
+          <a:graphicData uri="http://schemas.openxmlformats.org/drawingml/2006/chart">
+            <c:chart xmlns:r="http://schemas.openxmlformats.org/officeDocument/2006/relationships" xmlns:c="http://schemas.openxmlformats.org/drawingml/2006/chart" r:id="R219335453b124159"/>
+          </a:graphicData>
+        </a:graphic>
+      </p:graphicFrame>
+      <p:sp>
+        <p:nvSpPr>
+          <p:cNvPr id="4" name="">
+            <a:extLst xmlns:a="http://schemas.openxmlformats.org/drawingml/2006/main">
+              <a:ext uri="{FF2B5EF4-FFF2-40B4-BE49-F238E27FC236}">
+                <a16:creationId xmlns:a16="http://schemas.microsoft.com/office/drawing/2014/main" id="{358DE007-48FB-49AB-98E5-22E116C642EE}"/>
+              </a:ext>
+            </a:extLst>
+          </p:cNvPr>
+          <p:cNvSpPr>
+            <a:spLocks xmlns:a="http://schemas.openxmlformats.org/drawingml/2006/main" noGrp="1"/>
+          </p:cNvSpPr>
+          <p:nvPr/>
+        </p:nvSpPr>
+        <p:spPr>
+          <a:xfrm xmlns:a="http://schemas.openxmlformats.org/drawingml/2006/main">
+            <a:off x="742950" y="5572125"/>
+            <a:ext cx="10668000" cy="457200"/>
+          </a:xfrm>
+          <a:prstGeom xmlns:a="http://schemas.openxmlformats.org/drawingml/2006/main" prst="rect">
+            <a:avLst/>
+          </a:prstGeom>
+          <a:noFill xmlns:a="http://schemas.openxmlformats.org/drawingml/2006/main"/>
+          <a:ln xmlns:a="http://schemas.openxmlformats.org/drawingml/2006/main" w="0">
+            <a:noFill/>
+          </a:ln>
+        </p:spPr>
+        <p:txBody>
+          <a:bodyPr xmlns:a="http://schemas.openxmlformats.org/drawingml/2006/main">
+            <a:noAutofit/>
+          </a:bodyPr>
+          <a:lstStyle xmlns:a="http://schemas.openxmlformats.org/drawingml/2006/main"/>
+          <a:p xmlns:a="http://schemas.openxmlformats.org/drawingml/2006/main">
+            <a:pPr>
+              <a:defRPr sz="1875" b="0">
+                <a:solidFill>
+                  <a:srgbClr val="172C3D"/>
+                </a:solidFill>
+                <a:latin typeface="PingFang SC"/>
+                <a:ea typeface="PingFang SC"/>
+                <a:cs typeface="PingFang SC"/>
+              </a:defRPr>
+            </a:pPr>
+            <a:r>
+              <a:rPr sz="1875" b="0">
+                <a:solidFill>
+                  <a:srgbClr val="172C3D"/>
+                </a:solidFill>
+                <a:latin typeface="PingFang SC"/>
+                <a:ea typeface="PingFang SC"/>
+                <a:cs typeface="PingFang SC"/>
+              </a:rPr>
+              <a:t>9-token 前缀，8 个分支，每页 4 token。纵向数值单位为槽位。</a:t>
+            </a:r>
+          </a:p>
+        </p:txBody>
+      </p:sp>
+      <p:sp>
+        <p:nvSpPr>
+          <p:cNvPr id="5" name="">
+            <a:extLst xmlns:a="http://schemas.openxmlformats.org/drawingml/2006/main">
+              <a:ext uri="{FF2B5EF4-FFF2-40B4-BE49-F238E27FC236}">
+                <a16:creationId xmlns:a16="http://schemas.microsoft.com/office/drawing/2014/main" id="{DC4CB9A8-AE1E-44AC-8D9A-9381B8A5C2B5}"/>
+              </a:ext>
+            </a:extLst>
+          </p:cNvPr>
+          <p:cNvSpPr>
+            <a:spLocks xmlns:a="http://schemas.openxmlformats.org/drawingml/2006/main" noGrp="1"/>
+          </p:cNvSpPr>
+          <p:nvPr/>
+        </p:nvSpPr>
+        <p:spPr>
+          <a:xfrm xmlns:a="http://schemas.openxmlformats.org/drawingml/2006/main">
+            <a:off x="742950" y="6057900"/>
+            <a:ext cx="10668000" cy="457200"/>
+          </a:xfrm>
+          <a:prstGeom xmlns:a="http://schemas.openxmlformats.org/drawingml/2006/main" prst="rect">
+            <a:avLst/>
+          </a:prstGeom>
+          <a:noFill xmlns:a="http://schemas.openxmlformats.org/drawingml/2006/main"/>
+          <a:ln xmlns:a="http://schemas.openxmlformats.org/drawingml/2006/main" w="0">
+            <a:noFill/>
+          </a:ln>
+        </p:spPr>
+        <p:txBody>
+          <a:bodyPr xmlns:a="http://schemas.openxmlformats.org/drawingml/2006/main">
+            <a:noAutofit/>
+          </a:bodyPr>
+          <a:lstStyle xmlns:a="http://schemas.openxmlformats.org/drawingml/2006/main"/>
+          <a:p xmlns:a="http://schemas.openxmlformats.org/drawingml/2006/main">
+            <a:pPr>
+              <a:defRPr sz="2025" b="0">
+                <a:solidFill>
+                  <a:srgbClr val="172C3D"/>
+                </a:solidFill>
+                <a:latin typeface="PingFang SC"/>
+                <a:ea typeface="PingFang SC"/>
+                <a:cs typeface="PingFang SC"/>
+              </a:defRPr>
+            </a:pPr>
+            <a:r>
+              <a:rPr sz="2025" b="0">
+                <a:solidFill>
+                  <a:srgbClr val="172C3D"/>
+                </a:solidFill>
+                <a:latin typeface="PingFang SC"/>
+                <a:ea typeface="PingFang SC"/>
+                <a:cs typeface="PingFang SC"/>
+              </a:rPr>
+              <a:t>追加后由 108 个槽位降至 44 个，减少 59.3%。</a:t>
+            </a:r>
+          </a:p>
+        </p:txBody>
+      </p:sp>
+    </p:spTree>
+    <p:extLst>
+      <p:ext uri="{BB962C8B-B14F-4D97-AF65-F5344CB8AC3E}">
+        <p14:creationId xmlns:p14="http://schemas.microsoft.com/office/powerpoint/2010/main" val="2091835953"/>
+      </p:ext>
+    </p:extLst>
+  </p:cSld>
+</p:sld>
+</file>
+
+<file path=ppt/slides/slide11.xml><?xml version="1.0" encoding="utf-8"?>
+<p:sld xmlns:p="http://schemas.openxmlformats.org/presentationml/2006/main">
+  <p:cSld>
+    <p:bg>
+      <p:bgPr>
+        <a:solidFill xmlns:a="http://schemas.openxmlformats.org/drawingml/2006/main">
+          <a:srgbClr val="FFFFFF"/>
+        </a:solidFill>
+      </p:bgPr>
+    </p:bg>
+    <p:spTree>
+      <p:nvGrpSpPr>
+        <p:cNvPr id="1" name=""/>
+        <p:cNvGrpSpPr/>
+        <p:nvPr/>
+      </p:nvGrpSpPr>
+      <p:grpSpPr>
+        <a:xfrm xmlns:a="http://schemas.openxmlformats.org/drawingml/2006/main"/>
+      </p:grpSpPr>
+      <p:sp>
+        <p:nvSpPr>
+          <p:cNvPr id="7" name="">
+            <a:extLst xmlns:a="http://schemas.openxmlformats.org/drawingml/2006/main">
+              <a:ext uri="{FF2B5EF4-FFF2-40B4-BE49-F238E27FC236}">
+                <a16:creationId xmlns:a16="http://schemas.microsoft.com/office/drawing/2014/main" id="{2666DCEA-3910-4A13-9BEF-ACB6A78695D3}"/>
+              </a:ext>
+            </a:extLst>
+          </p:cNvPr>
+          <p:cNvSpPr>
+            <a:spLocks xmlns:a="http://schemas.openxmlformats.org/drawingml/2006/main" noGrp="1"/>
+          </p:cNvSpPr>
+          <p:nvPr/>
+        </p:nvSpPr>
+        <p:spPr>
+          <a:xfrm xmlns:a="http://schemas.openxmlformats.org/drawingml/2006/main">
+            <a:off x="619125" y="409575"/>
+            <a:ext cx="10953750" cy="809625"/>
+          </a:xfrm>
+          <a:prstGeom xmlns:a="http://schemas.openxmlformats.org/drawingml/2006/main" prst="rect">
+            <a:avLst/>
+          </a:prstGeom>
+          <a:noFill xmlns:a="http://schemas.openxmlformats.org/drawingml/2006/main"/>
+          <a:ln xmlns:a="http://schemas.openxmlformats.org/drawingml/2006/main" w="0">
+            <a:noFill/>
+          </a:ln>
+        </p:spPr>
+        <p:txBody>
+          <a:bodyPr xmlns:a="http://schemas.openxmlformats.org/drawingml/2006/main">
+            <a:noAutofit/>
+          </a:bodyPr>
+          <a:lstStyle xmlns:a="http://schemas.openxmlformats.org/drawingml/2006/main"/>
+          <a:p xmlns:a="http://schemas.openxmlformats.org/drawingml/2006/main">
+            <a:pPr>
+              <a:defRPr sz="3300" b="1">
+                <a:solidFill>
+                  <a:srgbClr val="172C3D"/>
+                </a:solidFill>
+                <a:latin typeface="PingFang SC"/>
+                <a:ea typeface="PingFang SC"/>
+                <a:cs typeface="PingFang SC"/>
+              </a:defRPr>
+            </a:pPr>
+            <a:r>
+              <a:rPr sz="3300" b="1">
+                <a:solidFill>
+                  <a:srgbClr val="172C3D"/>
+                </a:solidFill>
+                <a:latin typeface="PingFang SC"/>
+                <a:ea typeface="PingFang SC"/>
+                <a:cs typeface="PingFang SC"/>
+              </a:rPr>
+              <a:t>容量边界与分配策略</a:t>
+            </a:r>
+          </a:p>
+        </p:txBody>
+      </p:sp>
+      <p:sp>
+        <p:nvSpPr>
+          <p:cNvPr id="2" name="">
+            <a:extLst xmlns:a="http://schemas.openxmlformats.org/drawingml/2006/main">
+              <a:ext uri="{FF2B5EF4-FFF2-40B4-BE49-F238E27FC236}">
+                <a16:creationId xmlns:a16="http://schemas.microsoft.com/office/drawing/2014/main" id="{93047A29-7517-44F7-A2FC-D5E5B3653FD8}"/>
+              </a:ext>
+            </a:extLst>
+          </p:cNvPr>
+          <p:cNvSpPr>
+            <a:spLocks xmlns:a="http://schemas.openxmlformats.org/drawingml/2006/main" noGrp="1"/>
+          </p:cNvSpPr>
+          <p:nvPr/>
+        </p:nvSpPr>
+        <p:spPr>
+          <a:xfrm xmlns:a="http://schemas.openxmlformats.org/drawingml/2006/main">
+            <a:off x="11239500" y="6400800"/>
+            <a:ext cx="476250" cy="266700"/>
+          </a:xfrm>
+          <a:prstGeom xmlns:a="http://schemas.openxmlformats.org/drawingml/2006/main" prst="rect">
+            <a:avLst/>
+          </a:prstGeom>
+          <a:noFill xmlns:a="http://schemas.openxmlformats.org/drawingml/2006/main"/>
+          <a:ln xmlns:a="http://schemas.openxmlformats.org/drawingml/2006/main" w="0">
+            <a:noFill/>
+          </a:ln>
+        </p:spPr>
+        <p:txBody>
+          <a:bodyPr xmlns:a="http://schemas.openxmlformats.org/drawingml/2006/main">
+            <a:noAutofit/>
+          </a:bodyPr>
+          <a:lstStyle xmlns:a="http://schemas.openxmlformats.org/drawingml/2006/main"/>
+          <a:p xmlns:a="http://schemas.openxmlformats.org/drawingml/2006/main">
+            <a:pPr>
+              <a:defRPr sz="1350" b="0">
+                <a:solidFill>
+                  <a:srgbClr val="8290A0"/>
+                </a:solidFill>
+                <a:latin typeface="PingFang SC"/>
+                <a:ea typeface="PingFang SC"/>
+                <a:cs typeface="PingFang SC"/>
+              </a:defRPr>
+            </a:pPr>
+            <a:r>
+              <a:rPr sz="1350" b="0">
+                <a:solidFill>
+                  <a:srgbClr val="8290A0"/>
+                </a:solidFill>
+                <a:latin typeface="PingFang SC"/>
+                <a:ea typeface="PingFang SC"/>
+                <a:cs typeface="PingFang SC"/>
+              </a:rPr>
+              <a:t>11</a:t>
+            </a:r>
+          </a:p>
+        </p:txBody>
+      </p:sp>
+      <p:graphicFrame>
+        <p:nvGraphicFramePr>
+          <p:cNvPr id="9" name=""/>
+          <p:cNvGraphicFramePr/>
+          <p:nvPr/>
+        </p:nvGraphicFramePr>
+        <p:xfrm>
+          <a:off xmlns:a="http://schemas.openxmlformats.org/drawingml/2006/main" x="714375" y="1619250"/>
+          <a:ext xmlns:a="http://schemas.openxmlformats.org/drawingml/2006/main" cx="10763250" cy="2857500"/>
+        </p:xfrm>
+        <a:graphic xmlns:a="http://schemas.openxmlformats.org/drawingml/2006/main">
+          <a:graphicData uri="http://schemas.openxmlformats.org/drawingml/2006/table">
+            <a:tbl>
+              <a:tblPr/>
+              <a:tblGrid>
+                <a:gridCol w="2476500"/>
+                <a:gridCol w="2762250"/>
+                <a:gridCol w="2762250"/>
+                <a:gridCol w="2762250"/>
+              </a:tblGrid>
+              <a:tr h="571500">
+                <a:tc>
+                  <a:txBody>
+                    <a:bodyPr/>
+                    <a:lstStyle/>
+                    <a:p>
+                      <a:r>
+                        <a:rPr sz="1875" b="1">
+                          <a:solidFill>
+                            <a:srgbClr val="172C3D"/>
+                          </a:solidFill>
+                          <a:latin typeface="PingFang SC"/>
+                          <a:ea typeface="PingFang SC"/>
+                          <a:cs typeface="PingFang SC"/>
+                        </a:rPr>
+                        <a:t>实际长度</a:t>
+                      </a:r>
+                    </a:p>
+                  </a:txBody>
+                  <a:tcPr marL="91440" marR="91440" marT="45720" marB="45720">
+                    <a:solidFill>
+                      <a:srgbClr val="E7EEF4"/>
+                    </a:solidFill>
+                  </a:tcPr>
+                </a:tc>
+                <a:tc>
+                  <a:txBody>
+                    <a:bodyPr/>
+                    <a:lstStyle/>
+                    <a:p>
+                      <a:r>
+                        <a:rPr sz="1875" b="1">
+                          <a:solidFill>
+                            <a:srgbClr val="172C3D"/>
+                          </a:solidFill>
+                          <a:latin typeface="PingFang SC"/>
+                          <a:ea typeface="PingFang SC"/>
+                          <a:cs typeface="PingFang SC"/>
+                        </a:rPr>
+                        <a:t>连续预分配</a:t>
+                      </a:r>
+                    </a:p>
+                  </a:txBody>
+                  <a:tcPr marL="91440" marR="91440" marT="45720" marB="45720">
+                    <a:solidFill>
+                      <a:srgbClr val="E7EEF4"/>
+                    </a:solidFill>
+                  </a:tcPr>
+                </a:tc>
+                <a:tc>
+                  <a:txBody>
+                    <a:bodyPr/>
+                    <a:lstStyle/>
+                    <a:p>
+                      <a:r>
+                        <a:rPr sz="1875" b="1">
+                          <a:solidFill>
+                            <a:srgbClr val="172C3D"/>
+                          </a:solidFill>
+                          <a:latin typeface="PingFang SC"/>
+                          <a:ea typeface="PingFang SC"/>
+                          <a:cs typeface="PingFang SC"/>
+                        </a:rPr>
+                        <a:t>按需分页</a:t>
+                      </a:r>
+                    </a:p>
+                  </a:txBody>
+                  <a:tcPr marL="91440" marR="91440" marT="45720" marB="45720">
+                    <a:solidFill>
+                      <a:srgbClr val="E7EEF4"/>
+                    </a:solidFill>
+                  </a:tcPr>
+                </a:tc>
+                <a:tc>
+                  <a:txBody>
+                    <a:bodyPr/>
+                    <a:lstStyle/>
+                    <a:p>
+                      <a:r>
+                        <a:rPr sz="1875" b="1">
+                          <a:solidFill>
+                            <a:srgbClr val="172C3D"/>
+                          </a:solidFill>
+                          <a:latin typeface="PingFang SC"/>
+                          <a:ea typeface="PingFang SC"/>
+                          <a:cs typeface="PingFang SC"/>
+                        </a:rPr>
+                        <a:t>分页与换页</a:t>
+                      </a:r>
+                    </a:p>
+                  </a:txBody>
+                  <a:tcPr marL="91440" marR="91440" marT="45720" marB="45720">
+                    <a:solidFill>
+                      <a:srgbClr val="E7EEF4"/>
+                    </a:solidFill>
+                  </a:tcPr>
+                </a:tc>
+              </a:tr>
+              <a:tr h="571500">
+                <a:tc>
+                  <a:txBody>
+                    <a:bodyPr/>
+                    <a:lstStyle/>
+                    <a:p>
+                      <a:r>
+                        <a:rPr sz="1875" b="0">
+                          <a:solidFill>
+                            <a:srgbClr val="172C3D"/>
+                          </a:solidFill>
+                          <a:latin typeface="PingFang SC"/>
+                          <a:ea typeface="PingFang SC"/>
+                          <a:cs typeface="PingFang SC"/>
+                        </a:rPr>
+                        <a:t>8 token</a:t>
+                      </a:r>
+                    </a:p>
+                  </a:txBody>
+                  <a:tcPr marL="91440" marR="91440" marT="45720" marB="45720">
+                    <a:solidFill>
+                      <a:srgbClr val="FFFFFF"/>
+                    </a:solidFill>
+                  </a:tcPr>
+                </a:tc>
+                <a:tc>
+                  <a:txBody>
+                    <a:bodyPr/>
+                    <a:lstStyle/>
+                    <a:p>
+                      <a:r>
+                        <a:rPr sz="1875" b="0">
+                          <a:solidFill>
+                            <a:srgbClr val="172C3D"/>
+                          </a:solidFill>
+                          <a:latin typeface="PingFang SC"/>
+                          <a:ea typeface="PingFang SC"/>
+                          <a:cs typeface="PingFang SC"/>
+                        </a:rPr>
+                        <a:t>0</a:t>
+                      </a:r>
+                    </a:p>
+                  </a:txBody>
+                  <a:tcPr marL="91440" marR="91440" marT="45720" marB="45720">
+                    <a:solidFill>
+                      <a:srgbClr val="FFFFFF"/>
+                    </a:solidFill>
+                  </a:tcPr>
+                </a:tc>
+                <a:tc>
+                  <a:txBody>
+                    <a:bodyPr/>
+                    <a:lstStyle/>
+                    <a:p>
+                      <a:r>
+                        <a:rPr sz="1875" b="0">
+                          <a:solidFill>
+                            <a:srgbClr val="172C3D"/>
+                          </a:solidFill>
+                          <a:latin typeface="PingFang SC"/>
+                          <a:ea typeface="PingFang SC"/>
+                          <a:cs typeface="PingFang SC"/>
+                        </a:rPr>
+                        <a:t>0</a:t>
+                      </a:r>
+                    </a:p>
+                  </a:txBody>
+                  <a:tcPr marL="91440" marR="91440" marT="45720" marB="45720">
+                    <a:solidFill>
+                      <a:srgbClr val="FFFFFF"/>
+                    </a:solidFill>
+                  </a:tcPr>
+                </a:tc>
+                <a:tc>
+                  <a:txBody>
+                    <a:bodyPr/>
+                    <a:lstStyle/>
+                    <a:p>
+                      <a:r>
+                        <a:rPr sz="1875" b="0">
+                          <a:solidFill>
+                            <a:srgbClr val="172C3D"/>
+                          </a:solidFill>
+                          <a:latin typeface="PingFang SC"/>
+                          <a:ea typeface="PingFang SC"/>
+                          <a:cs typeface="PingFang SC"/>
+                        </a:rPr>
+                        <a:t>16</a:t>
+                      </a:r>
+                    </a:p>
+                  </a:txBody>
+                  <a:tcPr marL="91440" marR="91440" marT="45720" marB="45720">
+                    <a:solidFill>
+                      <a:srgbClr val="FFFFFF"/>
+                    </a:solidFill>
+                  </a:tcPr>
+                </a:tc>
+              </a:tr>
+              <a:tr h="571500">
+                <a:tc>
+                  <a:txBody>
+                    <a:bodyPr/>
+                    <a:lstStyle/>
+                    <a:p>
+                      <a:r>
+                        <a:rPr sz="1875" b="0">
+                          <a:solidFill>
+                            <a:srgbClr val="172C3D"/>
+                          </a:solidFill>
+                          <a:latin typeface="PingFang SC"/>
+                          <a:ea typeface="PingFang SC"/>
+                          <a:cs typeface="PingFang SC"/>
+                        </a:rPr>
+                        <a:t>16 token</a:t>
+                      </a:r>
+                    </a:p>
+                  </a:txBody>
+                  <a:tcPr marL="91440" marR="91440" marT="45720" marB="45720">
+                    <a:solidFill>
+                      <a:srgbClr val="F6F8FA"/>
+                    </a:solidFill>
+                  </a:tcPr>
+                </a:tc>
+                <a:tc>
+                  <a:txBody>
+                    <a:bodyPr/>
+                    <a:lstStyle/>
+                    <a:p>
+                      <a:r>
+                        <a:rPr sz="1875" b="0">
+                          <a:solidFill>
+                            <a:srgbClr val="172C3D"/>
+                          </a:solidFill>
+                          <a:latin typeface="PingFang SC"/>
+                          <a:ea typeface="PingFang SC"/>
+                          <a:cs typeface="PingFang SC"/>
+                        </a:rPr>
+                        <a:t>0</a:t>
+                      </a:r>
+                    </a:p>
+                  </a:txBody>
+                  <a:tcPr marL="91440" marR="91440" marT="45720" marB="45720">
+                    <a:solidFill>
+                      <a:srgbClr val="F6F8FA"/>
+                    </a:solidFill>
+                  </a:tcPr>
+                </a:tc>
+                <a:tc>
+                  <a:txBody>
+                    <a:bodyPr/>
+                    <a:lstStyle/>
+                    <a:p>
+                      <a:r>
+                        <a:rPr sz="1875" b="0">
+                          <a:solidFill>
+                            <a:srgbClr val="172C3D"/>
+                          </a:solidFill>
+                          <a:latin typeface="PingFang SC"/>
+                          <a:ea typeface="PingFang SC"/>
+                          <a:cs typeface="PingFang SC"/>
+                        </a:rPr>
+                        <a:t>0</a:t>
+                      </a:r>
+                    </a:p>
+                  </a:txBody>
+                  <a:tcPr marL="91440" marR="91440" marT="45720" marB="45720">
+                    <a:solidFill>
+                      <a:srgbClr val="F6F8FA"/>
+                    </a:solidFill>
+                  </a:tcPr>
+                </a:tc>
+                <a:tc>
+                  <a:txBody>
+                    <a:bodyPr/>
+                    <a:lstStyle/>
+                    <a:p>
+                      <a:r>
+                        <a:rPr sz="1875" b="0">
+                          <a:solidFill>
+                            <a:srgbClr val="172C3D"/>
+                          </a:solidFill>
+                          <a:latin typeface="PingFang SC"/>
+                          <a:ea typeface="PingFang SC"/>
+                          <a:cs typeface="PingFang SC"/>
+                        </a:rPr>
+                        <a:t>16</a:t>
+                      </a:r>
+                    </a:p>
+                  </a:txBody>
+                  <a:tcPr marL="91440" marR="91440" marT="45720" marB="45720">
+                    <a:solidFill>
+                      <a:srgbClr val="F6F8FA"/>
+                    </a:solidFill>
+                  </a:tcPr>
+                </a:tc>
+              </a:tr>
+              <a:tr h="571500">
+                <a:tc>
+                  <a:txBody>
+                    <a:bodyPr/>
+                    <a:lstStyle/>
+                    <a:p>
+                      <a:r>
+                        <a:rPr sz="1875" b="0">
+                          <a:solidFill>
+                            <a:srgbClr val="172C3D"/>
+                          </a:solidFill>
+                          <a:latin typeface="PingFang SC"/>
+                          <a:ea typeface="PingFang SC"/>
+                          <a:cs typeface="PingFang SC"/>
+                        </a:rPr>
+                        <a:t>32 token</a:t>
+                      </a:r>
+                    </a:p>
+                  </a:txBody>
+                  <a:tcPr marL="91440" marR="91440" marT="45720" marB="45720">
+                    <a:solidFill>
+                      <a:srgbClr val="FFFFFF"/>
+                    </a:solidFill>
+                  </a:tcPr>
+                </a:tc>
+                <a:tc>
+                  <a:txBody>
+                    <a:bodyPr/>
+                    <a:lstStyle/>
+                    <a:p>
+                      <a:r>
+                        <a:rPr sz="1875" b="0">
+                          <a:solidFill>
+                            <a:srgbClr val="172C3D"/>
+                          </a:solidFill>
+                          <a:latin typeface="PingFang SC"/>
+                          <a:ea typeface="PingFang SC"/>
+                          <a:cs typeface="PingFang SC"/>
+                        </a:rPr>
+                        <a:t>0</a:t>
+                      </a:r>
+                    </a:p>
+                  </a:txBody>
+                  <a:tcPr marL="91440" marR="91440" marT="45720" marB="45720">
+                    <a:solidFill>
+                      <a:srgbClr val="FFFFFF"/>
+                    </a:solidFill>
+                  </a:tcPr>
+                </a:tc>
+                <a:tc>
+                  <a:txBody>
+                    <a:bodyPr/>
+                    <a:lstStyle/>
+                    <a:p>
+                      <a:r>
+                        <a:rPr sz="1875" b="0">
+                          <a:solidFill>
+                            <a:srgbClr val="172C3D"/>
+                          </a:solidFill>
+                          <a:latin typeface="PingFang SC"/>
+                          <a:ea typeface="PingFang SC"/>
+                          <a:cs typeface="PingFang SC"/>
+                        </a:rPr>
+                        <a:t>0</a:t>
+                      </a:r>
+                    </a:p>
+                  </a:txBody>
+                  <a:tcPr marL="91440" marR="91440" marT="45720" marB="45720">
+                    <a:solidFill>
+                      <a:srgbClr val="FFFFFF"/>
+                    </a:solidFill>
+                  </a:tcPr>
+                </a:tc>
+                <a:tc>
+                  <a:txBody>
+                    <a:bodyPr/>
+                    <a:lstStyle/>
+                    <a:p>
+                      <a:r>
+                        <a:rPr sz="1875" b="0">
+                          <a:solidFill>
+                            <a:srgbClr val="172C3D"/>
+                          </a:solidFill>
+                          <a:latin typeface="PingFang SC"/>
+                          <a:ea typeface="PingFang SC"/>
+                          <a:cs typeface="PingFang SC"/>
+                        </a:rPr>
+                        <a:t>8</a:t>
+                      </a:r>
+                    </a:p>
+                  </a:txBody>
+                  <a:tcPr marL="91440" marR="91440" marT="45720" marB="45720">
+                    <a:solidFill>
+                      <a:srgbClr val="FFFFFF"/>
+                    </a:solidFill>
+                  </a:tcPr>
+                </a:tc>
+              </a:tr>
+              <a:tr h="571500">
+                <a:tc>
+                  <a:txBody>
+                    <a:bodyPr/>
+                    <a:lstStyle/>
+                    <a:p>
+                      <a:r>
+                        <a:rPr sz="1875" b="0">
+                          <a:solidFill>
+                            <a:srgbClr val="172C3D"/>
+                          </a:solidFill>
+                          <a:latin typeface="PingFang SC"/>
+                          <a:ea typeface="PingFang SC"/>
+                          <a:cs typeface="PingFang SC"/>
+                        </a:rPr>
+                        <a:t>64 token</a:t>
+                      </a:r>
+                    </a:p>
+                  </a:txBody>
+                  <a:tcPr marL="91440" marR="91440" marT="45720" marB="45720">
+                    <a:solidFill>
+                      <a:srgbClr val="F6F8FA"/>
+                    </a:solidFill>
+                  </a:tcPr>
+                </a:tc>
+                <a:tc>
+                  <a:txBody>
+                    <a:bodyPr/>
+                    <a:lstStyle/>
+                    <a:p>
+                      <a:r>
+                        <a:rPr sz="1875" b="0">
+                          <a:solidFill>
+                            <a:srgbClr val="172C3D"/>
+                          </a:solidFill>
+                          <a:latin typeface="PingFang SC"/>
+                          <a:ea typeface="PingFang SC"/>
+                          <a:cs typeface="PingFang SC"/>
+                        </a:rPr>
+                        <a:t>0</a:t>
+                      </a:r>
+                    </a:p>
+                  </a:txBody>
+                  <a:tcPr marL="91440" marR="91440" marT="45720" marB="45720">
+                    <a:solidFill>
+                      <a:srgbClr val="F6F8FA"/>
+                    </a:solidFill>
+                  </a:tcPr>
+                </a:tc>
+                <a:tc>
+                  <a:txBody>
+                    <a:bodyPr/>
+                    <a:lstStyle/>
+                    <a:p>
+                      <a:r>
+                        <a:rPr sz="1875" b="0">
+                          <a:solidFill>
+                            <a:srgbClr val="172C3D"/>
+                          </a:solidFill>
+                          <a:latin typeface="PingFang SC"/>
+                          <a:ea typeface="PingFang SC"/>
+                          <a:cs typeface="PingFang SC"/>
+                        </a:rPr>
+                        <a:t>0</a:t>
+                      </a:r>
+                    </a:p>
+                  </a:txBody>
+                  <a:tcPr marL="91440" marR="91440" marT="45720" marB="45720">
+                    <a:solidFill>
+                      <a:srgbClr val="F6F8FA"/>
+                    </a:solidFill>
+                  </a:tcPr>
+                </a:tc>
+                <a:tc>
+                  <a:txBody>
+                    <a:bodyPr/>
+                    <a:lstStyle/>
+                    <a:p>
+                      <a:r>
+                        <a:rPr sz="1875" b="0">
+                          <a:solidFill>
+                            <a:srgbClr val="172C3D"/>
+                          </a:solidFill>
+                          <a:latin typeface="PingFang SC"/>
+                          <a:ea typeface="PingFang SC"/>
+                          <a:cs typeface="PingFang SC"/>
+                        </a:rPr>
+                        <a:t>0</a:t>
+                      </a:r>
+                    </a:p>
+                  </a:txBody>
+                  <a:tcPr marL="91440" marR="91440" marT="45720" marB="45720">
+                    <a:solidFill>
+                      <a:srgbClr val="F6F8FA"/>
+                    </a:solidFill>
+                  </a:tcPr>
+                </a:tc>
+              </a:tr>
+            </a:tbl>
+          </a:graphicData>
+        </a:graphic>
+      </p:graphicFrame>
+      <p:sp>
+        <p:nvSpPr>
+          <p:cNvPr id="4" name="">
+            <a:extLst xmlns:a="http://schemas.openxmlformats.org/drawingml/2006/main">
+              <a:ext uri="{FF2B5EF4-FFF2-40B4-BE49-F238E27FC236}">
+                <a16:creationId xmlns:a16="http://schemas.microsoft.com/office/drawing/2014/main" id="{937B829C-1310-4144-B0ED-63C1F40F45BA}"/>
+              </a:ext>
+            </a:extLst>
+          </p:cNvPr>
+          <p:cNvSpPr>
+            <a:spLocks xmlns:a="http://schemas.openxmlformats.org/drawingml/2006/main" noGrp="1"/>
+          </p:cNvSpPr>
+          <p:nvPr/>
+        </p:nvSpPr>
+        <p:spPr>
+          <a:xfrm xmlns:a="http://schemas.openxmlformats.org/drawingml/2006/main">
+            <a:off x="742950" y="4810125"/>
+            <a:ext cx="10668000" cy="523875"/>
+          </a:xfrm>
+          <a:prstGeom xmlns:a="http://schemas.openxmlformats.org/drawingml/2006/main" prst="rect">
+            <a:avLst/>
+          </a:prstGeom>
+          <a:noFill xmlns:a="http://schemas.openxmlformats.org/drawingml/2006/main"/>
+          <a:ln xmlns:a="http://schemas.openxmlformats.org/drawingml/2006/main" w="0">
+            <a:noFill/>
+          </a:ln>
+        </p:spPr>
+        <p:txBody>
+          <a:bodyPr xmlns:a="http://schemas.openxmlformats.org/drawingml/2006/main">
+            <a:noAutofit/>
+          </a:bodyPr>
+          <a:lstStyle xmlns:a="http://schemas.openxmlformats.org/drawingml/2006/main"/>
+          <a:p xmlns:a="http://schemas.openxmlformats.org/drawingml/2006/main">
+            <a:pPr>
+              <a:defRPr sz="1950" b="0">
+                <a:solidFill>
+                  <a:srgbClr val="172C3D"/>
+                </a:solidFill>
+                <a:latin typeface="PingFang SC"/>
+                <a:ea typeface="PingFang SC"/>
+                <a:cs typeface="PingFang SC"/>
+              </a:defRPr>
+            </a:pPr>
+            <a:r>
+              <a:rPr sz="1950" b="0">
+                <a:solidFill>
+                  <a:srgbClr val="172C3D"/>
+                </a:solidFill>
+                <a:latin typeface="PingFang SC"/>
+                <a:ea typeface="PingFang SC"/>
+                <a:cs typeface="PingFang SC"/>
+              </a:rPr>
+              <a:t>16 条同时到达，物理容量 32 token，表中为完成请求数。</a:t>
+            </a:r>
+          </a:p>
+        </p:txBody>
+      </p:sp>
+      <p:sp>
+        <p:nvSpPr>
+          <p:cNvPr id="5" name="">
+            <a:extLst xmlns:a="http://schemas.openxmlformats.org/drawingml/2006/main">
+              <a:ext uri="{FF2B5EF4-FFF2-40B4-BE49-F238E27FC236}">
+                <a16:creationId xmlns:a16="http://schemas.microsoft.com/office/drawing/2014/main" id="{F136CFC7-C7B0-4BF4-BBDD-FA9A4D2A6ED1}"/>
+              </a:ext>
+            </a:extLst>
+          </p:cNvPr>
+          <p:cNvSpPr>
+            <a:spLocks xmlns:a="http://schemas.openxmlformats.org/drawingml/2006/main" noGrp="1"/>
+          </p:cNvSpPr>
+          <p:nvPr/>
+        </p:nvSpPr>
+        <p:spPr>
+          <a:xfrm xmlns:a="http://schemas.openxmlformats.org/drawingml/2006/main">
+            <a:off x="742950" y="5429250"/>
+            <a:ext cx="10668000" cy="523875"/>
+          </a:xfrm>
+          <a:prstGeom xmlns:a="http://schemas.openxmlformats.org/drawingml/2006/main" prst="rect">
+            <a:avLst/>
+          </a:prstGeom>
+          <a:noFill xmlns:a="http://schemas.openxmlformats.org/drawingml/2006/main"/>
+          <a:ln xmlns:a="http://schemas.openxmlformats.org/drawingml/2006/main" w="0">
+            <a:noFill/>
+          </a:ln>
+        </p:spPr>
+        <p:txBody>
+          <a:bodyPr xmlns:a="http://schemas.openxmlformats.org/drawingml/2006/main">
+            <a:noAutofit/>
+          </a:bodyPr>
+          <a:lstStyle xmlns:a="http://schemas.openxmlformats.org/drawingml/2006/main"/>
+          <a:p xmlns:a="http://schemas.openxmlformats.org/drawingml/2006/main">
+            <a:pPr>
+              <a:defRPr sz="1950" b="0">
+                <a:solidFill>
+                  <a:srgbClr val="172C3D"/>
+                </a:solidFill>
+                <a:latin typeface="PingFang SC"/>
+                <a:ea typeface="PingFang SC"/>
+                <a:cs typeface="PingFang SC"/>
+              </a:defRPr>
+            </a:pPr>
+            <a:r>
+              <a:rPr sz="1950" b="0">
+                <a:solidFill>
+                  <a:srgbClr val="172C3D"/>
+                </a:solidFill>
+                <a:latin typeface="PingFang SC"/>
+                <a:ea typeface="PingFang SC"/>
+                <a:cs typeface="PingFang SC"/>
+              </a:rPr>
+              <a:t>单次 Attention 必须容纳完整 KV，64-token 请求无法完成。</a:t>
+            </a:r>
+          </a:p>
+        </p:txBody>
+      </p:sp>
+      <p:sp>
+        <p:nvSpPr>
+          <p:cNvPr id="6" name="">
+            <a:extLst xmlns:a="http://schemas.openxmlformats.org/drawingml/2006/main">
+              <a:ext uri="{FF2B5EF4-FFF2-40B4-BE49-F238E27FC236}">
+                <a16:creationId xmlns:a16="http://schemas.microsoft.com/office/drawing/2014/main" id="{09EBAFE0-FD91-4B8B-AF1C-DDE1D03CCC79}"/>
+              </a:ext>
+            </a:extLst>
+          </p:cNvPr>
+          <p:cNvSpPr>
+            <a:spLocks xmlns:a="http://schemas.openxmlformats.org/drawingml/2006/main" noGrp="1"/>
+          </p:cNvSpPr>
+          <p:nvPr/>
+        </p:nvSpPr>
+        <p:spPr>
+          <a:xfrm xmlns:a="http://schemas.openxmlformats.org/drawingml/2006/main">
+            <a:off x="742950" y="6000750"/>
+            <a:ext cx="10668000" cy="428625"/>
+          </a:xfrm>
+          <a:prstGeom xmlns:a="http://schemas.openxmlformats.org/drawingml/2006/main" prst="rect">
+            <a:avLst/>
+          </a:prstGeom>
+          <a:noFill xmlns:a="http://schemas.openxmlformats.org/drawingml/2006/main"/>
+          <a:ln xmlns:a="http://schemas.openxmlformats.org/drawingml/2006/main" w="0">
+            <a:noFill/>
+          </a:ln>
+        </p:spPr>
+        <p:txBody>
+          <a:bodyPr xmlns:a="http://schemas.openxmlformats.org/drawingml/2006/main">
+            <a:noAutofit/>
+          </a:bodyPr>
+          <a:lstStyle xmlns:a="http://schemas.openxmlformats.org/drawingml/2006/main"/>
+          <a:p xmlns:a="http://schemas.openxmlformats.org/drawingml/2006/main">
+            <a:pPr>
+              <a:defRPr sz="1800" b="0">
+                <a:solidFill>
+                  <a:srgbClr val="172C3D"/>
+                </a:solidFill>
+                <a:latin typeface="PingFang SC"/>
+                <a:ea typeface="PingFang SC"/>
+                <a:cs typeface="PingFang SC"/>
+              </a:defRPr>
+            </a:pPr>
+            <a:r>
+              <a:rPr sz="1800" b="0">
+                <a:solidFill>
+                  <a:srgbClr val="172C3D"/>
+                </a:solidFill>
+                <a:latin typeface="PingFang SC"/>
+                <a:ea typeface="PingFang SC"/>
+                <a:cs typeface="PingFang SC"/>
+              </a:rPr>
+              <a:t>失败立即结束请求，结果也受准入策略影响。</a:t>
+            </a:r>
+          </a:p>
+        </p:txBody>
+      </p:sp>
+    </p:spTree>
+    <p:extLst>
+      <p:ext uri="{BB962C8B-B14F-4D97-AF65-F5344CB8AC3E}">
+        <p14:creationId xmlns:p14="http://schemas.microsoft.com/office/powerpoint/2010/main" val="460930071"/>
+      </p:ext>
+    </p:extLst>
+  </p:cSld>
+</p:sld>
+</file>
+
+<file path=ppt/slides/slide12.xml><?xml version="1.0" encoding="utf-8"?>
+<p:sld xmlns:p="http://schemas.openxmlformats.org/presentationml/2006/main">
+  <p:cSld>
+    <p:bg>
+      <p:bgPr>
+        <a:solidFill xmlns:a="http://schemas.openxmlformats.org/drawingml/2006/main">
+          <a:srgbClr val="FFFFFF"/>
+        </a:solidFill>
+      </p:bgPr>
+    </p:bg>
+    <p:spTree>
+      <p:nvGrpSpPr>
+        <p:cNvPr id="1" name=""/>
+        <p:cNvGrpSpPr/>
+        <p:nvPr/>
+      </p:nvGrpSpPr>
+      <p:grpSpPr>
+        <a:xfrm xmlns:a="http://schemas.openxmlformats.org/drawingml/2006/main"/>
+      </p:grpSpPr>
+      <p:sp>
+        <p:nvSpPr>
+          <p:cNvPr id="6" name="">
+            <a:extLst xmlns:a="http://schemas.openxmlformats.org/drawingml/2006/main">
+              <a:ext uri="{FF2B5EF4-FFF2-40B4-BE49-F238E27FC236}">
+                <a16:creationId xmlns:a16="http://schemas.microsoft.com/office/drawing/2014/main" id="{54CA6D6C-F593-45AE-81FA-1513D0BDF270}"/>
+              </a:ext>
+            </a:extLst>
+          </p:cNvPr>
+          <p:cNvSpPr>
+            <a:spLocks xmlns:a="http://schemas.openxmlformats.org/drawingml/2006/main" noGrp="1"/>
+          </p:cNvSpPr>
+          <p:nvPr/>
+        </p:nvSpPr>
+        <p:spPr>
+          <a:xfrm xmlns:a="http://schemas.openxmlformats.org/drawingml/2006/main">
+            <a:off x="619125" y="409575"/>
+            <a:ext cx="10953750" cy="809625"/>
+          </a:xfrm>
+          <a:prstGeom xmlns:a="http://schemas.openxmlformats.org/drawingml/2006/main" prst="rect">
+            <a:avLst/>
+          </a:prstGeom>
+          <a:noFill xmlns:a="http://schemas.openxmlformats.org/drawingml/2006/main"/>
+          <a:ln xmlns:a="http://schemas.openxmlformats.org/drawingml/2006/main" w="0">
+            <a:noFill/>
+          </a:ln>
+        </p:spPr>
+        <p:txBody>
+          <a:bodyPr xmlns:a="http://schemas.openxmlformats.org/drawingml/2006/main">
+            <a:noAutofit/>
+          </a:bodyPr>
+          <a:lstStyle xmlns:a="http://schemas.openxmlformats.org/drawingml/2006/main"/>
+          <a:p xmlns:a="http://schemas.openxmlformats.org/drawingml/2006/main">
+            <a:pPr>
+              <a:defRPr sz="3300" b="1">
+                <a:solidFill>
+                  <a:srgbClr val="172C3D"/>
+                </a:solidFill>
+                <a:latin typeface="PingFang SC"/>
+                <a:ea typeface="PingFang SC"/>
+                <a:cs typeface="PingFang SC"/>
+              </a:defRPr>
+            </a:pPr>
+            <a:r>
+              <a:rPr sz="3300" b="1">
+                <a:solidFill>
+                  <a:srgbClr val="172C3D"/>
+                </a:solidFill>
+                <a:latin typeface="PingFang SC"/>
+                <a:ea typeface="PingFang SC"/>
+                <a:cs typeface="PingFang SC"/>
+              </a:rPr>
+              <a:t>测试与 GPU 验证进度</a:t>
+            </a:r>
+          </a:p>
+        </p:txBody>
+      </p:sp>
+      <p:sp>
+        <p:nvSpPr>
+          <p:cNvPr id="2" name="">
+            <a:extLst xmlns:a="http://schemas.openxmlformats.org/drawingml/2006/main">
+              <a:ext uri="{FF2B5EF4-FFF2-40B4-BE49-F238E27FC236}">
+                <a16:creationId xmlns:a16="http://schemas.microsoft.com/office/drawing/2014/main" id="{9127D3A8-DCF5-49E9-885C-C447857CE0BA}"/>
+              </a:ext>
+            </a:extLst>
+          </p:cNvPr>
+          <p:cNvSpPr>
+            <a:spLocks xmlns:a="http://schemas.openxmlformats.org/drawingml/2006/main" noGrp="1"/>
+          </p:cNvSpPr>
+          <p:nvPr/>
+        </p:nvSpPr>
+        <p:spPr>
+          <a:xfrm xmlns:a="http://schemas.openxmlformats.org/drawingml/2006/main">
+            <a:off x="11239500" y="6400800"/>
+            <a:ext cx="476250" cy="266700"/>
+          </a:xfrm>
+          <a:prstGeom xmlns:a="http://schemas.openxmlformats.org/drawingml/2006/main" prst="rect">
+            <a:avLst/>
+          </a:prstGeom>
+          <a:noFill xmlns:a="http://schemas.openxmlformats.org/drawingml/2006/main"/>
+          <a:ln xmlns:a="http://schemas.openxmlformats.org/drawingml/2006/main" w="0">
+            <a:noFill/>
+          </a:ln>
+        </p:spPr>
+        <p:txBody>
+          <a:bodyPr xmlns:a="http://schemas.openxmlformats.org/drawingml/2006/main">
+            <a:noAutofit/>
+          </a:bodyPr>
+          <a:lstStyle xmlns:a="http://schemas.openxmlformats.org/drawingml/2006/main"/>
+          <a:p xmlns:a="http://schemas.openxmlformats.org/drawingml/2006/main">
+            <a:pPr>
+              <a:defRPr sz="1350" b="0">
+                <a:solidFill>
+                  <a:srgbClr val="8290A0"/>
+                </a:solidFill>
+                <a:latin typeface="PingFang SC"/>
+                <a:ea typeface="PingFang SC"/>
+                <a:cs typeface="PingFang SC"/>
+              </a:defRPr>
+            </a:pPr>
+            <a:r>
+              <a:rPr sz="1350" b="0">
+                <a:solidFill>
+                  <a:srgbClr val="8290A0"/>
+                </a:solidFill>
+                <a:latin typeface="PingFang SC"/>
+                <a:ea typeface="PingFang SC"/>
+                <a:cs typeface="PingFang SC"/>
+              </a:rPr>
+              <a:t>12</a:t>
+            </a:r>
+          </a:p>
+        </p:txBody>
+      </p:sp>
+      <p:graphicFrame>
+        <p:nvGraphicFramePr>
+          <p:cNvPr id="8" name=""/>
+          <p:cNvGraphicFramePr/>
+          <p:nvPr/>
+        </p:nvGraphicFramePr>
+        <p:xfrm>
+          <a:off xmlns:a="http://schemas.openxmlformats.org/drawingml/2006/main" x="714375" y="1762125"/>
+          <a:ext xmlns:a="http://schemas.openxmlformats.org/drawingml/2006/main" cx="10763250" cy="2571750"/>
+        </p:xfrm>
+        <a:graphic xmlns:a="http://schemas.openxmlformats.org/drawingml/2006/main">
+          <a:graphicData uri="http://schemas.openxmlformats.org/drawingml/2006/table">
+            <a:tbl>
+              <a:tblPr/>
+              <a:tblGrid>
+                <a:gridCol w="3714750"/>
+                <a:gridCol w="4572000"/>
+                <a:gridCol w="2476500"/>
+              </a:tblGrid>
+              <a:tr h="642938">
+                <a:tc>
+                  <a:txBody>
+                    <a:bodyPr/>
+                    <a:lstStyle/>
+                    <a:p>
+                      <a:r>
+                        <a:rPr sz="1875" b="1">
+                          <a:solidFill>
+                            <a:srgbClr val="172C3D"/>
+                          </a:solidFill>
+                          <a:latin typeface="PingFang SC"/>
+                          <a:ea typeface="PingFang SC"/>
+                          <a:cs typeface="PingFang SC"/>
+                        </a:rPr>
+                        <a:t>环境</a:t>
+                      </a:r>
+                    </a:p>
+                  </a:txBody>
+                  <a:tcPr marL="91440" marR="91440" marT="45720" marB="45720">
+                    <a:solidFill>
+                      <a:srgbClr val="E7EEF4"/>
+                    </a:solidFill>
+                  </a:tcPr>
+                </a:tc>
+                <a:tc>
+                  <a:txBody>
+                    <a:bodyPr/>
+                    <a:lstStyle/>
+                    <a:p>
+                      <a:r>
+                        <a:rPr sz="1875" b="1">
+                          <a:solidFill>
+                            <a:srgbClr val="172C3D"/>
+                          </a:solidFill>
+                          <a:latin typeface="PingFang SC"/>
+                          <a:ea typeface="PingFang SC"/>
+                          <a:cs typeface="PingFang SC"/>
+                        </a:rPr>
+                        <a:t>测试结果</a:t>
+                      </a:r>
+                    </a:p>
+                  </a:txBody>
+                  <a:tcPr marL="91440" marR="91440" marT="45720" marB="45720">
+                    <a:solidFill>
+                      <a:srgbClr val="E7EEF4"/>
+                    </a:solidFill>
+                  </a:tcPr>
+                </a:tc>
+                <a:tc>
+                  <a:txBody>
+                    <a:bodyPr/>
+                    <a:lstStyle/>
+                    <a:p>
+                      <a:r>
+                        <a:rPr sz="1875" b="1">
+                          <a:solidFill>
+                            <a:srgbClr val="172C3D"/>
+                          </a:solidFill>
+                          <a:latin typeface="PingFang SC"/>
+                          <a:ea typeface="PingFang SC"/>
+                          <a:cs typeface="PingFang SC"/>
+                        </a:rPr>
+                        <a:t>行覆盖率</a:t>
+                      </a:r>
+                    </a:p>
+                  </a:txBody>
+                  <a:tcPr marL="91440" marR="91440" marT="45720" marB="45720">
+                    <a:solidFill>
+                      <a:srgbClr val="E7EEF4"/>
+                    </a:solidFill>
+                  </a:tcPr>
+                </a:tc>
+              </a:tr>
+              <a:tr h="642938">
+                <a:tc>
+                  <a:txBody>
+                    <a:bodyPr/>
+                    <a:lstStyle/>
+                    <a:p>
+                      <a:r>
+                        <a:rPr sz="1875" b="0">
+                          <a:solidFill>
+                            <a:srgbClr val="172C3D"/>
+                          </a:solidFill>
+                          <a:latin typeface="PingFang SC"/>
+                          <a:ea typeface="PingFang SC"/>
+                          <a:cs typeface="PingFang SC"/>
+                        </a:rPr>
+                        <a:t>纯 CPU</a:t>
+                      </a:r>
+                    </a:p>
+                  </a:txBody>
+                  <a:tcPr marL="91440" marR="91440" marT="45720" marB="45720">
+                    <a:solidFill>
+                      <a:srgbClr val="FFFFFF"/>
+                    </a:solidFill>
+                  </a:tcPr>
+                </a:tc>
+                <a:tc>
+                  <a:txBody>
+                    <a:bodyPr/>
+                    <a:lstStyle/>
+                    <a:p>
+                      <a:r>
+                        <a:rPr sz="1875" b="0">
+                          <a:solidFill>
+                            <a:srgbClr val="172C3D"/>
+                          </a:solidFill>
+                          <a:latin typeface="PingFang SC"/>
+                          <a:ea typeface="PingFang SC"/>
+                          <a:cs typeface="PingFang SC"/>
+                        </a:rPr>
+                        <a:t>32 通过，3 跳过</a:t>
+                      </a:r>
+                    </a:p>
+                  </a:txBody>
+                  <a:tcPr marL="91440" marR="91440" marT="45720" marB="45720">
+                    <a:solidFill>
+                      <a:srgbClr val="FFFFFF"/>
+                    </a:solidFill>
+                  </a:tcPr>
+                </a:tc>
+                <a:tc>
+                  <a:txBody>
+                    <a:bodyPr/>
+                    <a:lstStyle/>
+                    <a:p>
+                      <a:r>
+                        <a:rPr sz="1875" b="0">
+                          <a:solidFill>
+                            <a:srgbClr val="172C3D"/>
+                          </a:solidFill>
+                          <a:latin typeface="PingFang SC"/>
+                          <a:ea typeface="PingFang SC"/>
+                          <a:cs typeface="PingFang SC"/>
+                        </a:rPr>
+                        <a:t>81.98%</a:t>
+                      </a:r>
+                    </a:p>
+                  </a:txBody>
+                  <a:tcPr marL="91440" marR="91440" marT="45720" marB="45720">
+                    <a:solidFill>
+                      <a:srgbClr val="FFFFFF"/>
+                    </a:solidFill>
+                  </a:tcPr>
+                </a:tc>
+              </a:tr>
+              <a:tr h="642938">
+                <a:tc>
+                  <a:txBody>
+                    <a:bodyPr/>
+                    <a:lstStyle/>
+                    <a:p>
+                      <a:r>
+                        <a:rPr sz="1875" b="0">
+                          <a:solidFill>
+                            <a:srgbClr val="172C3D"/>
+                          </a:solidFill>
+                          <a:latin typeface="PingFang SC"/>
+                          <a:ea typeface="PingFang SC"/>
+                          <a:cs typeface="PingFang SC"/>
+                        </a:rPr>
+                        <a:t>CPU 与 PyTorch</a:t>
+                      </a:r>
+                    </a:p>
+                  </a:txBody>
+                  <a:tcPr marL="91440" marR="91440" marT="45720" marB="45720">
+                    <a:solidFill>
+                      <a:srgbClr val="F6F8FA"/>
+                    </a:solidFill>
+                  </a:tcPr>
+                </a:tc>
+                <a:tc>
+                  <a:txBody>
+                    <a:bodyPr/>
+                    <a:lstStyle/>
+                    <a:p>
+                      <a:r>
+                        <a:rPr sz="1875" b="0">
+                          <a:solidFill>
+                            <a:srgbClr val="172C3D"/>
+                          </a:solidFill>
+                          <a:latin typeface="PingFang SC"/>
+                          <a:ea typeface="PingFang SC"/>
+                          <a:cs typeface="PingFang SC"/>
+                        </a:rPr>
+                        <a:t>35 通过，0 跳过</a:t>
+                      </a:r>
+                    </a:p>
+                  </a:txBody>
+                  <a:tcPr marL="91440" marR="91440" marT="45720" marB="45720">
+                    <a:solidFill>
+                      <a:srgbClr val="F6F8FA"/>
+                    </a:solidFill>
+                  </a:tcPr>
+                </a:tc>
+                <a:tc>
+                  <a:txBody>
+                    <a:bodyPr/>
+                    <a:lstStyle/>
+                    <a:p>
+                      <a:r>
+                        <a:rPr sz="1875" b="0">
+                          <a:solidFill>
+                            <a:srgbClr val="172C3D"/>
+                          </a:solidFill>
+                          <a:latin typeface="PingFang SC"/>
+                          <a:ea typeface="PingFang SC"/>
+                          <a:cs typeface="PingFang SC"/>
+                        </a:rPr>
+                        <a:t>93.64%</a:t>
+                      </a:r>
+                    </a:p>
+                  </a:txBody>
+                  <a:tcPr marL="91440" marR="91440" marT="45720" marB="45720">
+                    <a:solidFill>
+                      <a:srgbClr val="F6F8FA"/>
+                    </a:solidFill>
+                  </a:tcPr>
+                </a:tc>
+              </a:tr>
+              <a:tr h="642938">
+                <a:tc>
+                  <a:txBody>
+                    <a:bodyPr/>
+                    <a:lstStyle/>
+                    <a:p>
+                      <a:r>
+                        <a:rPr sz="1875" b="0">
+                          <a:solidFill>
+                            <a:srgbClr val="172C3D"/>
+                          </a:solidFill>
+                          <a:latin typeface="PingFang SC"/>
+                          <a:ea typeface="PingFang SC"/>
+                          <a:cs typeface="PingFang SC"/>
+                        </a:rPr>
+                        <a:t>CUDA 与 Qwen3</a:t>
+                      </a:r>
+                    </a:p>
+                  </a:txBody>
+                  <a:tcPr marL="91440" marR="91440" marT="45720" marB="45720">
+                    <a:solidFill>
+                      <a:srgbClr val="FFFFFF"/>
+                    </a:solidFill>
+                  </a:tcPr>
+                </a:tc>
+                <a:tc>
+                  <a:txBody>
+                    <a:bodyPr/>
+                    <a:lstStyle/>
+                    <a:p>
+                      <a:r>
+                        <a:rPr sz="1875" b="0">
+                          <a:solidFill>
+                            <a:srgbClr val="172C3D"/>
+                          </a:solidFill>
+                          <a:latin typeface="PingFang SC"/>
+                          <a:ea typeface="PingFang SC"/>
+                          <a:cs typeface="PingFang SC"/>
+                        </a:rPr>
+                        <a:t>待 RTX 4060 Laptop 实测</a:t>
+                      </a:r>
+                    </a:p>
+                  </a:txBody>
+                  <a:tcPr marL="91440" marR="91440" marT="45720" marB="45720">
+                    <a:solidFill>
+                      <a:srgbClr val="FFFFFF"/>
+                    </a:solidFill>
+                  </a:tcPr>
+                </a:tc>
+                <a:tc>
+                  <a:txBody>
+                    <a:bodyPr/>
+                    <a:lstStyle/>
+                    <a:p>
+                      <a:r>
+                        <a:rPr sz="1875" b="0">
+                          <a:solidFill>
+                            <a:srgbClr val="172C3D"/>
+                          </a:solidFill>
+                          <a:latin typeface="PingFang SC"/>
+                          <a:ea typeface="PingFang SC"/>
+                          <a:cs typeface="PingFang SC"/>
+                        </a:rPr>
+                        <a:t>待测</a:t>
+                      </a:r>
+                    </a:p>
+                  </a:txBody>
+                  <a:tcPr marL="91440" marR="91440" marT="45720" marB="45720">
+                    <a:solidFill>
+                      <a:srgbClr val="FFFFFF"/>
+                    </a:solidFill>
+                  </a:tcPr>
+                </a:tc>
+              </a:tr>
+            </a:tbl>
+          </a:graphicData>
+        </a:graphic>
+      </p:graphicFrame>
+      <p:sp>
+        <p:nvSpPr>
+          <p:cNvPr id="4" name="">
+            <a:extLst xmlns:a="http://schemas.openxmlformats.org/drawingml/2006/main">
+              <a:ext uri="{FF2B5EF4-FFF2-40B4-BE49-F238E27FC236}">
+                <a16:creationId xmlns:a16="http://schemas.microsoft.com/office/drawing/2014/main" id="{140363CB-2095-49E3-B75B-10FE9072920E}"/>
+              </a:ext>
+            </a:extLst>
+          </p:cNvPr>
+          <p:cNvSpPr>
+            <a:spLocks xmlns:a="http://schemas.openxmlformats.org/drawingml/2006/main" noGrp="1"/>
+          </p:cNvSpPr>
+          <p:nvPr/>
+        </p:nvSpPr>
+        <p:spPr>
+          <a:xfrm xmlns:a="http://schemas.openxmlformats.org/drawingml/2006/main">
+            <a:off x="742950" y="4762500"/>
+            <a:ext cx="10668000" cy="523875"/>
+          </a:xfrm>
+          <a:prstGeom xmlns:a="http://schemas.openxmlformats.org/drawingml/2006/main" prst="rect">
+            <a:avLst/>
+          </a:prstGeom>
+          <a:noFill xmlns:a="http://schemas.openxmlformats.org/drawingml/2006/main"/>
+          <a:ln xmlns:a="http://schemas.openxmlformats.org/drawingml/2006/main" w="0">
+            <a:noFill/>
+          </a:ln>
+        </p:spPr>
+        <p:txBody>
+          <a:bodyPr xmlns:a="http://schemas.openxmlformats.org/drawingml/2006/main">
+            <a:noAutofit/>
+          </a:bodyPr>
+          <a:lstStyle xmlns:a="http://schemas.openxmlformats.org/drawingml/2006/main"/>
+          <a:p xmlns:a="http://schemas.openxmlformats.org/drawingml/2006/main">
+            <a:pPr>
+              <a:defRPr sz="1950" b="0">
+                <a:solidFill>
+                  <a:srgbClr val="172C3D"/>
+                </a:solidFill>
+                <a:latin typeface="PingFang SC"/>
+                <a:ea typeface="PingFang SC"/>
+                <a:cs typeface="PingFang SC"/>
+              </a:defRPr>
+            </a:pPr>
+            <a:r>
+              <a:rPr sz="1950" b="0">
+                <a:solidFill>
+                  <a:srgbClr val="172C3D"/>
+                </a:solidFill>
+                <a:latin typeface="PingFang SC"/>
+                <a:ea typeface="PingFang SC"/>
+                <a:cs typeface="PingFang SC"/>
+              </a:rPr>
+              <a:t>覆盖率统计整个 src/memory，包括未执行的 GPU 适配代码。</a:t>
+            </a:r>
+          </a:p>
+        </p:txBody>
+      </p:sp>
+      <p:sp>
+        <p:nvSpPr>
+          <p:cNvPr id="5" name="">
+            <a:extLst xmlns:a="http://schemas.openxmlformats.org/drawingml/2006/main">
+              <a:ext uri="{FF2B5EF4-FFF2-40B4-BE49-F238E27FC236}">
+                <a16:creationId xmlns:a16="http://schemas.microsoft.com/office/drawing/2014/main" id="{EE465C35-F6F2-405F-96FF-E1915079A35F}"/>
+              </a:ext>
+            </a:extLst>
+          </p:cNvPr>
+          <p:cNvSpPr>
+            <a:spLocks xmlns:a="http://schemas.openxmlformats.org/drawingml/2006/main" noGrp="1"/>
+          </p:cNvSpPr>
+          <p:nvPr/>
+        </p:nvSpPr>
+        <p:spPr>
+          <a:xfrm xmlns:a="http://schemas.openxmlformats.org/drawingml/2006/main">
+            <a:off x="742950" y="5524500"/>
+            <a:ext cx="10668000" cy="523875"/>
+          </a:xfrm>
+          <a:prstGeom xmlns:a="http://schemas.openxmlformats.org/drawingml/2006/main" prst="rect">
+            <a:avLst/>
+          </a:prstGeom>
+          <a:noFill xmlns:a="http://schemas.openxmlformats.org/drawingml/2006/main"/>
+          <a:ln xmlns:a="http://schemas.openxmlformats.org/drawingml/2006/main" w="0">
+            <a:noFill/>
+          </a:ln>
+        </p:spPr>
+        <p:txBody>
+          <a:bodyPr xmlns:a="http://schemas.openxmlformats.org/drawingml/2006/main">
+            <a:noAutofit/>
+          </a:bodyPr>
+          <a:lstStyle xmlns:a="http://schemas.openxmlformats.org/drawingml/2006/main"/>
+          <a:p xmlns:a="http://schemas.openxmlformats.org/drawingml/2006/main">
+            <a:pPr>
+              <a:defRPr sz="1950" b="0">
+                <a:solidFill>
+                  <a:srgbClr val="172C3D"/>
+                </a:solidFill>
+                <a:latin typeface="PingFang SC"/>
+                <a:ea typeface="PingFang SC"/>
+                <a:cs typeface="PingFang SC"/>
+              </a:defRPr>
+            </a:pPr>
+            <a:r>
+              <a:rPr sz="1950" b="0">
+                <a:solidFill>
+                  <a:srgbClr val="172C3D"/>
+                </a:solidFill>
+                <a:latin typeface="PingFang SC"/>
+                <a:ea typeface="PingFang SC"/>
+                <a:cs typeface="PingFang SC"/>
+              </a:rPr>
+              <a:t>GPU 验证保留输出 token、峰值显存、换页字节数和耗时。</a:t>
+            </a:r>
+          </a:p>
+        </p:txBody>
+      </p:sp>
+    </p:spTree>
+    <p:extLst>
+      <p:ext uri="{BB962C8B-B14F-4D97-AF65-F5344CB8AC3E}">
+        <p14:creationId xmlns:p14="http://schemas.microsoft.com/office/powerpoint/2010/main" val="1490487933"/>
+      </p:ext>
+    </p:extLst>
+  </p:cSld>
+</p:sld>
+</file>
+
+<file path=ppt/slides/slide13.xml><?xml version="1.0" encoding="utf-8"?>
+<p:sld xmlns:p="http://schemas.openxmlformats.org/presentationml/2006/main">
+  <p:cSld>
+    <p:bg>
+      <p:bgPr>
+        <a:solidFill xmlns:a="http://schemas.openxmlformats.org/drawingml/2006/main">
+          <a:srgbClr val="FFFFFF"/>
+        </a:solidFill>
+      </p:bgPr>
+    </p:bg>
+    <p:spTree>
+      <p:nvGrpSpPr>
+        <p:cNvPr id="1" name=""/>
+        <p:cNvGrpSpPr/>
+        <p:nvPr/>
+      </p:nvGrpSpPr>
+      <p:grpSpPr>
+        <a:xfrm xmlns:a="http://schemas.openxmlformats.org/drawingml/2006/main"/>
+      </p:grpSpPr>
+      <p:sp>
+        <p:nvSpPr>
+          <p:cNvPr id="7" name="">
+            <a:extLst xmlns:a="http://schemas.openxmlformats.org/drawingml/2006/main">
+              <a:ext uri="{FF2B5EF4-FFF2-40B4-BE49-F238E27FC236}">
+                <a16:creationId xmlns:a16="http://schemas.microsoft.com/office/drawing/2014/main" id="{D985B060-09E3-48A6-A118-4111E554426B}"/>
+              </a:ext>
+            </a:extLst>
+          </p:cNvPr>
+          <p:cNvSpPr>
+            <a:spLocks xmlns:a="http://schemas.openxmlformats.org/drawingml/2006/main" noGrp="1"/>
+          </p:cNvSpPr>
+          <p:nvPr/>
+        </p:nvSpPr>
+        <p:spPr>
+          <a:xfrm xmlns:a="http://schemas.openxmlformats.org/drawingml/2006/main">
+            <a:off x="619125" y="409575"/>
+            <a:ext cx="10953750" cy="809625"/>
+          </a:xfrm>
+          <a:prstGeom xmlns:a="http://schemas.openxmlformats.org/drawingml/2006/main" prst="rect">
+            <a:avLst/>
+          </a:prstGeom>
+          <a:noFill xmlns:a="http://schemas.openxmlformats.org/drawingml/2006/main"/>
+          <a:ln xmlns:a="http://schemas.openxmlformats.org/drawingml/2006/main" w="0">
+            <a:noFill/>
+          </a:ln>
+        </p:spPr>
+        <p:txBody>
+          <a:bodyPr xmlns:a="http://schemas.openxmlformats.org/drawingml/2006/main">
+            <a:noAutofit/>
+          </a:bodyPr>
+          <a:lstStyle xmlns:a="http://schemas.openxmlformats.org/drawingml/2006/main"/>
+          <a:p xmlns:a="http://schemas.openxmlformats.org/drawingml/2006/main">
+            <a:pPr>
+              <a:defRPr sz="3300" b="1">
+                <a:solidFill>
+                  <a:srgbClr val="172C3D"/>
+                </a:solidFill>
+                <a:latin typeface="PingFang SC"/>
+                <a:ea typeface="PingFang SC"/>
+                <a:cs typeface="PingFang SC"/>
+              </a:defRPr>
+            </a:pPr>
+            <a:r>
+              <a:rPr sz="3300" b="1">
+                <a:solidFill>
+                  <a:srgbClr val="172C3D"/>
+                </a:solidFill>
+                <a:latin typeface="PingFang SC"/>
+                <a:ea typeface="PingFang SC"/>
+                <a:cs typeface="PingFang SC"/>
+              </a:rPr>
+              <a:t>结论与演示</a:t>
+            </a:r>
+          </a:p>
+        </p:txBody>
+      </p:sp>
+      <p:sp>
+        <p:nvSpPr>
+          <p:cNvPr id="2" name="">
+            <a:extLst xmlns:a="http://schemas.openxmlformats.org/drawingml/2006/main">
+              <a:ext uri="{FF2B5EF4-FFF2-40B4-BE49-F238E27FC236}">
+                <a16:creationId xmlns:a16="http://schemas.microsoft.com/office/drawing/2014/main" id="{86E33BAA-4119-459F-B6DD-E8822F676ACC}"/>
+              </a:ext>
+            </a:extLst>
+          </p:cNvPr>
+          <p:cNvSpPr>
+            <a:spLocks xmlns:a="http://schemas.openxmlformats.org/drawingml/2006/main" noGrp="1"/>
+          </p:cNvSpPr>
+          <p:nvPr/>
+        </p:nvSpPr>
+        <p:spPr>
+          <a:xfrm xmlns:a="http://schemas.openxmlformats.org/drawingml/2006/main">
+            <a:off x="11239500" y="6400800"/>
+            <a:ext cx="476250" cy="266700"/>
+          </a:xfrm>
+          <a:prstGeom xmlns:a="http://schemas.openxmlformats.org/drawingml/2006/main" prst="rect">
+            <a:avLst/>
+          </a:prstGeom>
+          <a:noFill xmlns:a="http://schemas.openxmlformats.org/drawingml/2006/main"/>
+          <a:ln xmlns:a="http://schemas.openxmlformats.org/drawingml/2006/main" w="0">
+            <a:noFill/>
+          </a:ln>
+        </p:spPr>
+        <p:txBody>
+          <a:bodyPr xmlns:a="http://schemas.openxmlformats.org/drawingml/2006/main">
+            <a:noAutofit/>
+          </a:bodyPr>
+          <a:lstStyle xmlns:a="http://schemas.openxmlformats.org/drawingml/2006/main"/>
+          <a:p xmlns:a="http://schemas.openxmlformats.org/drawingml/2006/main">
+            <a:pPr>
+              <a:defRPr sz="1350" b="0">
+                <a:solidFill>
+                  <a:srgbClr val="8290A0"/>
+                </a:solidFill>
+                <a:latin typeface="PingFang SC"/>
+                <a:ea typeface="PingFang SC"/>
+                <a:cs typeface="PingFang SC"/>
+              </a:defRPr>
+            </a:pPr>
+            <a:r>
+              <a:rPr sz="1350" b="0">
+                <a:solidFill>
+                  <a:srgbClr val="8290A0"/>
+                </a:solidFill>
+                <a:latin typeface="PingFang SC"/>
+                <a:ea typeface="PingFang SC"/>
+                <a:cs typeface="PingFang SC"/>
+              </a:rPr>
+              <a:t>13</a:t>
+            </a:r>
+          </a:p>
+        </p:txBody>
+      </p:sp>
+      <p:sp>
+        <p:nvSpPr>
+          <p:cNvPr id="3" name="">
+            <a:extLst xmlns:a="http://schemas.openxmlformats.org/drawingml/2006/main">
+              <a:ext uri="{FF2B5EF4-FFF2-40B4-BE49-F238E27FC236}">
+                <a16:creationId xmlns:a16="http://schemas.microsoft.com/office/drawing/2014/main" id="{5DF6EE31-3227-49C0-9776-058383C893FB}"/>
+              </a:ext>
+            </a:extLst>
+          </p:cNvPr>
+          <p:cNvSpPr>
+            <a:spLocks xmlns:a="http://schemas.openxmlformats.org/drawingml/2006/main" noGrp="1"/>
+          </p:cNvSpPr>
+          <p:nvPr/>
+        </p:nvSpPr>
+        <p:spPr>
+          <a:xfrm xmlns:a="http://schemas.openxmlformats.org/drawingml/2006/main">
+            <a:off x="723900" y="1714500"/>
+            <a:ext cx="10668000" cy="790575"/>
+          </a:xfrm>
+          <a:prstGeom xmlns:a="http://schemas.openxmlformats.org/drawingml/2006/main" prst="rect">
+            <a:avLst/>
+          </a:prstGeom>
+          <a:noFill xmlns:a="http://schemas.openxmlformats.org/drawingml/2006/main"/>
+          <a:ln xmlns:a="http://schemas.openxmlformats.org/drawingml/2006/main" w="0">
+            <a:noFill/>
+          </a:ln>
+        </p:spPr>
+        <p:txBody>
+          <a:bodyPr xmlns:a="http://schemas.openxmlformats.org/drawingml/2006/main">
+            <a:noAutofit/>
+          </a:bodyPr>
+          <a:lstStyle xmlns:a="http://schemas.openxmlformats.org/drawingml/2006/main"/>
+          <a:p xmlns:a="http://schemas.openxmlformats.org/drawingml/2006/main">
+            <a:pPr>
+              <a:defRPr sz="2250" b="0">
+                <a:solidFill>
+                  <a:srgbClr val="172C3D"/>
+                </a:solidFill>
+                <a:latin typeface="PingFang SC"/>
+                <a:ea typeface="PingFang SC"/>
+                <a:cs typeface="PingFang SC"/>
+              </a:defRPr>
+            </a:pPr>
+            <a:r>
+              <a:rPr sz="2250" b="0">
+                <a:solidFill>
+                  <a:srgbClr val="172C3D"/>
+                </a:solidFill>
+                <a:latin typeface="PingFang SC"/>
+                <a:ea typeface="PingFang SC"/>
+                <a:cs typeface="PingFang SC"/>
+              </a:rPr>
+              <a:t>按需分页降低预留浪费，COW 减少公共前缀的重复保存。</a:t>
+            </a:r>
+          </a:p>
+        </p:txBody>
+      </p:sp>
+      <p:sp>
+        <p:nvSpPr>
+          <p:cNvPr id="4" name="">
+            <a:extLst xmlns:a="http://schemas.openxmlformats.org/drawingml/2006/main">
+              <a:ext uri="{FF2B5EF4-FFF2-40B4-BE49-F238E27FC236}">
+                <a16:creationId xmlns:a16="http://schemas.microsoft.com/office/drawing/2014/main" id="{F5A4CE14-50D4-4BB7-85DE-3DD9DE6E4D2F}"/>
+              </a:ext>
+            </a:extLst>
+          </p:cNvPr>
+          <p:cNvSpPr>
+            <a:spLocks xmlns:a="http://schemas.openxmlformats.org/drawingml/2006/main" noGrp="1"/>
+          </p:cNvSpPr>
+          <p:nvPr/>
+        </p:nvSpPr>
+        <p:spPr>
+          <a:xfrm xmlns:a="http://schemas.openxmlformats.org/drawingml/2006/main">
+            <a:off x="723900" y="2667000"/>
+            <a:ext cx="10668000" cy="790575"/>
+          </a:xfrm>
+          <a:prstGeom xmlns:a="http://schemas.openxmlformats.org/drawingml/2006/main" prst="rect">
+            <a:avLst/>
+          </a:prstGeom>
+          <a:noFill xmlns:a="http://schemas.openxmlformats.org/drawingml/2006/main"/>
+          <a:ln xmlns:a="http://schemas.openxmlformats.org/drawingml/2006/main" w="0">
+            <a:noFill/>
+          </a:ln>
+        </p:spPr>
+        <p:txBody>
+          <a:bodyPr xmlns:a="http://schemas.openxmlformats.org/drawingml/2006/main">
+            <a:noAutofit/>
+          </a:bodyPr>
+          <a:lstStyle xmlns:a="http://schemas.openxmlformats.org/drawingml/2006/main"/>
+          <a:p xmlns:a="http://schemas.openxmlformats.org/drawingml/2006/main">
+            <a:pPr>
+              <a:defRPr sz="2250" b="0">
+                <a:solidFill>
+                  <a:srgbClr val="172C3D"/>
+                </a:solidFill>
+                <a:latin typeface="PingFang SC"/>
+                <a:ea typeface="PingFang SC"/>
+                <a:cs typeface="PingFang SC"/>
+              </a:defRPr>
+            </a:pPr>
+            <a:r>
+              <a:rPr sz="2250" b="0">
+                <a:solidFill>
+                  <a:srgbClr val="172C3D"/>
+                </a:solidFill>
+                <a:latin typeface="PingFang SC"/>
+                <a:ea typeface="PingFang SC"/>
+                <a:cs typeface="PingFang SC"/>
+              </a:rPr>
+              <a:t>换页让更多请求完成，吞吐收益还需结合搬运开销实测。</a:t>
+            </a:r>
+          </a:p>
+        </p:txBody>
+      </p:sp>
+      <p:sp>
+        <p:nvSpPr>
+          <p:cNvPr id="5" name="">
+            <a:extLst xmlns:a="http://schemas.openxmlformats.org/drawingml/2006/main">
+              <a:ext uri="{FF2B5EF4-FFF2-40B4-BE49-F238E27FC236}">
+                <a16:creationId xmlns:a16="http://schemas.microsoft.com/office/drawing/2014/main" id="{31E5C7D6-B90B-4FDC-9E5B-1E6F8CFDBE5C}"/>
+              </a:ext>
+            </a:extLst>
+          </p:cNvPr>
+          <p:cNvSpPr>
+            <a:spLocks xmlns:a="http://schemas.openxmlformats.org/drawingml/2006/main" noGrp="1"/>
+          </p:cNvSpPr>
+          <p:nvPr/>
+        </p:nvSpPr>
+        <p:spPr>
+          <a:xfrm xmlns:a="http://schemas.openxmlformats.org/drawingml/2006/main">
+            <a:off x="723900" y="3619500"/>
+            <a:ext cx="10668000" cy="790575"/>
+          </a:xfrm>
+          <a:prstGeom xmlns:a="http://schemas.openxmlformats.org/drawingml/2006/main" prst="rect">
+            <a:avLst/>
+          </a:prstGeom>
+          <a:noFill xmlns:a="http://schemas.openxmlformats.org/drawingml/2006/main"/>
+          <a:ln xmlns:a="http://schemas.openxmlformats.org/drawingml/2006/main" w="0">
+            <a:noFill/>
+          </a:ln>
+        </p:spPr>
+        <p:txBody>
+          <a:bodyPr xmlns:a="http://schemas.openxmlformats.org/drawingml/2006/main">
+            <a:noAutofit/>
+          </a:bodyPr>
+          <a:lstStyle xmlns:a="http://schemas.openxmlformats.org/drawingml/2006/main"/>
+          <a:p xmlns:a="http://schemas.openxmlformats.org/drawingml/2006/main">
+            <a:pPr>
+              <a:defRPr sz="2250" b="0">
+                <a:solidFill>
+                  <a:srgbClr val="172C3D"/>
+                </a:solidFill>
+                <a:latin typeface="PingFang SC"/>
+                <a:ea typeface="PingFang SC"/>
+                <a:cs typeface="PingFang SC"/>
+              </a:defRPr>
+            </a:pPr>
+            <a:r>
+              <a:rPr sz="2250" b="0">
+                <a:solidFill>
+                  <a:srgbClr val="172C3D"/>
+                </a:solidFill>
+                <a:latin typeface="PingFang SC"/>
+                <a:ea typeface="PingFang SC"/>
+                <a:cs typeface="PingFang SC"/>
+              </a:rPr>
+              <a:t>演示：python3 scripts/demo_memory.py</a:t>
+            </a:r>
+          </a:p>
+        </p:txBody>
+      </p:sp>
+      <p:sp>
+        <p:nvSpPr>
+          <p:cNvPr id="6" name="">
+            <a:extLst xmlns:a="http://schemas.openxmlformats.org/drawingml/2006/main">
+              <a:ext uri="{FF2B5EF4-FFF2-40B4-BE49-F238E27FC236}">
+                <a16:creationId xmlns:a16="http://schemas.microsoft.com/office/drawing/2014/main" id="{A3ABC3B9-9FE2-4262-ACA2-A9B024203A04}"/>
+              </a:ext>
+            </a:extLst>
+          </p:cNvPr>
+          <p:cNvSpPr>
+            <a:spLocks xmlns:a="http://schemas.openxmlformats.org/drawingml/2006/main" noGrp="1"/>
+          </p:cNvSpPr>
+          <p:nvPr/>
+        </p:nvSpPr>
+        <p:spPr>
+          <a:xfrm xmlns:a="http://schemas.openxmlformats.org/drawingml/2006/main">
+            <a:off x="723900" y="4572000"/>
+            <a:ext cx="10668000" cy="790575"/>
+          </a:xfrm>
+          <a:prstGeom xmlns:a="http://schemas.openxmlformats.org/drawingml/2006/main" prst="rect">
+            <a:avLst/>
+          </a:prstGeom>
+          <a:noFill xmlns:a="http://schemas.openxmlformats.org/drawingml/2006/main"/>
+          <a:ln xmlns:a="http://schemas.openxmlformats.org/drawingml/2006/main" w="0">
+            <a:noFill/>
+          </a:ln>
+        </p:spPr>
+        <p:txBody>
+          <a:bodyPr xmlns:a="http://schemas.openxmlformats.org/drawingml/2006/main">
+            <a:noAutofit/>
+          </a:bodyPr>
+          <a:lstStyle xmlns:a="http://schemas.openxmlformats.org/drawingml/2006/main"/>
+          <a:p xmlns:a="http://schemas.openxmlformats.org/drawingml/2006/main">
+            <a:pPr>
+              <a:defRPr sz="2250" b="0">
+                <a:solidFill>
+                  <a:srgbClr val="172C3D"/>
+                </a:solidFill>
+                <a:latin typeface="PingFang SC"/>
+                <a:ea typeface="PingFang SC"/>
+                <a:cs typeface="PingFang SC"/>
+              </a:defRPr>
+            </a:pPr>
+            <a:r>
+              <a:rPr sz="2250" b="0">
+                <a:solidFill>
+                  <a:srgbClr val="172C3D"/>
+                </a:solidFill>
+                <a:latin typeface="PingFang SC"/>
+                <a:ea typeface="PingFang SC"/>
+                <a:cs typeface="PingFang SC"/>
+              </a:rPr>
+              <a:t>待补：GPU 实测、实际对话负载和五分钟录屏。</a:t>
+            </a:r>
+          </a:p>
+        </p:txBody>
+      </p:sp>
+    </p:spTree>
+    <p:extLst>
+      <p:ext uri="{BB962C8B-B14F-4D97-AF65-F5344CB8AC3E}">
+        <p14:creationId xmlns:p14="http://schemas.microsoft.com/office/powerpoint/2010/main" val="788924120"/>
       </p:ext>
     </p:extLst>
   </p:cSld>
@@ -2269,10 +5121,10 @@
       </p:grpSpPr>
       <p:sp>
         <p:nvSpPr>
-          <p:cNvPr id="6" name="">
+          <p:cNvPr id="5" name="">
             <a:extLst xmlns:a="http://schemas.openxmlformats.org/drawingml/2006/main">
               <a:ext uri="{FF2B5EF4-FFF2-40B4-BE49-F238E27FC236}">
-                <a16:creationId xmlns:a16="http://schemas.microsoft.com/office/drawing/2014/main" id="{45A9AF88-DB9F-4F1A-A66F-94D1F3EB8E16}"/>
+                <a16:creationId xmlns:a16="http://schemas.microsoft.com/office/drawing/2014/main" id="{74726226-E159-4CEC-998F-2F8A56267750}"/>
               </a:ext>
             </a:extLst>
           </p:cNvPr>
@@ -2283,8 +5135,8 @@
         </p:nvSpPr>
         <p:spPr>
           <a:xfrm xmlns:a="http://schemas.openxmlformats.org/drawingml/2006/main">
-            <a:off x="685800" y="514350"/>
-            <a:ext cx="10820400" cy="904875"/>
+            <a:off x="619125" y="409575"/>
+            <a:ext cx="10953750" cy="809625"/>
           </a:xfrm>
           <a:prstGeom xmlns:a="http://schemas.openxmlformats.org/drawingml/2006/main" prst="rect">
             <a:avLst/>
@@ -2301,9 +5153,9 @@
           <a:lstStyle xmlns:a="http://schemas.openxmlformats.org/drawingml/2006/main"/>
           <a:p xmlns:a="http://schemas.openxmlformats.org/drawingml/2006/main">
             <a:pPr>
-              <a:defRPr sz="3450" b="1">
-                <a:solidFill>
-                  <a:srgbClr val="12283A"/>
+              <a:defRPr sz="3300" b="1">
+                <a:solidFill>
+                  <a:srgbClr val="172C3D"/>
                 </a:solidFill>
                 <a:latin typeface="PingFang SC"/>
                 <a:ea typeface="PingFang SC"/>
@@ -2311,15 +5163,15 @@
               </a:defRPr>
             </a:pPr>
             <a:r>
-              <a:rPr sz="3450" b="1">
-                <a:solidFill>
-                  <a:srgbClr val="12283A"/>
+              <a:rPr sz="3300" b="1">
+                <a:solidFill>
+                  <a:srgbClr val="172C3D"/>
                 </a:solidFill>
                 <a:latin typeface="PingFang SC"/>
                 <a:ea typeface="PingFang SC"/>
                 <a:cs typeface="PingFang SC"/>
               </a:rPr>
-              <a:t>课程问题与验收范围</a:t>
+              <a:t>操作系统概念如何落到 KV Cache</a:t>
             </a:r>
           </a:p>
         </p:txBody>
@@ -2329,7 +5181,7 @@
           <p:cNvPr id="2" name="">
             <a:extLst xmlns:a="http://schemas.openxmlformats.org/drawingml/2006/main">
               <a:ext uri="{FF2B5EF4-FFF2-40B4-BE49-F238E27FC236}">
-                <a16:creationId xmlns:a16="http://schemas.microsoft.com/office/drawing/2014/main" id="{A67A0C9B-401C-4FCB-829A-3713D92A8E24}"/>
+                <a16:creationId xmlns:a16="http://schemas.microsoft.com/office/drawing/2014/main" id="{B4F77BA4-6A19-4A82-B83F-CA1DE9B5A6CB}"/>
               </a:ext>
             </a:extLst>
           </p:cNvPr>
@@ -2340,8 +5192,8 @@
         </p:nvSpPr>
         <p:spPr>
           <a:xfrm xmlns:a="http://schemas.openxmlformats.org/drawingml/2006/main">
-            <a:off x="762000" y="1762125"/>
-            <a:ext cx="10668000" cy="876300"/>
+            <a:off x="11239500" y="6400800"/>
+            <a:ext cx="476250" cy="266700"/>
           </a:xfrm>
           <a:prstGeom xmlns:a="http://schemas.openxmlformats.org/drawingml/2006/main" prst="rect">
             <a:avLst/>
@@ -2358,9 +5210,9 @@
           <a:lstStyle xmlns:a="http://schemas.openxmlformats.org/drawingml/2006/main"/>
           <a:p xmlns:a="http://schemas.openxmlformats.org/drawingml/2006/main">
             <a:pPr>
-              <a:defRPr sz="2250" b="0">
-                <a:solidFill>
-                  <a:srgbClr val="263748"/>
+              <a:defRPr sz="1350" b="0">
+                <a:solidFill>
+                  <a:srgbClr val="8290A0"/>
                 </a:solidFill>
                 <a:latin typeface="PingFang SC"/>
                 <a:ea typeface="PingFang SC"/>
@@ -2368,25 +5220,347 @@
               </a:defRPr>
             </a:pPr>
             <a:r>
-              <a:rPr sz="2250" b="0">
-                <a:solidFill>
-                  <a:srgbClr val="263748"/>
+              <a:rPr sz="1350" b="0">
+                <a:solidFill>
+                  <a:srgbClr val="8290A0"/>
                 </a:solidFill>
                 <a:latin typeface="PingFang SC"/>
                 <a:ea typeface="PingFang SC"/>
                 <a:cs typeface="PingFang SC"/>
               </a:rPr>
-              <a:t>变长生成让 KV 空间需求持续增长，预留最大长度会浪费空间。</a:t>
+              <a:t>02</a:t>
             </a:r>
           </a:p>
         </p:txBody>
       </p:sp>
-      <p:sp>
-        <p:nvSpPr>
-          <p:cNvPr id="3" name="">
+      <p:graphicFrame>
+        <p:nvGraphicFramePr>
+          <p:cNvPr id="7" name=""/>
+          <p:cNvGraphicFramePr/>
+          <p:nvPr/>
+        </p:nvGraphicFramePr>
+        <p:xfrm>
+          <a:off xmlns:a="http://schemas.openxmlformats.org/drawingml/2006/main" x="714375" y="1571625"/>
+          <a:ext xmlns:a="http://schemas.openxmlformats.org/drawingml/2006/main" cx="10763250" cy="3952875"/>
+        </p:xfrm>
+        <a:graphic xmlns:a="http://schemas.openxmlformats.org/drawingml/2006/main">
+          <a:graphicData uri="http://schemas.openxmlformats.org/drawingml/2006/table">
+            <a:tbl>
+              <a:tblPr/>
+              <a:tblGrid>
+                <a:gridCol w="3333750"/>
+                <a:gridCol w="7429500"/>
+              </a:tblGrid>
+              <a:tr h="658813">
+                <a:tc>
+                  <a:txBody>
+                    <a:bodyPr/>
+                    <a:lstStyle/>
+                    <a:p>
+                      <a:r>
+                        <a:rPr sz="1875" b="1">
+                          <a:solidFill>
+                            <a:srgbClr val="172C3D"/>
+                          </a:solidFill>
+                          <a:latin typeface="PingFang SC"/>
+                          <a:ea typeface="PingFang SC"/>
+                          <a:cs typeface="PingFang SC"/>
+                        </a:rPr>
+                        <a:t>OS 概念</a:t>
+                      </a:r>
+                    </a:p>
+                  </a:txBody>
+                  <a:tcPr marL="91440" marR="91440" marT="45720" marB="45720">
+                    <a:solidFill>
+                      <a:srgbClr val="E7EEF4"/>
+                    </a:solidFill>
+                  </a:tcPr>
+                </a:tc>
+                <a:tc>
+                  <a:txBody>
+                    <a:bodyPr/>
+                    <a:lstStyle/>
+                    <a:p>
+                      <a:r>
+                        <a:rPr sz="1875" b="1">
+                          <a:solidFill>
+                            <a:srgbClr val="172C3D"/>
+                          </a:solidFill>
+                          <a:latin typeface="PingFang SC"/>
+                          <a:ea typeface="PingFang SC"/>
+                          <a:cs typeface="PingFang SC"/>
+                        </a:rPr>
+                        <a:t>项目中的实现</a:t>
+                      </a:r>
+                    </a:p>
+                  </a:txBody>
+                  <a:tcPr marL="91440" marR="91440" marT="45720" marB="45720">
+                    <a:solidFill>
+                      <a:srgbClr val="E7EEF4"/>
+                    </a:solidFill>
+                  </a:tcPr>
+                </a:tc>
+              </a:tr>
+              <a:tr h="658813">
+                <a:tc>
+                  <a:txBody>
+                    <a:bodyPr/>
+                    <a:lstStyle/>
+                    <a:p>
+                      <a:r>
+                        <a:rPr sz="1875" b="0">
+                          <a:solidFill>
+                            <a:srgbClr val="172C3D"/>
+                          </a:solidFill>
+                          <a:latin typeface="PingFang SC"/>
+                          <a:ea typeface="PingFang SC"/>
+                          <a:cs typeface="PingFang SC"/>
+                        </a:rPr>
+                        <a:t>虚拟地址与页表</a:t>
+                      </a:r>
+                    </a:p>
+                  </a:txBody>
+                  <a:tcPr marL="91440" marR="91440" marT="45720" marB="45720">
+                    <a:solidFill>
+                      <a:srgbClr val="FFFFFF"/>
+                    </a:solidFill>
+                  </a:tcPr>
+                </a:tc>
+                <a:tc>
+                  <a:txBody>
+                    <a:bodyPr/>
+                    <a:lstStyle/>
+                    <a:p>
+                      <a:r>
+                        <a:rPr sz="1875" b="0">
+                          <a:solidFill>
+                            <a:srgbClr val="172C3D"/>
+                          </a:solidFill>
+                          <a:latin typeface="PingFang SC"/>
+                          <a:ea typeface="PingFang SC"/>
+                          <a:cs typeface="PingFang SC"/>
+                        </a:rPr>
+                        <a:t>token 下标经序列页表映射到物理块</a:t>
+                      </a:r>
+                    </a:p>
+                  </a:txBody>
+                  <a:tcPr marL="91440" marR="91440" marT="45720" marB="45720">
+                    <a:solidFill>
+                      <a:srgbClr val="FFFFFF"/>
+                    </a:solidFill>
+                  </a:tcPr>
+                </a:tc>
+              </a:tr>
+              <a:tr h="658813">
+                <a:tc>
+                  <a:txBody>
+                    <a:bodyPr/>
+                    <a:lstStyle/>
+                    <a:p>
+                      <a:r>
+                        <a:rPr sz="1875" b="0">
+                          <a:solidFill>
+                            <a:srgbClr val="172C3D"/>
+                          </a:solidFill>
+                          <a:latin typeface="PingFang SC"/>
+                          <a:ea typeface="PingFang SC"/>
+                          <a:cs typeface="PingFang SC"/>
+                        </a:rPr>
+                        <a:t>按需分配</a:t>
+                      </a:r>
+                    </a:p>
+                  </a:txBody>
+                  <a:tcPr marL="91440" marR="91440" marT="45720" marB="45720">
+                    <a:solidFill>
+                      <a:srgbClr val="F6F8FA"/>
+                    </a:solidFill>
+                  </a:tcPr>
+                </a:tc>
+                <a:tc>
+                  <a:txBody>
+                    <a:bodyPr/>
+                    <a:lstStyle/>
+                    <a:p>
+                      <a:r>
+                        <a:rPr sz="1875" b="0">
+                          <a:solidFill>
+                            <a:srgbClr val="172C3D"/>
+                          </a:solidFill>
+                          <a:latin typeface="PingFang SC"/>
+                          <a:ea typeface="PingFang SC"/>
+                          <a:cs typeface="PingFang SC"/>
+                        </a:rPr>
+                        <a:t>生成推进时扩页，尾页不足一整页也可使用</a:t>
+                      </a:r>
+                    </a:p>
+                  </a:txBody>
+                  <a:tcPr marL="91440" marR="91440" marT="45720" marB="45720">
+                    <a:solidFill>
+                      <a:srgbClr val="F6F8FA"/>
+                    </a:solidFill>
+                  </a:tcPr>
+                </a:tc>
+              </a:tr>
+              <a:tr h="658813">
+                <a:tc>
+                  <a:txBody>
+                    <a:bodyPr/>
+                    <a:lstStyle/>
+                    <a:p>
+                      <a:r>
+                        <a:rPr sz="1875" b="0">
+                          <a:solidFill>
+                            <a:srgbClr val="172C3D"/>
+                          </a:solidFill>
+                          <a:latin typeface="PingFang SC"/>
+                          <a:ea typeface="PingFang SC"/>
+                          <a:cs typeface="PingFang SC"/>
+                        </a:rPr>
+                        <a:t>fork 与 COW</a:t>
+                      </a:r>
+                    </a:p>
+                  </a:txBody>
+                  <a:tcPr marL="91440" marR="91440" marT="45720" marB="45720">
+                    <a:solidFill>
+                      <a:srgbClr val="FFFFFF"/>
+                    </a:solidFill>
+                  </a:tcPr>
+                </a:tc>
+                <a:tc>
+                  <a:txBody>
+                    <a:bodyPr/>
+                    <a:lstStyle/>
+                    <a:p>
+                      <a:r>
+                        <a:rPr sz="1875" b="0">
+                          <a:solidFill>
+                            <a:srgbClr val="172C3D"/>
+                          </a:solidFill>
+                          <a:latin typeface="PingFang SC"/>
+                          <a:ea typeface="PingFang SC"/>
+                          <a:cs typeface="PingFang SC"/>
+                        </a:rPr>
+                        <a:t>共享前缀，修改共享页时复制</a:t>
+                      </a:r>
+                    </a:p>
+                  </a:txBody>
+                  <a:tcPr marL="91440" marR="91440" marT="45720" marB="45720">
+                    <a:solidFill>
+                      <a:srgbClr val="FFFFFF"/>
+                    </a:solidFill>
+                  </a:tcPr>
+                </a:tc>
+              </a:tr>
+              <a:tr h="658813">
+                <a:tc>
+                  <a:txBody>
+                    <a:bodyPr/>
+                    <a:lstStyle/>
+                    <a:p>
+                      <a:r>
+                        <a:rPr sz="1875" b="0">
+                          <a:solidFill>
+                            <a:srgbClr val="172C3D"/>
+                          </a:solidFill>
+                          <a:latin typeface="PingFang SC"/>
+                          <a:ea typeface="PingFang SC"/>
+                          <a:cs typeface="PingFang SC"/>
+                        </a:rPr>
+                        <a:t>页面置换</a:t>
+                      </a:r>
+                    </a:p>
+                  </a:txBody>
+                  <a:tcPr marL="91440" marR="91440" marT="45720" marB="45720">
+                    <a:solidFill>
+                      <a:srgbClr val="F6F8FA"/>
+                    </a:solidFill>
+                  </a:tcPr>
+                </a:tc>
+                <a:tc>
+                  <a:txBody>
+                    <a:bodyPr/>
+                    <a:lstStyle/>
+                    <a:p>
+                      <a:r>
+                        <a:rPr sz="1875" b="0">
+                          <a:solidFill>
+                            <a:srgbClr val="172C3D"/>
+                          </a:solidFill>
+                          <a:latin typeface="PingFang SC"/>
+                          <a:ea typeface="PingFang SC"/>
+                          <a:cs typeface="PingFang SC"/>
+                        </a:rPr>
+                        <a:t>LRU 选择未固定页，换出到有界主机池</a:t>
+                      </a:r>
+                    </a:p>
+                  </a:txBody>
+                  <a:tcPr marL="91440" marR="91440" marT="45720" marB="45720">
+                    <a:solidFill>
+                      <a:srgbClr val="F6F8FA"/>
+                    </a:solidFill>
+                  </a:tcPr>
+                </a:tc>
+              </a:tr>
+              <a:tr h="658813">
+                <a:tc>
+                  <a:txBody>
+                    <a:bodyPr/>
+                    <a:lstStyle/>
+                    <a:p>
+                      <a:r>
+                        <a:rPr sz="1875" b="0">
+                          <a:solidFill>
+                            <a:srgbClr val="172C3D"/>
+                          </a:solidFill>
+                          <a:latin typeface="PingFang SC"/>
+                          <a:ea typeface="PingFang SC"/>
+                          <a:cs typeface="PingFang SC"/>
+                        </a:rPr>
+                        <a:t>页固定</a:t>
+                      </a:r>
+                    </a:p>
+                  </a:txBody>
+                  <a:tcPr marL="91440" marR="91440" marT="45720" marB="45720">
+                    <a:solidFill>
+                      <a:srgbClr val="FFFFFF"/>
+                    </a:solidFill>
+                  </a:tcPr>
+                </a:tc>
+                <a:tc>
+                  <a:txBody>
+                    <a:bodyPr/>
+                    <a:lstStyle/>
+                    <a:p>
+                      <a:r>
+                        <a:rPr sz="1875" b="0">
+                          <a:solidFill>
+                            <a:srgbClr val="172C3D"/>
+                          </a:solidFill>
+                          <a:latin typeface="PingFang SC"/>
+                          <a:ea typeface="PingFang SC"/>
+                          <a:cs typeface="PingFang SC"/>
+                        </a:rPr>
+                        <a:t>前向期间保持完整 KV 工作集驻留</a:t>
+                      </a:r>
+                    </a:p>
+                  </a:txBody>
+                  <a:tcPr marL="91440" marR="91440" marT="45720" marB="45720">
+                    <a:solidFill>
+                      <a:srgbClr val="FFFFFF"/>
+                    </a:solidFill>
+                  </a:tcPr>
+                </a:tc>
+              </a:tr>
+            </a:tbl>
+          </a:graphicData>
+        </a:graphic>
+      </p:graphicFrame>
+      <p:sp>
+        <p:nvSpPr>
+          <p:cNvPr id="4" name="">
             <a:extLst xmlns:a="http://schemas.openxmlformats.org/drawingml/2006/main">
               <a:ext uri="{FF2B5EF4-FFF2-40B4-BE49-F238E27FC236}">
-                <a16:creationId xmlns:a16="http://schemas.microsoft.com/office/drawing/2014/main" id="{4589FD39-717F-458F-9F6C-4E57F2CE97E7}"/>
+                <a16:creationId xmlns:a16="http://schemas.microsoft.com/office/drawing/2014/main" id="{0A1BEE95-365C-4C9A-8565-CE7625B34DEE}"/>
               </a:ext>
             </a:extLst>
           </p:cNvPr>
@@ -2397,8 +5571,8 @@
         </p:nvSpPr>
         <p:spPr>
           <a:xfrm xmlns:a="http://schemas.openxmlformats.org/drawingml/2006/main">
-            <a:off x="762000" y="2771775"/>
-            <a:ext cx="10668000" cy="876300"/>
+            <a:off x="742950" y="5829300"/>
+            <a:ext cx="10668000" cy="495300"/>
           </a:xfrm>
           <a:prstGeom xmlns:a="http://schemas.openxmlformats.org/drawingml/2006/main" prst="rect">
             <a:avLst/>
@@ -2415,9 +5589,9 @@
           <a:lstStyle xmlns:a="http://schemas.openxmlformats.org/drawingml/2006/main"/>
           <a:p xmlns:a="http://schemas.openxmlformats.org/drawingml/2006/main">
             <a:pPr>
-              <a:defRPr sz="2250" b="0">
-                <a:solidFill>
-                  <a:srgbClr val="263748"/>
+              <a:defRPr sz="1875" b="0">
+                <a:solidFill>
+                  <a:srgbClr val="172C3D"/>
                 </a:solidFill>
                 <a:latin typeface="PingFang SC"/>
                 <a:ea typeface="PingFang SC"/>
@@ -2425,129 +5599,15 @@
               </a:defRPr>
             </a:pPr>
             <a:r>
-              <a:rPr sz="2250" b="0">
-                <a:solidFill>
-                  <a:srgbClr val="263748"/>
+              <a:rPr sz="1875" b="0">
+                <a:solidFill>
+                  <a:srgbClr val="172C3D"/>
                 </a:solidFill>
                 <a:latin typeface="PingFang SC"/>
                 <a:ea typeface="PingFang SC"/>
                 <a:cs typeface="PingFang SC"/>
               </a:rPr>
-              <a:t>分页把逻辑 token 地址映射到离散物理块，按实际进度扩展。</a:t>
-            </a:r>
-          </a:p>
-        </p:txBody>
-      </p:sp>
-      <p:sp>
-        <p:nvSpPr>
-          <p:cNvPr id="4" name="">
-            <a:extLst xmlns:a="http://schemas.openxmlformats.org/drawingml/2006/main">
-              <a:ext uri="{FF2B5EF4-FFF2-40B4-BE49-F238E27FC236}">
-                <a16:creationId xmlns:a16="http://schemas.microsoft.com/office/drawing/2014/main" id="{EB702938-96DB-4F33-B382-8E9D0CD6016F}"/>
-              </a:ext>
-            </a:extLst>
-          </p:cNvPr>
-          <p:cNvSpPr>
-            <a:spLocks xmlns:a="http://schemas.openxmlformats.org/drawingml/2006/main" noGrp="1"/>
-          </p:cNvSpPr>
-          <p:nvPr/>
-        </p:nvSpPr>
-        <p:spPr>
-          <a:xfrm xmlns:a="http://schemas.openxmlformats.org/drawingml/2006/main">
-            <a:off x="762000" y="3781425"/>
-            <a:ext cx="10668000" cy="876300"/>
-          </a:xfrm>
-          <a:prstGeom xmlns:a="http://schemas.openxmlformats.org/drawingml/2006/main" prst="rect">
-            <a:avLst/>
-          </a:prstGeom>
-          <a:noFill xmlns:a="http://schemas.openxmlformats.org/drawingml/2006/main"/>
-          <a:ln xmlns:a="http://schemas.openxmlformats.org/drawingml/2006/main" w="0">
-            <a:noFill/>
-          </a:ln>
-        </p:spPr>
-        <p:txBody>
-          <a:bodyPr xmlns:a="http://schemas.openxmlformats.org/drawingml/2006/main">
-            <a:noAutofit/>
-          </a:bodyPr>
-          <a:lstStyle xmlns:a="http://schemas.openxmlformats.org/drawingml/2006/main"/>
-          <a:p xmlns:a="http://schemas.openxmlformats.org/drawingml/2006/main">
-            <a:pPr>
-              <a:defRPr sz="2250" b="0">
-                <a:solidFill>
-                  <a:srgbClr val="263748"/>
-                </a:solidFill>
-                <a:latin typeface="PingFang SC"/>
-                <a:ea typeface="PingFang SC"/>
-                <a:cs typeface="PingFang SC"/>
-              </a:defRPr>
-            </a:pPr>
-            <a:r>
-              <a:rPr sz="2250" b="0">
-                <a:solidFill>
-                  <a:srgbClr val="263748"/>
-                </a:solidFill>
-                <a:latin typeface="PingFang SC"/>
-                <a:ea typeface="PingFang SC"/>
-                <a:cs typeface="PingFang SC"/>
-              </a:rPr>
-              <a:t>公共前缀通过共享与写时复制减少重复保存。</a:t>
-            </a:r>
-          </a:p>
-        </p:txBody>
-      </p:sp>
-      <p:sp>
-        <p:nvSpPr>
-          <p:cNvPr id="5" name="">
-            <a:extLst xmlns:a="http://schemas.openxmlformats.org/drawingml/2006/main">
-              <a:ext uri="{FF2B5EF4-FFF2-40B4-BE49-F238E27FC236}">
-                <a16:creationId xmlns:a16="http://schemas.microsoft.com/office/drawing/2014/main" id="{AC56E957-1A46-478A-BABA-2C59135560DB}"/>
-              </a:ext>
-            </a:extLst>
-          </p:cNvPr>
-          <p:cNvSpPr>
-            <a:spLocks xmlns:a="http://schemas.openxmlformats.org/drawingml/2006/main" noGrp="1"/>
-          </p:cNvSpPr>
-          <p:nvPr/>
-        </p:nvSpPr>
-        <p:spPr>
-          <a:xfrm xmlns:a="http://schemas.openxmlformats.org/drawingml/2006/main">
-            <a:off x="762000" y="4791075"/>
-            <a:ext cx="10668000" cy="876300"/>
-          </a:xfrm>
-          <a:prstGeom xmlns:a="http://schemas.openxmlformats.org/drawingml/2006/main" prst="rect">
-            <a:avLst/>
-          </a:prstGeom>
-          <a:noFill xmlns:a="http://schemas.openxmlformats.org/drawingml/2006/main"/>
-          <a:ln xmlns:a="http://schemas.openxmlformats.org/drawingml/2006/main" w="0">
-            <a:noFill/>
-          </a:ln>
-        </p:spPr>
-        <p:txBody>
-          <a:bodyPr xmlns:a="http://schemas.openxmlformats.org/drawingml/2006/main">
-            <a:noAutofit/>
-          </a:bodyPr>
-          <a:lstStyle xmlns:a="http://schemas.openxmlformats.org/drawingml/2006/main"/>
-          <a:p xmlns:a="http://schemas.openxmlformats.org/drawingml/2006/main">
-            <a:pPr>
-              <a:defRPr sz="2250" b="0">
-                <a:solidFill>
-                  <a:srgbClr val="263748"/>
-                </a:solidFill>
-                <a:latin typeface="PingFang SC"/>
-                <a:ea typeface="PingFang SC"/>
-                <a:cs typeface="PingFang SC"/>
-              </a:defRPr>
-            </a:pPr>
-            <a:r>
-              <a:rPr sz="2250" b="0">
-                <a:solidFill>
-                  <a:srgbClr val="263748"/>
-                </a:solidFill>
-                <a:latin typeface="PingFang SC"/>
-                <a:ea typeface="PingFang SC"/>
-                <a:cs typeface="PingFang SC"/>
-              </a:rPr>
-              <a:t>显存压力下将可换出的页保存到主机，访问前恢复工作集。</a:t>
+              <a:t>空闲块采用队列管理，当前未实现多级页表或伙伴合并。</a:t>
             </a:r>
           </a:p>
         </p:txBody>
@@ -2555,7 +5615,7 @@
     </p:spTree>
     <p:extLst>
       <p:ext uri="{BB962C8B-B14F-4D97-AF65-F5344CB8AC3E}">
-        <p14:creationId xmlns:p14="http://schemas.microsoft.com/office/powerpoint/2010/main" val="953369204"/>
+        <p14:creationId xmlns:p14="http://schemas.microsoft.com/office/powerpoint/2010/main" val="762948588"/>
       </p:ext>
     </p:extLst>
   </p:cSld>
@@ -2583,10 +5643,10 @@
       </p:grpSpPr>
       <p:sp>
         <p:nvSpPr>
-          <p:cNvPr id="6" name="">
+          <p:cNvPr id="15" name="">
             <a:extLst xmlns:a="http://schemas.openxmlformats.org/drawingml/2006/main">
               <a:ext uri="{FF2B5EF4-FFF2-40B4-BE49-F238E27FC236}">
-                <a16:creationId xmlns:a16="http://schemas.microsoft.com/office/drawing/2014/main" id="{5820A182-D29B-4412-B980-2A1937559CF4}"/>
+                <a16:creationId xmlns:a16="http://schemas.microsoft.com/office/drawing/2014/main" id="{40744E68-EC54-4056-B86D-6D002E33F1CD}"/>
               </a:ext>
             </a:extLst>
           </p:cNvPr>
@@ -2597,8 +5657,8 @@
         </p:nvSpPr>
         <p:spPr>
           <a:xfrm xmlns:a="http://schemas.openxmlformats.org/drawingml/2006/main">
-            <a:off x="685800" y="514350"/>
-            <a:ext cx="10820400" cy="904875"/>
+            <a:off x="619125" y="409575"/>
+            <a:ext cx="10953750" cy="809625"/>
           </a:xfrm>
           <a:prstGeom xmlns:a="http://schemas.openxmlformats.org/drawingml/2006/main" prst="rect">
             <a:avLst/>
@@ -2615,9 +5675,9 @@
           <a:lstStyle xmlns:a="http://schemas.openxmlformats.org/drawingml/2006/main"/>
           <a:p xmlns:a="http://schemas.openxmlformats.org/drawingml/2006/main">
             <a:pPr>
-              <a:defRPr sz="3450" b="1">
-                <a:solidFill>
-                  <a:srgbClr val="12283A"/>
+              <a:defRPr sz="3300" b="1">
+                <a:solidFill>
+                  <a:srgbClr val="172C3D"/>
                 </a:solidFill>
                 <a:latin typeface="PingFang SC"/>
                 <a:ea typeface="PingFang SC"/>
@@ -2625,15 +5685,15 @@
               </a:defRPr>
             </a:pPr>
             <a:r>
-              <a:rPr sz="3450" b="1">
-                <a:solidFill>
-                  <a:srgbClr val="12283A"/>
+              <a:rPr sz="3300" b="1">
+                <a:solidFill>
+                  <a:srgbClr val="172C3D"/>
                 </a:solidFill>
                 <a:latin typeface="PingFang SC"/>
                 <a:ea typeface="PingFang SC"/>
                 <a:cs typeface="PingFang SC"/>
               </a:rPr>
-              <a:t>管理逻辑与存储后端</a:t>
+              <a:t>模块结构</a:t>
             </a:r>
           </a:p>
         </p:txBody>
@@ -2643,7 +5703,7 @@
           <p:cNvPr id="2" name="">
             <a:extLst xmlns:a="http://schemas.openxmlformats.org/drawingml/2006/main">
               <a:ext uri="{FF2B5EF4-FFF2-40B4-BE49-F238E27FC236}">
-                <a16:creationId xmlns:a16="http://schemas.microsoft.com/office/drawing/2014/main" id="{4AA297C0-2731-4606-8C5B-0078CA8B395B}"/>
+                <a16:creationId xmlns:a16="http://schemas.microsoft.com/office/drawing/2014/main" id="{81C3D1C1-E73F-4DF5-86C7-FAF0CAF7596D}"/>
               </a:ext>
             </a:extLst>
           </p:cNvPr>
@@ -2654,8 +5714,8 @@
         </p:nvSpPr>
         <p:spPr>
           <a:xfrm xmlns:a="http://schemas.openxmlformats.org/drawingml/2006/main">
-            <a:off x="762000" y="1762125"/>
-            <a:ext cx="10668000" cy="876300"/>
+            <a:off x="11239500" y="6400800"/>
+            <a:ext cx="476250" cy="266700"/>
           </a:xfrm>
           <a:prstGeom xmlns:a="http://schemas.openxmlformats.org/drawingml/2006/main" prst="rect">
             <a:avLst/>
@@ -2672,9 +5732,9 @@
           <a:lstStyle xmlns:a="http://schemas.openxmlformats.org/drawingml/2006/main"/>
           <a:p xmlns:a="http://schemas.openxmlformats.org/drawingml/2006/main">
             <a:pPr>
-              <a:defRPr sz="2250" b="0">
-                <a:solidFill>
-                  <a:srgbClr val="263748"/>
+              <a:defRPr sz="1350" b="0">
+                <a:solidFill>
+                  <a:srgbClr val="8290A0"/>
                 </a:solidFill>
                 <a:latin typeface="PingFang SC"/>
                 <a:ea typeface="PingFang SC"/>
@@ -2682,15 +5742,15 @@
               </a:defRPr>
             </a:pPr>
             <a:r>
-              <a:rPr sz="2250" b="0">
-                <a:solidFill>
-                  <a:srgbClr val="263748"/>
+              <a:rPr sz="1350" b="0">
+                <a:solidFill>
+                  <a:srgbClr val="8290A0"/>
                 </a:solidFill>
                 <a:latin typeface="PingFang SC"/>
                 <a:ea typeface="PingFang SC"/>
                 <a:cs typeface="PingFang SC"/>
               </a:rPr>
-              <a:t>PagedMemory：页表、引用计数、COW、驻留状态与 LRU。</a:t>
+              <a:t>03</a:t>
             </a:r>
           </a:p>
         </p:txBody>
@@ -2700,7 +5760,7 @@
           <p:cNvPr id="3" name="">
             <a:extLst xmlns:a="http://schemas.openxmlformats.org/drawingml/2006/main">
               <a:ext uri="{FF2B5EF4-FFF2-40B4-BE49-F238E27FC236}">
-                <a16:creationId xmlns:a16="http://schemas.microsoft.com/office/drawing/2014/main" id="{25F60745-D866-40DB-BAC3-83D2092C8DCB}"/>
+                <a16:creationId xmlns:a16="http://schemas.microsoft.com/office/drawing/2014/main" id="{CEDBE434-E858-4D14-8DD8-A794C418F23F}"/>
               </a:ext>
             </a:extLst>
           </p:cNvPr>
@@ -2711,27 +5771,31 @@
         </p:nvSpPr>
         <p:spPr>
           <a:xfrm xmlns:a="http://schemas.openxmlformats.org/drawingml/2006/main">
-            <a:off x="762000" y="2771775"/>
-            <a:ext cx="10668000" cy="876300"/>
-          </a:xfrm>
-          <a:prstGeom xmlns:a="http://schemas.openxmlformats.org/drawingml/2006/main" prst="rect">
-            <a:avLst/>
-          </a:prstGeom>
-          <a:noFill xmlns:a="http://schemas.openxmlformats.org/drawingml/2006/main"/>
-          <a:ln xmlns:a="http://schemas.openxmlformats.org/drawingml/2006/main" w="0">
-            <a:noFill/>
+            <a:off x="736283" y="1744980"/>
+            <a:ext cx="2551748" cy="787908"/>
+          </a:xfrm>
+          <a:prstGeom xmlns:a="http://schemas.openxmlformats.org/drawingml/2006/main" prst="rect">
+            <a:avLst/>
+          </a:prstGeom>
+          <a:solidFill xmlns:a="http://schemas.openxmlformats.org/drawingml/2006/main">
+            <a:srgbClr val="F1F5F8"/>
+          </a:solidFill>
+          <a:ln xmlns:a="http://schemas.openxmlformats.org/drawingml/2006/main" w="14288">
+            <a:solidFill>
+              <a:srgbClr val="9AAFC0"/>
+            </a:solidFill>
           </a:ln>
         </p:spPr>
         <p:txBody>
-          <a:bodyPr xmlns:a="http://schemas.openxmlformats.org/drawingml/2006/main">
+          <a:bodyPr xmlns:a="http://schemas.openxmlformats.org/drawingml/2006/main" anchor="ctr">
             <a:noAutofit/>
           </a:bodyPr>
           <a:lstStyle xmlns:a="http://schemas.openxmlformats.org/drawingml/2006/main"/>
           <a:p xmlns:a="http://schemas.openxmlformats.org/drawingml/2006/main">
-            <a:pPr>
-              <a:defRPr sz="2250" b="0">
-                <a:solidFill>
-                  <a:srgbClr val="263748"/>
+            <a:pPr algn="ctr">
+              <a:defRPr sz="1904">
+                <a:solidFill>
+                  <a:srgbClr val="172C3D"/>
                 </a:solidFill>
                 <a:latin typeface="PingFang SC"/>
                 <a:ea typeface="PingFang SC"/>
@@ -2739,15 +5803,38 @@
               </a:defRPr>
             </a:pPr>
             <a:r>
-              <a:rPr sz="2250" b="0">
-                <a:solidFill>
-                  <a:srgbClr val="263748"/>
+              <a:rPr sz="1904">
+                <a:solidFill>
+                  <a:srgbClr val="172C3D"/>
                 </a:solidFill>
                 <a:latin typeface="PingFang SC"/>
                 <a:ea typeface="PingFang SC"/>
                 <a:cs typeface="PingFang SC"/>
               </a:rPr>
-              <a:t>ListStorage：CPU 页内容模型，便于核对复制和换页。</a:t>
+              <a:t>CPU 仿真</a:t>
+            </a:r>
+          </a:p>
+          <a:p xmlns:a="http://schemas.openxmlformats.org/drawingml/2006/main">
+            <a:pPr algn="ctr">
+              <a:defRPr sz="1904">
+                <a:solidFill>
+                  <a:srgbClr val="172C3D"/>
+                </a:solidFill>
+                <a:latin typeface="PingFang SC"/>
+                <a:ea typeface="PingFang SC"/>
+                <a:cs typeface="PingFang SC"/>
+              </a:defRPr>
+            </a:pPr>
+            <a:r>
+              <a:rPr sz="1904">
+                <a:solidFill>
+                  <a:srgbClr val="172C3D"/>
+                </a:solidFill>
+                <a:latin typeface="PingFang SC"/>
+                <a:ea typeface="PingFang SC"/>
+                <a:cs typeface="PingFang SC"/>
+              </a:rPr>
+              <a:t>simulate.py</a:t>
             </a:r>
           </a:p>
         </p:txBody>
@@ -2757,7 +5844,7 @@
           <p:cNvPr id="4" name="">
             <a:extLst xmlns:a="http://schemas.openxmlformats.org/drawingml/2006/main">
               <a:ext uri="{FF2B5EF4-FFF2-40B4-BE49-F238E27FC236}">
-                <a16:creationId xmlns:a16="http://schemas.microsoft.com/office/drawing/2014/main" id="{901B4628-8046-4460-855E-DD4CD4649DD9}"/>
+                <a16:creationId xmlns:a16="http://schemas.microsoft.com/office/drawing/2014/main" id="{697E1FE7-F5E8-49E9-ACF5-9AA442272750}"/>
               </a:ext>
             </a:extLst>
           </p:cNvPr>
@@ -2768,27 +5855,31 @@
         </p:nvSpPr>
         <p:spPr>
           <a:xfrm xmlns:a="http://schemas.openxmlformats.org/drawingml/2006/main">
-            <a:off x="762000" y="3781425"/>
-            <a:ext cx="10668000" cy="876300"/>
-          </a:xfrm>
-          <a:prstGeom xmlns:a="http://schemas.openxmlformats.org/drawingml/2006/main" prst="rect">
-            <a:avLst/>
-          </a:prstGeom>
-          <a:noFill xmlns:a="http://schemas.openxmlformats.org/drawingml/2006/main"/>
-          <a:ln xmlns:a="http://schemas.openxmlformats.org/drawingml/2006/main" w="0">
-            <a:noFill/>
+            <a:off x="736283" y="3356610"/>
+            <a:ext cx="2551748" cy="787908"/>
+          </a:xfrm>
+          <a:prstGeom xmlns:a="http://schemas.openxmlformats.org/drawingml/2006/main" prst="rect">
+            <a:avLst/>
+          </a:prstGeom>
+          <a:solidFill xmlns:a="http://schemas.openxmlformats.org/drawingml/2006/main">
+            <a:srgbClr val="F1F5F8"/>
+          </a:solidFill>
+          <a:ln xmlns:a="http://schemas.openxmlformats.org/drawingml/2006/main" w="14288">
+            <a:solidFill>
+              <a:srgbClr val="9AAFC0"/>
+            </a:solidFill>
           </a:ln>
         </p:spPr>
         <p:txBody>
-          <a:bodyPr xmlns:a="http://schemas.openxmlformats.org/drawingml/2006/main">
+          <a:bodyPr xmlns:a="http://schemas.openxmlformats.org/drawingml/2006/main" anchor="ctr">
             <a:noAutofit/>
           </a:bodyPr>
           <a:lstStyle xmlns:a="http://schemas.openxmlformats.org/drawingml/2006/main"/>
           <a:p xmlns:a="http://schemas.openxmlformats.org/drawingml/2006/main">
-            <a:pPr>
-              <a:defRPr sz="2250" b="0">
-                <a:solidFill>
-                  <a:srgbClr val="263748"/>
+            <a:pPr algn="ctr">
+              <a:defRPr sz="1904">
+                <a:solidFill>
+                  <a:srgbClr val="172C3D"/>
                 </a:solidFill>
                 <a:latin typeface="PingFang SC"/>
                 <a:ea typeface="PingFang SC"/>
@@ -2796,15 +5887,38 @@
               </a:defRPr>
             </a:pPr>
             <a:r>
-              <a:rPr sz="2250" b="0">
-                <a:solidFill>
-                  <a:srgbClr val="263748"/>
+              <a:rPr sz="1904">
+                <a:solidFill>
+                  <a:srgbClr val="172C3D"/>
                 </a:solidFill>
                 <a:latin typeface="PingFang SC"/>
                 <a:ea typeface="PingFang SC"/>
                 <a:cs typeface="PingFang SC"/>
               </a:rPr>
-              <a:t>TorchStorage：真实 KV 张量、主机页池与数据搬运。</a:t>
+              <a:t>请求运行器</a:t>
+            </a:r>
+          </a:p>
+          <a:p xmlns:a="http://schemas.openxmlformats.org/drawingml/2006/main">
+            <a:pPr algn="ctr">
+              <a:defRPr sz="1904">
+                <a:solidFill>
+                  <a:srgbClr val="172C3D"/>
+                </a:solidFill>
+                <a:latin typeface="PingFang SC"/>
+                <a:ea typeface="PingFang SC"/>
+                <a:cs typeface="PingFang SC"/>
+              </a:defRPr>
+            </a:pPr>
+            <a:r>
+              <a:rPr sz="1904">
+                <a:solidFill>
+                  <a:srgbClr val="172C3D"/>
+                </a:solidFill>
+                <a:latin typeface="PingFang SC"/>
+                <a:ea typeface="PingFang SC"/>
+                <a:cs typeface="PingFang SC"/>
+              </a:rPr>
+              <a:t>MemoryRuntime</a:t>
             </a:r>
           </a:p>
         </p:txBody>
@@ -2814,7 +5928,7 @@
           <p:cNvPr id="5" name="">
             <a:extLst xmlns:a="http://schemas.openxmlformats.org/drawingml/2006/main">
               <a:ext uri="{FF2B5EF4-FFF2-40B4-BE49-F238E27FC236}">
-                <a16:creationId xmlns:a16="http://schemas.microsoft.com/office/drawing/2014/main" id="{3F4DB0D8-C103-496D-9F50-5BBD47246D50}"/>
+                <a16:creationId xmlns:a16="http://schemas.microsoft.com/office/drawing/2014/main" id="{E074CC34-1CCC-4C41-8864-A4875B9E24C1}"/>
               </a:ext>
             </a:extLst>
           </p:cNvPr>
@@ -2825,27 +5939,31 @@
         </p:nvSpPr>
         <p:spPr>
           <a:xfrm xmlns:a="http://schemas.openxmlformats.org/drawingml/2006/main">
-            <a:off x="762000" y="4791075"/>
-            <a:ext cx="10668000" cy="876300"/>
-          </a:xfrm>
-          <a:prstGeom xmlns:a="http://schemas.openxmlformats.org/drawingml/2006/main" prst="rect">
-            <a:avLst/>
-          </a:prstGeom>
-          <a:noFill xmlns:a="http://schemas.openxmlformats.org/drawingml/2006/main"/>
-          <a:ln xmlns:a="http://schemas.openxmlformats.org/drawingml/2006/main" w="0">
-            <a:noFill/>
+            <a:off x="4586288" y="2506028"/>
+            <a:ext cx="2909888" cy="940117"/>
+          </a:xfrm>
+          <a:prstGeom xmlns:a="http://schemas.openxmlformats.org/drawingml/2006/main" prst="rect">
+            <a:avLst/>
+          </a:prstGeom>
+          <a:solidFill xmlns:a="http://schemas.openxmlformats.org/drawingml/2006/main">
+            <a:srgbClr val="F1F5F8"/>
+          </a:solidFill>
+          <a:ln xmlns:a="http://schemas.openxmlformats.org/drawingml/2006/main" w="14288">
+            <a:solidFill>
+              <a:srgbClr val="9AAFC0"/>
+            </a:solidFill>
           </a:ln>
         </p:spPr>
         <p:txBody>
-          <a:bodyPr xmlns:a="http://schemas.openxmlformats.org/drawingml/2006/main">
+          <a:bodyPr xmlns:a="http://schemas.openxmlformats.org/drawingml/2006/main" anchor="ctr">
             <a:noAutofit/>
           </a:bodyPr>
           <a:lstStyle xmlns:a="http://schemas.openxmlformats.org/drawingml/2006/main"/>
           <a:p xmlns:a="http://schemas.openxmlformats.org/drawingml/2006/main">
-            <a:pPr>
-              <a:defRPr sz="2250" b="0">
-                <a:solidFill>
-                  <a:srgbClr val="263748"/>
+            <a:pPr algn="ctr">
+              <a:defRPr sz="1904">
+                <a:solidFill>
+                  <a:srgbClr val="172C3D"/>
                 </a:solidFill>
                 <a:latin typeface="PingFang SC"/>
                 <a:ea typeface="PingFang SC"/>
@@ -2853,23 +5971,460 @@
               </a:defRPr>
             </a:pPr>
             <a:r>
-              <a:rPr sz="2250" b="0">
-                <a:solidFill>
-                  <a:srgbClr val="263748"/>
+              <a:rPr sz="1904">
+                <a:solidFill>
+                  <a:srgbClr val="172C3D"/>
                 </a:solidFill>
                 <a:latin typeface="PingFang SC"/>
                 <a:ea typeface="PingFang SC"/>
                 <a:cs typeface="PingFang SC"/>
               </a:rPr>
-              <a:t>MemoryRuntime：固定轮询请求，Qwen3 回调执行真实前向。</a:t>
+              <a:t>PagedMemory</a:t>
             </a:r>
           </a:p>
+          <a:p xmlns:a="http://schemas.openxmlformats.org/drawingml/2006/main">
+            <a:pPr algn="ctr">
+              <a:defRPr sz="1904">
+                <a:solidFill>
+                  <a:srgbClr val="172C3D"/>
+                </a:solidFill>
+                <a:latin typeface="PingFang SC"/>
+                <a:ea typeface="PingFang SC"/>
+                <a:cs typeface="PingFang SC"/>
+              </a:defRPr>
+            </a:pPr>
+            <a:r>
+              <a:rPr sz="1904">
+                <a:solidFill>
+                  <a:srgbClr val="172C3D"/>
+                </a:solidFill>
+                <a:latin typeface="PingFang SC"/>
+                <a:ea typeface="PingFang SC"/>
+                <a:cs typeface="PingFang SC"/>
+              </a:rPr>
+              <a:t>页表  引用计数  LRU</a:t>
+            </a:r>
+          </a:p>
         </p:txBody>
       </p:sp>
+      <p:sp>
+        <p:nvSpPr>
+          <p:cNvPr id="6" name="">
+            <a:extLst xmlns:a="http://schemas.openxmlformats.org/drawingml/2006/main">
+              <a:ext uri="{FF2B5EF4-FFF2-40B4-BE49-F238E27FC236}">
+                <a16:creationId xmlns:a16="http://schemas.microsoft.com/office/drawing/2014/main" id="{532B4431-946B-4DD8-9D01-B773AD4F54E5}"/>
+              </a:ext>
+            </a:extLst>
+          </p:cNvPr>
+          <p:cNvSpPr>
+            <a:spLocks xmlns:a="http://schemas.openxmlformats.org/drawingml/2006/main" noGrp="1"/>
+          </p:cNvSpPr>
+          <p:nvPr/>
+        </p:nvSpPr>
+        <p:spPr>
+          <a:xfrm xmlns:a="http://schemas.openxmlformats.org/drawingml/2006/main">
+            <a:off x="8839200" y="1744980"/>
+            <a:ext cx="2551748" cy="787908"/>
+          </a:xfrm>
+          <a:prstGeom xmlns:a="http://schemas.openxmlformats.org/drawingml/2006/main" prst="rect">
+            <a:avLst/>
+          </a:prstGeom>
+          <a:solidFill xmlns:a="http://schemas.openxmlformats.org/drawingml/2006/main">
+            <a:srgbClr val="F1F5F8"/>
+          </a:solidFill>
+          <a:ln xmlns:a="http://schemas.openxmlformats.org/drawingml/2006/main" w="14288">
+            <a:solidFill>
+              <a:srgbClr val="9AAFC0"/>
+            </a:solidFill>
+          </a:ln>
+        </p:spPr>
+        <p:txBody>
+          <a:bodyPr xmlns:a="http://schemas.openxmlformats.org/drawingml/2006/main" anchor="ctr">
+            <a:noAutofit/>
+          </a:bodyPr>
+          <a:lstStyle xmlns:a="http://schemas.openxmlformats.org/drawingml/2006/main"/>
+          <a:p xmlns:a="http://schemas.openxmlformats.org/drawingml/2006/main">
+            <a:pPr algn="ctr">
+              <a:defRPr sz="1904">
+                <a:solidFill>
+                  <a:srgbClr val="172C3D"/>
+                </a:solidFill>
+                <a:latin typeface="PingFang SC"/>
+                <a:ea typeface="PingFang SC"/>
+                <a:cs typeface="PingFang SC"/>
+              </a:defRPr>
+            </a:pPr>
+            <a:r>
+              <a:rPr sz="1904">
+                <a:solidFill>
+                  <a:srgbClr val="172C3D"/>
+                </a:solidFill>
+                <a:latin typeface="PingFang SC"/>
+                <a:ea typeface="PingFang SC"/>
+                <a:cs typeface="PingFang SC"/>
+              </a:rPr>
+              <a:t>ListStorage</a:t>
+            </a:r>
+          </a:p>
+          <a:p xmlns:a="http://schemas.openxmlformats.org/drawingml/2006/main">
+            <a:pPr algn="ctr">
+              <a:defRPr sz="1904">
+                <a:solidFill>
+                  <a:srgbClr val="172C3D"/>
+                </a:solidFill>
+                <a:latin typeface="PingFang SC"/>
+                <a:ea typeface="PingFang SC"/>
+                <a:cs typeface="PingFang SC"/>
+              </a:defRPr>
+            </a:pPr>
+            <a:r>
+              <a:rPr sz="1904">
+                <a:solidFill>
+                  <a:srgbClr val="172C3D"/>
+                </a:solidFill>
+                <a:latin typeface="PingFang SC"/>
+                <a:ea typeface="PingFang SC"/>
+                <a:cs typeface="PingFang SC"/>
+              </a:rPr>
+              <a:t>Python 页内容</a:t>
+            </a:r>
+          </a:p>
+        </p:txBody>
+      </p:sp>
+      <p:sp>
+        <p:nvSpPr>
+          <p:cNvPr id="7" name="">
+            <a:extLst xmlns:a="http://schemas.openxmlformats.org/drawingml/2006/main">
+              <a:ext uri="{FF2B5EF4-FFF2-40B4-BE49-F238E27FC236}">
+                <a16:creationId xmlns:a16="http://schemas.microsoft.com/office/drawing/2014/main" id="{D5D21B54-6E6A-4413-908F-83620F2FF183}"/>
+              </a:ext>
+            </a:extLst>
+          </p:cNvPr>
+          <p:cNvSpPr>
+            <a:spLocks xmlns:a="http://schemas.openxmlformats.org/drawingml/2006/main" noGrp="1"/>
+          </p:cNvSpPr>
+          <p:nvPr/>
+        </p:nvSpPr>
+        <p:spPr>
+          <a:xfrm xmlns:a="http://schemas.openxmlformats.org/drawingml/2006/main">
+            <a:off x="8839200" y="3356610"/>
+            <a:ext cx="2551748" cy="787908"/>
+          </a:xfrm>
+          <a:prstGeom xmlns:a="http://schemas.openxmlformats.org/drawingml/2006/main" prst="rect">
+            <a:avLst/>
+          </a:prstGeom>
+          <a:solidFill xmlns:a="http://schemas.openxmlformats.org/drawingml/2006/main">
+            <a:srgbClr val="F1F5F8"/>
+          </a:solidFill>
+          <a:ln xmlns:a="http://schemas.openxmlformats.org/drawingml/2006/main" w="14288">
+            <a:solidFill>
+              <a:srgbClr val="9AAFC0"/>
+            </a:solidFill>
+          </a:ln>
+        </p:spPr>
+        <p:txBody>
+          <a:bodyPr xmlns:a="http://schemas.openxmlformats.org/drawingml/2006/main" anchor="ctr">
+            <a:noAutofit/>
+          </a:bodyPr>
+          <a:lstStyle xmlns:a="http://schemas.openxmlformats.org/drawingml/2006/main"/>
+          <a:p xmlns:a="http://schemas.openxmlformats.org/drawingml/2006/main">
+            <a:pPr algn="ctr">
+              <a:defRPr sz="1904">
+                <a:solidFill>
+                  <a:srgbClr val="172C3D"/>
+                </a:solidFill>
+                <a:latin typeface="PingFang SC"/>
+                <a:ea typeface="PingFang SC"/>
+                <a:cs typeface="PingFang SC"/>
+              </a:defRPr>
+            </a:pPr>
+            <a:r>
+              <a:rPr sz="1904">
+                <a:solidFill>
+                  <a:srgbClr val="172C3D"/>
+                </a:solidFill>
+                <a:latin typeface="PingFang SC"/>
+                <a:ea typeface="PingFang SC"/>
+                <a:cs typeface="PingFang SC"/>
+              </a:rPr>
+              <a:t>TorchStorage</a:t>
+            </a:r>
+          </a:p>
+          <a:p xmlns:a="http://schemas.openxmlformats.org/drawingml/2006/main">
+            <a:pPr algn="ctr">
+              <a:defRPr sz="1904">
+                <a:solidFill>
+                  <a:srgbClr val="172C3D"/>
+                </a:solidFill>
+                <a:latin typeface="PingFang SC"/>
+                <a:ea typeface="PingFang SC"/>
+                <a:cs typeface="PingFang SC"/>
+              </a:defRPr>
+            </a:pPr>
+            <a:r>
+              <a:rPr sz="1904">
+                <a:solidFill>
+                  <a:srgbClr val="172C3D"/>
+                </a:solidFill>
+                <a:latin typeface="PingFang SC"/>
+                <a:ea typeface="PingFang SC"/>
+                <a:cs typeface="PingFang SC"/>
+              </a:rPr>
+              <a:t>KV 张量与主机页</a:t>
+            </a:r>
+          </a:p>
+        </p:txBody>
+      </p:sp>
+      <p:sp>
+        <p:nvSpPr>
+          <p:cNvPr id="8" name="">
+            <a:extLst xmlns:a="http://schemas.openxmlformats.org/drawingml/2006/main">
+              <a:ext uri="{FF2B5EF4-FFF2-40B4-BE49-F238E27FC236}">
+                <a16:creationId xmlns:a16="http://schemas.microsoft.com/office/drawing/2014/main" id="{CF982F49-6FDB-4AD2-B2E5-1F46BFFB957C}"/>
+              </a:ext>
+            </a:extLst>
+          </p:cNvPr>
+          <p:cNvSpPr>
+            <a:spLocks xmlns:a="http://schemas.openxmlformats.org/drawingml/2006/main" noGrp="1"/>
+          </p:cNvSpPr>
+          <p:nvPr/>
+        </p:nvSpPr>
+        <p:spPr>
+          <a:xfrm xmlns:a="http://schemas.openxmlformats.org/drawingml/2006/main">
+            <a:off x="4586288" y="4654868"/>
+            <a:ext cx="2909888" cy="787908"/>
+          </a:xfrm>
+          <a:prstGeom xmlns:a="http://schemas.openxmlformats.org/drawingml/2006/main" prst="rect">
+            <a:avLst/>
+          </a:prstGeom>
+          <a:solidFill xmlns:a="http://schemas.openxmlformats.org/drawingml/2006/main">
+            <a:srgbClr val="F1F5F8"/>
+          </a:solidFill>
+          <a:ln xmlns:a="http://schemas.openxmlformats.org/drawingml/2006/main" w="14288">
+            <a:solidFill>
+              <a:srgbClr val="9AAFC0"/>
+            </a:solidFill>
+          </a:ln>
+        </p:spPr>
+        <p:txBody>
+          <a:bodyPr xmlns:a="http://schemas.openxmlformats.org/drawingml/2006/main" anchor="ctr">
+            <a:noAutofit/>
+          </a:bodyPr>
+          <a:lstStyle xmlns:a="http://schemas.openxmlformats.org/drawingml/2006/main"/>
+          <a:p xmlns:a="http://schemas.openxmlformats.org/drawingml/2006/main">
+            <a:pPr algn="ctr">
+              <a:defRPr sz="1904">
+                <a:solidFill>
+                  <a:srgbClr val="172C3D"/>
+                </a:solidFill>
+                <a:latin typeface="PingFang SC"/>
+                <a:ea typeface="PingFang SC"/>
+                <a:cs typeface="PingFang SC"/>
+              </a:defRPr>
+            </a:pPr>
+            <a:r>
+              <a:rPr sz="1904">
+                <a:solidFill>
+                  <a:srgbClr val="172C3D"/>
+                </a:solidFill>
+                <a:latin typeface="PingFang SC"/>
+                <a:ea typeface="PingFang SC"/>
+                <a:cs typeface="PingFang SC"/>
+              </a:rPr>
+              <a:t>Qwen3 执行器</a:t>
+            </a:r>
+          </a:p>
+          <a:p xmlns:a="http://schemas.openxmlformats.org/drawingml/2006/main">
+            <a:pPr algn="ctr">
+              <a:defRPr sz="1904">
+                <a:solidFill>
+                  <a:srgbClr val="172C3D"/>
+                </a:solidFill>
+                <a:latin typeface="PingFang SC"/>
+                <a:ea typeface="PingFang SC"/>
+                <a:cs typeface="PingFang SC"/>
+              </a:defRPr>
+            </a:pPr>
+            <a:r>
+              <a:rPr sz="1904">
+                <a:solidFill>
+                  <a:srgbClr val="172C3D"/>
+                </a:solidFill>
+                <a:latin typeface="PingFang SC"/>
+                <a:ea typeface="PingFang SC"/>
+                <a:cs typeface="PingFang SC"/>
+              </a:rPr>
+              <a:t>ModelExecutor</a:t>
+            </a:r>
+          </a:p>
+        </p:txBody>
+      </p:sp>
+      <p:cxnSp>
+        <p:nvCxnSpPr>
+          <p:cNvPr id="23" name=""/>
+          <p:cNvCxnSpPr>
+            <a:stCxn xmlns:a="http://schemas.openxmlformats.org/drawingml/2006/main" id="3" idx="3"/>
+            <a:endCxn xmlns:a="http://schemas.openxmlformats.org/drawingml/2006/main" id="5" idx="1"/>
+          </p:cNvCxnSpPr>
+          <p:nvPr/>
+        </p:nvCxnSpPr>
+        <p:spPr>
+          <a:xfrm xmlns:a="http://schemas.openxmlformats.org/drawingml/2006/main">
+            <a:off x="3288031" y="2138934"/>
+            <a:ext cx="1298257" cy="837153"/>
+          </a:xfrm>
+          <a:prstGeom xmlns:a="http://schemas.openxmlformats.org/drawingml/2006/main" prst="bentConnector3">
+            <a:avLst>
+              <a:gd name="adj1" fmla="val 50000"/>
+            </a:avLst>
+          </a:prstGeom>
+          <a:ln xmlns:a="http://schemas.openxmlformats.org/drawingml/2006/main" w="19050">
+            <a:solidFill>
+              <a:srgbClr val="597387"/>
+            </a:solidFill>
+            <a:tailEnd type="arrow" w="med" len="med"/>
+          </a:ln>
+        </p:spPr>
+      </p:cxnSp>
+      <p:cxnSp>
+        <p:nvCxnSpPr>
+          <p:cNvPr id="24" name=""/>
+          <p:cNvCxnSpPr>
+            <a:stCxn xmlns:a="http://schemas.openxmlformats.org/drawingml/2006/main" id="4" idx="3"/>
+            <a:endCxn xmlns:a="http://schemas.openxmlformats.org/drawingml/2006/main" id="5" idx="1"/>
+          </p:cNvCxnSpPr>
+          <p:nvPr/>
+        </p:nvCxnSpPr>
+        <p:spPr>
+          <a:xfrm xmlns:a="http://schemas.openxmlformats.org/drawingml/2006/main" flipV="1">
+            <a:off x="3288031" y="2976087"/>
+            <a:ext cx="1298257" cy="774478"/>
+          </a:xfrm>
+          <a:prstGeom xmlns:a="http://schemas.openxmlformats.org/drawingml/2006/main" prst="bentConnector3">
+            <a:avLst>
+              <a:gd name="adj1" fmla="val 50000"/>
+            </a:avLst>
+          </a:prstGeom>
+          <a:ln xmlns:a="http://schemas.openxmlformats.org/drawingml/2006/main" w="19050">
+            <a:solidFill>
+              <a:srgbClr val="597387"/>
+            </a:solidFill>
+            <a:tailEnd type="arrow" w="med" len="med"/>
+          </a:ln>
+        </p:spPr>
+      </p:cxnSp>
+      <p:cxnSp>
+        <p:nvCxnSpPr>
+          <p:cNvPr id="25" name=""/>
+          <p:cNvCxnSpPr>
+            <a:stCxn xmlns:a="http://schemas.openxmlformats.org/drawingml/2006/main" id="5" idx="3"/>
+            <a:endCxn xmlns:a="http://schemas.openxmlformats.org/drawingml/2006/main" id="6" idx="1"/>
+          </p:cNvCxnSpPr>
+          <p:nvPr/>
+        </p:nvCxnSpPr>
+        <p:spPr>
+          <a:xfrm xmlns:a="http://schemas.openxmlformats.org/drawingml/2006/main" flipV="1">
+            <a:off x="7496176" y="2138934"/>
+            <a:ext cx="1343024" cy="837153"/>
+          </a:xfrm>
+          <a:prstGeom xmlns:a="http://schemas.openxmlformats.org/drawingml/2006/main" prst="bentConnector3">
+            <a:avLst>
+              <a:gd name="adj1" fmla="val 50000"/>
+            </a:avLst>
+          </a:prstGeom>
+          <a:ln xmlns:a="http://schemas.openxmlformats.org/drawingml/2006/main" w="19050">
+            <a:solidFill>
+              <a:srgbClr val="597387"/>
+            </a:solidFill>
+            <a:tailEnd type="arrow" w="med" len="med"/>
+          </a:ln>
+        </p:spPr>
+      </p:cxnSp>
+      <p:cxnSp>
+        <p:nvCxnSpPr>
+          <p:cNvPr id="26" name=""/>
+          <p:cNvCxnSpPr>
+            <a:stCxn xmlns:a="http://schemas.openxmlformats.org/drawingml/2006/main" id="5" idx="3"/>
+            <a:endCxn xmlns:a="http://schemas.openxmlformats.org/drawingml/2006/main" id="7" idx="1"/>
+          </p:cNvCxnSpPr>
+          <p:nvPr/>
+        </p:nvCxnSpPr>
+        <p:spPr>
+          <a:xfrm xmlns:a="http://schemas.openxmlformats.org/drawingml/2006/main">
+            <a:off x="7496176" y="2976087"/>
+            <a:ext cx="1343024" cy="774478"/>
+          </a:xfrm>
+          <a:prstGeom xmlns:a="http://schemas.openxmlformats.org/drawingml/2006/main" prst="bentConnector3">
+            <a:avLst>
+              <a:gd name="adj1" fmla="val 50000"/>
+            </a:avLst>
+          </a:prstGeom>
+          <a:ln xmlns:a="http://schemas.openxmlformats.org/drawingml/2006/main" w="19050">
+            <a:solidFill>
+              <a:srgbClr val="597387"/>
+            </a:solidFill>
+            <a:tailEnd type="arrow" w="med" len="med"/>
+          </a:ln>
+        </p:spPr>
+      </p:cxnSp>
+      <p:cxnSp>
+        <p:nvCxnSpPr>
+          <p:cNvPr id="27" name=""/>
+          <p:cNvCxnSpPr>
+            <a:stCxn xmlns:a="http://schemas.openxmlformats.org/drawingml/2006/main" id="4" idx="2"/>
+            <a:endCxn xmlns:a="http://schemas.openxmlformats.org/drawingml/2006/main" id="8" idx="1"/>
+          </p:cNvCxnSpPr>
+          <p:nvPr/>
+        </p:nvCxnSpPr>
+        <p:spPr>
+          <a:xfrm xmlns:a="http://schemas.openxmlformats.org/drawingml/2006/main">
+            <a:off x="2012157" y="4144518"/>
+            <a:ext cx="2574131" cy="904304"/>
+          </a:xfrm>
+          <a:prstGeom xmlns:a="http://schemas.openxmlformats.org/drawingml/2006/main" prst="bentConnector5">
+            <a:avLst>
+              <a:gd name="adj1" fmla="val 0"/>
+              <a:gd name="adj2" fmla="val 25279"/>
+              <a:gd name="adj3" fmla="val 91119"/>
+            </a:avLst>
+          </a:prstGeom>
+          <a:ln xmlns:a="http://schemas.openxmlformats.org/drawingml/2006/main" w="19050">
+            <a:solidFill>
+              <a:srgbClr val="597387"/>
+            </a:solidFill>
+            <a:tailEnd type="arrow" w="med" len="med"/>
+          </a:ln>
+        </p:spPr>
+      </p:cxnSp>
+      <p:cxnSp>
+        <p:nvCxnSpPr>
+          <p:cNvPr id="28" name=""/>
+          <p:cNvCxnSpPr>
+            <a:stCxn xmlns:a="http://schemas.openxmlformats.org/drawingml/2006/main" id="8" idx="3"/>
+            <a:endCxn xmlns:a="http://schemas.openxmlformats.org/drawingml/2006/main" id="7" idx="2"/>
+          </p:cNvCxnSpPr>
+          <p:nvPr/>
+        </p:nvCxnSpPr>
+        <p:spPr>
+          <a:xfrm xmlns:a="http://schemas.openxmlformats.org/drawingml/2006/main" flipV="1">
+            <a:off x="7496176" y="4144518"/>
+            <a:ext cx="2618898" cy="904304"/>
+          </a:xfrm>
+          <a:prstGeom xmlns:a="http://schemas.openxmlformats.org/drawingml/2006/main" prst="bentConnector2">
+            <a:avLst/>
+          </a:prstGeom>
+          <a:ln xmlns:a="http://schemas.openxmlformats.org/drawingml/2006/main" w="19050">
+            <a:solidFill>
+              <a:srgbClr val="597387"/>
+            </a:solidFill>
+            <a:tailEnd type="arrow" w="med" len="med"/>
+          </a:ln>
+        </p:spPr>
+      </p:cxnSp>
     </p:spTree>
     <p:extLst>
       <p:ext uri="{BB962C8B-B14F-4D97-AF65-F5344CB8AC3E}">
-        <p14:creationId xmlns:p14="http://schemas.microsoft.com/office/powerpoint/2010/main" val="252962668"/>
+        <p14:creationId xmlns:p14="http://schemas.microsoft.com/office/powerpoint/2010/main" val="998649923"/>
       </p:ext>
     </p:extLst>
   </p:cSld>
@@ -2897,10 +6452,10 @@
       </p:grpSpPr>
       <p:sp>
         <p:nvSpPr>
-          <p:cNvPr id="6" name="">
+          <p:cNvPr id="7" name="">
             <a:extLst xmlns:a="http://schemas.openxmlformats.org/drawingml/2006/main">
               <a:ext uri="{FF2B5EF4-FFF2-40B4-BE49-F238E27FC236}">
-                <a16:creationId xmlns:a16="http://schemas.microsoft.com/office/drawing/2014/main" id="{0D6B16E9-4966-493A-ABDF-801A77D080D6}"/>
+                <a16:creationId xmlns:a16="http://schemas.microsoft.com/office/drawing/2014/main" id="{EB7FAE5B-A66B-443B-B587-00D3F732D66A}"/>
               </a:ext>
             </a:extLst>
           </p:cNvPr>
@@ -2911,8 +6466,8 @@
         </p:nvSpPr>
         <p:spPr>
           <a:xfrm xmlns:a="http://schemas.openxmlformats.org/drawingml/2006/main">
-            <a:off x="685800" y="514350"/>
-            <a:ext cx="10820400" cy="904875"/>
+            <a:off x="619125" y="409575"/>
+            <a:ext cx="10953750" cy="809625"/>
           </a:xfrm>
           <a:prstGeom xmlns:a="http://schemas.openxmlformats.org/drawingml/2006/main" prst="rect">
             <a:avLst/>
@@ -2929,9 +6484,9 @@
           <a:lstStyle xmlns:a="http://schemas.openxmlformats.org/drawingml/2006/main"/>
           <a:p xmlns:a="http://schemas.openxmlformats.org/drawingml/2006/main">
             <a:pPr>
-              <a:defRPr sz="3450" b="1">
-                <a:solidFill>
-                  <a:srgbClr val="12283A"/>
+              <a:defRPr sz="3300" b="1">
+                <a:solidFill>
+                  <a:srgbClr val="172C3D"/>
                 </a:solidFill>
                 <a:latin typeface="PingFang SC"/>
                 <a:ea typeface="PingFang SC"/>
@@ -2939,15 +6494,15 @@
               </a:defRPr>
             </a:pPr>
             <a:r>
-              <a:rPr sz="3450" b="1">
-                <a:solidFill>
-                  <a:srgbClr val="12283A"/>
+              <a:rPr sz="3300" b="1">
+                <a:solidFill>
+                  <a:srgbClr val="172C3D"/>
                 </a:solidFill>
                 <a:latin typeface="PingFang SC"/>
                 <a:ea typeface="PingFang SC"/>
                 <a:cs typeface="PingFang SC"/>
               </a:rPr>
-              <a:t>COW 与换页正确性</a:t>
+              <a:t>逻辑地址与按需扩页</a:t>
             </a:r>
           </a:p>
         </p:txBody>
@@ -2957,7 +6512,7 @@
           <p:cNvPr id="2" name="">
             <a:extLst xmlns:a="http://schemas.openxmlformats.org/drawingml/2006/main">
               <a:ext uri="{FF2B5EF4-FFF2-40B4-BE49-F238E27FC236}">
-                <a16:creationId xmlns:a16="http://schemas.microsoft.com/office/drawing/2014/main" id="{18DFAC5E-2752-4493-9F65-8140C7BBDBD4}"/>
+                <a16:creationId xmlns:a16="http://schemas.microsoft.com/office/drawing/2014/main" id="{59545180-EE68-4803-9CC5-42C175E1E246}"/>
               </a:ext>
             </a:extLst>
           </p:cNvPr>
@@ -2968,8 +6523,8 @@
         </p:nvSpPr>
         <p:spPr>
           <a:xfrm xmlns:a="http://schemas.openxmlformats.org/drawingml/2006/main">
-            <a:off x="762000" y="1762125"/>
-            <a:ext cx="10668000" cy="876300"/>
+            <a:off x="11239500" y="6400800"/>
+            <a:ext cx="476250" cy="266700"/>
           </a:xfrm>
           <a:prstGeom xmlns:a="http://schemas.openxmlformats.org/drawingml/2006/main" prst="rect">
             <a:avLst/>
@@ -2986,9 +6541,66 @@
           <a:lstStyle xmlns:a="http://schemas.openxmlformats.org/drawingml/2006/main"/>
           <a:p xmlns:a="http://schemas.openxmlformats.org/drawingml/2006/main">
             <a:pPr>
+              <a:defRPr sz="1350" b="0">
+                <a:solidFill>
+                  <a:srgbClr val="8290A0"/>
+                </a:solidFill>
+                <a:latin typeface="PingFang SC"/>
+                <a:ea typeface="PingFang SC"/>
+                <a:cs typeface="PingFang SC"/>
+              </a:defRPr>
+            </a:pPr>
+            <a:r>
+              <a:rPr sz="1350" b="0">
+                <a:solidFill>
+                  <a:srgbClr val="8290A0"/>
+                </a:solidFill>
+                <a:latin typeface="PingFang SC"/>
+                <a:ea typeface="PingFang SC"/>
+                <a:cs typeface="PingFang SC"/>
+              </a:rPr>
+              <a:t>04</a:t>
+            </a:r>
+          </a:p>
+        </p:txBody>
+      </p:sp>
+      <p:sp>
+        <p:nvSpPr>
+          <p:cNvPr id="3" name="">
+            <a:extLst xmlns:a="http://schemas.openxmlformats.org/drawingml/2006/main">
+              <a:ext uri="{FF2B5EF4-FFF2-40B4-BE49-F238E27FC236}">
+                <a16:creationId xmlns:a16="http://schemas.microsoft.com/office/drawing/2014/main" id="{13435557-4131-4980-B861-2C2B74088E0E}"/>
+              </a:ext>
+            </a:extLst>
+          </p:cNvPr>
+          <p:cNvSpPr>
+            <a:spLocks xmlns:a="http://schemas.openxmlformats.org/drawingml/2006/main" noGrp="1"/>
+          </p:cNvSpPr>
+          <p:nvPr/>
+        </p:nvSpPr>
+        <p:spPr>
+          <a:xfrm xmlns:a="http://schemas.openxmlformats.org/drawingml/2006/main">
+            <a:off x="723900" y="1714500"/>
+            <a:ext cx="10668000" cy="790575"/>
+          </a:xfrm>
+          <a:prstGeom xmlns:a="http://schemas.openxmlformats.org/drawingml/2006/main" prst="rect">
+            <a:avLst/>
+          </a:prstGeom>
+          <a:noFill xmlns:a="http://schemas.openxmlformats.org/drawingml/2006/main"/>
+          <a:ln xmlns:a="http://schemas.openxmlformats.org/drawingml/2006/main" w="0">
+            <a:noFill/>
+          </a:ln>
+        </p:spPr>
+        <p:txBody>
+          <a:bodyPr xmlns:a="http://schemas.openxmlformats.org/drawingml/2006/main">
+            <a:noAutofit/>
+          </a:bodyPr>
+          <a:lstStyle xmlns:a="http://schemas.openxmlformats.org/drawingml/2006/main"/>
+          <a:p xmlns:a="http://schemas.openxmlformats.org/drawingml/2006/main">
+            <a:pPr>
               <a:defRPr sz="2250" b="0">
                 <a:solidFill>
-                  <a:srgbClr val="263748"/>
+                  <a:srgbClr val="172C3D"/>
                 </a:solidFill>
                 <a:latin typeface="PingFang SC"/>
                 <a:ea typeface="PingFang SC"/>
@@ -2998,23 +6610,23 @@
             <a:r>
               <a:rPr sz="2250" b="0">
                 <a:solidFill>
-                  <a:srgbClr val="263748"/>
+                  <a:srgbClr val="172C3D"/>
                 </a:solidFill>
                 <a:latin typeface="PingFang SC"/>
                 <a:ea typeface="PingFang SC"/>
                 <a:cs typeface="PingFang SC"/>
               </a:rPr>
-              <a:t>fork 只增加共享引用，写入时复制受影响的共享页。</a:t>
+              <a:t>每页 4 token，逻辑位置 9 分解为页号 2 和偏移 1。</a:t>
             </a:r>
           </a:p>
         </p:txBody>
       </p:sp>
       <p:sp>
         <p:nvSpPr>
-          <p:cNvPr id="3" name="">
+          <p:cNvPr id="4" name="">
             <a:extLst xmlns:a="http://schemas.openxmlformats.org/drawingml/2006/main">
               <a:ext uri="{FF2B5EF4-FFF2-40B4-BE49-F238E27FC236}">
-                <a16:creationId xmlns:a16="http://schemas.microsoft.com/office/drawing/2014/main" id="{B0A3D872-5916-4A7D-AB69-CAEC81A4A374}"/>
+                <a16:creationId xmlns:a16="http://schemas.microsoft.com/office/drawing/2014/main" id="{AF1934CE-2F77-4257-98B5-E78574E1F45F}"/>
               </a:ext>
             </a:extLst>
           </p:cNvPr>
@@ -3025,8 +6637,8 @@
         </p:nvSpPr>
         <p:spPr>
           <a:xfrm xmlns:a="http://schemas.openxmlformats.org/drawingml/2006/main">
-            <a:off x="762000" y="2771775"/>
-            <a:ext cx="10668000" cy="876300"/>
+            <a:off x="723900" y="2667000"/>
+            <a:ext cx="10668000" cy="790575"/>
           </a:xfrm>
           <a:prstGeom xmlns:a="http://schemas.openxmlformats.org/drawingml/2006/main" prst="rect">
             <a:avLst/>
@@ -3045,7 +6657,7 @@
             <a:pPr>
               <a:defRPr sz="2250" b="0">
                 <a:solidFill>
-                  <a:srgbClr val="263748"/>
+                  <a:srgbClr val="172C3D"/>
                 </a:solidFill>
                 <a:latin typeface="PingFang SC"/>
                 <a:ea typeface="PingFang SC"/>
@@ -3055,23 +6667,23 @@
             <a:r>
               <a:rPr sz="2250" b="0">
                 <a:solidFill>
-                  <a:srgbClr val="263748"/>
+                  <a:srgbClr val="172C3D"/>
                 </a:solidFill>
                 <a:latin typeface="PingFang SC"/>
                 <a:ea typeface="PingFang SC"/>
                 <a:cs typeface="PingFang SC"/>
               </a:rPr>
-              <a:t>计算前固定完整工作集，计算完成后解除页固定。</a:t>
+              <a:t>序列页表保存稳定页 ID，页面对象记录 frame 或 host。</a:t>
             </a:r>
           </a:p>
         </p:txBody>
       </p:sp>
       <p:sp>
         <p:nvSpPr>
-          <p:cNvPr id="4" name="">
+          <p:cNvPr id="5" name="">
             <a:extLst xmlns:a="http://schemas.openxmlformats.org/drawingml/2006/main">
               <a:ext uri="{FF2B5EF4-FFF2-40B4-BE49-F238E27FC236}">
-                <a16:creationId xmlns:a16="http://schemas.microsoft.com/office/drawing/2014/main" id="{8136072B-0CC2-49E1-846F-00D12CEE538C}"/>
+                <a16:creationId xmlns:a16="http://schemas.microsoft.com/office/drawing/2014/main" id="{0DD9DFF2-FF27-458D-A128-B713F3D8E13B}"/>
               </a:ext>
             </a:extLst>
           </p:cNvPr>
@@ -3082,8 +6694,8 @@
         </p:nvSpPr>
         <p:spPr>
           <a:xfrm xmlns:a="http://schemas.openxmlformats.org/drawingml/2006/main">
-            <a:off x="762000" y="3781425"/>
-            <a:ext cx="10668000" cy="876300"/>
+            <a:off x="723900" y="3619500"/>
+            <a:ext cx="10668000" cy="790575"/>
           </a:xfrm>
           <a:prstGeom xmlns:a="http://schemas.openxmlformats.org/drawingml/2006/main" prst="rect">
             <a:avLst/>
@@ -3102,7 +6714,7 @@
             <a:pPr>
               <a:defRPr sz="2250" b="0">
                 <a:solidFill>
-                  <a:srgbClr val="263748"/>
+                  <a:srgbClr val="172C3D"/>
                 </a:solidFill>
                 <a:latin typeface="PingFang SC"/>
                 <a:ea typeface="PingFang SC"/>
@@ -3112,23 +6724,23 @@
             <a:r>
               <a:rPr sz="2250" b="0">
                 <a:solidFill>
-                  <a:srgbClr val="263748"/>
+                  <a:srgbClr val="172C3D"/>
                 </a:solidFill>
                 <a:latin typeface="PingFang SC"/>
                 <a:ea typeface="PingFang SC"/>
                 <a:cs typeface="PingFang SC"/>
               </a:rPr>
-              <a:t>主机池满时交换 GPU 页与换入页的主机槽位。</a:t>
+              <a:t>长度从 8 增至 9 时分配第 3 页，无需连续物理空间。</a:t>
             </a:r>
           </a:p>
         </p:txBody>
       </p:sp>
       <p:sp>
         <p:nvSpPr>
-          <p:cNvPr id="5" name="">
+          <p:cNvPr id="6" name="">
             <a:extLst xmlns:a="http://schemas.openxmlformats.org/drawingml/2006/main">
               <a:ext uri="{FF2B5EF4-FFF2-40B4-BE49-F238E27FC236}">
-                <a16:creationId xmlns:a16="http://schemas.microsoft.com/office/drawing/2014/main" id="{DC1BF821-58D7-4B60-8861-CDCAF1CBD5A4}"/>
+                <a16:creationId xmlns:a16="http://schemas.microsoft.com/office/drawing/2014/main" id="{6D859939-1AC2-4D69-AF11-BC965D62C2E9}"/>
               </a:ext>
             </a:extLst>
           </p:cNvPr>
@@ -3139,8 +6751,8 @@
         </p:nvSpPr>
         <p:spPr>
           <a:xfrm xmlns:a="http://schemas.openxmlformats.org/drawingml/2006/main">
-            <a:off x="762000" y="4791075"/>
-            <a:ext cx="10668000" cy="876300"/>
+            <a:off x="723900" y="4572000"/>
+            <a:ext cx="10668000" cy="790575"/>
           </a:xfrm>
           <a:prstGeom xmlns:a="http://schemas.openxmlformats.org/drawingml/2006/main" prst="rect">
             <a:avLst/>
@@ -3159,7 +6771,7 @@
             <a:pPr>
               <a:defRPr sz="2250" b="0">
                 <a:solidFill>
-                  <a:srgbClr val="263748"/>
+                  <a:srgbClr val="172C3D"/>
                 </a:solidFill>
                 <a:latin typeface="PingFang SC"/>
                 <a:ea typeface="PingFang SC"/>
@@ -3169,13 +6781,13 @@
             <a:r>
               <a:rPr sz="2250" b="0">
                 <a:solidFill>
-                  <a:srgbClr val="263748"/>
+                  <a:srgbClr val="172C3D"/>
                 </a:solidFill>
                 <a:latin typeface="PingFang SC"/>
                 <a:ea typeface="PingFang SC"/>
                 <a:cs typeface="PingFang SC"/>
               </a:rPr>
-              <a:t>随机生命周期、不同释放顺序和复制失败用例检查状态一致性。</a:t>
+              <a:t>引用归零才释放页面，检查空闲池与活跃页是否完整分割。</a:t>
             </a:r>
           </a:p>
         </p:txBody>
@@ -3183,7 +6795,7 @@
     </p:spTree>
     <p:extLst>
       <p:ext uri="{BB962C8B-B14F-4D97-AF65-F5344CB8AC3E}">
-        <p14:creationId xmlns:p14="http://schemas.microsoft.com/office/powerpoint/2010/main" val="768093235"/>
+        <p14:creationId xmlns:p14="http://schemas.microsoft.com/office/powerpoint/2010/main" val="1223292603"/>
       </p:ext>
     </p:extLst>
   </p:cSld>
@@ -3211,10 +6823,10 @@
       </p:grpSpPr>
       <p:sp>
         <p:nvSpPr>
-          <p:cNvPr id="5" name="">
+          <p:cNvPr id="35" name="">
             <a:extLst xmlns:a="http://schemas.openxmlformats.org/drawingml/2006/main">
               <a:ext uri="{FF2B5EF4-FFF2-40B4-BE49-F238E27FC236}">
-                <a16:creationId xmlns:a16="http://schemas.microsoft.com/office/drawing/2014/main" id="{4D9FF4F3-7E7D-4078-96CF-E41B79FDB753}"/>
+                <a16:creationId xmlns:a16="http://schemas.microsoft.com/office/drawing/2014/main" id="{6D534151-4322-476A-89C0-63203764C27D}"/>
               </a:ext>
             </a:extLst>
           </p:cNvPr>
@@ -3225,8 +6837,8 @@
         </p:nvSpPr>
         <p:spPr>
           <a:xfrm xmlns:a="http://schemas.openxmlformats.org/drawingml/2006/main">
-            <a:off x="685800" y="514350"/>
-            <a:ext cx="10820400" cy="904875"/>
+            <a:off x="619125" y="409575"/>
+            <a:ext cx="10953750" cy="809625"/>
           </a:xfrm>
           <a:prstGeom xmlns:a="http://schemas.openxmlformats.org/drawingml/2006/main" prst="rect">
             <a:avLst/>
@@ -3243,9 +6855,9 @@
           <a:lstStyle xmlns:a="http://schemas.openxmlformats.org/drawingml/2006/main"/>
           <a:p xmlns:a="http://schemas.openxmlformats.org/drawingml/2006/main">
             <a:pPr>
-              <a:defRPr sz="3450" b="1">
-                <a:solidFill>
-                  <a:srgbClr val="12283A"/>
+              <a:defRPr sz="3300" b="1">
+                <a:solidFill>
+                  <a:srgbClr val="172C3D"/>
                 </a:solidFill>
                 <a:latin typeface="PingFang SC"/>
                 <a:ea typeface="PingFang SC"/>
@@ -3253,41 +6865,25 @@
               </a:defRPr>
             </a:pPr>
             <a:r>
-              <a:rPr sz="3450" b="1">
-                <a:solidFill>
-                  <a:srgbClr val="12283A"/>
+              <a:rPr sz="3300" b="1">
+                <a:solidFill>
+                  <a:srgbClr val="172C3D"/>
                 </a:solidFill>
                 <a:latin typeface="PingFang SC"/>
                 <a:ea typeface="PingFang SC"/>
                 <a:cs typeface="PingFang SC"/>
               </a:rPr>
-              <a:t>固定物理容量下的请求完成数</a:t>
+              <a:t>写时复制的执行顺序</a:t>
             </a:r>
           </a:p>
         </p:txBody>
       </p:sp>
-      <p:graphicFrame>
-        <p:nvGraphicFramePr>
-          <p:cNvPr id="6" name="Chart"/>
-          <p:cNvGraphicFramePr/>
-          <p:nvPr/>
-        </p:nvGraphicFramePr>
-        <p:xfrm>
-          <a:off xmlns:a="http://schemas.openxmlformats.org/drawingml/2006/main" x="762000" y="1714500"/>
-          <a:ext xmlns:a="http://schemas.openxmlformats.org/drawingml/2006/main" cx="10668000" cy="3810000"/>
-        </p:xfrm>
-        <a:graphic xmlns:a="http://schemas.openxmlformats.org/drawingml/2006/main">
-          <a:graphicData uri="http://schemas.openxmlformats.org/drawingml/2006/chart">
-            <c:chart xmlns:r="http://schemas.openxmlformats.org/officeDocument/2006/relationships" xmlns:c="http://schemas.openxmlformats.org/drawingml/2006/chart" r:id="R228b21fa1cbd4146"/>
-          </a:graphicData>
-        </a:graphic>
-      </p:graphicFrame>
-      <p:sp>
-        <p:nvSpPr>
-          <p:cNvPr id="3" name="">
+      <p:sp>
+        <p:nvSpPr>
+          <p:cNvPr id="2" name="">
             <a:extLst xmlns:a="http://schemas.openxmlformats.org/drawingml/2006/main">
               <a:ext uri="{FF2B5EF4-FFF2-40B4-BE49-F238E27FC236}">
-                <a16:creationId xmlns:a16="http://schemas.microsoft.com/office/drawing/2014/main" id="{3AA5F198-F145-47E7-B448-784329631BE5}"/>
+                <a16:creationId xmlns:a16="http://schemas.microsoft.com/office/drawing/2014/main" id="{1DA824A8-201E-4B25-8B58-E03AD30B7998}"/>
               </a:ext>
             </a:extLst>
           </p:cNvPr>
@@ -3298,8 +6894,8 @@
         </p:nvSpPr>
         <p:spPr>
           <a:xfrm xmlns:a="http://schemas.openxmlformats.org/drawingml/2006/main">
-            <a:off x="762000" y="5619750"/>
-            <a:ext cx="10668000" cy="457200"/>
+            <a:off x="11239500" y="6400800"/>
+            <a:ext cx="476250" cy="266700"/>
           </a:xfrm>
           <a:prstGeom xmlns:a="http://schemas.openxmlformats.org/drawingml/2006/main" prst="rect">
             <a:avLst/>
@@ -3316,9 +6912,9 @@
           <a:lstStyle xmlns:a="http://schemas.openxmlformats.org/drawingml/2006/main"/>
           <a:p xmlns:a="http://schemas.openxmlformats.org/drawingml/2006/main">
             <a:pPr>
-              <a:defRPr sz="1800" b="0">
-                <a:solidFill>
-                  <a:srgbClr val="263748"/>
+              <a:defRPr sz="1350" b="0">
+                <a:solidFill>
+                  <a:srgbClr val="8290A0"/>
                 </a:solidFill>
                 <a:latin typeface="PingFang SC"/>
                 <a:ea typeface="PingFang SC"/>
@@ -3326,15 +6922,76 @@
               </a:defRPr>
             </a:pPr>
             <a:r>
-              <a:rPr sz="1800" b="0">
-                <a:solidFill>
-                  <a:srgbClr val="263748"/>
+              <a:rPr sz="1350" b="0">
+                <a:solidFill>
+                  <a:srgbClr val="8290A0"/>
                 </a:solidFill>
                 <a:latin typeface="PingFang SC"/>
                 <a:ea typeface="PingFang SC"/>
                 <a:cs typeface="PingFang SC"/>
               </a:rPr>
-              <a:t>CPU 仿真：每页 4 token，每组 32 条请求，3 个种子均值。</a:t>
+              <a:t>05</a:t>
+            </a:r>
+          </a:p>
+        </p:txBody>
+      </p:sp>
+      <p:sp>
+        <p:nvSpPr>
+          <p:cNvPr id="3" name="">
+            <a:extLst xmlns:a="http://schemas.openxmlformats.org/drawingml/2006/main">
+              <a:ext uri="{FF2B5EF4-FFF2-40B4-BE49-F238E27FC236}">
+                <a16:creationId xmlns:a16="http://schemas.microsoft.com/office/drawing/2014/main" id="{93C736A8-F7D8-4880-A193-6700717F4061}"/>
+              </a:ext>
+            </a:extLst>
+          </p:cNvPr>
+          <p:cNvSpPr>
+            <a:spLocks xmlns:a="http://schemas.openxmlformats.org/drawingml/2006/main" noGrp="1"/>
+          </p:cNvSpPr>
+          <p:nvPr/>
+        </p:nvSpPr>
+        <p:spPr>
+          <a:xfrm xmlns:a="http://schemas.openxmlformats.org/drawingml/2006/main">
+            <a:off x="835342" y="1658303"/>
+            <a:ext cx="2059305" cy="519303"/>
+          </a:xfrm>
+          <a:prstGeom xmlns:a="http://schemas.openxmlformats.org/drawingml/2006/main" prst="rect">
+            <a:avLst/>
+          </a:prstGeom>
+          <a:solidFill xmlns:a="http://schemas.openxmlformats.org/drawingml/2006/main">
+            <a:srgbClr val="F1F5F8"/>
+          </a:solidFill>
+          <a:ln xmlns:a="http://schemas.openxmlformats.org/drawingml/2006/main" w="14288">
+            <a:solidFill>
+              <a:srgbClr val="9AAFC0"/>
+            </a:solidFill>
+          </a:ln>
+        </p:spPr>
+        <p:txBody>
+          <a:bodyPr xmlns:a="http://schemas.openxmlformats.org/drawingml/2006/main" anchor="ctr">
+            <a:noAutofit/>
+          </a:bodyPr>
+          <a:lstStyle xmlns:a="http://schemas.openxmlformats.org/drawingml/2006/main"/>
+          <a:p xmlns:a="http://schemas.openxmlformats.org/drawingml/2006/main">
+            <a:pPr algn="ctr">
+              <a:defRPr sz="1833">
+                <a:solidFill>
+                  <a:srgbClr val="172C3D"/>
+                </a:solidFill>
+                <a:latin typeface="PingFang SC"/>
+                <a:ea typeface="PingFang SC"/>
+                <a:cs typeface="PingFang SC"/>
+              </a:defRPr>
+            </a:pPr>
+            <a:r>
+              <a:rPr sz="1833">
+                <a:solidFill>
+                  <a:srgbClr val="172C3D"/>
+                </a:solidFill>
+                <a:latin typeface="PingFang SC"/>
+                <a:ea typeface="PingFang SC"/>
+                <a:cs typeface="PingFang SC"/>
+              </a:rPr>
+              <a:t>请求分支</a:t>
             </a:r>
           </a:p>
         </p:txBody>
@@ -3344,7 +7001,7 @@
           <p:cNvPr id="4" name="">
             <a:extLst xmlns:a="http://schemas.openxmlformats.org/drawingml/2006/main">
               <a:ext uri="{FF2B5EF4-FFF2-40B4-BE49-F238E27FC236}">
-                <a16:creationId xmlns:a16="http://schemas.microsoft.com/office/drawing/2014/main" id="{FAB1660F-5DF5-45A1-BAC7-0C3D2B9698B4}"/>
+                <a16:creationId xmlns:a16="http://schemas.microsoft.com/office/drawing/2014/main" id="{FE7A8AC7-B49A-4D9C-B41F-EEFAC30F7B16}"/>
               </a:ext>
             </a:extLst>
           </p:cNvPr>
@@ -3355,8 +7012,455 @@
         </p:nvSpPr>
         <p:spPr>
           <a:xfrm xmlns:a="http://schemas.openxmlformats.org/drawingml/2006/main">
-            <a:off x="762000" y="6115050"/>
-            <a:ext cx="10668000" cy="428625"/>
+            <a:off x="1864995" y="2204466"/>
+            <a:ext cx="9525" cy="9525"/>
+          </a:xfrm>
+          <a:prstGeom xmlns:a="http://schemas.openxmlformats.org/drawingml/2006/main" prst="rect">
+            <a:avLst/>
+          </a:prstGeom>
+          <a:noFill xmlns:a="http://schemas.openxmlformats.org/drawingml/2006/main"/>
+          <a:ln xmlns:a="http://schemas.openxmlformats.org/drawingml/2006/main" w="0">
+            <a:noFill/>
+          </a:ln>
+        </p:spPr>
+      </p:sp>
+      <p:sp>
+        <p:nvSpPr>
+          <p:cNvPr id="5" name="">
+            <a:extLst xmlns:a="http://schemas.openxmlformats.org/drawingml/2006/main">
+              <a:ext uri="{FF2B5EF4-FFF2-40B4-BE49-F238E27FC236}">
+                <a16:creationId xmlns:a16="http://schemas.microsoft.com/office/drawing/2014/main" id="{8D559B73-3632-4BF7-B069-9822E992FEFF}"/>
+              </a:ext>
+            </a:extLst>
+          </p:cNvPr>
+          <p:cNvSpPr>
+            <a:spLocks xmlns:a="http://schemas.openxmlformats.org/drawingml/2006/main" noGrp="1"/>
+          </p:cNvSpPr>
+          <p:nvPr/>
+        </p:nvSpPr>
+        <p:spPr>
+          <a:xfrm xmlns:a="http://schemas.openxmlformats.org/drawingml/2006/main">
+            <a:off x="1864995" y="5776913"/>
+            <a:ext cx="9525" cy="9525"/>
+          </a:xfrm>
+          <a:prstGeom xmlns:a="http://schemas.openxmlformats.org/drawingml/2006/main" prst="rect">
+            <a:avLst/>
+          </a:prstGeom>
+          <a:noFill xmlns:a="http://schemas.openxmlformats.org/drawingml/2006/main"/>
+          <a:ln xmlns:a="http://schemas.openxmlformats.org/drawingml/2006/main" w="0">
+            <a:noFill/>
+          </a:ln>
+        </p:spPr>
+      </p:sp>
+      <p:cxnSp>
+        <p:nvCxnSpPr>
+          <p:cNvPr id="40" name=""/>
+          <p:cNvCxnSpPr>
+            <a:stCxn xmlns:a="http://schemas.openxmlformats.org/drawingml/2006/main" id="4" idx="3"/>
+            <a:endCxn xmlns:a="http://schemas.openxmlformats.org/drawingml/2006/main" id="5" idx="1"/>
+          </p:cNvCxnSpPr>
+          <p:nvPr/>
+        </p:nvCxnSpPr>
+        <p:spPr>
+          <a:xfrm xmlns:a="http://schemas.openxmlformats.org/drawingml/2006/main" flipH="1">
+            <a:off x="1864995" y="2209229"/>
+            <a:ext cx="9525" cy="3572447"/>
+          </a:xfrm>
+          <a:prstGeom xmlns:a="http://schemas.openxmlformats.org/drawingml/2006/main" prst="straightConnector1">
+            <a:avLst/>
+          </a:prstGeom>
+          <a:ln xmlns:a="http://schemas.openxmlformats.org/drawingml/2006/main" w="19050">
+            <a:solidFill>
+              <a:srgbClr val="597387"/>
+            </a:solidFill>
+            <a:prstDash val="dash"/>
+          </a:ln>
+        </p:spPr>
+      </p:cxnSp>
+      <p:sp>
+        <p:nvSpPr>
+          <p:cNvPr id="7" name="">
+            <a:extLst xmlns:a="http://schemas.openxmlformats.org/drawingml/2006/main">
+              <a:ext uri="{FF2B5EF4-FFF2-40B4-BE49-F238E27FC236}">
+                <a16:creationId xmlns:a16="http://schemas.microsoft.com/office/drawing/2014/main" id="{37FEBC53-40F5-4B81-935D-D3BB251180A2}"/>
+              </a:ext>
+            </a:extLst>
+          </p:cNvPr>
+          <p:cNvSpPr>
+            <a:spLocks xmlns:a="http://schemas.openxmlformats.org/drawingml/2006/main" noGrp="1"/>
+          </p:cNvSpPr>
+          <p:nvPr/>
+        </p:nvSpPr>
+        <p:spPr>
+          <a:xfrm xmlns:a="http://schemas.openxmlformats.org/drawingml/2006/main">
+            <a:off x="5043488" y="1658303"/>
+            <a:ext cx="2059305" cy="519303"/>
+          </a:xfrm>
+          <a:prstGeom xmlns:a="http://schemas.openxmlformats.org/drawingml/2006/main" prst="rect">
+            <a:avLst/>
+          </a:prstGeom>
+          <a:solidFill xmlns:a="http://schemas.openxmlformats.org/drawingml/2006/main">
+            <a:srgbClr val="F1F5F8"/>
+          </a:solidFill>
+          <a:ln xmlns:a="http://schemas.openxmlformats.org/drawingml/2006/main" w="14288">
+            <a:solidFill>
+              <a:srgbClr val="9AAFC0"/>
+            </a:solidFill>
+          </a:ln>
+        </p:spPr>
+        <p:txBody>
+          <a:bodyPr xmlns:a="http://schemas.openxmlformats.org/drawingml/2006/main" anchor="ctr">
+            <a:noAutofit/>
+          </a:bodyPr>
+          <a:lstStyle xmlns:a="http://schemas.openxmlformats.org/drawingml/2006/main"/>
+          <a:p xmlns:a="http://schemas.openxmlformats.org/drawingml/2006/main">
+            <a:pPr algn="ctr">
+              <a:defRPr sz="1833">
+                <a:solidFill>
+                  <a:srgbClr val="172C3D"/>
+                </a:solidFill>
+                <a:latin typeface="PingFang SC"/>
+                <a:ea typeface="PingFang SC"/>
+                <a:cs typeface="PingFang SC"/>
+              </a:defRPr>
+            </a:pPr>
+            <a:r>
+              <a:rPr sz="1833">
+                <a:solidFill>
+                  <a:srgbClr val="172C3D"/>
+                </a:solidFill>
+                <a:latin typeface="PingFang SC"/>
+                <a:ea typeface="PingFang SC"/>
+                <a:cs typeface="PingFang SC"/>
+              </a:rPr>
+              <a:t>PagedMemory</a:t>
+            </a:r>
+          </a:p>
+        </p:txBody>
+      </p:sp>
+      <p:sp>
+        <p:nvSpPr>
+          <p:cNvPr id="8" name="">
+            <a:extLst xmlns:a="http://schemas.openxmlformats.org/drawingml/2006/main">
+              <a:ext uri="{FF2B5EF4-FFF2-40B4-BE49-F238E27FC236}">
+                <a16:creationId xmlns:a16="http://schemas.microsoft.com/office/drawing/2014/main" id="{01C33896-F75E-424C-856A-0CBC97F2F4E9}"/>
+              </a:ext>
+            </a:extLst>
+          </p:cNvPr>
+          <p:cNvSpPr>
+            <a:spLocks xmlns:a="http://schemas.openxmlformats.org/drawingml/2006/main" noGrp="1"/>
+          </p:cNvSpPr>
+          <p:nvPr/>
+        </p:nvSpPr>
+        <p:spPr>
+          <a:xfrm xmlns:a="http://schemas.openxmlformats.org/drawingml/2006/main">
+            <a:off x="6073140" y="2204466"/>
+            <a:ext cx="9525" cy="9525"/>
+          </a:xfrm>
+          <a:prstGeom xmlns:a="http://schemas.openxmlformats.org/drawingml/2006/main" prst="rect">
+            <a:avLst/>
+          </a:prstGeom>
+          <a:noFill xmlns:a="http://schemas.openxmlformats.org/drawingml/2006/main"/>
+          <a:ln xmlns:a="http://schemas.openxmlformats.org/drawingml/2006/main" w="0">
+            <a:noFill/>
+          </a:ln>
+        </p:spPr>
+      </p:sp>
+      <p:sp>
+        <p:nvSpPr>
+          <p:cNvPr id="9" name="">
+            <a:extLst xmlns:a="http://schemas.openxmlformats.org/drawingml/2006/main">
+              <a:ext uri="{FF2B5EF4-FFF2-40B4-BE49-F238E27FC236}">
+                <a16:creationId xmlns:a16="http://schemas.microsoft.com/office/drawing/2014/main" id="{8F6BCF68-CCFE-4326-B1A0-0F595CF3C5C9}"/>
+              </a:ext>
+            </a:extLst>
+          </p:cNvPr>
+          <p:cNvSpPr>
+            <a:spLocks xmlns:a="http://schemas.openxmlformats.org/drawingml/2006/main" noGrp="1"/>
+          </p:cNvSpPr>
+          <p:nvPr/>
+        </p:nvSpPr>
+        <p:spPr>
+          <a:xfrm xmlns:a="http://schemas.openxmlformats.org/drawingml/2006/main">
+            <a:off x="6073140" y="5776913"/>
+            <a:ext cx="9525" cy="9525"/>
+          </a:xfrm>
+          <a:prstGeom xmlns:a="http://schemas.openxmlformats.org/drawingml/2006/main" prst="rect">
+            <a:avLst/>
+          </a:prstGeom>
+          <a:noFill xmlns:a="http://schemas.openxmlformats.org/drawingml/2006/main"/>
+          <a:ln xmlns:a="http://schemas.openxmlformats.org/drawingml/2006/main" w="0">
+            <a:noFill/>
+          </a:ln>
+        </p:spPr>
+      </p:sp>
+      <p:cxnSp>
+        <p:nvCxnSpPr>
+          <p:cNvPr id="44" name=""/>
+          <p:cNvCxnSpPr>
+            <a:stCxn xmlns:a="http://schemas.openxmlformats.org/drawingml/2006/main" id="8" idx="3"/>
+            <a:endCxn xmlns:a="http://schemas.openxmlformats.org/drawingml/2006/main" id="9" idx="1"/>
+          </p:cNvCxnSpPr>
+          <p:nvPr/>
+        </p:nvCxnSpPr>
+        <p:spPr>
+          <a:xfrm xmlns:a="http://schemas.openxmlformats.org/drawingml/2006/main" flipH="1">
+            <a:off x="6073140" y="2209229"/>
+            <a:ext cx="9525" cy="3572447"/>
+          </a:xfrm>
+          <a:prstGeom xmlns:a="http://schemas.openxmlformats.org/drawingml/2006/main" prst="straightConnector1">
+            <a:avLst/>
+          </a:prstGeom>
+          <a:ln xmlns:a="http://schemas.openxmlformats.org/drawingml/2006/main" w="19050">
+            <a:solidFill>
+              <a:srgbClr val="597387"/>
+            </a:solidFill>
+            <a:prstDash val="dash"/>
+          </a:ln>
+        </p:spPr>
+      </p:cxnSp>
+      <p:sp>
+        <p:nvSpPr>
+          <p:cNvPr id="11" name="">
+            <a:extLst xmlns:a="http://schemas.openxmlformats.org/drawingml/2006/main">
+              <a:ext uri="{FF2B5EF4-FFF2-40B4-BE49-F238E27FC236}">
+                <a16:creationId xmlns:a16="http://schemas.microsoft.com/office/drawing/2014/main" id="{1DC1161C-C68B-4981-BD61-663EA20CA543}"/>
+              </a:ext>
+            </a:extLst>
+          </p:cNvPr>
+          <p:cNvSpPr>
+            <a:spLocks xmlns:a="http://schemas.openxmlformats.org/drawingml/2006/main" noGrp="1"/>
+          </p:cNvSpPr>
+          <p:nvPr/>
+        </p:nvSpPr>
+        <p:spPr>
+          <a:xfrm xmlns:a="http://schemas.openxmlformats.org/drawingml/2006/main">
+            <a:off x="9251633" y="1658303"/>
+            <a:ext cx="2059305" cy="519303"/>
+          </a:xfrm>
+          <a:prstGeom xmlns:a="http://schemas.openxmlformats.org/drawingml/2006/main" prst="rect">
+            <a:avLst/>
+          </a:prstGeom>
+          <a:solidFill xmlns:a="http://schemas.openxmlformats.org/drawingml/2006/main">
+            <a:srgbClr val="F1F5F8"/>
+          </a:solidFill>
+          <a:ln xmlns:a="http://schemas.openxmlformats.org/drawingml/2006/main" w="14288">
+            <a:solidFill>
+              <a:srgbClr val="9AAFC0"/>
+            </a:solidFill>
+          </a:ln>
+        </p:spPr>
+        <p:txBody>
+          <a:bodyPr xmlns:a="http://schemas.openxmlformats.org/drawingml/2006/main" anchor="ctr">
+            <a:noAutofit/>
+          </a:bodyPr>
+          <a:lstStyle xmlns:a="http://schemas.openxmlformats.org/drawingml/2006/main"/>
+          <a:p xmlns:a="http://schemas.openxmlformats.org/drawingml/2006/main">
+            <a:pPr algn="ctr">
+              <a:defRPr sz="1833">
+                <a:solidFill>
+                  <a:srgbClr val="172C3D"/>
+                </a:solidFill>
+                <a:latin typeface="PingFang SC"/>
+                <a:ea typeface="PingFang SC"/>
+                <a:cs typeface="PingFang SC"/>
+              </a:defRPr>
+            </a:pPr>
+            <a:r>
+              <a:rPr sz="1833">
+                <a:solidFill>
+                  <a:srgbClr val="172C3D"/>
+                </a:solidFill>
+                <a:latin typeface="PingFang SC"/>
+                <a:ea typeface="PingFang SC"/>
+                <a:cs typeface="PingFang SC"/>
+              </a:rPr>
+              <a:t>存储后端</a:t>
+            </a:r>
+          </a:p>
+        </p:txBody>
+      </p:sp>
+      <p:sp>
+        <p:nvSpPr>
+          <p:cNvPr id="12" name="">
+            <a:extLst xmlns:a="http://schemas.openxmlformats.org/drawingml/2006/main">
+              <a:ext uri="{FF2B5EF4-FFF2-40B4-BE49-F238E27FC236}">
+                <a16:creationId xmlns:a16="http://schemas.microsoft.com/office/drawing/2014/main" id="{E54A9AF2-2FF3-4ED3-8026-41A64B271147}"/>
+              </a:ext>
+            </a:extLst>
+          </p:cNvPr>
+          <p:cNvSpPr>
+            <a:spLocks xmlns:a="http://schemas.openxmlformats.org/drawingml/2006/main" noGrp="1"/>
+          </p:cNvSpPr>
+          <p:nvPr/>
+        </p:nvSpPr>
+        <p:spPr>
+          <a:xfrm xmlns:a="http://schemas.openxmlformats.org/drawingml/2006/main">
+            <a:off x="10281285" y="2204466"/>
+            <a:ext cx="9525" cy="9525"/>
+          </a:xfrm>
+          <a:prstGeom xmlns:a="http://schemas.openxmlformats.org/drawingml/2006/main" prst="rect">
+            <a:avLst/>
+          </a:prstGeom>
+          <a:noFill xmlns:a="http://schemas.openxmlformats.org/drawingml/2006/main"/>
+          <a:ln xmlns:a="http://schemas.openxmlformats.org/drawingml/2006/main" w="0">
+            <a:noFill/>
+          </a:ln>
+        </p:spPr>
+      </p:sp>
+      <p:sp>
+        <p:nvSpPr>
+          <p:cNvPr id="13" name="">
+            <a:extLst xmlns:a="http://schemas.openxmlformats.org/drawingml/2006/main">
+              <a:ext uri="{FF2B5EF4-FFF2-40B4-BE49-F238E27FC236}">
+                <a16:creationId xmlns:a16="http://schemas.microsoft.com/office/drawing/2014/main" id="{279BCBAD-124B-4EB1-82DE-D813BFD286FC}"/>
+              </a:ext>
+            </a:extLst>
+          </p:cNvPr>
+          <p:cNvSpPr>
+            <a:spLocks xmlns:a="http://schemas.openxmlformats.org/drawingml/2006/main" noGrp="1"/>
+          </p:cNvSpPr>
+          <p:nvPr/>
+        </p:nvSpPr>
+        <p:spPr>
+          <a:xfrm xmlns:a="http://schemas.openxmlformats.org/drawingml/2006/main">
+            <a:off x="10281285" y="5776913"/>
+            <a:ext cx="9525" cy="9525"/>
+          </a:xfrm>
+          <a:prstGeom xmlns:a="http://schemas.openxmlformats.org/drawingml/2006/main" prst="rect">
+            <a:avLst/>
+          </a:prstGeom>
+          <a:noFill xmlns:a="http://schemas.openxmlformats.org/drawingml/2006/main"/>
+          <a:ln xmlns:a="http://schemas.openxmlformats.org/drawingml/2006/main" w="0">
+            <a:noFill/>
+          </a:ln>
+        </p:spPr>
+      </p:sp>
+      <p:cxnSp>
+        <p:nvCxnSpPr>
+          <p:cNvPr id="48" name=""/>
+          <p:cNvCxnSpPr>
+            <a:stCxn xmlns:a="http://schemas.openxmlformats.org/drawingml/2006/main" id="12" idx="3"/>
+            <a:endCxn xmlns:a="http://schemas.openxmlformats.org/drawingml/2006/main" id="13" idx="1"/>
+          </p:cNvCxnSpPr>
+          <p:nvPr/>
+        </p:nvCxnSpPr>
+        <p:spPr>
+          <a:xfrm xmlns:a="http://schemas.openxmlformats.org/drawingml/2006/main" flipH="1">
+            <a:off x="10281285" y="2209229"/>
+            <a:ext cx="9525" cy="3572447"/>
+          </a:xfrm>
+          <a:prstGeom xmlns:a="http://schemas.openxmlformats.org/drawingml/2006/main" prst="straightConnector1">
+            <a:avLst/>
+          </a:prstGeom>
+          <a:ln xmlns:a="http://schemas.openxmlformats.org/drawingml/2006/main" w="19050">
+            <a:solidFill>
+              <a:srgbClr val="597387"/>
+            </a:solidFill>
+            <a:prstDash val="dash"/>
+          </a:ln>
+        </p:spPr>
+      </p:cxnSp>
+      <p:sp>
+        <p:nvSpPr>
+          <p:cNvPr id="15" name="">
+            <a:extLst xmlns:a="http://schemas.openxmlformats.org/drawingml/2006/main">
+              <a:ext uri="{FF2B5EF4-FFF2-40B4-BE49-F238E27FC236}">
+                <a16:creationId xmlns:a16="http://schemas.microsoft.com/office/drawing/2014/main" id="{16252B50-DDAC-4894-8312-6CC0DC6A9BF2}"/>
+              </a:ext>
+            </a:extLst>
+          </p:cNvPr>
+          <p:cNvSpPr>
+            <a:spLocks xmlns:a="http://schemas.openxmlformats.org/drawingml/2006/main" noGrp="1"/>
+          </p:cNvSpPr>
+          <p:nvPr/>
+        </p:nvSpPr>
+        <p:spPr>
+          <a:xfrm xmlns:a="http://schemas.openxmlformats.org/drawingml/2006/main">
+            <a:off x="1864995" y="2553653"/>
+            <a:ext cx="9525" cy="9525"/>
+          </a:xfrm>
+          <a:prstGeom xmlns:a="http://schemas.openxmlformats.org/drawingml/2006/main" prst="rect">
+            <a:avLst/>
+          </a:prstGeom>
+          <a:noFill xmlns:a="http://schemas.openxmlformats.org/drawingml/2006/main"/>
+          <a:ln xmlns:a="http://schemas.openxmlformats.org/drawingml/2006/main" w="0">
+            <a:noFill/>
+          </a:ln>
+        </p:spPr>
+      </p:sp>
+      <p:sp>
+        <p:nvSpPr>
+          <p:cNvPr id="16" name="">
+            <a:extLst xmlns:a="http://schemas.openxmlformats.org/drawingml/2006/main">
+              <a:ext uri="{FF2B5EF4-FFF2-40B4-BE49-F238E27FC236}">
+                <a16:creationId xmlns:a16="http://schemas.microsoft.com/office/drawing/2014/main" id="{E21ACB14-0CCF-43B7-B658-6296C63DB5CC}"/>
+              </a:ext>
+            </a:extLst>
+          </p:cNvPr>
+          <p:cNvSpPr>
+            <a:spLocks xmlns:a="http://schemas.openxmlformats.org/drawingml/2006/main" noGrp="1"/>
+          </p:cNvSpPr>
+          <p:nvPr/>
+        </p:nvSpPr>
+        <p:spPr>
+          <a:xfrm xmlns:a="http://schemas.openxmlformats.org/drawingml/2006/main">
+            <a:off x="6073140" y="2553653"/>
+            <a:ext cx="9525" cy="9525"/>
+          </a:xfrm>
+          <a:prstGeom xmlns:a="http://schemas.openxmlformats.org/drawingml/2006/main" prst="rect">
+            <a:avLst/>
+          </a:prstGeom>
+          <a:noFill xmlns:a="http://schemas.openxmlformats.org/drawingml/2006/main"/>
+          <a:ln xmlns:a="http://schemas.openxmlformats.org/drawingml/2006/main" w="0">
+            <a:noFill/>
+          </a:ln>
+        </p:spPr>
+      </p:sp>
+      <p:cxnSp>
+        <p:nvCxnSpPr>
+          <p:cNvPr id="51" name=""/>
+          <p:cNvCxnSpPr>
+            <a:stCxn xmlns:a="http://schemas.openxmlformats.org/drawingml/2006/main" id="15" idx="3"/>
+            <a:endCxn xmlns:a="http://schemas.openxmlformats.org/drawingml/2006/main" id="16" idx="1"/>
+          </p:cNvCxnSpPr>
+          <p:nvPr/>
+        </p:nvCxnSpPr>
+        <p:spPr>
+          <a:xfrm xmlns:a="http://schemas.openxmlformats.org/drawingml/2006/main">
+            <a:off x="1874520" y="2558416"/>
+            <a:ext cx="4198620" cy="0"/>
+          </a:xfrm>
+          <a:prstGeom xmlns:a="http://schemas.openxmlformats.org/drawingml/2006/main" prst="straightConnector1">
+            <a:avLst/>
+          </a:prstGeom>
+          <a:ln xmlns:a="http://schemas.openxmlformats.org/drawingml/2006/main" w="19050">
+            <a:solidFill>
+              <a:srgbClr val="597387"/>
+            </a:solidFill>
+            <a:prstDash val="solid"/>
+            <a:tailEnd type="arrow" w="med" len="med"/>
+          </a:ln>
+        </p:spPr>
+      </p:cxnSp>
+      <p:sp>
+        <p:nvSpPr>
+          <p:cNvPr id="18" name="">
+            <a:extLst xmlns:a="http://schemas.openxmlformats.org/drawingml/2006/main">
+              <a:ext uri="{FF2B5EF4-FFF2-40B4-BE49-F238E27FC236}">
+                <a16:creationId xmlns:a16="http://schemas.microsoft.com/office/drawing/2014/main" id="{1AADCE24-9213-42A6-9E6C-945DC51BBD2E}"/>
+              </a:ext>
+            </a:extLst>
+          </p:cNvPr>
+          <p:cNvSpPr>
+            <a:spLocks xmlns:a="http://schemas.openxmlformats.org/drawingml/2006/main" noGrp="1"/>
+          </p:cNvSpPr>
+          <p:nvPr/>
+        </p:nvSpPr>
+        <p:spPr>
+          <a:xfrm xmlns:a="http://schemas.openxmlformats.org/drawingml/2006/main">
+            <a:off x="1954530" y="2186559"/>
+            <a:ext cx="4029075" cy="340233"/>
           </a:xfrm>
           <a:prstGeom xmlns:a="http://schemas.openxmlformats.org/drawingml/2006/main" prst="rect">
             <a:avLst/>
@@ -3373,9 +7477,9 @@
           <a:lstStyle xmlns:a="http://schemas.openxmlformats.org/drawingml/2006/main"/>
           <a:p xmlns:a="http://schemas.openxmlformats.org/drawingml/2006/main">
             <a:pPr>
-              <a:defRPr sz="1725" b="0">
-                <a:solidFill>
-                  <a:srgbClr val="263748"/>
+              <a:defRPr sz="1692" b="0">
+                <a:solidFill>
+                  <a:srgbClr val="172C3D"/>
                 </a:solidFill>
                 <a:latin typeface="PingFang SC"/>
                 <a:ea typeface="PingFang SC"/>
@@ -3383,15 +7487,571 @@
               </a:defRPr>
             </a:pPr>
             <a:r>
-              <a:rPr sz="1725" b="0">
-                <a:solidFill>
-                  <a:srgbClr val="263748"/>
+              <a:rPr sz="1692" b="0">
+                <a:solidFill>
+                  <a:srgbClr val="172C3D"/>
                 </a:solidFill>
                 <a:latin typeface="PingFang SC"/>
                 <a:ea typeface="PingFang SC"/>
                 <a:cs typeface="PingFang SC"/>
               </a:rPr>
-              <a:t>换页额外使用 32 个主机页。完成数增加伴随数据搬运代价。</a:t>
+              <a:t>fork 复制映射并增加引用</a:t>
+            </a:r>
+          </a:p>
+        </p:txBody>
+      </p:sp>
+      <p:sp>
+        <p:nvSpPr>
+          <p:cNvPr id="19" name="">
+            <a:extLst xmlns:a="http://schemas.openxmlformats.org/drawingml/2006/main">
+              <a:ext uri="{FF2B5EF4-FFF2-40B4-BE49-F238E27FC236}">
+                <a16:creationId xmlns:a16="http://schemas.microsoft.com/office/drawing/2014/main" id="{F3FFC069-BEB8-49C5-9798-656259502440}"/>
+              </a:ext>
+            </a:extLst>
+          </p:cNvPr>
+          <p:cNvSpPr>
+            <a:spLocks xmlns:a="http://schemas.openxmlformats.org/drawingml/2006/main" noGrp="1"/>
+          </p:cNvSpPr>
+          <p:nvPr/>
+        </p:nvSpPr>
+        <p:spPr>
+          <a:xfrm xmlns:a="http://schemas.openxmlformats.org/drawingml/2006/main">
+            <a:off x="1864995" y="3269932"/>
+            <a:ext cx="9525" cy="9525"/>
+          </a:xfrm>
+          <a:prstGeom xmlns:a="http://schemas.openxmlformats.org/drawingml/2006/main" prst="rect">
+            <a:avLst/>
+          </a:prstGeom>
+          <a:noFill xmlns:a="http://schemas.openxmlformats.org/drawingml/2006/main"/>
+          <a:ln xmlns:a="http://schemas.openxmlformats.org/drawingml/2006/main" w="0">
+            <a:noFill/>
+          </a:ln>
+        </p:spPr>
+      </p:sp>
+      <p:sp>
+        <p:nvSpPr>
+          <p:cNvPr id="20" name="">
+            <a:extLst xmlns:a="http://schemas.openxmlformats.org/drawingml/2006/main">
+              <a:ext uri="{FF2B5EF4-FFF2-40B4-BE49-F238E27FC236}">
+                <a16:creationId xmlns:a16="http://schemas.microsoft.com/office/drawing/2014/main" id="{68305813-E4EE-4F63-878A-6807603C3634}"/>
+              </a:ext>
+            </a:extLst>
+          </p:cNvPr>
+          <p:cNvSpPr>
+            <a:spLocks xmlns:a="http://schemas.openxmlformats.org/drawingml/2006/main" noGrp="1"/>
+          </p:cNvSpPr>
+          <p:nvPr/>
+        </p:nvSpPr>
+        <p:spPr>
+          <a:xfrm xmlns:a="http://schemas.openxmlformats.org/drawingml/2006/main">
+            <a:off x="6073140" y="3269932"/>
+            <a:ext cx="9525" cy="9525"/>
+          </a:xfrm>
+          <a:prstGeom xmlns:a="http://schemas.openxmlformats.org/drawingml/2006/main" prst="rect">
+            <a:avLst/>
+          </a:prstGeom>
+          <a:noFill xmlns:a="http://schemas.openxmlformats.org/drawingml/2006/main"/>
+          <a:ln xmlns:a="http://schemas.openxmlformats.org/drawingml/2006/main" w="0">
+            <a:noFill/>
+          </a:ln>
+        </p:spPr>
+      </p:sp>
+      <p:cxnSp>
+        <p:nvCxnSpPr>
+          <p:cNvPr id="55" name=""/>
+          <p:cNvCxnSpPr>
+            <a:stCxn xmlns:a="http://schemas.openxmlformats.org/drawingml/2006/main" id="19" idx="3"/>
+            <a:endCxn xmlns:a="http://schemas.openxmlformats.org/drawingml/2006/main" id="20" idx="1"/>
+          </p:cNvCxnSpPr>
+          <p:nvPr/>
+        </p:nvCxnSpPr>
+        <p:spPr>
+          <a:xfrm xmlns:a="http://schemas.openxmlformats.org/drawingml/2006/main">
+            <a:off x="1874520" y="3274695"/>
+            <a:ext cx="4198620" cy="0"/>
+          </a:xfrm>
+          <a:prstGeom xmlns:a="http://schemas.openxmlformats.org/drawingml/2006/main" prst="straightConnector1">
+            <a:avLst/>
+          </a:prstGeom>
+          <a:ln xmlns:a="http://schemas.openxmlformats.org/drawingml/2006/main" w="19050">
+            <a:solidFill>
+              <a:srgbClr val="597387"/>
+            </a:solidFill>
+            <a:prstDash val="solid"/>
+            <a:tailEnd type="arrow" w="med" len="med"/>
+          </a:ln>
+        </p:spPr>
+      </p:cxnSp>
+      <p:sp>
+        <p:nvSpPr>
+          <p:cNvPr id="22" name="">
+            <a:extLst xmlns:a="http://schemas.openxmlformats.org/drawingml/2006/main">
+              <a:ext uri="{FF2B5EF4-FFF2-40B4-BE49-F238E27FC236}">
+                <a16:creationId xmlns:a16="http://schemas.microsoft.com/office/drawing/2014/main" id="{4DC45E43-2B24-43EE-9E17-C7FA0234E8D8}"/>
+              </a:ext>
+            </a:extLst>
+          </p:cNvPr>
+          <p:cNvSpPr>
+            <a:spLocks xmlns:a="http://schemas.openxmlformats.org/drawingml/2006/main" noGrp="1"/>
+          </p:cNvSpPr>
+          <p:nvPr/>
+        </p:nvSpPr>
+        <p:spPr>
+          <a:xfrm xmlns:a="http://schemas.openxmlformats.org/drawingml/2006/main">
+            <a:off x="1954530" y="2902839"/>
+            <a:ext cx="4029075" cy="340233"/>
+          </a:xfrm>
+          <a:prstGeom xmlns:a="http://schemas.openxmlformats.org/drawingml/2006/main" prst="rect">
+            <a:avLst/>
+          </a:prstGeom>
+          <a:noFill xmlns:a="http://schemas.openxmlformats.org/drawingml/2006/main"/>
+          <a:ln xmlns:a="http://schemas.openxmlformats.org/drawingml/2006/main" w="0">
+            <a:noFill/>
+          </a:ln>
+        </p:spPr>
+        <p:txBody>
+          <a:bodyPr xmlns:a="http://schemas.openxmlformats.org/drawingml/2006/main">
+            <a:noAutofit/>
+          </a:bodyPr>
+          <a:lstStyle xmlns:a="http://schemas.openxmlformats.org/drawingml/2006/main"/>
+          <a:p xmlns:a="http://schemas.openxmlformats.org/drawingml/2006/main">
+            <a:pPr>
+              <a:defRPr sz="1692" b="0">
+                <a:solidFill>
+                  <a:srgbClr val="172C3D"/>
+                </a:solidFill>
+                <a:latin typeface="PingFang SC"/>
+                <a:ea typeface="PingFang SC"/>
+                <a:cs typeface="PingFang SC"/>
+              </a:defRPr>
+            </a:pPr>
+            <a:r>
+              <a:rPr sz="1692" b="0">
+                <a:solidFill>
+                  <a:srgbClr val="172C3D"/>
+                </a:solidFill>
+                <a:latin typeface="PingFang SC"/>
+                <a:ea typeface="PingFang SC"/>
+                <a:cs typeface="PingFang SC"/>
+              </a:rPr>
+              <a:t>追加 token 到共享尾页</a:t>
+            </a:r>
+          </a:p>
+        </p:txBody>
+      </p:sp>
+      <p:sp>
+        <p:nvSpPr>
+          <p:cNvPr id="23" name="">
+            <a:extLst xmlns:a="http://schemas.openxmlformats.org/drawingml/2006/main">
+              <a:ext uri="{FF2B5EF4-FFF2-40B4-BE49-F238E27FC236}">
+                <a16:creationId xmlns:a16="http://schemas.microsoft.com/office/drawing/2014/main" id="{995B6D23-122F-4F13-AEC2-CC37BA935B3C}"/>
+              </a:ext>
+            </a:extLst>
+          </p:cNvPr>
+          <p:cNvSpPr>
+            <a:spLocks xmlns:a="http://schemas.openxmlformats.org/drawingml/2006/main" noGrp="1"/>
+          </p:cNvSpPr>
+          <p:nvPr/>
+        </p:nvSpPr>
+        <p:spPr>
+          <a:xfrm xmlns:a="http://schemas.openxmlformats.org/drawingml/2006/main">
+            <a:off x="6073140" y="3986213"/>
+            <a:ext cx="9525" cy="9525"/>
+          </a:xfrm>
+          <a:prstGeom xmlns:a="http://schemas.openxmlformats.org/drawingml/2006/main" prst="rect">
+            <a:avLst/>
+          </a:prstGeom>
+          <a:noFill xmlns:a="http://schemas.openxmlformats.org/drawingml/2006/main"/>
+          <a:ln xmlns:a="http://schemas.openxmlformats.org/drawingml/2006/main" w="0">
+            <a:noFill/>
+          </a:ln>
+        </p:spPr>
+      </p:sp>
+      <p:sp>
+        <p:nvSpPr>
+          <p:cNvPr id="24" name="">
+            <a:extLst xmlns:a="http://schemas.openxmlformats.org/drawingml/2006/main">
+              <a:ext uri="{FF2B5EF4-FFF2-40B4-BE49-F238E27FC236}">
+                <a16:creationId xmlns:a16="http://schemas.microsoft.com/office/drawing/2014/main" id="{2D432FC7-36A5-47AE-AB4F-31CA420E4803}"/>
+              </a:ext>
+            </a:extLst>
+          </p:cNvPr>
+          <p:cNvSpPr>
+            <a:spLocks xmlns:a="http://schemas.openxmlformats.org/drawingml/2006/main" noGrp="1"/>
+          </p:cNvSpPr>
+          <p:nvPr/>
+        </p:nvSpPr>
+        <p:spPr>
+          <a:xfrm xmlns:a="http://schemas.openxmlformats.org/drawingml/2006/main">
+            <a:off x="10281285" y="3986213"/>
+            <a:ext cx="9525" cy="9525"/>
+          </a:xfrm>
+          <a:prstGeom xmlns:a="http://schemas.openxmlformats.org/drawingml/2006/main" prst="rect">
+            <a:avLst/>
+          </a:prstGeom>
+          <a:noFill xmlns:a="http://schemas.openxmlformats.org/drawingml/2006/main"/>
+          <a:ln xmlns:a="http://schemas.openxmlformats.org/drawingml/2006/main" w="0">
+            <a:noFill/>
+          </a:ln>
+        </p:spPr>
+      </p:sp>
+      <p:cxnSp>
+        <p:nvCxnSpPr>
+          <p:cNvPr id="59" name=""/>
+          <p:cNvCxnSpPr>
+            <a:stCxn xmlns:a="http://schemas.openxmlformats.org/drawingml/2006/main" id="23" idx="3"/>
+            <a:endCxn xmlns:a="http://schemas.openxmlformats.org/drawingml/2006/main" id="24" idx="1"/>
+          </p:cNvCxnSpPr>
+          <p:nvPr/>
+        </p:nvCxnSpPr>
+        <p:spPr>
+          <a:xfrm xmlns:a="http://schemas.openxmlformats.org/drawingml/2006/main">
+            <a:off x="6082665" y="3990976"/>
+            <a:ext cx="4198620" cy="0"/>
+          </a:xfrm>
+          <a:prstGeom xmlns:a="http://schemas.openxmlformats.org/drawingml/2006/main" prst="straightConnector1">
+            <a:avLst/>
+          </a:prstGeom>
+          <a:ln xmlns:a="http://schemas.openxmlformats.org/drawingml/2006/main" w="19050">
+            <a:solidFill>
+              <a:srgbClr val="597387"/>
+            </a:solidFill>
+            <a:prstDash val="solid"/>
+            <a:tailEnd type="arrow" w="med" len="med"/>
+          </a:ln>
+        </p:spPr>
+      </p:cxnSp>
+      <p:sp>
+        <p:nvSpPr>
+          <p:cNvPr id="26" name="">
+            <a:extLst xmlns:a="http://schemas.openxmlformats.org/drawingml/2006/main">
+              <a:ext uri="{FF2B5EF4-FFF2-40B4-BE49-F238E27FC236}">
+                <a16:creationId xmlns:a16="http://schemas.microsoft.com/office/drawing/2014/main" id="{F7CB44E3-6F64-4AF1-AA84-62B65764C20E}"/>
+              </a:ext>
+            </a:extLst>
+          </p:cNvPr>
+          <p:cNvSpPr>
+            <a:spLocks xmlns:a="http://schemas.openxmlformats.org/drawingml/2006/main" noGrp="1"/>
+          </p:cNvSpPr>
+          <p:nvPr/>
+        </p:nvSpPr>
+        <p:spPr>
+          <a:xfrm xmlns:a="http://schemas.openxmlformats.org/drawingml/2006/main">
+            <a:off x="6162675" y="3619119"/>
+            <a:ext cx="4029075" cy="340233"/>
+          </a:xfrm>
+          <a:prstGeom xmlns:a="http://schemas.openxmlformats.org/drawingml/2006/main" prst="rect">
+            <a:avLst/>
+          </a:prstGeom>
+          <a:noFill xmlns:a="http://schemas.openxmlformats.org/drawingml/2006/main"/>
+          <a:ln xmlns:a="http://schemas.openxmlformats.org/drawingml/2006/main" w="0">
+            <a:noFill/>
+          </a:ln>
+        </p:spPr>
+        <p:txBody>
+          <a:bodyPr xmlns:a="http://schemas.openxmlformats.org/drawingml/2006/main">
+            <a:noAutofit/>
+          </a:bodyPr>
+          <a:lstStyle xmlns:a="http://schemas.openxmlformats.org/drawingml/2006/main"/>
+          <a:p xmlns:a="http://schemas.openxmlformats.org/drawingml/2006/main">
+            <a:pPr>
+              <a:defRPr sz="1692" b="0">
+                <a:solidFill>
+                  <a:srgbClr val="172C3D"/>
+                </a:solidFill>
+                <a:latin typeface="PingFang SC"/>
+                <a:ea typeface="PingFang SC"/>
+                <a:cs typeface="PingFang SC"/>
+              </a:defRPr>
+            </a:pPr>
+            <a:r>
+              <a:rPr sz="1692" b="0">
+                <a:solidFill>
+                  <a:srgbClr val="172C3D"/>
+                </a:solidFill>
+                <a:latin typeface="PingFang SC"/>
+                <a:ea typeface="PingFang SC"/>
+                <a:cs typeface="PingFang SC"/>
+              </a:rPr>
+              <a:t>分配新页并复制内容</a:t>
+            </a:r>
+          </a:p>
+        </p:txBody>
+      </p:sp>
+      <p:sp>
+        <p:nvSpPr>
+          <p:cNvPr id="27" name="">
+            <a:extLst xmlns:a="http://schemas.openxmlformats.org/drawingml/2006/main">
+              <a:ext uri="{FF2B5EF4-FFF2-40B4-BE49-F238E27FC236}">
+                <a16:creationId xmlns:a16="http://schemas.microsoft.com/office/drawing/2014/main" id="{4B63BCD5-DB4F-4054-9161-E9FCDB0FF2CA}"/>
+              </a:ext>
+            </a:extLst>
+          </p:cNvPr>
+          <p:cNvSpPr>
+            <a:spLocks xmlns:a="http://schemas.openxmlformats.org/drawingml/2006/main" noGrp="1"/>
+          </p:cNvSpPr>
+          <p:nvPr/>
+        </p:nvSpPr>
+        <p:spPr>
+          <a:xfrm xmlns:a="http://schemas.openxmlformats.org/drawingml/2006/main">
+            <a:off x="10281285" y="4702493"/>
+            <a:ext cx="9525" cy="9525"/>
+          </a:xfrm>
+          <a:prstGeom xmlns:a="http://schemas.openxmlformats.org/drawingml/2006/main" prst="rect">
+            <a:avLst/>
+          </a:prstGeom>
+          <a:noFill xmlns:a="http://schemas.openxmlformats.org/drawingml/2006/main"/>
+          <a:ln xmlns:a="http://schemas.openxmlformats.org/drawingml/2006/main" w="0">
+            <a:noFill/>
+          </a:ln>
+        </p:spPr>
+      </p:sp>
+      <p:sp>
+        <p:nvSpPr>
+          <p:cNvPr id="28" name="">
+            <a:extLst xmlns:a="http://schemas.openxmlformats.org/drawingml/2006/main">
+              <a:ext uri="{FF2B5EF4-FFF2-40B4-BE49-F238E27FC236}">
+                <a16:creationId xmlns:a16="http://schemas.microsoft.com/office/drawing/2014/main" id="{19FB9F48-E23B-4158-978D-D234B44D943F}"/>
+              </a:ext>
+            </a:extLst>
+          </p:cNvPr>
+          <p:cNvSpPr>
+            <a:spLocks xmlns:a="http://schemas.openxmlformats.org/drawingml/2006/main" noGrp="1"/>
+          </p:cNvSpPr>
+          <p:nvPr/>
+        </p:nvSpPr>
+        <p:spPr>
+          <a:xfrm xmlns:a="http://schemas.openxmlformats.org/drawingml/2006/main">
+            <a:off x="6073140" y="4702493"/>
+            <a:ext cx="9525" cy="9525"/>
+          </a:xfrm>
+          <a:prstGeom xmlns:a="http://schemas.openxmlformats.org/drawingml/2006/main" prst="rect">
+            <a:avLst/>
+          </a:prstGeom>
+          <a:noFill xmlns:a="http://schemas.openxmlformats.org/drawingml/2006/main"/>
+          <a:ln xmlns:a="http://schemas.openxmlformats.org/drawingml/2006/main" w="0">
+            <a:noFill/>
+          </a:ln>
+        </p:spPr>
+      </p:sp>
+      <p:cxnSp>
+        <p:nvCxnSpPr>
+          <p:cNvPr id="63" name=""/>
+          <p:cNvCxnSpPr>
+            <a:stCxn xmlns:a="http://schemas.openxmlformats.org/drawingml/2006/main" id="27" idx="3"/>
+            <a:endCxn xmlns:a="http://schemas.openxmlformats.org/drawingml/2006/main" id="28" idx="1"/>
+          </p:cNvCxnSpPr>
+          <p:nvPr/>
+        </p:nvCxnSpPr>
+        <p:spPr>
+          <a:xfrm xmlns:a="http://schemas.openxmlformats.org/drawingml/2006/main" flipH="1">
+            <a:off x="6073140" y="4707256"/>
+            <a:ext cx="4217670" cy="0"/>
+          </a:xfrm>
+          <a:prstGeom xmlns:a="http://schemas.openxmlformats.org/drawingml/2006/main" prst="straightConnector1">
+            <a:avLst/>
+          </a:prstGeom>
+          <a:ln xmlns:a="http://schemas.openxmlformats.org/drawingml/2006/main" w="19050">
+            <a:solidFill>
+              <a:srgbClr val="597387"/>
+            </a:solidFill>
+            <a:prstDash val="solid"/>
+            <a:tailEnd type="arrow" w="med" len="med"/>
+          </a:ln>
+        </p:spPr>
+      </p:cxnSp>
+      <p:sp>
+        <p:nvSpPr>
+          <p:cNvPr id="30" name="">
+            <a:extLst xmlns:a="http://schemas.openxmlformats.org/drawingml/2006/main">
+              <a:ext uri="{FF2B5EF4-FFF2-40B4-BE49-F238E27FC236}">
+                <a16:creationId xmlns:a16="http://schemas.microsoft.com/office/drawing/2014/main" id="{257C55D5-5518-4EDE-8492-C8DD60B3178A}"/>
+              </a:ext>
+            </a:extLst>
+          </p:cNvPr>
+          <p:cNvSpPr>
+            <a:spLocks xmlns:a="http://schemas.openxmlformats.org/drawingml/2006/main" noGrp="1"/>
+          </p:cNvSpPr>
+          <p:nvPr/>
+        </p:nvSpPr>
+        <p:spPr>
+          <a:xfrm xmlns:a="http://schemas.openxmlformats.org/drawingml/2006/main">
+            <a:off x="6162675" y="4335399"/>
+            <a:ext cx="4029075" cy="340233"/>
+          </a:xfrm>
+          <a:prstGeom xmlns:a="http://schemas.openxmlformats.org/drawingml/2006/main" prst="rect">
+            <a:avLst/>
+          </a:prstGeom>
+          <a:noFill xmlns:a="http://schemas.openxmlformats.org/drawingml/2006/main"/>
+          <a:ln xmlns:a="http://schemas.openxmlformats.org/drawingml/2006/main" w="0">
+            <a:noFill/>
+          </a:ln>
+        </p:spPr>
+        <p:txBody>
+          <a:bodyPr xmlns:a="http://schemas.openxmlformats.org/drawingml/2006/main">
+            <a:noAutofit/>
+          </a:bodyPr>
+          <a:lstStyle xmlns:a="http://schemas.openxmlformats.org/drawingml/2006/main"/>
+          <a:p xmlns:a="http://schemas.openxmlformats.org/drawingml/2006/main">
+            <a:pPr>
+              <a:defRPr sz="1692" b="0">
+                <a:solidFill>
+                  <a:srgbClr val="172C3D"/>
+                </a:solidFill>
+                <a:latin typeface="PingFang SC"/>
+                <a:ea typeface="PingFang SC"/>
+                <a:cs typeface="PingFang SC"/>
+              </a:defRPr>
+            </a:pPr>
+            <a:r>
+              <a:rPr sz="1692" b="0">
+                <a:solidFill>
+                  <a:srgbClr val="172C3D"/>
+                </a:solidFill>
+                <a:latin typeface="PingFang SC"/>
+                <a:ea typeface="PingFang SC"/>
+                <a:cs typeface="PingFang SC"/>
+              </a:rPr>
+              <a:t>复制完成</a:t>
+            </a:r>
+          </a:p>
+        </p:txBody>
+      </p:sp>
+      <p:sp>
+        <p:nvSpPr>
+          <p:cNvPr id="31" name="">
+            <a:extLst xmlns:a="http://schemas.openxmlformats.org/drawingml/2006/main">
+              <a:ext uri="{FF2B5EF4-FFF2-40B4-BE49-F238E27FC236}">
+                <a16:creationId xmlns:a16="http://schemas.microsoft.com/office/drawing/2014/main" id="{AF995998-2F89-4B82-8FAF-3C2DBE8FB69B}"/>
+              </a:ext>
+            </a:extLst>
+          </p:cNvPr>
+          <p:cNvSpPr>
+            <a:spLocks xmlns:a="http://schemas.openxmlformats.org/drawingml/2006/main" noGrp="1"/>
+          </p:cNvSpPr>
+          <p:nvPr/>
+        </p:nvSpPr>
+        <p:spPr>
+          <a:xfrm xmlns:a="http://schemas.openxmlformats.org/drawingml/2006/main">
+            <a:off x="6073140" y="5418773"/>
+            <a:ext cx="9525" cy="9525"/>
+          </a:xfrm>
+          <a:prstGeom xmlns:a="http://schemas.openxmlformats.org/drawingml/2006/main" prst="rect">
+            <a:avLst/>
+          </a:prstGeom>
+          <a:noFill xmlns:a="http://schemas.openxmlformats.org/drawingml/2006/main"/>
+          <a:ln xmlns:a="http://schemas.openxmlformats.org/drawingml/2006/main" w="0">
+            <a:noFill/>
+          </a:ln>
+        </p:spPr>
+      </p:sp>
+      <p:sp>
+        <p:nvSpPr>
+          <p:cNvPr id="32" name="">
+            <a:extLst xmlns:a="http://schemas.openxmlformats.org/drawingml/2006/main">
+              <a:ext uri="{FF2B5EF4-FFF2-40B4-BE49-F238E27FC236}">
+                <a16:creationId xmlns:a16="http://schemas.microsoft.com/office/drawing/2014/main" id="{81692DA9-E8EE-4205-9832-B1357626711C}"/>
+              </a:ext>
+            </a:extLst>
+          </p:cNvPr>
+          <p:cNvSpPr>
+            <a:spLocks xmlns:a="http://schemas.openxmlformats.org/drawingml/2006/main" noGrp="1"/>
+          </p:cNvSpPr>
+          <p:nvPr/>
+        </p:nvSpPr>
+        <p:spPr>
+          <a:xfrm xmlns:a="http://schemas.openxmlformats.org/drawingml/2006/main">
+            <a:off x="1864995" y="5418773"/>
+            <a:ext cx="9525" cy="9525"/>
+          </a:xfrm>
+          <a:prstGeom xmlns:a="http://schemas.openxmlformats.org/drawingml/2006/main" prst="rect">
+            <a:avLst/>
+          </a:prstGeom>
+          <a:noFill xmlns:a="http://schemas.openxmlformats.org/drawingml/2006/main"/>
+          <a:ln xmlns:a="http://schemas.openxmlformats.org/drawingml/2006/main" w="0">
+            <a:noFill/>
+          </a:ln>
+        </p:spPr>
+      </p:sp>
+      <p:cxnSp>
+        <p:nvCxnSpPr>
+          <p:cNvPr id="67" name=""/>
+          <p:cNvCxnSpPr>
+            <a:stCxn xmlns:a="http://schemas.openxmlformats.org/drawingml/2006/main" id="31" idx="3"/>
+            <a:endCxn xmlns:a="http://schemas.openxmlformats.org/drawingml/2006/main" id="32" idx="1"/>
+          </p:cNvCxnSpPr>
+          <p:nvPr/>
+        </p:nvCxnSpPr>
+        <p:spPr>
+          <a:xfrm xmlns:a="http://schemas.openxmlformats.org/drawingml/2006/main" flipH="1">
+            <a:off x="1864995" y="5423536"/>
+            <a:ext cx="4217670" cy="0"/>
+          </a:xfrm>
+          <a:prstGeom xmlns:a="http://schemas.openxmlformats.org/drawingml/2006/main" prst="straightConnector1">
+            <a:avLst/>
+          </a:prstGeom>
+          <a:ln xmlns:a="http://schemas.openxmlformats.org/drawingml/2006/main" w="19050">
+            <a:solidFill>
+              <a:srgbClr val="597387"/>
+            </a:solidFill>
+            <a:prstDash val="solid"/>
+            <a:tailEnd type="arrow" w="med" len="med"/>
+          </a:ln>
+        </p:spPr>
+      </p:cxnSp>
+      <p:sp>
+        <p:nvSpPr>
+          <p:cNvPr id="34" name="">
+            <a:extLst xmlns:a="http://schemas.openxmlformats.org/drawingml/2006/main">
+              <a:ext uri="{FF2B5EF4-FFF2-40B4-BE49-F238E27FC236}">
+                <a16:creationId xmlns:a16="http://schemas.microsoft.com/office/drawing/2014/main" id="{6ED7D383-3FFD-46DF-B69F-77E8D6A79D6E}"/>
+              </a:ext>
+            </a:extLst>
+          </p:cNvPr>
+          <p:cNvSpPr>
+            <a:spLocks xmlns:a="http://schemas.openxmlformats.org/drawingml/2006/main" noGrp="1"/>
+          </p:cNvSpPr>
+          <p:nvPr/>
+        </p:nvSpPr>
+        <p:spPr>
+          <a:xfrm xmlns:a="http://schemas.openxmlformats.org/drawingml/2006/main">
+            <a:off x="1954530" y="5051679"/>
+            <a:ext cx="4029075" cy="340233"/>
+          </a:xfrm>
+          <a:prstGeom xmlns:a="http://schemas.openxmlformats.org/drawingml/2006/main" prst="rect">
+            <a:avLst/>
+          </a:prstGeom>
+          <a:noFill xmlns:a="http://schemas.openxmlformats.org/drawingml/2006/main"/>
+          <a:ln xmlns:a="http://schemas.openxmlformats.org/drawingml/2006/main" w="0">
+            <a:noFill/>
+          </a:ln>
+        </p:spPr>
+        <p:txBody>
+          <a:bodyPr xmlns:a="http://schemas.openxmlformats.org/drawingml/2006/main">
+            <a:noAutofit/>
+          </a:bodyPr>
+          <a:lstStyle xmlns:a="http://schemas.openxmlformats.org/drawingml/2006/main"/>
+          <a:p xmlns:a="http://schemas.openxmlformats.org/drawingml/2006/main">
+            <a:pPr>
+              <a:defRPr sz="1692" b="0">
+                <a:solidFill>
+                  <a:srgbClr val="172C3D"/>
+                </a:solidFill>
+                <a:latin typeface="PingFang SC"/>
+                <a:ea typeface="PingFang SC"/>
+                <a:cs typeface="PingFang SC"/>
+              </a:defRPr>
+            </a:pPr>
+            <a:r>
+              <a:rPr sz="1692" b="0">
+                <a:solidFill>
+                  <a:srgbClr val="172C3D"/>
+                </a:solidFill>
+                <a:latin typeface="PingFang SC"/>
+                <a:ea typeface="PingFang SC"/>
+                <a:cs typeface="PingFang SC"/>
+              </a:rPr>
+              <a:t>映射更新与分支写入完成</a:t>
             </a:r>
           </a:p>
         </p:txBody>
@@ -3399,7 +8059,7 @@
     </p:spTree>
     <p:extLst>
       <p:ext uri="{BB962C8B-B14F-4D97-AF65-F5344CB8AC3E}">
-        <p14:creationId xmlns:p14="http://schemas.microsoft.com/office/powerpoint/2010/main" val="172027473"/>
+        <p14:creationId xmlns:p14="http://schemas.microsoft.com/office/powerpoint/2010/main" val="1419184975"/>
       </p:ext>
     </p:extLst>
   </p:cSld>
@@ -3427,10 +8087,10 @@
       </p:grpSpPr>
       <p:sp>
         <p:nvSpPr>
-          <p:cNvPr id="5" name="">
+          <p:cNvPr id="39" name="">
             <a:extLst xmlns:a="http://schemas.openxmlformats.org/drawingml/2006/main">
               <a:ext uri="{FF2B5EF4-FFF2-40B4-BE49-F238E27FC236}">
-                <a16:creationId xmlns:a16="http://schemas.microsoft.com/office/drawing/2014/main" id="{A25D9EF5-8C34-4B20-9587-929AAA762BF2}"/>
+                <a16:creationId xmlns:a16="http://schemas.microsoft.com/office/drawing/2014/main" id="{7D77566D-A931-4E2D-AC6B-625AA2189388}"/>
               </a:ext>
             </a:extLst>
           </p:cNvPr>
@@ -3441,8 +8101,8 @@
         </p:nvSpPr>
         <p:spPr>
           <a:xfrm xmlns:a="http://schemas.openxmlformats.org/drawingml/2006/main">
-            <a:off x="685800" y="514350"/>
-            <a:ext cx="10820400" cy="904875"/>
+            <a:off x="619125" y="409575"/>
+            <a:ext cx="10953750" cy="809625"/>
           </a:xfrm>
           <a:prstGeom xmlns:a="http://schemas.openxmlformats.org/drawingml/2006/main" prst="rect">
             <a:avLst/>
@@ -3459,9 +8119,9 @@
           <a:lstStyle xmlns:a="http://schemas.openxmlformats.org/drawingml/2006/main"/>
           <a:p xmlns:a="http://schemas.openxmlformats.org/drawingml/2006/main">
             <a:pPr>
-              <a:defRPr sz="3450" b="1">
-                <a:solidFill>
-                  <a:srgbClr val="12283A"/>
+              <a:defRPr sz="3300" b="1">
+                <a:solidFill>
+                  <a:srgbClr val="172C3D"/>
                 </a:solidFill>
                 <a:latin typeface="PingFang SC"/>
                 <a:ea typeface="PingFang SC"/>
@@ -3469,41 +8129,25 @@
               </a:defRPr>
             </a:pPr>
             <a:r>
-              <a:rPr sz="3450" b="1">
-                <a:solidFill>
-                  <a:srgbClr val="12283A"/>
+              <a:rPr sz="3300" b="1">
+                <a:solidFill>
+                  <a:srgbClr val="172C3D"/>
                 </a:solidFill>
                 <a:latin typeface="PingFang SC"/>
                 <a:ea typeface="PingFang SC"/>
                 <a:cs typeface="PingFang SC"/>
               </a:rPr>
-              <a:t>共享分支的物理空间</a:t>
+              <a:t>换页与计算的执行顺序</a:t>
             </a:r>
           </a:p>
         </p:txBody>
       </p:sp>
-      <p:graphicFrame>
-        <p:nvGraphicFramePr>
-          <p:cNvPr id="6" name="Chart"/>
-          <p:cNvGraphicFramePr/>
-          <p:nvPr/>
-        </p:nvGraphicFramePr>
-        <p:xfrm>
-          <a:off xmlns:a="http://schemas.openxmlformats.org/drawingml/2006/main" x="762000" y="1714500"/>
-          <a:ext xmlns:a="http://schemas.openxmlformats.org/drawingml/2006/main" cx="10668000" cy="3762375"/>
-        </p:xfrm>
-        <a:graphic xmlns:a="http://schemas.openxmlformats.org/drawingml/2006/main">
-          <a:graphicData uri="http://schemas.openxmlformats.org/drawingml/2006/chart">
-            <c:chart xmlns:r="http://schemas.openxmlformats.org/officeDocument/2006/relationships" xmlns:c="http://schemas.openxmlformats.org/drawingml/2006/chart" r:id="R8f1fccccf2044216"/>
-          </a:graphicData>
-        </a:graphic>
-      </p:graphicFrame>
-      <p:sp>
-        <p:nvSpPr>
-          <p:cNvPr id="3" name="">
+      <p:sp>
+        <p:nvSpPr>
+          <p:cNvPr id="2" name="">
             <a:extLst xmlns:a="http://schemas.openxmlformats.org/drawingml/2006/main">
               <a:ext uri="{FF2B5EF4-FFF2-40B4-BE49-F238E27FC236}">
-                <a16:creationId xmlns:a16="http://schemas.microsoft.com/office/drawing/2014/main" id="{479A6084-5371-4858-BE4C-2FFD1F7BAE0C}"/>
+                <a16:creationId xmlns:a16="http://schemas.microsoft.com/office/drawing/2014/main" id="{531E64E0-A872-42E0-A0A6-BDF615CC9E69}"/>
               </a:ext>
             </a:extLst>
           </p:cNvPr>
@@ -3514,8 +8158,8 @@
         </p:nvSpPr>
         <p:spPr>
           <a:xfrm xmlns:a="http://schemas.openxmlformats.org/drawingml/2006/main">
-            <a:off x="762000" y="5619750"/>
-            <a:ext cx="10668000" cy="457200"/>
+            <a:off x="11239500" y="6400800"/>
+            <a:ext cx="476250" cy="266700"/>
           </a:xfrm>
           <a:prstGeom xmlns:a="http://schemas.openxmlformats.org/drawingml/2006/main" prst="rect">
             <a:avLst/>
@@ -3532,9 +8176,9 @@
           <a:lstStyle xmlns:a="http://schemas.openxmlformats.org/drawingml/2006/main"/>
           <a:p xmlns:a="http://schemas.openxmlformats.org/drawingml/2006/main">
             <a:pPr>
-              <a:defRPr sz="1800" b="0">
-                <a:solidFill>
-                  <a:srgbClr val="263748"/>
+              <a:defRPr sz="1350" b="0">
+                <a:solidFill>
+                  <a:srgbClr val="8290A0"/>
                 </a:solidFill>
                 <a:latin typeface="PingFang SC"/>
                 <a:ea typeface="PingFang SC"/>
@@ -3542,15 +8186,76 @@
               </a:defRPr>
             </a:pPr>
             <a:r>
-              <a:rPr sz="1800" b="0">
-                <a:solidFill>
-                  <a:srgbClr val="263748"/>
+              <a:rPr sz="1350" b="0">
+                <a:solidFill>
+                  <a:srgbClr val="8290A0"/>
                 </a:solidFill>
                 <a:latin typeface="PingFang SC"/>
                 <a:ea typeface="PingFang SC"/>
                 <a:cs typeface="PingFang SC"/>
               </a:rPr>
-              <a:t>CPU 仿真：9-token 前缀、8 个分支、每页 4 token。单位为槽位。</a:t>
+              <a:t>06</a:t>
+            </a:r>
+          </a:p>
+        </p:txBody>
+      </p:sp>
+      <p:sp>
+        <p:nvSpPr>
+          <p:cNvPr id="3" name="">
+            <a:extLst xmlns:a="http://schemas.openxmlformats.org/drawingml/2006/main">
+              <a:ext uri="{FF2B5EF4-FFF2-40B4-BE49-F238E27FC236}">
+                <a16:creationId xmlns:a16="http://schemas.microsoft.com/office/drawing/2014/main" id="{C775D3C0-3BA8-4F5D-A691-904D9B87EDB6}"/>
+              </a:ext>
+            </a:extLst>
+          </p:cNvPr>
+          <p:cNvSpPr>
+            <a:spLocks xmlns:a="http://schemas.openxmlformats.org/drawingml/2006/main" noGrp="1"/>
+          </p:cNvSpPr>
+          <p:nvPr/>
+        </p:nvSpPr>
+        <p:spPr>
+          <a:xfrm xmlns:a="http://schemas.openxmlformats.org/drawingml/2006/main">
+            <a:off x="477203" y="1658303"/>
+            <a:ext cx="2059305" cy="519303"/>
+          </a:xfrm>
+          <a:prstGeom xmlns:a="http://schemas.openxmlformats.org/drawingml/2006/main" prst="rect">
+            <a:avLst/>
+          </a:prstGeom>
+          <a:solidFill xmlns:a="http://schemas.openxmlformats.org/drawingml/2006/main">
+            <a:srgbClr val="F1F5F8"/>
+          </a:solidFill>
+          <a:ln xmlns:a="http://schemas.openxmlformats.org/drawingml/2006/main" w="14288">
+            <a:solidFill>
+              <a:srgbClr val="9AAFC0"/>
+            </a:solidFill>
+          </a:ln>
+        </p:spPr>
+        <p:txBody>
+          <a:bodyPr xmlns:a="http://schemas.openxmlformats.org/drawingml/2006/main" anchor="ctr">
+            <a:noAutofit/>
+          </a:bodyPr>
+          <a:lstStyle xmlns:a="http://schemas.openxmlformats.org/drawingml/2006/main"/>
+          <a:p xmlns:a="http://schemas.openxmlformats.org/drawingml/2006/main">
+            <a:pPr algn="ctr">
+              <a:defRPr sz="1833">
+                <a:solidFill>
+                  <a:srgbClr val="172C3D"/>
+                </a:solidFill>
+                <a:latin typeface="PingFang SC"/>
+                <a:ea typeface="PingFang SC"/>
+                <a:cs typeface="PingFang SC"/>
+              </a:defRPr>
+            </a:pPr>
+            <a:r>
+              <a:rPr sz="1833">
+                <a:solidFill>
+                  <a:srgbClr val="172C3D"/>
+                </a:solidFill>
+                <a:latin typeface="PingFang SC"/>
+                <a:ea typeface="PingFang SC"/>
+                <a:cs typeface="PingFang SC"/>
+              </a:rPr>
+              <a:t>MemoryRuntime</a:t>
             </a:r>
           </a:p>
         </p:txBody>
@@ -3560,7 +8265,7 @@
           <p:cNvPr id="4" name="">
             <a:extLst xmlns:a="http://schemas.openxmlformats.org/drawingml/2006/main">
               <a:ext uri="{FF2B5EF4-FFF2-40B4-BE49-F238E27FC236}">
-                <a16:creationId xmlns:a16="http://schemas.microsoft.com/office/drawing/2014/main" id="{9581596B-17FC-4A91-80EE-0D03333A480A}"/>
+                <a16:creationId xmlns:a16="http://schemas.microsoft.com/office/drawing/2014/main" id="{F7B51AAF-C221-41F3-A489-8E85E4B3FB34}"/>
               </a:ext>
             </a:extLst>
           </p:cNvPr>
@@ -3571,8 +8276,597 @@
         </p:nvSpPr>
         <p:spPr>
           <a:xfrm xmlns:a="http://schemas.openxmlformats.org/drawingml/2006/main">
-            <a:off x="762000" y="6115050"/>
-            <a:ext cx="10668000" cy="428625"/>
+            <a:off x="1506855" y="2204466"/>
+            <a:ext cx="9525" cy="9525"/>
+          </a:xfrm>
+          <a:prstGeom xmlns:a="http://schemas.openxmlformats.org/drawingml/2006/main" prst="rect">
+            <a:avLst/>
+          </a:prstGeom>
+          <a:noFill xmlns:a="http://schemas.openxmlformats.org/drawingml/2006/main"/>
+          <a:ln xmlns:a="http://schemas.openxmlformats.org/drawingml/2006/main" w="0">
+            <a:noFill/>
+          </a:ln>
+        </p:spPr>
+      </p:sp>
+      <p:sp>
+        <p:nvSpPr>
+          <p:cNvPr id="5" name="">
+            <a:extLst xmlns:a="http://schemas.openxmlformats.org/drawingml/2006/main">
+              <a:ext uri="{FF2B5EF4-FFF2-40B4-BE49-F238E27FC236}">
+                <a16:creationId xmlns:a16="http://schemas.microsoft.com/office/drawing/2014/main" id="{EE25FF8E-8206-49FD-A1C6-8ED41403C9C9}"/>
+              </a:ext>
+            </a:extLst>
+          </p:cNvPr>
+          <p:cNvSpPr>
+            <a:spLocks xmlns:a="http://schemas.openxmlformats.org/drawingml/2006/main" noGrp="1"/>
+          </p:cNvSpPr>
+          <p:nvPr/>
+        </p:nvSpPr>
+        <p:spPr>
+          <a:xfrm xmlns:a="http://schemas.openxmlformats.org/drawingml/2006/main">
+            <a:off x="1506855" y="5776913"/>
+            <a:ext cx="9525" cy="9525"/>
+          </a:xfrm>
+          <a:prstGeom xmlns:a="http://schemas.openxmlformats.org/drawingml/2006/main" prst="rect">
+            <a:avLst/>
+          </a:prstGeom>
+          <a:noFill xmlns:a="http://schemas.openxmlformats.org/drawingml/2006/main"/>
+          <a:ln xmlns:a="http://schemas.openxmlformats.org/drawingml/2006/main" w="0">
+            <a:noFill/>
+          </a:ln>
+        </p:spPr>
+      </p:sp>
+      <p:cxnSp>
+        <p:nvCxnSpPr>
+          <p:cNvPr id="44" name=""/>
+          <p:cNvCxnSpPr>
+            <a:stCxn xmlns:a="http://schemas.openxmlformats.org/drawingml/2006/main" id="4" idx="3"/>
+            <a:endCxn xmlns:a="http://schemas.openxmlformats.org/drawingml/2006/main" id="5" idx="1"/>
+          </p:cNvCxnSpPr>
+          <p:nvPr/>
+        </p:nvCxnSpPr>
+        <p:spPr>
+          <a:xfrm xmlns:a="http://schemas.openxmlformats.org/drawingml/2006/main" flipH="1">
+            <a:off x="1506855" y="2209229"/>
+            <a:ext cx="9525" cy="3572447"/>
+          </a:xfrm>
+          <a:prstGeom xmlns:a="http://schemas.openxmlformats.org/drawingml/2006/main" prst="straightConnector1">
+            <a:avLst/>
+          </a:prstGeom>
+          <a:ln xmlns:a="http://schemas.openxmlformats.org/drawingml/2006/main" w="19050">
+            <a:solidFill>
+              <a:srgbClr val="597387"/>
+            </a:solidFill>
+            <a:prstDash val="dash"/>
+          </a:ln>
+        </p:spPr>
+      </p:cxnSp>
+      <p:sp>
+        <p:nvSpPr>
+          <p:cNvPr id="7" name="">
+            <a:extLst xmlns:a="http://schemas.openxmlformats.org/drawingml/2006/main">
+              <a:ext uri="{FF2B5EF4-FFF2-40B4-BE49-F238E27FC236}">
+                <a16:creationId xmlns:a16="http://schemas.microsoft.com/office/drawing/2014/main" id="{018CA018-C5A3-4276-8C59-E138DFC7F871}"/>
+              </a:ext>
+            </a:extLst>
+          </p:cNvPr>
+          <p:cNvSpPr>
+            <a:spLocks xmlns:a="http://schemas.openxmlformats.org/drawingml/2006/main" noGrp="1"/>
+          </p:cNvSpPr>
+          <p:nvPr/>
+        </p:nvSpPr>
+        <p:spPr>
+          <a:xfrm xmlns:a="http://schemas.openxmlformats.org/drawingml/2006/main">
+            <a:off x="3521393" y="1658303"/>
+            <a:ext cx="2059305" cy="519303"/>
+          </a:xfrm>
+          <a:prstGeom xmlns:a="http://schemas.openxmlformats.org/drawingml/2006/main" prst="rect">
+            <a:avLst/>
+          </a:prstGeom>
+          <a:solidFill xmlns:a="http://schemas.openxmlformats.org/drawingml/2006/main">
+            <a:srgbClr val="F1F5F8"/>
+          </a:solidFill>
+          <a:ln xmlns:a="http://schemas.openxmlformats.org/drawingml/2006/main" w="14288">
+            <a:solidFill>
+              <a:srgbClr val="9AAFC0"/>
+            </a:solidFill>
+          </a:ln>
+        </p:spPr>
+        <p:txBody>
+          <a:bodyPr xmlns:a="http://schemas.openxmlformats.org/drawingml/2006/main" anchor="ctr">
+            <a:noAutofit/>
+          </a:bodyPr>
+          <a:lstStyle xmlns:a="http://schemas.openxmlformats.org/drawingml/2006/main"/>
+          <a:p xmlns:a="http://schemas.openxmlformats.org/drawingml/2006/main">
+            <a:pPr algn="ctr">
+              <a:defRPr sz="1833">
+                <a:solidFill>
+                  <a:srgbClr val="172C3D"/>
+                </a:solidFill>
+                <a:latin typeface="PingFang SC"/>
+                <a:ea typeface="PingFang SC"/>
+                <a:cs typeface="PingFang SC"/>
+              </a:defRPr>
+            </a:pPr>
+            <a:r>
+              <a:rPr sz="1833">
+                <a:solidFill>
+                  <a:srgbClr val="172C3D"/>
+                </a:solidFill>
+                <a:latin typeface="PingFang SC"/>
+                <a:ea typeface="PingFang SC"/>
+                <a:cs typeface="PingFang SC"/>
+              </a:rPr>
+              <a:t>PagedMemory</a:t>
+            </a:r>
+          </a:p>
+        </p:txBody>
+      </p:sp>
+      <p:sp>
+        <p:nvSpPr>
+          <p:cNvPr id="8" name="">
+            <a:extLst xmlns:a="http://schemas.openxmlformats.org/drawingml/2006/main">
+              <a:ext uri="{FF2B5EF4-FFF2-40B4-BE49-F238E27FC236}">
+                <a16:creationId xmlns:a16="http://schemas.microsoft.com/office/drawing/2014/main" id="{BE4A1EBD-C40B-4A93-8D6C-A0D43A5ED723}"/>
+              </a:ext>
+            </a:extLst>
+          </p:cNvPr>
+          <p:cNvSpPr>
+            <a:spLocks xmlns:a="http://schemas.openxmlformats.org/drawingml/2006/main" noGrp="1"/>
+          </p:cNvSpPr>
+          <p:nvPr/>
+        </p:nvSpPr>
+        <p:spPr>
+          <a:xfrm xmlns:a="http://schemas.openxmlformats.org/drawingml/2006/main">
+            <a:off x="4551045" y="2204466"/>
+            <a:ext cx="9525" cy="9525"/>
+          </a:xfrm>
+          <a:prstGeom xmlns:a="http://schemas.openxmlformats.org/drawingml/2006/main" prst="rect">
+            <a:avLst/>
+          </a:prstGeom>
+          <a:noFill xmlns:a="http://schemas.openxmlformats.org/drawingml/2006/main"/>
+          <a:ln xmlns:a="http://schemas.openxmlformats.org/drawingml/2006/main" w="0">
+            <a:noFill/>
+          </a:ln>
+        </p:spPr>
+      </p:sp>
+      <p:sp>
+        <p:nvSpPr>
+          <p:cNvPr id="9" name="">
+            <a:extLst xmlns:a="http://schemas.openxmlformats.org/drawingml/2006/main">
+              <a:ext uri="{FF2B5EF4-FFF2-40B4-BE49-F238E27FC236}">
+                <a16:creationId xmlns:a16="http://schemas.microsoft.com/office/drawing/2014/main" id="{BC400E10-A4D6-4DD2-91C9-3DFAAC7EB968}"/>
+              </a:ext>
+            </a:extLst>
+          </p:cNvPr>
+          <p:cNvSpPr>
+            <a:spLocks xmlns:a="http://schemas.openxmlformats.org/drawingml/2006/main" noGrp="1"/>
+          </p:cNvSpPr>
+          <p:nvPr/>
+        </p:nvSpPr>
+        <p:spPr>
+          <a:xfrm xmlns:a="http://schemas.openxmlformats.org/drawingml/2006/main">
+            <a:off x="4551045" y="5776913"/>
+            <a:ext cx="9525" cy="9525"/>
+          </a:xfrm>
+          <a:prstGeom xmlns:a="http://schemas.openxmlformats.org/drawingml/2006/main" prst="rect">
+            <a:avLst/>
+          </a:prstGeom>
+          <a:noFill xmlns:a="http://schemas.openxmlformats.org/drawingml/2006/main"/>
+          <a:ln xmlns:a="http://schemas.openxmlformats.org/drawingml/2006/main" w="0">
+            <a:noFill/>
+          </a:ln>
+        </p:spPr>
+      </p:sp>
+      <p:cxnSp>
+        <p:nvCxnSpPr>
+          <p:cNvPr id="48" name=""/>
+          <p:cNvCxnSpPr>
+            <a:stCxn xmlns:a="http://schemas.openxmlformats.org/drawingml/2006/main" id="8" idx="3"/>
+            <a:endCxn xmlns:a="http://schemas.openxmlformats.org/drawingml/2006/main" id="9" idx="1"/>
+          </p:cNvCxnSpPr>
+          <p:nvPr/>
+        </p:nvCxnSpPr>
+        <p:spPr>
+          <a:xfrm xmlns:a="http://schemas.openxmlformats.org/drawingml/2006/main" flipH="1">
+            <a:off x="4551045" y="2209229"/>
+            <a:ext cx="9525" cy="3572447"/>
+          </a:xfrm>
+          <a:prstGeom xmlns:a="http://schemas.openxmlformats.org/drawingml/2006/main" prst="straightConnector1">
+            <a:avLst/>
+          </a:prstGeom>
+          <a:ln xmlns:a="http://schemas.openxmlformats.org/drawingml/2006/main" w="19050">
+            <a:solidFill>
+              <a:srgbClr val="597387"/>
+            </a:solidFill>
+            <a:prstDash val="dash"/>
+          </a:ln>
+        </p:spPr>
+      </p:cxnSp>
+      <p:sp>
+        <p:nvSpPr>
+          <p:cNvPr id="11" name="">
+            <a:extLst xmlns:a="http://schemas.openxmlformats.org/drawingml/2006/main">
+              <a:ext uri="{FF2B5EF4-FFF2-40B4-BE49-F238E27FC236}">
+                <a16:creationId xmlns:a16="http://schemas.microsoft.com/office/drawing/2014/main" id="{15152682-68B4-4498-A9B6-2F5CCEC1BC43}"/>
+              </a:ext>
+            </a:extLst>
+          </p:cNvPr>
+          <p:cNvSpPr>
+            <a:spLocks xmlns:a="http://schemas.openxmlformats.org/drawingml/2006/main" noGrp="1"/>
+          </p:cNvSpPr>
+          <p:nvPr/>
+        </p:nvSpPr>
+        <p:spPr>
+          <a:xfrm xmlns:a="http://schemas.openxmlformats.org/drawingml/2006/main">
+            <a:off x="6565583" y="1658303"/>
+            <a:ext cx="2059305" cy="519303"/>
+          </a:xfrm>
+          <a:prstGeom xmlns:a="http://schemas.openxmlformats.org/drawingml/2006/main" prst="rect">
+            <a:avLst/>
+          </a:prstGeom>
+          <a:solidFill xmlns:a="http://schemas.openxmlformats.org/drawingml/2006/main">
+            <a:srgbClr val="F1F5F8"/>
+          </a:solidFill>
+          <a:ln xmlns:a="http://schemas.openxmlformats.org/drawingml/2006/main" w="14288">
+            <a:solidFill>
+              <a:srgbClr val="9AAFC0"/>
+            </a:solidFill>
+          </a:ln>
+        </p:spPr>
+        <p:txBody>
+          <a:bodyPr xmlns:a="http://schemas.openxmlformats.org/drawingml/2006/main" anchor="ctr">
+            <a:noAutofit/>
+          </a:bodyPr>
+          <a:lstStyle xmlns:a="http://schemas.openxmlformats.org/drawingml/2006/main"/>
+          <a:p xmlns:a="http://schemas.openxmlformats.org/drawingml/2006/main">
+            <a:pPr algn="ctr">
+              <a:defRPr sz="1833">
+                <a:solidFill>
+                  <a:srgbClr val="172C3D"/>
+                </a:solidFill>
+                <a:latin typeface="PingFang SC"/>
+                <a:ea typeface="PingFang SC"/>
+                <a:cs typeface="PingFang SC"/>
+              </a:defRPr>
+            </a:pPr>
+            <a:r>
+              <a:rPr sz="1833">
+                <a:solidFill>
+                  <a:srgbClr val="172C3D"/>
+                </a:solidFill>
+                <a:latin typeface="PingFang SC"/>
+                <a:ea typeface="PingFang SC"/>
+                <a:cs typeface="PingFang SC"/>
+              </a:rPr>
+              <a:t>存储后端</a:t>
+            </a:r>
+          </a:p>
+        </p:txBody>
+      </p:sp>
+      <p:sp>
+        <p:nvSpPr>
+          <p:cNvPr id="12" name="">
+            <a:extLst xmlns:a="http://schemas.openxmlformats.org/drawingml/2006/main">
+              <a:ext uri="{FF2B5EF4-FFF2-40B4-BE49-F238E27FC236}">
+                <a16:creationId xmlns:a16="http://schemas.microsoft.com/office/drawing/2014/main" id="{C90227E8-62CB-4B6E-8AEC-B207A10A4534}"/>
+              </a:ext>
+            </a:extLst>
+          </p:cNvPr>
+          <p:cNvSpPr>
+            <a:spLocks xmlns:a="http://schemas.openxmlformats.org/drawingml/2006/main" noGrp="1"/>
+          </p:cNvSpPr>
+          <p:nvPr/>
+        </p:nvSpPr>
+        <p:spPr>
+          <a:xfrm xmlns:a="http://schemas.openxmlformats.org/drawingml/2006/main">
+            <a:off x="7595235" y="2204466"/>
+            <a:ext cx="9525" cy="9525"/>
+          </a:xfrm>
+          <a:prstGeom xmlns:a="http://schemas.openxmlformats.org/drawingml/2006/main" prst="rect">
+            <a:avLst/>
+          </a:prstGeom>
+          <a:noFill xmlns:a="http://schemas.openxmlformats.org/drawingml/2006/main"/>
+          <a:ln xmlns:a="http://schemas.openxmlformats.org/drawingml/2006/main" w="0">
+            <a:noFill/>
+          </a:ln>
+        </p:spPr>
+      </p:sp>
+      <p:sp>
+        <p:nvSpPr>
+          <p:cNvPr id="13" name="">
+            <a:extLst xmlns:a="http://schemas.openxmlformats.org/drawingml/2006/main">
+              <a:ext uri="{FF2B5EF4-FFF2-40B4-BE49-F238E27FC236}">
+                <a16:creationId xmlns:a16="http://schemas.microsoft.com/office/drawing/2014/main" id="{F3FBFABE-D46E-43E1-935A-2C1A3A135820}"/>
+              </a:ext>
+            </a:extLst>
+          </p:cNvPr>
+          <p:cNvSpPr>
+            <a:spLocks xmlns:a="http://schemas.openxmlformats.org/drawingml/2006/main" noGrp="1"/>
+          </p:cNvSpPr>
+          <p:nvPr/>
+        </p:nvSpPr>
+        <p:spPr>
+          <a:xfrm xmlns:a="http://schemas.openxmlformats.org/drawingml/2006/main">
+            <a:off x="7595235" y="5776913"/>
+            <a:ext cx="9525" cy="9525"/>
+          </a:xfrm>
+          <a:prstGeom xmlns:a="http://schemas.openxmlformats.org/drawingml/2006/main" prst="rect">
+            <a:avLst/>
+          </a:prstGeom>
+          <a:noFill xmlns:a="http://schemas.openxmlformats.org/drawingml/2006/main"/>
+          <a:ln xmlns:a="http://schemas.openxmlformats.org/drawingml/2006/main" w="0">
+            <a:noFill/>
+          </a:ln>
+        </p:spPr>
+      </p:sp>
+      <p:cxnSp>
+        <p:nvCxnSpPr>
+          <p:cNvPr id="52" name=""/>
+          <p:cNvCxnSpPr>
+            <a:stCxn xmlns:a="http://schemas.openxmlformats.org/drawingml/2006/main" id="12" idx="3"/>
+            <a:endCxn xmlns:a="http://schemas.openxmlformats.org/drawingml/2006/main" id="13" idx="1"/>
+          </p:cNvCxnSpPr>
+          <p:nvPr/>
+        </p:nvCxnSpPr>
+        <p:spPr>
+          <a:xfrm xmlns:a="http://schemas.openxmlformats.org/drawingml/2006/main" flipH="1">
+            <a:off x="7595235" y="2209229"/>
+            <a:ext cx="9525" cy="3572447"/>
+          </a:xfrm>
+          <a:prstGeom xmlns:a="http://schemas.openxmlformats.org/drawingml/2006/main" prst="straightConnector1">
+            <a:avLst/>
+          </a:prstGeom>
+          <a:ln xmlns:a="http://schemas.openxmlformats.org/drawingml/2006/main" w="19050">
+            <a:solidFill>
+              <a:srgbClr val="597387"/>
+            </a:solidFill>
+            <a:prstDash val="dash"/>
+          </a:ln>
+        </p:spPr>
+      </p:cxnSp>
+      <p:sp>
+        <p:nvSpPr>
+          <p:cNvPr id="15" name="">
+            <a:extLst xmlns:a="http://schemas.openxmlformats.org/drawingml/2006/main">
+              <a:ext uri="{FF2B5EF4-FFF2-40B4-BE49-F238E27FC236}">
+                <a16:creationId xmlns:a16="http://schemas.microsoft.com/office/drawing/2014/main" id="{6BF31AA6-CA36-42CC-A7E1-1EF2BFD4A60F}"/>
+              </a:ext>
+            </a:extLst>
+          </p:cNvPr>
+          <p:cNvSpPr>
+            <a:spLocks xmlns:a="http://schemas.openxmlformats.org/drawingml/2006/main" noGrp="1"/>
+          </p:cNvSpPr>
+          <p:nvPr/>
+        </p:nvSpPr>
+        <p:spPr>
+          <a:xfrm xmlns:a="http://schemas.openxmlformats.org/drawingml/2006/main">
+            <a:off x="9609773" y="1658303"/>
+            <a:ext cx="2059305" cy="519303"/>
+          </a:xfrm>
+          <a:prstGeom xmlns:a="http://schemas.openxmlformats.org/drawingml/2006/main" prst="rect">
+            <a:avLst/>
+          </a:prstGeom>
+          <a:solidFill xmlns:a="http://schemas.openxmlformats.org/drawingml/2006/main">
+            <a:srgbClr val="F1F5F8"/>
+          </a:solidFill>
+          <a:ln xmlns:a="http://schemas.openxmlformats.org/drawingml/2006/main" w="14288">
+            <a:solidFill>
+              <a:srgbClr val="9AAFC0"/>
+            </a:solidFill>
+          </a:ln>
+        </p:spPr>
+        <p:txBody>
+          <a:bodyPr xmlns:a="http://schemas.openxmlformats.org/drawingml/2006/main" anchor="ctr">
+            <a:noAutofit/>
+          </a:bodyPr>
+          <a:lstStyle xmlns:a="http://schemas.openxmlformats.org/drawingml/2006/main"/>
+          <a:p xmlns:a="http://schemas.openxmlformats.org/drawingml/2006/main">
+            <a:pPr algn="ctr">
+              <a:defRPr sz="1833">
+                <a:solidFill>
+                  <a:srgbClr val="172C3D"/>
+                </a:solidFill>
+                <a:latin typeface="PingFang SC"/>
+                <a:ea typeface="PingFang SC"/>
+                <a:cs typeface="PingFang SC"/>
+              </a:defRPr>
+            </a:pPr>
+            <a:r>
+              <a:rPr sz="1833">
+                <a:solidFill>
+                  <a:srgbClr val="172C3D"/>
+                </a:solidFill>
+                <a:latin typeface="PingFang SC"/>
+                <a:ea typeface="PingFang SC"/>
+                <a:cs typeface="PingFang SC"/>
+              </a:rPr>
+              <a:t>Qwen3 执行器</a:t>
+            </a:r>
+          </a:p>
+        </p:txBody>
+      </p:sp>
+      <p:sp>
+        <p:nvSpPr>
+          <p:cNvPr id="16" name="">
+            <a:extLst xmlns:a="http://schemas.openxmlformats.org/drawingml/2006/main">
+              <a:ext uri="{FF2B5EF4-FFF2-40B4-BE49-F238E27FC236}">
+                <a16:creationId xmlns:a16="http://schemas.microsoft.com/office/drawing/2014/main" id="{141B28D7-0B14-42DE-936E-B8C8277E9B97}"/>
+              </a:ext>
+            </a:extLst>
+          </p:cNvPr>
+          <p:cNvSpPr>
+            <a:spLocks xmlns:a="http://schemas.openxmlformats.org/drawingml/2006/main" noGrp="1"/>
+          </p:cNvSpPr>
+          <p:nvPr/>
+        </p:nvSpPr>
+        <p:spPr>
+          <a:xfrm xmlns:a="http://schemas.openxmlformats.org/drawingml/2006/main">
+            <a:off x="10639425" y="2204466"/>
+            <a:ext cx="9525" cy="9525"/>
+          </a:xfrm>
+          <a:prstGeom xmlns:a="http://schemas.openxmlformats.org/drawingml/2006/main" prst="rect">
+            <a:avLst/>
+          </a:prstGeom>
+          <a:noFill xmlns:a="http://schemas.openxmlformats.org/drawingml/2006/main"/>
+          <a:ln xmlns:a="http://schemas.openxmlformats.org/drawingml/2006/main" w="0">
+            <a:noFill/>
+          </a:ln>
+        </p:spPr>
+      </p:sp>
+      <p:sp>
+        <p:nvSpPr>
+          <p:cNvPr id="17" name="">
+            <a:extLst xmlns:a="http://schemas.openxmlformats.org/drawingml/2006/main">
+              <a:ext uri="{FF2B5EF4-FFF2-40B4-BE49-F238E27FC236}">
+                <a16:creationId xmlns:a16="http://schemas.microsoft.com/office/drawing/2014/main" id="{176B8371-2B23-453F-84F8-D3DFA603C2D9}"/>
+              </a:ext>
+            </a:extLst>
+          </p:cNvPr>
+          <p:cNvSpPr>
+            <a:spLocks xmlns:a="http://schemas.openxmlformats.org/drawingml/2006/main" noGrp="1"/>
+          </p:cNvSpPr>
+          <p:nvPr/>
+        </p:nvSpPr>
+        <p:spPr>
+          <a:xfrm xmlns:a="http://schemas.openxmlformats.org/drawingml/2006/main">
+            <a:off x="10639425" y="5776913"/>
+            <a:ext cx="9525" cy="9525"/>
+          </a:xfrm>
+          <a:prstGeom xmlns:a="http://schemas.openxmlformats.org/drawingml/2006/main" prst="rect">
+            <a:avLst/>
+          </a:prstGeom>
+          <a:noFill xmlns:a="http://schemas.openxmlformats.org/drawingml/2006/main"/>
+          <a:ln xmlns:a="http://schemas.openxmlformats.org/drawingml/2006/main" w="0">
+            <a:noFill/>
+          </a:ln>
+        </p:spPr>
+      </p:sp>
+      <p:cxnSp>
+        <p:nvCxnSpPr>
+          <p:cNvPr id="56" name=""/>
+          <p:cNvCxnSpPr>
+            <a:stCxn xmlns:a="http://schemas.openxmlformats.org/drawingml/2006/main" id="16" idx="3"/>
+            <a:endCxn xmlns:a="http://schemas.openxmlformats.org/drawingml/2006/main" id="17" idx="1"/>
+          </p:cNvCxnSpPr>
+          <p:nvPr/>
+        </p:nvCxnSpPr>
+        <p:spPr>
+          <a:xfrm xmlns:a="http://schemas.openxmlformats.org/drawingml/2006/main" flipH="1">
+            <a:off x="10639425" y="2209229"/>
+            <a:ext cx="9525" cy="3572447"/>
+          </a:xfrm>
+          <a:prstGeom xmlns:a="http://schemas.openxmlformats.org/drawingml/2006/main" prst="straightConnector1">
+            <a:avLst/>
+          </a:prstGeom>
+          <a:ln xmlns:a="http://schemas.openxmlformats.org/drawingml/2006/main" w="19050">
+            <a:solidFill>
+              <a:srgbClr val="597387"/>
+            </a:solidFill>
+            <a:prstDash val="dash"/>
+          </a:ln>
+        </p:spPr>
+      </p:cxnSp>
+      <p:sp>
+        <p:nvSpPr>
+          <p:cNvPr id="19" name="">
+            <a:extLst xmlns:a="http://schemas.openxmlformats.org/drawingml/2006/main">
+              <a:ext uri="{FF2B5EF4-FFF2-40B4-BE49-F238E27FC236}">
+                <a16:creationId xmlns:a16="http://schemas.microsoft.com/office/drawing/2014/main" id="{B13A9854-97FA-47BB-94AE-D97097953684}"/>
+              </a:ext>
+            </a:extLst>
+          </p:cNvPr>
+          <p:cNvSpPr>
+            <a:spLocks xmlns:a="http://schemas.openxmlformats.org/drawingml/2006/main" noGrp="1"/>
+          </p:cNvSpPr>
+          <p:nvPr/>
+        </p:nvSpPr>
+        <p:spPr>
+          <a:xfrm xmlns:a="http://schemas.openxmlformats.org/drawingml/2006/main">
+            <a:off x="1506855" y="2553653"/>
+            <a:ext cx="9525" cy="9525"/>
+          </a:xfrm>
+          <a:prstGeom xmlns:a="http://schemas.openxmlformats.org/drawingml/2006/main" prst="rect">
+            <a:avLst/>
+          </a:prstGeom>
+          <a:noFill xmlns:a="http://schemas.openxmlformats.org/drawingml/2006/main"/>
+          <a:ln xmlns:a="http://schemas.openxmlformats.org/drawingml/2006/main" w="0">
+            <a:noFill/>
+          </a:ln>
+        </p:spPr>
+      </p:sp>
+      <p:sp>
+        <p:nvSpPr>
+          <p:cNvPr id="20" name="">
+            <a:extLst xmlns:a="http://schemas.openxmlformats.org/drawingml/2006/main">
+              <a:ext uri="{FF2B5EF4-FFF2-40B4-BE49-F238E27FC236}">
+                <a16:creationId xmlns:a16="http://schemas.microsoft.com/office/drawing/2014/main" id="{8709D45D-E843-4A70-9037-318211FB3115}"/>
+              </a:ext>
+            </a:extLst>
+          </p:cNvPr>
+          <p:cNvSpPr>
+            <a:spLocks xmlns:a="http://schemas.openxmlformats.org/drawingml/2006/main" noGrp="1"/>
+          </p:cNvSpPr>
+          <p:nvPr/>
+        </p:nvSpPr>
+        <p:spPr>
+          <a:xfrm xmlns:a="http://schemas.openxmlformats.org/drawingml/2006/main">
+            <a:off x="4551045" y="2553653"/>
+            <a:ext cx="9525" cy="9525"/>
+          </a:xfrm>
+          <a:prstGeom xmlns:a="http://schemas.openxmlformats.org/drawingml/2006/main" prst="rect">
+            <a:avLst/>
+          </a:prstGeom>
+          <a:noFill xmlns:a="http://schemas.openxmlformats.org/drawingml/2006/main"/>
+          <a:ln xmlns:a="http://schemas.openxmlformats.org/drawingml/2006/main" w="0">
+            <a:noFill/>
+          </a:ln>
+        </p:spPr>
+      </p:sp>
+      <p:cxnSp>
+        <p:nvCxnSpPr>
+          <p:cNvPr id="59" name=""/>
+          <p:cNvCxnSpPr>
+            <a:stCxn xmlns:a="http://schemas.openxmlformats.org/drawingml/2006/main" id="19" idx="3"/>
+            <a:endCxn xmlns:a="http://schemas.openxmlformats.org/drawingml/2006/main" id="20" idx="1"/>
+          </p:cNvCxnSpPr>
+          <p:nvPr/>
+        </p:nvCxnSpPr>
+        <p:spPr>
+          <a:xfrm xmlns:a="http://schemas.openxmlformats.org/drawingml/2006/main">
+            <a:off x="1516380" y="2558416"/>
+            <a:ext cx="3034665" cy="0"/>
+          </a:xfrm>
+          <a:prstGeom xmlns:a="http://schemas.openxmlformats.org/drawingml/2006/main" prst="straightConnector1">
+            <a:avLst/>
+          </a:prstGeom>
+          <a:ln xmlns:a="http://schemas.openxmlformats.org/drawingml/2006/main" w="19050">
+            <a:solidFill>
+              <a:srgbClr val="597387"/>
+            </a:solidFill>
+            <a:prstDash val="solid"/>
+            <a:tailEnd type="arrow" w="med" len="med"/>
+          </a:ln>
+        </p:spPr>
+      </p:cxnSp>
+      <p:sp>
+        <p:nvSpPr>
+          <p:cNvPr id="22" name="">
+            <a:extLst xmlns:a="http://schemas.openxmlformats.org/drawingml/2006/main">
+              <a:ext uri="{FF2B5EF4-FFF2-40B4-BE49-F238E27FC236}">
+                <a16:creationId xmlns:a16="http://schemas.microsoft.com/office/drawing/2014/main" id="{9D66BC27-98F5-4552-95EA-4A7E5D823864}"/>
+              </a:ext>
+            </a:extLst>
+          </p:cNvPr>
+          <p:cNvSpPr>
+            <a:spLocks xmlns:a="http://schemas.openxmlformats.org/drawingml/2006/main" noGrp="1"/>
+          </p:cNvSpPr>
+          <p:nvPr/>
+        </p:nvSpPr>
+        <p:spPr>
+          <a:xfrm xmlns:a="http://schemas.openxmlformats.org/drawingml/2006/main">
+            <a:off x="1596390" y="2186559"/>
+            <a:ext cx="2865120" cy="340233"/>
           </a:xfrm>
           <a:prstGeom xmlns:a="http://schemas.openxmlformats.org/drawingml/2006/main" prst="rect">
             <a:avLst/>
@@ -3589,9 +8883,9 @@
           <a:lstStyle xmlns:a="http://schemas.openxmlformats.org/drawingml/2006/main"/>
           <a:p xmlns:a="http://schemas.openxmlformats.org/drawingml/2006/main">
             <a:pPr>
-              <a:defRPr sz="1725" b="0">
-                <a:solidFill>
-                  <a:srgbClr val="263748"/>
+              <a:defRPr sz="1692" b="0">
+                <a:solidFill>
+                  <a:srgbClr val="172C3D"/>
                 </a:solidFill>
                 <a:latin typeface="PingFang SC"/>
                 <a:ea typeface="PingFang SC"/>
@@ -3599,15 +8893,571 @@
               </a:defRPr>
             </a:pPr>
             <a:r>
-              <a:rPr sz="1725" b="0">
-                <a:solidFill>
-                  <a:srgbClr val="263748"/>
+              <a:rPr sz="1692" b="0">
+                <a:solidFill>
+                  <a:srgbClr val="172C3D"/>
                 </a:solidFill>
                 <a:latin typeface="PingFang SC"/>
                 <a:ea typeface="PingFang SC"/>
                 <a:cs typeface="PingFang SC"/>
               </a:rPr>
-              <a:t>各分支追加 1 token 后，物理分配槽位由 108 减为 44。</a:t>
+              <a:t>申请并固定完整工作集</a:t>
+            </a:r>
+          </a:p>
+        </p:txBody>
+      </p:sp>
+      <p:sp>
+        <p:nvSpPr>
+          <p:cNvPr id="23" name="">
+            <a:extLst xmlns:a="http://schemas.openxmlformats.org/drawingml/2006/main">
+              <a:ext uri="{FF2B5EF4-FFF2-40B4-BE49-F238E27FC236}">
+                <a16:creationId xmlns:a16="http://schemas.microsoft.com/office/drawing/2014/main" id="{CD3A6906-50CA-4ABB-AA1F-9D8BD472B354}"/>
+              </a:ext>
+            </a:extLst>
+          </p:cNvPr>
+          <p:cNvSpPr>
+            <a:spLocks xmlns:a="http://schemas.openxmlformats.org/drawingml/2006/main" noGrp="1"/>
+          </p:cNvSpPr>
+          <p:nvPr/>
+        </p:nvSpPr>
+        <p:spPr>
+          <a:xfrm xmlns:a="http://schemas.openxmlformats.org/drawingml/2006/main">
+            <a:off x="4551045" y="3269932"/>
+            <a:ext cx="9525" cy="9525"/>
+          </a:xfrm>
+          <a:prstGeom xmlns:a="http://schemas.openxmlformats.org/drawingml/2006/main" prst="rect">
+            <a:avLst/>
+          </a:prstGeom>
+          <a:noFill xmlns:a="http://schemas.openxmlformats.org/drawingml/2006/main"/>
+          <a:ln xmlns:a="http://schemas.openxmlformats.org/drawingml/2006/main" w="0">
+            <a:noFill/>
+          </a:ln>
+        </p:spPr>
+      </p:sp>
+      <p:sp>
+        <p:nvSpPr>
+          <p:cNvPr id="24" name="">
+            <a:extLst xmlns:a="http://schemas.openxmlformats.org/drawingml/2006/main">
+              <a:ext uri="{FF2B5EF4-FFF2-40B4-BE49-F238E27FC236}">
+                <a16:creationId xmlns:a16="http://schemas.microsoft.com/office/drawing/2014/main" id="{1FC23962-BFBB-4557-B24A-689C6D402413}"/>
+              </a:ext>
+            </a:extLst>
+          </p:cNvPr>
+          <p:cNvSpPr>
+            <a:spLocks xmlns:a="http://schemas.openxmlformats.org/drawingml/2006/main" noGrp="1"/>
+          </p:cNvSpPr>
+          <p:nvPr/>
+        </p:nvSpPr>
+        <p:spPr>
+          <a:xfrm xmlns:a="http://schemas.openxmlformats.org/drawingml/2006/main">
+            <a:off x="7595235" y="3269932"/>
+            <a:ext cx="9525" cy="9525"/>
+          </a:xfrm>
+          <a:prstGeom xmlns:a="http://schemas.openxmlformats.org/drawingml/2006/main" prst="rect">
+            <a:avLst/>
+          </a:prstGeom>
+          <a:noFill xmlns:a="http://schemas.openxmlformats.org/drawingml/2006/main"/>
+          <a:ln xmlns:a="http://schemas.openxmlformats.org/drawingml/2006/main" w="0">
+            <a:noFill/>
+          </a:ln>
+        </p:spPr>
+      </p:sp>
+      <p:cxnSp>
+        <p:nvCxnSpPr>
+          <p:cNvPr id="63" name=""/>
+          <p:cNvCxnSpPr>
+            <a:stCxn xmlns:a="http://schemas.openxmlformats.org/drawingml/2006/main" id="23" idx="3"/>
+            <a:endCxn xmlns:a="http://schemas.openxmlformats.org/drawingml/2006/main" id="24" idx="1"/>
+          </p:cNvCxnSpPr>
+          <p:nvPr/>
+        </p:nvCxnSpPr>
+        <p:spPr>
+          <a:xfrm xmlns:a="http://schemas.openxmlformats.org/drawingml/2006/main">
+            <a:off x="4560570" y="3274695"/>
+            <a:ext cx="3034665" cy="0"/>
+          </a:xfrm>
+          <a:prstGeom xmlns:a="http://schemas.openxmlformats.org/drawingml/2006/main" prst="straightConnector1">
+            <a:avLst/>
+          </a:prstGeom>
+          <a:ln xmlns:a="http://schemas.openxmlformats.org/drawingml/2006/main" w="19050">
+            <a:solidFill>
+              <a:srgbClr val="597387"/>
+            </a:solidFill>
+            <a:prstDash val="solid"/>
+            <a:tailEnd type="arrow" w="med" len="med"/>
+          </a:ln>
+        </p:spPr>
+      </p:cxnSp>
+      <p:sp>
+        <p:nvSpPr>
+          <p:cNvPr id="26" name="">
+            <a:extLst xmlns:a="http://schemas.openxmlformats.org/drawingml/2006/main">
+              <a:ext uri="{FF2B5EF4-FFF2-40B4-BE49-F238E27FC236}">
+                <a16:creationId xmlns:a16="http://schemas.microsoft.com/office/drawing/2014/main" id="{CC43E43E-C8F8-40E3-9100-18981D6FF066}"/>
+              </a:ext>
+            </a:extLst>
+          </p:cNvPr>
+          <p:cNvSpPr>
+            <a:spLocks xmlns:a="http://schemas.openxmlformats.org/drawingml/2006/main" noGrp="1"/>
+          </p:cNvSpPr>
+          <p:nvPr/>
+        </p:nvSpPr>
+        <p:spPr>
+          <a:xfrm xmlns:a="http://schemas.openxmlformats.org/drawingml/2006/main">
+            <a:off x="4640580" y="2902839"/>
+            <a:ext cx="2865120" cy="340233"/>
+          </a:xfrm>
+          <a:prstGeom xmlns:a="http://schemas.openxmlformats.org/drawingml/2006/main" prst="rect">
+            <a:avLst/>
+          </a:prstGeom>
+          <a:noFill xmlns:a="http://schemas.openxmlformats.org/drawingml/2006/main"/>
+          <a:ln xmlns:a="http://schemas.openxmlformats.org/drawingml/2006/main" w="0">
+            <a:noFill/>
+          </a:ln>
+        </p:spPr>
+        <p:txBody>
+          <a:bodyPr xmlns:a="http://schemas.openxmlformats.org/drawingml/2006/main">
+            <a:noAutofit/>
+          </a:bodyPr>
+          <a:lstStyle xmlns:a="http://schemas.openxmlformats.org/drawingml/2006/main"/>
+          <a:p xmlns:a="http://schemas.openxmlformats.org/drawingml/2006/main">
+            <a:pPr>
+              <a:defRPr sz="1692" b="0">
+                <a:solidFill>
+                  <a:srgbClr val="172C3D"/>
+                </a:solidFill>
+                <a:latin typeface="PingFang SC"/>
+                <a:ea typeface="PingFang SC"/>
+                <a:cs typeface="PingFang SC"/>
+              </a:defRPr>
+            </a:pPr>
+            <a:r>
+              <a:rPr sz="1692" b="0">
+                <a:solidFill>
+                  <a:srgbClr val="172C3D"/>
+                </a:solidFill>
+                <a:latin typeface="PingFang SC"/>
+                <a:ea typeface="PingFang SC"/>
+                <a:cs typeface="PingFang SC"/>
+              </a:rPr>
+              <a:t>LRU 换出并换入缺页</a:t>
+            </a:r>
+          </a:p>
+        </p:txBody>
+      </p:sp>
+      <p:sp>
+        <p:nvSpPr>
+          <p:cNvPr id="27" name="">
+            <a:extLst xmlns:a="http://schemas.openxmlformats.org/drawingml/2006/main">
+              <a:ext uri="{FF2B5EF4-FFF2-40B4-BE49-F238E27FC236}">
+                <a16:creationId xmlns:a16="http://schemas.microsoft.com/office/drawing/2014/main" id="{348BEF85-C3A6-4309-A1A4-DA049BFA0029}"/>
+              </a:ext>
+            </a:extLst>
+          </p:cNvPr>
+          <p:cNvSpPr>
+            <a:spLocks xmlns:a="http://schemas.openxmlformats.org/drawingml/2006/main" noGrp="1"/>
+          </p:cNvSpPr>
+          <p:nvPr/>
+        </p:nvSpPr>
+        <p:spPr>
+          <a:xfrm xmlns:a="http://schemas.openxmlformats.org/drawingml/2006/main">
+            <a:off x="7595235" y="3986213"/>
+            <a:ext cx="9525" cy="9525"/>
+          </a:xfrm>
+          <a:prstGeom xmlns:a="http://schemas.openxmlformats.org/drawingml/2006/main" prst="rect">
+            <a:avLst/>
+          </a:prstGeom>
+          <a:noFill xmlns:a="http://schemas.openxmlformats.org/drawingml/2006/main"/>
+          <a:ln xmlns:a="http://schemas.openxmlformats.org/drawingml/2006/main" w="0">
+            <a:noFill/>
+          </a:ln>
+        </p:spPr>
+      </p:sp>
+      <p:sp>
+        <p:nvSpPr>
+          <p:cNvPr id="28" name="">
+            <a:extLst xmlns:a="http://schemas.openxmlformats.org/drawingml/2006/main">
+              <a:ext uri="{FF2B5EF4-FFF2-40B4-BE49-F238E27FC236}">
+                <a16:creationId xmlns:a16="http://schemas.microsoft.com/office/drawing/2014/main" id="{B71BE328-A2F9-4283-9E8F-C014094CEF52}"/>
+              </a:ext>
+            </a:extLst>
+          </p:cNvPr>
+          <p:cNvSpPr>
+            <a:spLocks xmlns:a="http://schemas.openxmlformats.org/drawingml/2006/main" noGrp="1"/>
+          </p:cNvSpPr>
+          <p:nvPr/>
+        </p:nvSpPr>
+        <p:spPr>
+          <a:xfrm xmlns:a="http://schemas.openxmlformats.org/drawingml/2006/main">
+            <a:off x="4551045" y="3986213"/>
+            <a:ext cx="9525" cy="9525"/>
+          </a:xfrm>
+          <a:prstGeom xmlns:a="http://schemas.openxmlformats.org/drawingml/2006/main" prst="rect">
+            <a:avLst/>
+          </a:prstGeom>
+          <a:noFill xmlns:a="http://schemas.openxmlformats.org/drawingml/2006/main"/>
+          <a:ln xmlns:a="http://schemas.openxmlformats.org/drawingml/2006/main" w="0">
+            <a:noFill/>
+          </a:ln>
+        </p:spPr>
+      </p:sp>
+      <p:cxnSp>
+        <p:nvCxnSpPr>
+          <p:cNvPr id="67" name=""/>
+          <p:cNvCxnSpPr>
+            <a:stCxn xmlns:a="http://schemas.openxmlformats.org/drawingml/2006/main" id="27" idx="3"/>
+            <a:endCxn xmlns:a="http://schemas.openxmlformats.org/drawingml/2006/main" id="28" idx="1"/>
+          </p:cNvCxnSpPr>
+          <p:nvPr/>
+        </p:nvCxnSpPr>
+        <p:spPr>
+          <a:xfrm xmlns:a="http://schemas.openxmlformats.org/drawingml/2006/main" flipH="1">
+            <a:off x="4551045" y="3990976"/>
+            <a:ext cx="3053715" cy="0"/>
+          </a:xfrm>
+          <a:prstGeom xmlns:a="http://schemas.openxmlformats.org/drawingml/2006/main" prst="straightConnector1">
+            <a:avLst/>
+          </a:prstGeom>
+          <a:ln xmlns:a="http://schemas.openxmlformats.org/drawingml/2006/main" w="19050">
+            <a:solidFill>
+              <a:srgbClr val="597387"/>
+            </a:solidFill>
+            <a:prstDash val="solid"/>
+            <a:tailEnd type="arrow" w="med" len="med"/>
+          </a:ln>
+        </p:spPr>
+      </p:cxnSp>
+      <p:sp>
+        <p:nvSpPr>
+          <p:cNvPr id="30" name="">
+            <a:extLst xmlns:a="http://schemas.openxmlformats.org/drawingml/2006/main">
+              <a:ext uri="{FF2B5EF4-FFF2-40B4-BE49-F238E27FC236}">
+                <a16:creationId xmlns:a16="http://schemas.microsoft.com/office/drawing/2014/main" id="{8A3D8C1A-8D61-44F4-93BD-1E618D65B01D}"/>
+              </a:ext>
+            </a:extLst>
+          </p:cNvPr>
+          <p:cNvSpPr>
+            <a:spLocks xmlns:a="http://schemas.openxmlformats.org/drawingml/2006/main" noGrp="1"/>
+          </p:cNvSpPr>
+          <p:nvPr/>
+        </p:nvSpPr>
+        <p:spPr>
+          <a:xfrm xmlns:a="http://schemas.openxmlformats.org/drawingml/2006/main">
+            <a:off x="4640580" y="3619119"/>
+            <a:ext cx="2865120" cy="340233"/>
+          </a:xfrm>
+          <a:prstGeom xmlns:a="http://schemas.openxmlformats.org/drawingml/2006/main" prst="rect">
+            <a:avLst/>
+          </a:prstGeom>
+          <a:noFill xmlns:a="http://schemas.openxmlformats.org/drawingml/2006/main"/>
+          <a:ln xmlns:a="http://schemas.openxmlformats.org/drawingml/2006/main" w="0">
+            <a:noFill/>
+          </a:ln>
+        </p:spPr>
+        <p:txBody>
+          <a:bodyPr xmlns:a="http://schemas.openxmlformats.org/drawingml/2006/main">
+            <a:noAutofit/>
+          </a:bodyPr>
+          <a:lstStyle xmlns:a="http://schemas.openxmlformats.org/drawingml/2006/main"/>
+          <a:p xmlns:a="http://schemas.openxmlformats.org/drawingml/2006/main">
+            <a:pPr>
+              <a:defRPr sz="1692" b="0">
+                <a:solidFill>
+                  <a:srgbClr val="172C3D"/>
+                </a:solidFill>
+                <a:latin typeface="PingFang SC"/>
+                <a:ea typeface="PingFang SC"/>
+                <a:cs typeface="PingFang SC"/>
+              </a:defRPr>
+            </a:pPr>
+            <a:r>
+              <a:rPr sz="1692" b="0">
+                <a:solidFill>
+                  <a:srgbClr val="172C3D"/>
+                </a:solidFill>
+                <a:latin typeface="PingFang SC"/>
+                <a:ea typeface="PingFang SC"/>
+                <a:cs typeface="PingFang SC"/>
+              </a:rPr>
+              <a:t>数据搬运完成</a:t>
+            </a:r>
+          </a:p>
+        </p:txBody>
+      </p:sp>
+      <p:sp>
+        <p:nvSpPr>
+          <p:cNvPr id="31" name="">
+            <a:extLst xmlns:a="http://schemas.openxmlformats.org/drawingml/2006/main">
+              <a:ext uri="{FF2B5EF4-FFF2-40B4-BE49-F238E27FC236}">
+                <a16:creationId xmlns:a16="http://schemas.microsoft.com/office/drawing/2014/main" id="{97390816-786F-4084-84B3-40CFD5678EC9}"/>
+              </a:ext>
+            </a:extLst>
+          </p:cNvPr>
+          <p:cNvSpPr>
+            <a:spLocks xmlns:a="http://schemas.openxmlformats.org/drawingml/2006/main" noGrp="1"/>
+          </p:cNvSpPr>
+          <p:nvPr/>
+        </p:nvSpPr>
+        <p:spPr>
+          <a:xfrm xmlns:a="http://schemas.openxmlformats.org/drawingml/2006/main">
+            <a:off x="1506855" y="4702493"/>
+            <a:ext cx="9525" cy="9525"/>
+          </a:xfrm>
+          <a:prstGeom xmlns:a="http://schemas.openxmlformats.org/drawingml/2006/main" prst="rect">
+            <a:avLst/>
+          </a:prstGeom>
+          <a:noFill xmlns:a="http://schemas.openxmlformats.org/drawingml/2006/main"/>
+          <a:ln xmlns:a="http://schemas.openxmlformats.org/drawingml/2006/main" w="0">
+            <a:noFill/>
+          </a:ln>
+        </p:spPr>
+      </p:sp>
+      <p:sp>
+        <p:nvSpPr>
+          <p:cNvPr id="32" name="">
+            <a:extLst xmlns:a="http://schemas.openxmlformats.org/drawingml/2006/main">
+              <a:ext uri="{FF2B5EF4-FFF2-40B4-BE49-F238E27FC236}">
+                <a16:creationId xmlns:a16="http://schemas.microsoft.com/office/drawing/2014/main" id="{9AD8C40D-A69A-4010-ABEA-0704E3140081}"/>
+              </a:ext>
+            </a:extLst>
+          </p:cNvPr>
+          <p:cNvSpPr>
+            <a:spLocks xmlns:a="http://schemas.openxmlformats.org/drawingml/2006/main" noGrp="1"/>
+          </p:cNvSpPr>
+          <p:nvPr/>
+        </p:nvSpPr>
+        <p:spPr>
+          <a:xfrm xmlns:a="http://schemas.openxmlformats.org/drawingml/2006/main">
+            <a:off x="10639425" y="4702493"/>
+            <a:ext cx="9525" cy="9525"/>
+          </a:xfrm>
+          <a:prstGeom xmlns:a="http://schemas.openxmlformats.org/drawingml/2006/main" prst="rect">
+            <a:avLst/>
+          </a:prstGeom>
+          <a:noFill xmlns:a="http://schemas.openxmlformats.org/drawingml/2006/main"/>
+          <a:ln xmlns:a="http://schemas.openxmlformats.org/drawingml/2006/main" w="0">
+            <a:noFill/>
+          </a:ln>
+        </p:spPr>
+      </p:sp>
+      <p:cxnSp>
+        <p:nvCxnSpPr>
+          <p:cNvPr id="71" name=""/>
+          <p:cNvCxnSpPr>
+            <a:stCxn xmlns:a="http://schemas.openxmlformats.org/drawingml/2006/main" id="31" idx="3"/>
+            <a:endCxn xmlns:a="http://schemas.openxmlformats.org/drawingml/2006/main" id="32" idx="1"/>
+          </p:cNvCxnSpPr>
+          <p:nvPr/>
+        </p:nvCxnSpPr>
+        <p:spPr>
+          <a:xfrm xmlns:a="http://schemas.openxmlformats.org/drawingml/2006/main">
+            <a:off x="1516380" y="4707256"/>
+            <a:ext cx="9123045" cy="0"/>
+          </a:xfrm>
+          <a:prstGeom xmlns:a="http://schemas.openxmlformats.org/drawingml/2006/main" prst="straightConnector1">
+            <a:avLst/>
+          </a:prstGeom>
+          <a:ln xmlns:a="http://schemas.openxmlformats.org/drawingml/2006/main" w="19050">
+            <a:solidFill>
+              <a:srgbClr val="597387"/>
+            </a:solidFill>
+            <a:prstDash val="solid"/>
+            <a:tailEnd type="arrow" w="med" len="med"/>
+          </a:ln>
+        </p:spPr>
+      </p:cxnSp>
+      <p:sp>
+        <p:nvSpPr>
+          <p:cNvPr id="34" name="">
+            <a:extLst xmlns:a="http://schemas.openxmlformats.org/drawingml/2006/main">
+              <a:ext uri="{FF2B5EF4-FFF2-40B4-BE49-F238E27FC236}">
+                <a16:creationId xmlns:a16="http://schemas.microsoft.com/office/drawing/2014/main" id="{36094666-5DC6-45F9-8A6F-EB8CB92E88F0}"/>
+              </a:ext>
+            </a:extLst>
+          </p:cNvPr>
+          <p:cNvSpPr>
+            <a:spLocks xmlns:a="http://schemas.openxmlformats.org/drawingml/2006/main" noGrp="1"/>
+          </p:cNvSpPr>
+          <p:nvPr/>
+        </p:nvSpPr>
+        <p:spPr>
+          <a:xfrm xmlns:a="http://schemas.openxmlformats.org/drawingml/2006/main">
+            <a:off x="1596390" y="4335399"/>
+            <a:ext cx="8953500" cy="340233"/>
+          </a:xfrm>
+          <a:prstGeom xmlns:a="http://schemas.openxmlformats.org/drawingml/2006/main" prst="rect">
+            <a:avLst/>
+          </a:prstGeom>
+          <a:noFill xmlns:a="http://schemas.openxmlformats.org/drawingml/2006/main"/>
+          <a:ln xmlns:a="http://schemas.openxmlformats.org/drawingml/2006/main" w="0">
+            <a:noFill/>
+          </a:ln>
+        </p:spPr>
+        <p:txBody>
+          <a:bodyPr xmlns:a="http://schemas.openxmlformats.org/drawingml/2006/main">
+            <a:noAutofit/>
+          </a:bodyPr>
+          <a:lstStyle xmlns:a="http://schemas.openxmlformats.org/drawingml/2006/main"/>
+          <a:p xmlns:a="http://schemas.openxmlformats.org/drawingml/2006/main">
+            <a:pPr>
+              <a:defRPr sz="1692" b="0">
+                <a:solidFill>
+                  <a:srgbClr val="172C3D"/>
+                </a:solidFill>
+                <a:latin typeface="PingFang SC"/>
+                <a:ea typeface="PingFang SC"/>
+                <a:cs typeface="PingFang SC"/>
+              </a:defRPr>
+            </a:pPr>
+            <a:r>
+              <a:rPr sz="1692" b="0">
+                <a:solidFill>
+                  <a:srgbClr val="172C3D"/>
+                </a:solidFill>
+                <a:latin typeface="PingFang SC"/>
+                <a:ea typeface="PingFang SC"/>
+                <a:cs typeface="PingFang SC"/>
+              </a:rPr>
+              <a:t>传入物理块表并执行前向</a:t>
+            </a:r>
+          </a:p>
+        </p:txBody>
+      </p:sp>
+      <p:sp>
+        <p:nvSpPr>
+          <p:cNvPr id="35" name="">
+            <a:extLst xmlns:a="http://schemas.openxmlformats.org/drawingml/2006/main">
+              <a:ext uri="{FF2B5EF4-FFF2-40B4-BE49-F238E27FC236}">
+                <a16:creationId xmlns:a16="http://schemas.microsoft.com/office/drawing/2014/main" id="{65F9D73A-28ED-474D-B53F-9A4CF2D1DC0B}"/>
+              </a:ext>
+            </a:extLst>
+          </p:cNvPr>
+          <p:cNvSpPr>
+            <a:spLocks xmlns:a="http://schemas.openxmlformats.org/drawingml/2006/main" noGrp="1"/>
+          </p:cNvSpPr>
+          <p:nvPr/>
+        </p:nvSpPr>
+        <p:spPr>
+          <a:xfrm xmlns:a="http://schemas.openxmlformats.org/drawingml/2006/main">
+            <a:off x="10639425" y="5418773"/>
+            <a:ext cx="9525" cy="9525"/>
+          </a:xfrm>
+          <a:prstGeom xmlns:a="http://schemas.openxmlformats.org/drawingml/2006/main" prst="rect">
+            <a:avLst/>
+          </a:prstGeom>
+          <a:noFill xmlns:a="http://schemas.openxmlformats.org/drawingml/2006/main"/>
+          <a:ln xmlns:a="http://schemas.openxmlformats.org/drawingml/2006/main" w="0">
+            <a:noFill/>
+          </a:ln>
+        </p:spPr>
+      </p:sp>
+      <p:sp>
+        <p:nvSpPr>
+          <p:cNvPr id="36" name="">
+            <a:extLst xmlns:a="http://schemas.openxmlformats.org/drawingml/2006/main">
+              <a:ext uri="{FF2B5EF4-FFF2-40B4-BE49-F238E27FC236}">
+                <a16:creationId xmlns:a16="http://schemas.microsoft.com/office/drawing/2014/main" id="{7B97DBB0-4F04-437A-9B0F-1CD9EBA88E0D}"/>
+              </a:ext>
+            </a:extLst>
+          </p:cNvPr>
+          <p:cNvSpPr>
+            <a:spLocks xmlns:a="http://schemas.openxmlformats.org/drawingml/2006/main" noGrp="1"/>
+          </p:cNvSpPr>
+          <p:nvPr/>
+        </p:nvSpPr>
+        <p:spPr>
+          <a:xfrm xmlns:a="http://schemas.openxmlformats.org/drawingml/2006/main">
+            <a:off x="1506855" y="5418773"/>
+            <a:ext cx="9525" cy="9525"/>
+          </a:xfrm>
+          <a:prstGeom xmlns:a="http://schemas.openxmlformats.org/drawingml/2006/main" prst="rect">
+            <a:avLst/>
+          </a:prstGeom>
+          <a:noFill xmlns:a="http://schemas.openxmlformats.org/drawingml/2006/main"/>
+          <a:ln xmlns:a="http://schemas.openxmlformats.org/drawingml/2006/main" w="0">
+            <a:noFill/>
+          </a:ln>
+        </p:spPr>
+      </p:sp>
+      <p:cxnSp>
+        <p:nvCxnSpPr>
+          <p:cNvPr id="75" name=""/>
+          <p:cNvCxnSpPr>
+            <a:stCxn xmlns:a="http://schemas.openxmlformats.org/drawingml/2006/main" id="35" idx="3"/>
+            <a:endCxn xmlns:a="http://schemas.openxmlformats.org/drawingml/2006/main" id="36" idx="1"/>
+          </p:cNvCxnSpPr>
+          <p:nvPr/>
+        </p:nvCxnSpPr>
+        <p:spPr>
+          <a:xfrm xmlns:a="http://schemas.openxmlformats.org/drawingml/2006/main" flipH="1">
+            <a:off x="1506855" y="5423536"/>
+            <a:ext cx="9142095" cy="0"/>
+          </a:xfrm>
+          <a:prstGeom xmlns:a="http://schemas.openxmlformats.org/drawingml/2006/main" prst="straightConnector1">
+            <a:avLst/>
+          </a:prstGeom>
+          <a:ln xmlns:a="http://schemas.openxmlformats.org/drawingml/2006/main" w="19050">
+            <a:solidFill>
+              <a:srgbClr val="597387"/>
+            </a:solidFill>
+            <a:prstDash val="solid"/>
+            <a:tailEnd type="arrow" w="med" len="med"/>
+          </a:ln>
+        </p:spPr>
+      </p:cxnSp>
+      <p:sp>
+        <p:nvSpPr>
+          <p:cNvPr id="38" name="">
+            <a:extLst xmlns:a="http://schemas.openxmlformats.org/drawingml/2006/main">
+              <a:ext uri="{FF2B5EF4-FFF2-40B4-BE49-F238E27FC236}">
+                <a16:creationId xmlns:a16="http://schemas.microsoft.com/office/drawing/2014/main" id="{29321B87-EA66-4858-A44A-830D339A591F}"/>
+              </a:ext>
+            </a:extLst>
+          </p:cNvPr>
+          <p:cNvSpPr>
+            <a:spLocks xmlns:a="http://schemas.openxmlformats.org/drawingml/2006/main" noGrp="1"/>
+          </p:cNvSpPr>
+          <p:nvPr/>
+        </p:nvSpPr>
+        <p:spPr>
+          <a:xfrm xmlns:a="http://schemas.openxmlformats.org/drawingml/2006/main">
+            <a:off x="1596390" y="5051679"/>
+            <a:ext cx="8953500" cy="340233"/>
+          </a:xfrm>
+          <a:prstGeom xmlns:a="http://schemas.openxmlformats.org/drawingml/2006/main" prst="rect">
+            <a:avLst/>
+          </a:prstGeom>
+          <a:noFill xmlns:a="http://schemas.openxmlformats.org/drawingml/2006/main"/>
+          <a:ln xmlns:a="http://schemas.openxmlformats.org/drawingml/2006/main" w="0">
+            <a:noFill/>
+          </a:ln>
+        </p:spPr>
+        <p:txBody>
+          <a:bodyPr xmlns:a="http://schemas.openxmlformats.org/drawingml/2006/main">
+            <a:noAutofit/>
+          </a:bodyPr>
+          <a:lstStyle xmlns:a="http://schemas.openxmlformats.org/drawingml/2006/main"/>
+          <a:p xmlns:a="http://schemas.openxmlformats.org/drawingml/2006/main">
+            <a:pPr>
+              <a:defRPr sz="1692" b="0">
+                <a:solidFill>
+                  <a:srgbClr val="172C3D"/>
+                </a:solidFill>
+                <a:latin typeface="PingFang SC"/>
+                <a:ea typeface="PingFang SC"/>
+                <a:cs typeface="PingFang SC"/>
+              </a:defRPr>
+            </a:pPr>
+            <a:r>
+              <a:rPr sz="1692" b="0">
+                <a:solidFill>
+                  <a:srgbClr val="172C3D"/>
+                </a:solidFill>
+                <a:latin typeface="PingFang SC"/>
+                <a:ea typeface="PingFang SC"/>
+                <a:cs typeface="PingFang SC"/>
+              </a:rPr>
+              <a:t>前向完成后解除固定</a:t>
             </a:r>
           </a:p>
         </p:txBody>
@@ -3615,7 +9465,7 @@
     </p:spTree>
     <p:extLst>
       <p:ext uri="{BB962C8B-B14F-4D97-AF65-F5344CB8AC3E}">
-        <p14:creationId xmlns:p14="http://schemas.microsoft.com/office/powerpoint/2010/main" val="953737790"/>
+        <p14:creationId xmlns:p14="http://schemas.microsoft.com/office/powerpoint/2010/main" val="1340036774"/>
       </p:ext>
     </p:extLst>
   </p:cSld>
@@ -3646,7 +9496,7 @@
           <p:cNvPr id="6" name="">
             <a:extLst xmlns:a="http://schemas.openxmlformats.org/drawingml/2006/main">
               <a:ext uri="{FF2B5EF4-FFF2-40B4-BE49-F238E27FC236}">
-                <a16:creationId xmlns:a16="http://schemas.microsoft.com/office/drawing/2014/main" id="{DFC8364C-25AA-4F2D-8D63-272B6A84E6C0}"/>
+                <a16:creationId xmlns:a16="http://schemas.microsoft.com/office/drawing/2014/main" id="{36D99C1D-23DE-4D77-8B6F-915CEE0B1D93}"/>
               </a:ext>
             </a:extLst>
           </p:cNvPr>
@@ -3657,8 +9507,8 @@
         </p:nvSpPr>
         <p:spPr>
           <a:xfrm xmlns:a="http://schemas.openxmlformats.org/drawingml/2006/main">
-            <a:off x="685800" y="514350"/>
-            <a:ext cx="10820400" cy="904875"/>
+            <a:off x="619125" y="409575"/>
+            <a:ext cx="10953750" cy="809625"/>
           </a:xfrm>
           <a:prstGeom xmlns:a="http://schemas.openxmlformats.org/drawingml/2006/main" prst="rect">
             <a:avLst/>
@@ -3675,9 +9525,9 @@
           <a:lstStyle xmlns:a="http://schemas.openxmlformats.org/drawingml/2006/main"/>
           <a:p xmlns:a="http://schemas.openxmlformats.org/drawingml/2006/main">
             <a:pPr>
-              <a:defRPr sz="3450" b="1">
-                <a:solidFill>
-                  <a:srgbClr val="12283A"/>
+              <a:defRPr sz="3300" b="1">
+                <a:solidFill>
+                  <a:srgbClr val="172C3D"/>
                 </a:solidFill>
                 <a:latin typeface="PingFang SC"/>
                 <a:ea typeface="PingFang SC"/>
@@ -3685,15 +9535,15 @@
               </a:defRPr>
             </a:pPr>
             <a:r>
-              <a:rPr sz="3450" b="1">
-                <a:solidFill>
-                  <a:srgbClr val="12283A"/>
+              <a:rPr sz="3300" b="1">
+                <a:solidFill>
+                  <a:srgbClr val="172C3D"/>
                 </a:solidFill>
                 <a:latin typeface="PingFang SC"/>
                 <a:ea typeface="PingFang SC"/>
                 <a:cs typeface="PingFang SC"/>
               </a:rPr>
-              <a:t>验证结果与实现边界</a:t>
+              <a:t>实验设置与基线</a:t>
             </a:r>
           </a:p>
         </p:txBody>
@@ -3703,7 +9553,7 @@
           <p:cNvPr id="2" name="">
             <a:extLst xmlns:a="http://schemas.openxmlformats.org/drawingml/2006/main">
               <a:ext uri="{FF2B5EF4-FFF2-40B4-BE49-F238E27FC236}">
-                <a16:creationId xmlns:a16="http://schemas.microsoft.com/office/drawing/2014/main" id="{C2C1798E-871B-4E4E-A948-107DA5521509}"/>
+                <a16:creationId xmlns:a16="http://schemas.microsoft.com/office/drawing/2014/main" id="{D13BF25D-D49E-4F1C-BE46-7E848F9F41D3}"/>
               </a:ext>
             </a:extLst>
           </p:cNvPr>
@@ -3714,8 +9564,8 @@
         </p:nvSpPr>
         <p:spPr>
           <a:xfrm xmlns:a="http://schemas.openxmlformats.org/drawingml/2006/main">
-            <a:off x="762000" y="1762125"/>
-            <a:ext cx="10668000" cy="876300"/>
+            <a:off x="11239500" y="6400800"/>
+            <a:ext cx="476250" cy="266700"/>
           </a:xfrm>
           <a:prstGeom xmlns:a="http://schemas.openxmlformats.org/drawingml/2006/main" prst="rect">
             <a:avLst/>
@@ -3732,9 +9582,9 @@
           <a:lstStyle xmlns:a="http://schemas.openxmlformats.org/drawingml/2006/main"/>
           <a:p xmlns:a="http://schemas.openxmlformats.org/drawingml/2006/main">
             <a:pPr>
-              <a:defRPr sz="2250" b="0">
-                <a:solidFill>
-                  <a:srgbClr val="263748"/>
+              <a:defRPr sz="1350" b="0">
+                <a:solidFill>
+                  <a:srgbClr val="8290A0"/>
                 </a:solidFill>
                 <a:latin typeface="PingFang SC"/>
                 <a:ea typeface="PingFang SC"/>
@@ -3742,25 +9592,344 @@
               </a:defRPr>
             </a:pPr>
             <a:r>
-              <a:rPr sz="2250" b="0">
-                <a:solidFill>
-                  <a:srgbClr val="263748"/>
+              <a:rPr sz="1350" b="0">
+                <a:solidFill>
+                  <a:srgbClr val="8290A0"/>
                 </a:solidFill>
                 <a:latin typeface="PingFang SC"/>
                 <a:ea typeface="PingFang SC"/>
                 <a:cs typeface="PingFang SC"/>
               </a:rPr>
-              <a:t>已运行：CPU 分页、COW、换页与真实 CPU 张量后端测试。</a:t>
+              <a:t>07</a:t>
             </a:r>
           </a:p>
         </p:txBody>
       </p:sp>
-      <p:sp>
-        <p:nvSpPr>
-          <p:cNvPr id="3" name="">
+      <p:graphicFrame>
+        <p:nvGraphicFramePr>
+          <p:cNvPr id="8" name=""/>
+          <p:cNvGraphicFramePr/>
+          <p:nvPr/>
+        </p:nvGraphicFramePr>
+        <p:xfrm>
+          <a:off xmlns:a="http://schemas.openxmlformats.org/drawingml/2006/main" x="714375" y="1714500"/>
+          <a:ext xmlns:a="http://schemas.openxmlformats.org/drawingml/2006/main" cx="10763250" cy="2762250"/>
+        </p:xfrm>
+        <a:graphic xmlns:a="http://schemas.openxmlformats.org/drawingml/2006/main">
+          <a:graphicData uri="http://schemas.openxmlformats.org/drawingml/2006/table">
+            <a:tbl>
+              <a:tblPr/>
+              <a:tblGrid>
+                <a:gridCol w="3048000"/>
+                <a:gridCol w="5143500"/>
+                <a:gridCol w="2571750"/>
+              </a:tblGrid>
+              <a:tr h="690563">
+                <a:tc>
+                  <a:txBody>
+                    <a:bodyPr/>
+                    <a:lstStyle/>
+                    <a:p>
+                      <a:r>
+                        <a:rPr sz="1875" b="1">
+                          <a:solidFill>
+                            <a:srgbClr val="172C3D"/>
+                          </a:solidFill>
+                          <a:latin typeface="PingFang SC"/>
+                          <a:ea typeface="PingFang SC"/>
+                          <a:cs typeface="PingFang SC"/>
+                        </a:rPr>
+                        <a:t>策略</a:t>
+                      </a:r>
+                    </a:p>
+                  </a:txBody>
+                  <a:tcPr marL="91440" marR="91440" marT="45720" marB="45720">
+                    <a:solidFill>
+                      <a:srgbClr val="E7EEF4"/>
+                    </a:solidFill>
+                  </a:tcPr>
+                </a:tc>
+                <a:tc>
+                  <a:txBody>
+                    <a:bodyPr/>
+                    <a:lstStyle/>
+                    <a:p>
+                      <a:r>
+                        <a:rPr sz="1875" b="1">
+                          <a:solidFill>
+                            <a:srgbClr val="172C3D"/>
+                          </a:solidFill>
+                          <a:latin typeface="PingFang SC"/>
+                          <a:ea typeface="PingFang SC"/>
+                          <a:cs typeface="PingFang SC"/>
+                        </a:rPr>
+                        <a:t>空间分配</a:t>
+                      </a:r>
+                    </a:p>
+                  </a:txBody>
+                  <a:tcPr marL="91440" marR="91440" marT="45720" marB="45720">
+                    <a:solidFill>
+                      <a:srgbClr val="E7EEF4"/>
+                    </a:solidFill>
+                  </a:tcPr>
+                </a:tc>
+                <a:tc>
+                  <a:txBody>
+                    <a:bodyPr/>
+                    <a:lstStyle/>
+                    <a:p>
+                      <a:r>
+                        <a:rPr sz="1875" b="1">
+                          <a:solidFill>
+                            <a:srgbClr val="172C3D"/>
+                          </a:solidFill>
+                          <a:latin typeface="PingFang SC"/>
+                          <a:ea typeface="PingFang SC"/>
+                          <a:cs typeface="PingFang SC"/>
+                        </a:rPr>
+                        <a:t>主机页池</a:t>
+                      </a:r>
+                    </a:p>
+                  </a:txBody>
+                  <a:tcPr marL="91440" marR="91440" marT="45720" marB="45720">
+                    <a:solidFill>
+                      <a:srgbClr val="E7EEF4"/>
+                    </a:solidFill>
+                  </a:tcPr>
+                </a:tc>
+              </a:tr>
+              <a:tr h="690563">
+                <a:tc>
+                  <a:txBody>
+                    <a:bodyPr/>
+                    <a:lstStyle/>
+                    <a:p>
+                      <a:r>
+                        <a:rPr sz="1875" b="0">
+                          <a:solidFill>
+                            <a:srgbClr val="172C3D"/>
+                          </a:solidFill>
+                          <a:latin typeface="PingFang SC"/>
+                          <a:ea typeface="PingFang SC"/>
+                          <a:cs typeface="PingFang SC"/>
+                        </a:rPr>
+                        <a:t>连续预分配</a:t>
+                      </a:r>
+                    </a:p>
+                  </a:txBody>
+                  <a:tcPr marL="91440" marR="91440" marT="45720" marB="45720">
+                    <a:solidFill>
+                      <a:srgbClr val="FFFFFF"/>
+                    </a:solidFill>
+                  </a:tcPr>
+                </a:tc>
+                <a:tc>
+                  <a:txBody>
+                    <a:bodyPr/>
+                    <a:lstStyle/>
+                    <a:p>
+                      <a:r>
+                        <a:rPr sz="1875" b="0">
+                          <a:solidFill>
+                            <a:srgbClr val="172C3D"/>
+                          </a:solidFill>
+                          <a:latin typeface="PingFang SC"/>
+                          <a:ea typeface="PingFang SC"/>
+                          <a:cs typeface="PingFang SC"/>
+                        </a:rPr>
+                        <a:t>按声明最大长度预留连续区</a:t>
+                      </a:r>
+                    </a:p>
+                  </a:txBody>
+                  <a:tcPr marL="91440" marR="91440" marT="45720" marB="45720">
+                    <a:solidFill>
+                      <a:srgbClr val="FFFFFF"/>
+                    </a:solidFill>
+                  </a:tcPr>
+                </a:tc>
+                <a:tc>
+                  <a:txBody>
+                    <a:bodyPr/>
+                    <a:lstStyle/>
+                    <a:p>
+                      <a:r>
+                        <a:rPr sz="1875" b="0">
+                          <a:solidFill>
+                            <a:srgbClr val="172C3D"/>
+                          </a:solidFill>
+                          <a:latin typeface="PingFang SC"/>
+                          <a:ea typeface="PingFang SC"/>
+                          <a:cs typeface="PingFang SC"/>
+                        </a:rPr>
+                        <a:t>无</a:t>
+                      </a:r>
+                    </a:p>
+                  </a:txBody>
+                  <a:tcPr marL="91440" marR="91440" marT="45720" marB="45720">
+                    <a:solidFill>
+                      <a:srgbClr val="FFFFFF"/>
+                    </a:solidFill>
+                  </a:tcPr>
+                </a:tc>
+              </a:tr>
+              <a:tr h="690563">
+                <a:tc>
+                  <a:txBody>
+                    <a:bodyPr/>
+                    <a:lstStyle/>
+                    <a:p>
+                      <a:r>
+                        <a:rPr sz="1875" b="0">
+                          <a:solidFill>
+                            <a:srgbClr val="172C3D"/>
+                          </a:solidFill>
+                          <a:latin typeface="PingFang SC"/>
+                          <a:ea typeface="PingFang SC"/>
+                          <a:cs typeface="PingFang SC"/>
+                        </a:rPr>
+                        <a:t>按需分页</a:t>
+                      </a:r>
+                    </a:p>
+                  </a:txBody>
+                  <a:tcPr marL="91440" marR="91440" marT="45720" marB="45720">
+                    <a:solidFill>
+                      <a:srgbClr val="F6F8FA"/>
+                    </a:solidFill>
+                  </a:tcPr>
+                </a:tc>
+                <a:tc>
+                  <a:txBody>
+                    <a:bodyPr/>
+                    <a:lstStyle/>
+                    <a:p>
+                      <a:r>
+                        <a:rPr sz="1875" b="0">
+                          <a:solidFill>
+                            <a:srgbClr val="172C3D"/>
+                          </a:solidFill>
+                          <a:latin typeface="PingFang SC"/>
+                          <a:ea typeface="PingFang SC"/>
+                          <a:cs typeface="PingFang SC"/>
+                        </a:rPr>
+                        <a:t>逐步申请固定大小的页</a:t>
+                      </a:r>
+                    </a:p>
+                  </a:txBody>
+                  <a:tcPr marL="91440" marR="91440" marT="45720" marB="45720">
+                    <a:solidFill>
+                      <a:srgbClr val="F6F8FA"/>
+                    </a:solidFill>
+                  </a:tcPr>
+                </a:tc>
+                <a:tc>
+                  <a:txBody>
+                    <a:bodyPr/>
+                    <a:lstStyle/>
+                    <a:p>
+                      <a:r>
+                        <a:rPr sz="1875" b="0">
+                          <a:solidFill>
+                            <a:srgbClr val="172C3D"/>
+                          </a:solidFill>
+                          <a:latin typeface="PingFang SC"/>
+                          <a:ea typeface="PingFang SC"/>
+                          <a:cs typeface="PingFang SC"/>
+                        </a:rPr>
+                        <a:t>无</a:t>
+                      </a:r>
+                    </a:p>
+                  </a:txBody>
+                  <a:tcPr marL="91440" marR="91440" marT="45720" marB="45720">
+                    <a:solidFill>
+                      <a:srgbClr val="F6F8FA"/>
+                    </a:solidFill>
+                  </a:tcPr>
+                </a:tc>
+              </a:tr>
+              <a:tr h="690563">
+                <a:tc>
+                  <a:txBody>
+                    <a:bodyPr/>
+                    <a:lstStyle/>
+                    <a:p>
+                      <a:r>
+                        <a:rPr sz="1875" b="0">
+                          <a:solidFill>
+                            <a:srgbClr val="172C3D"/>
+                          </a:solidFill>
+                          <a:latin typeface="PingFang SC"/>
+                          <a:ea typeface="PingFang SC"/>
+                          <a:cs typeface="PingFang SC"/>
+                        </a:rPr>
+                        <a:t>分页与换页</a:t>
+                      </a:r>
+                    </a:p>
+                  </a:txBody>
+                  <a:tcPr marL="91440" marR="91440" marT="45720" marB="45720">
+                    <a:solidFill>
+                      <a:srgbClr val="FFFFFF"/>
+                    </a:solidFill>
+                  </a:tcPr>
+                </a:tc>
+                <a:tc>
+                  <a:txBody>
+                    <a:bodyPr/>
+                    <a:lstStyle/>
+                    <a:p>
+                      <a:r>
+                        <a:rPr sz="1875" b="0">
+                          <a:solidFill>
+                            <a:srgbClr val="172C3D"/>
+                          </a:solidFill>
+                          <a:latin typeface="PingFang SC"/>
+                          <a:ea typeface="PingFang SC"/>
+                          <a:cs typeface="PingFang SC"/>
+                        </a:rPr>
+                        <a:t>相同物理池，加 LRU 置换</a:t>
+                      </a:r>
+                    </a:p>
+                  </a:txBody>
+                  <a:tcPr marL="91440" marR="91440" marT="45720" marB="45720">
+                    <a:solidFill>
+                      <a:srgbClr val="FFFFFF"/>
+                    </a:solidFill>
+                  </a:tcPr>
+                </a:tc>
+                <a:tc>
+                  <a:txBody>
+                    <a:bodyPr/>
+                    <a:lstStyle/>
+                    <a:p>
+                      <a:r>
+                        <a:rPr sz="1875" b="0">
+                          <a:solidFill>
+                            <a:srgbClr val="172C3D"/>
+                          </a:solidFill>
+                          <a:latin typeface="PingFang SC"/>
+                          <a:ea typeface="PingFang SC"/>
+                          <a:cs typeface="PingFang SC"/>
+                        </a:rPr>
+                        <a:t>混合负载 32 页</a:t>
+                      </a:r>
+                    </a:p>
+                  </a:txBody>
+                  <a:tcPr marL="91440" marR="91440" marT="45720" marB="45720">
+                    <a:solidFill>
+                      <a:srgbClr val="FFFFFF"/>
+                    </a:solidFill>
+                  </a:tcPr>
+                </a:tc>
+              </a:tr>
+            </a:tbl>
+          </a:graphicData>
+        </a:graphic>
+      </p:graphicFrame>
+      <p:sp>
+        <p:nvSpPr>
+          <p:cNvPr id="4" name="">
             <a:extLst xmlns:a="http://schemas.openxmlformats.org/drawingml/2006/main">
               <a:ext uri="{FF2B5EF4-FFF2-40B4-BE49-F238E27FC236}">
-                <a16:creationId xmlns:a16="http://schemas.microsoft.com/office/drawing/2014/main" id="{B7C6B626-ECB2-45AD-B540-537E8C82EF27}"/>
+                <a16:creationId xmlns:a16="http://schemas.microsoft.com/office/drawing/2014/main" id="{06FB08EE-1A5A-4114-BCEB-FE917C93C651}"/>
               </a:ext>
             </a:extLst>
           </p:cNvPr>
@@ -3771,8 +9940,8 @@
         </p:nvSpPr>
         <p:spPr>
           <a:xfrm xmlns:a="http://schemas.openxmlformats.org/drawingml/2006/main">
-            <a:off x="762000" y="2771775"/>
-            <a:ext cx="10668000" cy="876300"/>
+            <a:off x="742950" y="4905375"/>
+            <a:ext cx="10668000" cy="523875"/>
           </a:xfrm>
           <a:prstGeom xmlns:a="http://schemas.openxmlformats.org/drawingml/2006/main" prst="rect">
             <a:avLst/>
@@ -3789,9 +9958,9 @@
           <a:lstStyle xmlns:a="http://schemas.openxmlformats.org/drawingml/2006/main"/>
           <a:p xmlns:a="http://schemas.openxmlformats.org/drawingml/2006/main">
             <a:pPr>
-              <a:defRPr sz="2250" b="0">
-                <a:solidFill>
-                  <a:srgbClr val="263748"/>
+              <a:defRPr sz="2100" b="0">
+                <a:solidFill>
+                  <a:srgbClr val="172C3D"/>
                 </a:solidFill>
                 <a:latin typeface="PingFang SC"/>
                 <a:ea typeface="PingFang SC"/>
@@ -3799,25 +9968,25 @@
               </a:defRPr>
             </a:pPr>
             <a:r>
-              <a:rPr sz="2250" b="0">
-                <a:solidFill>
-                  <a:srgbClr val="263748"/>
+              <a:rPr sz="2100" b="0">
+                <a:solidFill>
+                  <a:srgbClr val="172C3D"/>
                 </a:solidFill>
                 <a:latin typeface="PingFang SC"/>
                 <a:ea typeface="PingFang SC"/>
                 <a:cs typeface="PingFang SC"/>
               </a:rPr>
-              <a:t>已有 129 组确定性容量实验，原始数据与图表可重新生成。</a:t>
+              <a:t>混合负载：32 条请求，长度 3～20 token，3 个随机种子。</a:t>
             </a:r>
           </a:p>
         </p:txBody>
       </p:sp>
       <p:sp>
         <p:nvSpPr>
-          <p:cNvPr id="4" name="">
+          <p:cNvPr id="5" name="">
             <a:extLst xmlns:a="http://schemas.openxmlformats.org/drawingml/2006/main">
               <a:ext uri="{FF2B5EF4-FFF2-40B4-BE49-F238E27FC236}">
-                <a16:creationId xmlns:a16="http://schemas.microsoft.com/office/drawing/2014/main" id="{484C3B7E-0ACD-4A78-9968-E009C16B5FCE}"/>
+                <a16:creationId xmlns:a16="http://schemas.microsoft.com/office/drawing/2014/main" id="{2BE475B3-630F-4E58-8B98-F998FDB9F7FE}"/>
               </a:ext>
             </a:extLst>
           </p:cNvPr>
@@ -3828,8 +9997,8 @@
         </p:nvSpPr>
         <p:spPr>
           <a:xfrm xmlns:a="http://schemas.openxmlformats.org/drawingml/2006/main">
-            <a:off x="762000" y="3781425"/>
-            <a:ext cx="10668000" cy="876300"/>
+            <a:off x="742950" y="5638800"/>
+            <a:ext cx="10668000" cy="495300"/>
           </a:xfrm>
           <a:prstGeom xmlns:a="http://schemas.openxmlformats.org/drawingml/2006/main" prst="rect">
             <a:avLst/>
@@ -3846,9 +10015,9 @@
           <a:lstStyle xmlns:a="http://schemas.openxmlformats.org/drawingml/2006/main"/>
           <a:p xmlns:a="http://schemas.openxmlformats.org/drawingml/2006/main">
             <a:pPr>
-              <a:defRPr sz="2250" b="0">
-                <a:solidFill>
-                  <a:srgbClr val="263748"/>
+              <a:defRPr sz="1875" b="0">
+                <a:solidFill>
+                  <a:srgbClr val="172C3D"/>
                 </a:solidFill>
                 <a:latin typeface="PingFang SC"/>
                 <a:ea typeface="PingFang SC"/>
@@ -3856,72 +10025,15 @@
               </a:defRPr>
             </a:pPr>
             <a:r>
-              <a:rPr sz="2250" b="0">
-                <a:solidFill>
-                  <a:srgbClr val="263748"/>
+              <a:rPr sz="1875" b="0">
+                <a:solidFill>
+                  <a:srgbClr val="172C3D"/>
                 </a:solidFill>
                 <a:latin typeface="PingFang SC"/>
                 <a:ea typeface="PingFang SC"/>
                 <a:cs typeface="PingFang SC"/>
               </a:rPr>
-              <a:t>待运行：RTX 4060 Laptop 的 CUDA 页往返与 Qwen3 输出对照。</a:t>
-            </a:r>
-          </a:p>
-        </p:txBody>
-      </p:sp>
-      <p:sp>
-        <p:nvSpPr>
-          <p:cNvPr id="5" name="">
-            <a:extLst xmlns:a="http://schemas.openxmlformats.org/drawingml/2006/main">
-              <a:ext uri="{FF2B5EF4-FFF2-40B4-BE49-F238E27FC236}">
-                <a16:creationId xmlns:a16="http://schemas.microsoft.com/office/drawing/2014/main" id="{984E30A0-97E5-4144-8CAA-5D13140FA344}"/>
-              </a:ext>
-            </a:extLst>
-          </p:cNvPr>
-          <p:cNvSpPr>
-            <a:spLocks xmlns:a="http://schemas.openxmlformats.org/drawingml/2006/main" noGrp="1"/>
-          </p:cNvSpPr>
-          <p:nvPr/>
-        </p:nvSpPr>
-        <p:spPr>
-          <a:xfrm xmlns:a="http://schemas.openxmlformats.org/drawingml/2006/main">
-            <a:off x="762000" y="4791075"/>
-            <a:ext cx="10668000" cy="876300"/>
-          </a:xfrm>
-          <a:prstGeom xmlns:a="http://schemas.openxmlformats.org/drawingml/2006/main" prst="rect">
-            <a:avLst/>
-          </a:prstGeom>
-          <a:noFill xmlns:a="http://schemas.openxmlformats.org/drawingml/2006/main"/>
-          <a:ln xmlns:a="http://schemas.openxmlformats.org/drawingml/2006/main" w="0">
-            <a:noFill/>
-          </a:ln>
-        </p:spPr>
-        <p:txBody>
-          <a:bodyPr xmlns:a="http://schemas.openxmlformats.org/drawingml/2006/main">
-            <a:noAutofit/>
-          </a:bodyPr>
-          <a:lstStyle xmlns:a="http://schemas.openxmlformats.org/drawingml/2006/main"/>
-          <a:p xmlns:a="http://schemas.openxmlformats.org/drawingml/2006/main">
-            <a:pPr>
-              <a:defRPr sz="2250" b="0">
-                <a:solidFill>
-                  <a:srgbClr val="263748"/>
-                </a:solidFill>
-                <a:latin typeface="PingFang SC"/>
-                <a:ea typeface="PingFang SC"/>
-                <a:cs typeface="PingFang SC"/>
-              </a:defRPr>
-            </a:pPr>
-            <a:r>
-              <a:rPr sz="2250" b="0">
-                <a:solidFill>
-                  <a:srgbClr val="263748"/>
-                </a:solidFill>
-                <a:latin typeface="PingFang SC"/>
-                <a:ea typeface="PingFang SC"/>
-                <a:cs typeface="PingFang SC"/>
-              </a:rPr>
-              <a:t>单次 Attention 的完整 KV 工作集必须放入物理显存池。</a:t>
+              <a:t>比较同时涉及预留策略和内存布局，结果属于 CPU 仿真。</a:t>
             </a:r>
           </a:p>
         </p:txBody>
@@ -3929,7 +10041,7 @@
     </p:spTree>
     <p:extLst>
       <p:ext uri="{BB962C8B-B14F-4D97-AF65-F5344CB8AC3E}">
-        <p14:creationId xmlns:p14="http://schemas.microsoft.com/office/powerpoint/2010/main" val="1259775474"/>
+        <p14:creationId xmlns:p14="http://schemas.microsoft.com/office/powerpoint/2010/main" val="88423484"/>
       </p:ext>
     </p:extLst>
   </p:cSld>
@@ -3960,7 +10072,7 @@
           <p:cNvPr id="6" name="">
             <a:extLst xmlns:a="http://schemas.openxmlformats.org/drawingml/2006/main">
               <a:ext uri="{FF2B5EF4-FFF2-40B4-BE49-F238E27FC236}">
-                <a16:creationId xmlns:a16="http://schemas.microsoft.com/office/drawing/2014/main" id="{ABBBAFAE-F335-4746-BD88-90EDDBFAD268}"/>
+                <a16:creationId xmlns:a16="http://schemas.microsoft.com/office/drawing/2014/main" id="{2D71091B-5DFB-48A9-8B56-662CEBD1872F}"/>
               </a:ext>
             </a:extLst>
           </p:cNvPr>
@@ -3971,8 +10083,8 @@
         </p:nvSpPr>
         <p:spPr>
           <a:xfrm xmlns:a="http://schemas.openxmlformats.org/drawingml/2006/main">
-            <a:off x="685800" y="514350"/>
-            <a:ext cx="10820400" cy="904875"/>
+            <a:off x="619125" y="409575"/>
+            <a:ext cx="10953750" cy="809625"/>
           </a:xfrm>
           <a:prstGeom xmlns:a="http://schemas.openxmlformats.org/drawingml/2006/main" prst="rect">
             <a:avLst/>
@@ -3989,9 +10101,9 @@
           <a:lstStyle xmlns:a="http://schemas.openxmlformats.org/drawingml/2006/main"/>
           <a:p xmlns:a="http://schemas.openxmlformats.org/drawingml/2006/main">
             <a:pPr>
-              <a:defRPr sz="3450" b="1">
-                <a:solidFill>
-                  <a:srgbClr val="12283A"/>
+              <a:defRPr sz="3300" b="1">
+                <a:solidFill>
+                  <a:srgbClr val="172C3D"/>
                 </a:solidFill>
                 <a:latin typeface="PingFang SC"/>
                 <a:ea typeface="PingFang SC"/>
@@ -3999,15 +10111,15 @@
               </a:defRPr>
             </a:pPr>
             <a:r>
-              <a:rPr sz="3450" b="1">
-                <a:solidFill>
-                  <a:srgbClr val="12283A"/>
+              <a:rPr sz="3300" b="1">
+                <a:solidFill>
+                  <a:srgbClr val="172C3D"/>
                 </a:solidFill>
                 <a:latin typeface="PingFang SC"/>
                 <a:ea typeface="PingFang SC"/>
                 <a:cs typeface="PingFang SC"/>
               </a:rPr>
-              <a:t>复现入口与后续验收</a:t>
+              <a:t>固定物理容量下的完成请求数</a:t>
             </a:r>
           </a:p>
         </p:txBody>
@@ -4017,7 +10129,7 @@
           <p:cNvPr id="2" name="">
             <a:extLst xmlns:a="http://schemas.openxmlformats.org/drawingml/2006/main">
               <a:ext uri="{FF2B5EF4-FFF2-40B4-BE49-F238E27FC236}">
-                <a16:creationId xmlns:a16="http://schemas.microsoft.com/office/drawing/2014/main" id="{F9468A6C-7919-4FFA-B97A-1FAA98633989}"/>
+                <a16:creationId xmlns:a16="http://schemas.microsoft.com/office/drawing/2014/main" id="{F1A60101-234C-4CF6-B15F-A97E056B46BF}"/>
               </a:ext>
             </a:extLst>
           </p:cNvPr>
@@ -4028,8 +10140,8 @@
         </p:nvSpPr>
         <p:spPr>
           <a:xfrm xmlns:a="http://schemas.openxmlformats.org/drawingml/2006/main">
-            <a:off x="762000" y="1762125"/>
-            <a:ext cx="10668000" cy="876300"/>
+            <a:off x="11239500" y="6400800"/>
+            <a:ext cx="476250" cy="266700"/>
           </a:xfrm>
           <a:prstGeom xmlns:a="http://schemas.openxmlformats.org/drawingml/2006/main" prst="rect">
             <a:avLst/>
@@ -4046,9 +10158,9 @@
           <a:lstStyle xmlns:a="http://schemas.openxmlformats.org/drawingml/2006/main"/>
           <a:p xmlns:a="http://schemas.openxmlformats.org/drawingml/2006/main">
             <a:pPr>
-              <a:defRPr sz="2250" b="0">
-                <a:solidFill>
-                  <a:srgbClr val="263748"/>
+              <a:defRPr sz="1350" b="0">
+                <a:solidFill>
+                  <a:srgbClr val="8290A0"/>
                 </a:solidFill>
                 <a:latin typeface="PingFang SC"/>
                 <a:ea typeface="PingFang SC"/>
@@ -4056,25 +10168,41 @@
               </a:defRPr>
             </a:pPr>
             <a:r>
-              <a:rPr sz="2250" b="0">
-                <a:solidFill>
-                  <a:srgbClr val="263748"/>
+              <a:rPr sz="1350" b="0">
+                <a:solidFill>
+                  <a:srgbClr val="8290A0"/>
                 </a:solidFill>
                 <a:latin typeface="PingFang SC"/>
                 <a:ea typeface="PingFang SC"/>
                 <a:cs typeface="PingFang SC"/>
               </a:rPr>
-              <a:t>本地测试：bash scripts/setup_cpu.sh</a:t>
+              <a:t>08</a:t>
             </a:r>
           </a:p>
         </p:txBody>
       </p:sp>
-      <p:sp>
-        <p:nvSpPr>
-          <p:cNvPr id="3" name="">
+      <p:graphicFrame>
+        <p:nvGraphicFramePr>
+          <p:cNvPr id="8" name="Chart"/>
+          <p:cNvGraphicFramePr/>
+          <p:nvPr/>
+        </p:nvGraphicFramePr>
+        <p:xfrm>
+          <a:off xmlns:a="http://schemas.openxmlformats.org/drawingml/2006/main" x="714375" y="1666875"/>
+          <a:ext xmlns:a="http://schemas.openxmlformats.org/drawingml/2006/main" cx="10763250" cy="3714750"/>
+        </p:xfrm>
+        <a:graphic xmlns:a="http://schemas.openxmlformats.org/drawingml/2006/main">
+          <a:graphicData uri="http://schemas.openxmlformats.org/drawingml/2006/chart">
+            <c:chart xmlns:r="http://schemas.openxmlformats.org/officeDocument/2006/relationships" xmlns:c="http://schemas.openxmlformats.org/drawingml/2006/chart" r:id="R403197df98ab468e"/>
+          </a:graphicData>
+        </a:graphic>
+      </p:graphicFrame>
+      <p:sp>
+        <p:nvSpPr>
+          <p:cNvPr id="4" name="">
             <a:extLst xmlns:a="http://schemas.openxmlformats.org/drawingml/2006/main">
               <a:ext uri="{FF2B5EF4-FFF2-40B4-BE49-F238E27FC236}">
-                <a16:creationId xmlns:a16="http://schemas.microsoft.com/office/drawing/2014/main" id="{4EE36456-C31A-4AA2-97E2-BACB39AA812B}"/>
+                <a16:creationId xmlns:a16="http://schemas.microsoft.com/office/drawing/2014/main" id="{0AC2B0D5-07BD-4771-B6D9-DFEEB5737CAB}"/>
               </a:ext>
             </a:extLst>
           </p:cNvPr>
@@ -4085,8 +10213,8 @@
         </p:nvSpPr>
         <p:spPr>
           <a:xfrm xmlns:a="http://schemas.openxmlformats.org/drawingml/2006/main">
-            <a:off x="762000" y="2771775"/>
-            <a:ext cx="10668000" cy="876300"/>
+            <a:off x="742950" y="5572125"/>
+            <a:ext cx="10668000" cy="457200"/>
           </a:xfrm>
           <a:prstGeom xmlns:a="http://schemas.openxmlformats.org/drawingml/2006/main" prst="rect">
             <a:avLst/>
@@ -4103,9 +10231,9 @@
           <a:lstStyle xmlns:a="http://schemas.openxmlformats.org/drawingml/2006/main"/>
           <a:p xmlns:a="http://schemas.openxmlformats.org/drawingml/2006/main">
             <a:pPr>
-              <a:defRPr sz="2250" b="0">
-                <a:solidFill>
-                  <a:srgbClr val="263748"/>
+              <a:defRPr sz="1875" b="0">
+                <a:solidFill>
+                  <a:srgbClr val="172C3D"/>
                 </a:solidFill>
                 <a:latin typeface="PingFang SC"/>
                 <a:ea typeface="PingFang SC"/>
@@ -4113,25 +10241,25 @@
               </a:defRPr>
             </a:pPr>
             <a:r>
-              <a:rPr sz="2250" b="0">
-                <a:solidFill>
-                  <a:srgbClr val="263748"/>
+              <a:rPr sz="1875" b="0">
+                <a:solidFill>
+                  <a:srgbClr val="172C3D"/>
                 </a:solidFill>
                 <a:latin typeface="PingFang SC"/>
                 <a:ea typeface="PingFang SC"/>
                 <a:cs typeface="PingFang SC"/>
               </a:rPr>
-              <a:t>容量实验：python3 bench/bench_memory.py</a:t>
+              <a:t>每组提交 32 条请求，每页 4 token，图中为三个种子的均值。</a:t>
             </a:r>
           </a:p>
         </p:txBody>
       </p:sp>
       <p:sp>
         <p:nvSpPr>
-          <p:cNvPr id="4" name="">
+          <p:cNvPr id="5" name="">
             <a:extLst xmlns:a="http://schemas.openxmlformats.org/drawingml/2006/main">
               <a:ext uri="{FF2B5EF4-FFF2-40B4-BE49-F238E27FC236}">
-                <a16:creationId xmlns:a16="http://schemas.microsoft.com/office/drawing/2014/main" id="{9461B341-F03A-43E9-B01C-9C003DE588C4}"/>
+                <a16:creationId xmlns:a16="http://schemas.microsoft.com/office/drawing/2014/main" id="{EAF3A921-8E3A-4395-B937-7E6B600B2D05}"/>
               </a:ext>
             </a:extLst>
           </p:cNvPr>
@@ -4142,8 +10270,8 @@
         </p:nvSpPr>
         <p:spPr>
           <a:xfrm xmlns:a="http://schemas.openxmlformats.org/drawingml/2006/main">
-            <a:off x="762000" y="3781425"/>
-            <a:ext cx="10668000" cy="876300"/>
+            <a:off x="742950" y="6057900"/>
+            <a:ext cx="10668000" cy="457200"/>
           </a:xfrm>
           <a:prstGeom xmlns:a="http://schemas.openxmlformats.org/drawingml/2006/main" prst="rect">
             <a:avLst/>
@@ -4160,9 +10288,9 @@
           <a:lstStyle xmlns:a="http://schemas.openxmlformats.org/drawingml/2006/main"/>
           <a:p xmlns:a="http://schemas.openxmlformats.org/drawingml/2006/main">
             <a:pPr>
-              <a:defRPr sz="2250" b="0">
-                <a:solidFill>
-                  <a:srgbClr val="263748"/>
+              <a:defRPr sz="1875" b="0">
+                <a:solidFill>
+                  <a:srgbClr val="172C3D"/>
                 </a:solidFill>
                 <a:latin typeface="PingFang SC"/>
                 <a:ea typeface="PingFang SC"/>
@@ -4170,25 +10298,54 @@
               </a:defRPr>
             </a:pPr>
             <a:r>
-              <a:rPr sz="2250" b="0">
-                <a:solidFill>
-                  <a:srgbClr val="263748"/>
+              <a:rPr sz="1875" b="0">
+                <a:solidFill>
+                  <a:srgbClr val="172C3D"/>
                 </a:solidFill>
                 <a:latin typeface="PingFang SC"/>
                 <a:ea typeface="PingFang SC"/>
                 <a:cs typeface="PingFang SC"/>
               </a:rPr>
-              <a:t>GPU 验证：bash scripts/validate_gpu.sh</a:t>
+              <a:t>换页增加完成数，也带来约 477～567 页次的平均换入。</a:t>
             </a:r>
           </a:p>
         </p:txBody>
       </p:sp>
-      <p:sp>
-        <p:nvSpPr>
-          <p:cNvPr id="5" name="">
+    </p:spTree>
+    <p:extLst>
+      <p:ext uri="{BB962C8B-B14F-4D97-AF65-F5344CB8AC3E}">
+        <p14:creationId xmlns:p14="http://schemas.microsoft.com/office/powerpoint/2010/main" val="166745222"/>
+      </p:ext>
+    </p:extLst>
+  </p:cSld>
+</p:sld>
+</file>
+
+<file path=ppt/slides/slide9.xml><?xml version="1.0" encoding="utf-8"?>
+<p:sld xmlns:p="http://schemas.openxmlformats.org/presentationml/2006/main">
+  <p:cSld>
+    <p:bg>
+      <p:bgPr>
+        <a:solidFill xmlns:a="http://schemas.openxmlformats.org/drawingml/2006/main">
+          <a:srgbClr val="FFFFFF"/>
+        </a:solidFill>
+      </p:bgPr>
+    </p:bg>
+    <p:spTree>
+      <p:nvGrpSpPr>
+        <p:cNvPr id="1" name=""/>
+        <p:cNvGrpSpPr/>
+        <p:nvPr/>
+      </p:nvGrpSpPr>
+      <p:grpSpPr>
+        <a:xfrm xmlns:a="http://schemas.openxmlformats.org/drawingml/2006/main"/>
+      </p:grpSpPr>
+      <p:sp>
+        <p:nvSpPr>
+          <p:cNvPr id="7" name="">
             <a:extLst xmlns:a="http://schemas.openxmlformats.org/drawingml/2006/main">
               <a:ext uri="{FF2B5EF4-FFF2-40B4-BE49-F238E27FC236}">
-                <a16:creationId xmlns:a16="http://schemas.microsoft.com/office/drawing/2014/main" id="{3CDAC5C1-2B25-47EA-81E9-1D8F46AC5652}"/>
+                <a16:creationId xmlns:a16="http://schemas.microsoft.com/office/drawing/2014/main" id="{3EADAC65-1DDF-495C-A6C6-D275232BAEE4}"/>
               </a:ext>
             </a:extLst>
           </p:cNvPr>
@@ -4199,8 +10356,8 @@
         </p:nvSpPr>
         <p:spPr>
           <a:xfrm xmlns:a="http://schemas.openxmlformats.org/drawingml/2006/main">
-            <a:off x="762000" y="4791075"/>
-            <a:ext cx="10668000" cy="876300"/>
+            <a:off x="619125" y="409575"/>
+            <a:ext cx="10953750" cy="809625"/>
           </a:xfrm>
           <a:prstGeom xmlns:a="http://schemas.openxmlformats.org/drawingml/2006/main" prst="rect">
             <a:avLst/>
@@ -4217,9 +10374,9 @@
           <a:lstStyle xmlns:a="http://schemas.openxmlformats.org/drawingml/2006/main"/>
           <a:p xmlns:a="http://schemas.openxmlformats.org/drawingml/2006/main">
             <a:pPr>
-              <a:defRPr sz="2250" b="0">
-                <a:solidFill>
-                  <a:srgbClr val="263748"/>
+              <a:defRPr sz="3300" b="1">
+                <a:solidFill>
+                  <a:srgbClr val="172C3D"/>
                 </a:solidFill>
                 <a:latin typeface="PingFang SC"/>
                 <a:ea typeface="PingFang SC"/>
@@ -4227,15 +10384,259 @@
               </a:defRPr>
             </a:pPr>
             <a:r>
-              <a:rPr sz="2250" b="0">
-                <a:solidFill>
-                  <a:srgbClr val="263748"/>
+              <a:rPr sz="3300" b="1">
+                <a:solidFill>
+                  <a:srgbClr val="172C3D"/>
                 </a:solidFill>
                 <a:latin typeface="PingFang SC"/>
                 <a:ea typeface="PingFang SC"/>
                 <a:cs typeface="PingFang SC"/>
               </a:rPr>
-              <a:t>补齐 GPU 报告与五分钟实际演示，按真实过程整理分工和互审。</a:t>
+              <a:t>已分配空间中的内部碎片</a:t>
+            </a:r>
+          </a:p>
+        </p:txBody>
+      </p:sp>
+      <p:sp>
+        <p:nvSpPr>
+          <p:cNvPr id="2" name="">
+            <a:extLst xmlns:a="http://schemas.openxmlformats.org/drawingml/2006/main">
+              <a:ext uri="{FF2B5EF4-FFF2-40B4-BE49-F238E27FC236}">
+                <a16:creationId xmlns:a16="http://schemas.microsoft.com/office/drawing/2014/main" id="{559C9FF5-F869-4CC7-A14B-008C33713FFD}"/>
+              </a:ext>
+            </a:extLst>
+          </p:cNvPr>
+          <p:cNvSpPr>
+            <a:spLocks xmlns:a="http://schemas.openxmlformats.org/drawingml/2006/main" noGrp="1"/>
+          </p:cNvSpPr>
+          <p:nvPr/>
+        </p:nvSpPr>
+        <p:spPr>
+          <a:xfrm xmlns:a="http://schemas.openxmlformats.org/drawingml/2006/main">
+            <a:off x="11239500" y="6400800"/>
+            <a:ext cx="476250" cy="266700"/>
+          </a:xfrm>
+          <a:prstGeom xmlns:a="http://schemas.openxmlformats.org/drawingml/2006/main" prst="rect">
+            <a:avLst/>
+          </a:prstGeom>
+          <a:noFill xmlns:a="http://schemas.openxmlformats.org/drawingml/2006/main"/>
+          <a:ln xmlns:a="http://schemas.openxmlformats.org/drawingml/2006/main" w="0">
+            <a:noFill/>
+          </a:ln>
+        </p:spPr>
+        <p:txBody>
+          <a:bodyPr xmlns:a="http://schemas.openxmlformats.org/drawingml/2006/main">
+            <a:noAutofit/>
+          </a:bodyPr>
+          <a:lstStyle xmlns:a="http://schemas.openxmlformats.org/drawingml/2006/main"/>
+          <a:p xmlns:a="http://schemas.openxmlformats.org/drawingml/2006/main">
+            <a:pPr>
+              <a:defRPr sz="1350" b="0">
+                <a:solidFill>
+                  <a:srgbClr val="8290A0"/>
+                </a:solidFill>
+                <a:latin typeface="PingFang SC"/>
+                <a:ea typeface="PingFang SC"/>
+                <a:cs typeface="PingFang SC"/>
+              </a:defRPr>
+            </a:pPr>
+            <a:r>
+              <a:rPr sz="1350" b="0">
+                <a:solidFill>
+                  <a:srgbClr val="8290A0"/>
+                </a:solidFill>
+                <a:latin typeface="PingFang SC"/>
+                <a:ea typeface="PingFang SC"/>
+                <a:cs typeface="PingFang SC"/>
+              </a:rPr>
+              <a:t>09</a:t>
+            </a:r>
+          </a:p>
+        </p:txBody>
+      </p:sp>
+      <p:graphicFrame>
+        <p:nvGraphicFramePr>
+          <p:cNvPr id="9" name="Chart"/>
+          <p:cNvGraphicFramePr/>
+          <p:nvPr/>
+        </p:nvGraphicFramePr>
+        <p:xfrm>
+          <a:off xmlns:a="http://schemas.openxmlformats.org/drawingml/2006/main" x="714375" y="1666875"/>
+          <a:ext xmlns:a="http://schemas.openxmlformats.org/drawingml/2006/main" cx="10763250" cy="3714750"/>
+        </p:xfrm>
+        <a:graphic xmlns:a="http://schemas.openxmlformats.org/drawingml/2006/main">
+          <a:graphicData uri="http://schemas.openxmlformats.org/drawingml/2006/chart">
+            <c:chart xmlns:r="http://schemas.openxmlformats.org/officeDocument/2006/relationships" xmlns:c="http://schemas.openxmlformats.org/drawingml/2006/chart" r:id="R76f9108fde7d4423"/>
+          </a:graphicData>
+        </a:graphic>
+      </p:graphicFrame>
+      <p:sp>
+        <p:nvSpPr>
+          <p:cNvPr id="4" name="">
+            <a:extLst xmlns:a="http://schemas.openxmlformats.org/drawingml/2006/main">
+              <a:ext uri="{FF2B5EF4-FFF2-40B4-BE49-F238E27FC236}">
+                <a16:creationId xmlns:a16="http://schemas.microsoft.com/office/drawing/2014/main" id="{A0AF79AD-CA09-4702-85B3-227FF94F0B80}"/>
+              </a:ext>
+            </a:extLst>
+          </p:cNvPr>
+          <p:cNvSpPr>
+            <a:spLocks xmlns:a="http://schemas.openxmlformats.org/drawingml/2006/main" noGrp="1"/>
+          </p:cNvSpPr>
+          <p:nvPr/>
+        </p:nvSpPr>
+        <p:spPr>
+          <a:xfrm xmlns:a="http://schemas.openxmlformats.org/drawingml/2006/main">
+            <a:off x="762000" y="1381125"/>
+            <a:ext cx="2857500" cy="333375"/>
+          </a:xfrm>
+          <a:prstGeom xmlns:a="http://schemas.openxmlformats.org/drawingml/2006/main" prst="rect">
+            <a:avLst/>
+          </a:prstGeom>
+          <a:noFill xmlns:a="http://schemas.openxmlformats.org/drawingml/2006/main"/>
+          <a:ln xmlns:a="http://schemas.openxmlformats.org/drawingml/2006/main" w="0">
+            <a:noFill/>
+          </a:ln>
+        </p:spPr>
+        <p:txBody>
+          <a:bodyPr xmlns:a="http://schemas.openxmlformats.org/drawingml/2006/main">
+            <a:noAutofit/>
+          </a:bodyPr>
+          <a:lstStyle xmlns:a="http://schemas.openxmlformats.org/drawingml/2006/main"/>
+          <a:p xmlns:a="http://schemas.openxmlformats.org/drawingml/2006/main">
+            <a:pPr>
+              <a:defRPr sz="1725" b="0">
+                <a:solidFill>
+                  <a:srgbClr val="172C3D"/>
+                </a:solidFill>
+                <a:latin typeface="PingFang SC"/>
+                <a:ea typeface="PingFang SC"/>
+                <a:cs typeface="PingFang SC"/>
+              </a:defRPr>
+            </a:pPr>
+            <a:r>
+              <a:rPr sz="1725" b="0">
+                <a:solidFill>
+                  <a:srgbClr val="172C3D"/>
+                </a:solidFill>
+                <a:latin typeface="PingFang SC"/>
+                <a:ea typeface="PingFang SC"/>
+                <a:cs typeface="PingFang SC"/>
+              </a:rPr>
+              <a:t>单位：%</a:t>
+            </a:r>
+          </a:p>
+        </p:txBody>
+      </p:sp>
+      <p:sp>
+        <p:nvSpPr>
+          <p:cNvPr id="5" name="">
+            <a:extLst xmlns:a="http://schemas.openxmlformats.org/drawingml/2006/main">
+              <a:ext uri="{FF2B5EF4-FFF2-40B4-BE49-F238E27FC236}">
+                <a16:creationId xmlns:a16="http://schemas.microsoft.com/office/drawing/2014/main" id="{2E169EE0-EA51-419C-8378-7DD49A567420}"/>
+              </a:ext>
+            </a:extLst>
+          </p:cNvPr>
+          <p:cNvSpPr>
+            <a:spLocks xmlns:a="http://schemas.openxmlformats.org/drawingml/2006/main" noGrp="1"/>
+          </p:cNvSpPr>
+          <p:nvPr/>
+        </p:nvSpPr>
+        <p:spPr>
+          <a:xfrm xmlns:a="http://schemas.openxmlformats.org/drawingml/2006/main">
+            <a:off x="742950" y="5572125"/>
+            <a:ext cx="10668000" cy="457200"/>
+          </a:xfrm>
+          <a:prstGeom xmlns:a="http://schemas.openxmlformats.org/drawingml/2006/main" prst="rect">
+            <a:avLst/>
+          </a:prstGeom>
+          <a:noFill xmlns:a="http://schemas.openxmlformats.org/drawingml/2006/main"/>
+          <a:ln xmlns:a="http://schemas.openxmlformats.org/drawingml/2006/main" w="0">
+            <a:noFill/>
+          </a:ln>
+        </p:spPr>
+        <p:txBody>
+          <a:bodyPr xmlns:a="http://schemas.openxmlformats.org/drawingml/2006/main">
+            <a:noAutofit/>
+          </a:bodyPr>
+          <a:lstStyle xmlns:a="http://schemas.openxmlformats.org/drawingml/2006/main"/>
+          <a:p xmlns:a="http://schemas.openxmlformats.org/drawingml/2006/main">
+            <a:pPr>
+              <a:defRPr sz="2025" b="0">
+                <a:solidFill>
+                  <a:srgbClr val="172C3D"/>
+                </a:solidFill>
+                <a:latin typeface="PingFang SC"/>
+                <a:ea typeface="PingFang SC"/>
+                <a:cs typeface="PingFang SC"/>
+              </a:defRPr>
+            </a:pPr>
+            <a:r>
+              <a:rPr sz="2025" b="0">
+                <a:solidFill>
+                  <a:srgbClr val="172C3D"/>
+                </a:solidFill>
+                <a:latin typeface="PingFang SC"/>
+                <a:ea typeface="PingFang SC"/>
+                <a:cs typeface="PingFang SC"/>
+              </a:rPr>
+              <a:t>32 页时，连续预分配 79.8%，按需分页 19.0%。</a:t>
+            </a:r>
+          </a:p>
+        </p:txBody>
+      </p:sp>
+      <p:sp>
+        <p:nvSpPr>
+          <p:cNvPr id="6" name="">
+            <a:extLst xmlns:a="http://schemas.openxmlformats.org/drawingml/2006/main">
+              <a:ext uri="{FF2B5EF4-FFF2-40B4-BE49-F238E27FC236}">
+                <a16:creationId xmlns:a16="http://schemas.microsoft.com/office/drawing/2014/main" id="{A345F813-8952-45FE-A2A7-577089FEC1AA}"/>
+              </a:ext>
+            </a:extLst>
+          </p:cNvPr>
+          <p:cNvSpPr>
+            <a:spLocks xmlns:a="http://schemas.openxmlformats.org/drawingml/2006/main" noGrp="1"/>
+          </p:cNvSpPr>
+          <p:nvPr/>
+        </p:nvSpPr>
+        <p:spPr>
+          <a:xfrm xmlns:a="http://schemas.openxmlformats.org/drawingml/2006/main">
+            <a:off x="742950" y="6057900"/>
+            <a:ext cx="10668000" cy="457200"/>
+          </a:xfrm>
+          <a:prstGeom xmlns:a="http://schemas.openxmlformats.org/drawingml/2006/main" prst="rect">
+            <a:avLst/>
+          </a:prstGeom>
+          <a:noFill xmlns:a="http://schemas.openxmlformats.org/drawingml/2006/main"/>
+          <a:ln xmlns:a="http://schemas.openxmlformats.org/drawingml/2006/main" w="0">
+            <a:noFill/>
+          </a:ln>
+        </p:spPr>
+        <p:txBody>
+          <a:bodyPr xmlns:a="http://schemas.openxmlformats.org/drawingml/2006/main">
+            <a:noAutofit/>
+          </a:bodyPr>
+          <a:lstStyle xmlns:a="http://schemas.openxmlformats.org/drawingml/2006/main"/>
+          <a:p xmlns:a="http://schemas.openxmlformats.org/drawingml/2006/main">
+            <a:pPr>
+              <a:defRPr sz="1875" b="0">
+                <a:solidFill>
+                  <a:srgbClr val="172C3D"/>
+                </a:solidFill>
+                <a:latin typeface="PingFang SC"/>
+                <a:ea typeface="PingFang SC"/>
+                <a:cs typeface="PingFang SC"/>
+              </a:defRPr>
+            </a:pPr>
+            <a:r>
+              <a:rPr sz="1875" b="0">
+                <a:solidFill>
+                  <a:srgbClr val="172C3D"/>
+                </a:solidFill>
+                <a:latin typeface="PingFang SC"/>
+                <a:ea typeface="PingFang SC"/>
+                <a:cs typeface="PingFang SC"/>
+              </a:rPr>
+              <a:t>不同策略留下的请求集合不同，这也会影响碎片率。</a:t>
             </a:r>
           </a:p>
         </p:txBody>
@@ -4243,7 +10644,7 @@
     </p:spTree>
     <p:extLst>
       <p:ext uri="{BB962C8B-B14F-4D97-AF65-F5344CB8AC3E}">
-        <p14:creationId xmlns:p14="http://schemas.microsoft.com/office/powerpoint/2010/main" val="432932819"/>
+        <p14:creationId xmlns:p14="http://schemas.microsoft.com/office/powerpoint/2010/main" val="1814948800"/>
       </p:ext>
     </p:extLst>
   </p:cSld>
